--- a/Progression_P6/P6-L11_Mock_Results_and_Final_Revision.pptx
+++ b/Progression_P6/P6-L11_Mock_Results_and_Final_Revision.pptx
@@ -1,6 +1,6 @@
 
 <file path=ppt/presentation.xml><?xml version="1.0" encoding="utf-8"?>
-<p:presentation xmlns:a="http://schemas.openxmlformats.org/drawingml/2006/main" xmlns:r="http://schemas.openxmlformats.org/officeDocument/2006/relationships" xmlns:p="http://schemas.openxmlformats.org/presentationml/2006/main" saveSubsetFonts="1" autoCompressPictures="0">
+<p:presentation xmlns:a="http://schemas.openxmlformats.org/drawingml/2006/main" xmlns:r="http://schemas.openxmlformats.org/officeDocument/2006/relationships" xmlns:p="http://schemas.openxmlformats.org/presentationml/2006/main" embedTrueTypeFonts="1" saveSubsetFonts="1" autoCompressPictures="0">
   <p:sldMasterIdLst>
     <p:sldMasterId id="2147483648" r:id="rId1"/>
   </p:sldMasterIdLst>
@@ -29,6 +29,13 @@
   </p:notesMasterIdLst>
   <p:sldSz cx="12192000" cy="6858000"/>
   <p:notesSz cx="6858000" cy="12192000"/>
+  <p:embeddedFontLst>
+    <p:embeddedFont>
+      <p:font typeface="Amiri" pitchFamily="2" charset="-78"/>
+      <p:regular r:id="rIdFont1"/>
+      <p:bold r:id="rIdFont2"/>
+    </p:embeddedFont>
+  </p:embeddedFontLst>
   <p:defaultTextStyle>
     <a:lvl1pPr marL="0" algn="l" defTabSz="914400" rtl="0" eaLnBrk="1" latinLnBrk="0" hangingPunct="1">
       <a:defRPr sz="1800" kern="1200">
@@ -385,8 +392,7 @@
           <a:schemeClr val="tx1"/>
         </a:solidFill>
         <a:latin typeface="+mn-lt"/>
-        <a:ea typeface="+mn-ea"/>
-        <a:cs typeface="+mn-cs"/>
+        <a:cs typeface="Amiri" pitchFamily="2" charset="-78"/>
       </a:defRPr>
     </a:lvl1pPr>
     <a:lvl2pPr marL="457200" algn="l" defTabSz="914400" rtl="0" eaLnBrk="1" latinLnBrk="0" hangingPunct="1">
@@ -395,8 +401,7 @@
           <a:schemeClr val="tx1"/>
         </a:solidFill>
         <a:latin typeface="+mn-lt"/>
-        <a:ea typeface="+mn-ea"/>
-        <a:cs typeface="+mn-cs"/>
+        <a:cs typeface="Amiri" pitchFamily="2" charset="-78"/>
       </a:defRPr>
     </a:lvl2pPr>
     <a:lvl3pPr marL="914400" algn="l" defTabSz="914400" rtl="0" eaLnBrk="1" latinLnBrk="0" hangingPunct="1">
@@ -405,8 +410,7 @@
           <a:schemeClr val="tx1"/>
         </a:solidFill>
         <a:latin typeface="+mn-lt"/>
-        <a:ea typeface="+mn-ea"/>
-        <a:cs typeface="+mn-cs"/>
+        <a:cs typeface="Amiri" pitchFamily="2" charset="-78"/>
       </a:defRPr>
     </a:lvl3pPr>
     <a:lvl4pPr marL="1371600" algn="l" defTabSz="914400" rtl="0" eaLnBrk="1" latinLnBrk="0" hangingPunct="1">
@@ -415,8 +419,7 @@
           <a:schemeClr val="tx1"/>
         </a:solidFill>
         <a:latin typeface="+mn-lt"/>
-        <a:ea typeface="+mn-ea"/>
-        <a:cs typeface="+mn-cs"/>
+        <a:cs typeface="Amiri" pitchFamily="2" charset="-78"/>
       </a:defRPr>
     </a:lvl4pPr>
     <a:lvl5pPr marL="1828800" algn="l" defTabSz="914400" rtl="0" eaLnBrk="1" latinLnBrk="0" hangingPunct="1">
@@ -425,8 +428,7 @@
           <a:schemeClr val="tx1"/>
         </a:solidFill>
         <a:latin typeface="+mn-lt"/>
-        <a:ea typeface="+mn-ea"/>
-        <a:cs typeface="+mn-cs"/>
+        <a:cs typeface="Amiri" pitchFamily="2" charset="-78"/>
       </a:defRPr>
     </a:lvl5pPr>
     <a:lvl6pPr marL="2286000" algn="l" defTabSz="914400" rtl="0" eaLnBrk="1" latinLnBrk="0" hangingPunct="1">
@@ -435,8 +437,7 @@
           <a:schemeClr val="tx1"/>
         </a:solidFill>
         <a:latin typeface="+mn-lt"/>
-        <a:ea typeface="+mn-ea"/>
-        <a:cs typeface="+mn-cs"/>
+        <a:cs typeface="Amiri" pitchFamily="2" charset="-78"/>
       </a:defRPr>
     </a:lvl6pPr>
     <a:lvl7pPr marL="2743200" algn="l" defTabSz="914400" rtl="0" eaLnBrk="1" latinLnBrk="0" hangingPunct="1">
@@ -445,8 +446,7 @@
           <a:schemeClr val="tx1"/>
         </a:solidFill>
         <a:latin typeface="+mn-lt"/>
-        <a:ea typeface="+mn-ea"/>
-        <a:cs typeface="+mn-cs"/>
+        <a:cs typeface="Amiri" pitchFamily="2" charset="-78"/>
       </a:defRPr>
     </a:lvl7pPr>
     <a:lvl8pPr marL="3200400" algn="l" defTabSz="914400" rtl="0" eaLnBrk="1" latinLnBrk="0" hangingPunct="1">
@@ -455,8 +455,7 @@
           <a:schemeClr val="tx1"/>
         </a:solidFill>
         <a:latin typeface="+mn-lt"/>
-        <a:ea typeface="+mn-ea"/>
-        <a:cs typeface="+mn-cs"/>
+        <a:cs typeface="Amiri" pitchFamily="2" charset="-78"/>
       </a:defRPr>
     </a:lvl8pPr>
     <a:lvl9pPr marL="3657600" algn="l" defTabSz="914400" rtl="0" eaLnBrk="1" latinLnBrk="0" hangingPunct="1">
@@ -465,8 +464,7 @@
           <a:schemeClr val="tx1"/>
         </a:solidFill>
         <a:latin typeface="+mn-lt"/>
-        <a:ea typeface="+mn-ea"/>
-        <a:cs typeface="+mn-cs"/>
+        <a:cs typeface="Amiri" pitchFamily="2" charset="-78"/>
       </a:defRPr>
     </a:lvl9pPr>
   </p:notesStyle>
@@ -2159,8 +2157,7 @@
             <a:schemeClr val="tx1"/>
           </a:solidFill>
           <a:latin typeface="+mj-lt"/>
-          <a:ea typeface="+mj-ea"/>
-          <a:cs typeface="+mj-cs"/>
+          <a:cs typeface="Amiri" pitchFamily="2" charset="-78"/>
         </a:defRPr>
       </a:lvl1pPr>
     </p:titleStyle>
@@ -2176,8 +2173,7 @@
             <a:schemeClr val="tx1"/>
           </a:solidFill>
           <a:latin typeface="+mn-lt"/>
-          <a:ea typeface="+mn-ea"/>
-          <a:cs typeface="+mn-cs"/>
+          <a:cs typeface="Amiri" pitchFamily="2" charset="-78"/>
         </a:defRPr>
       </a:lvl1pPr>
       <a:lvl2pPr marL="742950" indent="-285750" algn="l" defTabSz="914400" rtl="0" eaLnBrk="1" latinLnBrk="0" hangingPunct="1">
@@ -2191,8 +2187,7 @@
             <a:schemeClr val="tx1"/>
           </a:solidFill>
           <a:latin typeface="+mn-lt"/>
-          <a:ea typeface="+mn-ea"/>
-          <a:cs typeface="+mn-cs"/>
+          <a:cs typeface="Amiri" pitchFamily="2" charset="-78"/>
         </a:defRPr>
       </a:lvl2pPr>
       <a:lvl3pPr marL="1143000" indent="-228600" algn="l" defTabSz="914400" rtl="0" eaLnBrk="1" latinLnBrk="0" hangingPunct="1">
@@ -2206,8 +2201,7 @@
             <a:schemeClr val="tx1"/>
           </a:solidFill>
           <a:latin typeface="+mn-lt"/>
-          <a:ea typeface="+mn-ea"/>
-          <a:cs typeface="+mn-cs"/>
+          <a:cs typeface="Amiri" pitchFamily="2" charset="-78"/>
         </a:defRPr>
       </a:lvl3pPr>
       <a:lvl4pPr marL="1600200" indent="-228600" algn="l" defTabSz="914400" rtl="0" eaLnBrk="1" latinLnBrk="0" hangingPunct="1">
@@ -2221,8 +2215,7 @@
             <a:schemeClr val="tx1"/>
           </a:solidFill>
           <a:latin typeface="+mn-lt"/>
-          <a:ea typeface="+mn-ea"/>
-          <a:cs typeface="+mn-cs"/>
+          <a:cs typeface="Amiri" pitchFamily="2" charset="-78"/>
         </a:defRPr>
       </a:lvl4pPr>
       <a:lvl5pPr marL="2057400" indent="-228600" algn="l" defTabSz="914400" rtl="0" eaLnBrk="1" latinLnBrk="0" hangingPunct="1">
@@ -2236,8 +2229,7 @@
             <a:schemeClr val="tx1"/>
           </a:solidFill>
           <a:latin typeface="+mn-lt"/>
-          <a:ea typeface="+mn-ea"/>
-          <a:cs typeface="+mn-cs"/>
+          <a:cs typeface="Amiri" pitchFamily="2" charset="-78"/>
         </a:defRPr>
       </a:lvl5pPr>
       <a:lvl6pPr marL="2514600" indent="-228600" algn="l" defTabSz="914400" rtl="0" eaLnBrk="1" latinLnBrk="0" hangingPunct="1">
@@ -2251,8 +2243,7 @@
             <a:schemeClr val="tx1"/>
           </a:solidFill>
           <a:latin typeface="+mn-lt"/>
-          <a:ea typeface="+mn-ea"/>
-          <a:cs typeface="+mn-cs"/>
+          <a:cs typeface="Amiri" pitchFamily="2" charset="-78"/>
         </a:defRPr>
       </a:lvl6pPr>
       <a:lvl7pPr marL="2971800" indent="-228600" algn="l" defTabSz="914400" rtl="0" eaLnBrk="1" latinLnBrk="0" hangingPunct="1">
@@ -2266,8 +2257,7 @@
             <a:schemeClr val="tx1"/>
           </a:solidFill>
           <a:latin typeface="+mn-lt"/>
-          <a:ea typeface="+mn-ea"/>
-          <a:cs typeface="+mn-cs"/>
+          <a:cs typeface="Amiri" pitchFamily="2" charset="-78"/>
         </a:defRPr>
       </a:lvl7pPr>
       <a:lvl8pPr marL="3429000" indent="-228600" algn="l" defTabSz="914400" rtl="0" eaLnBrk="1" latinLnBrk="0" hangingPunct="1">
@@ -2281,8 +2271,7 @@
             <a:schemeClr val="tx1"/>
           </a:solidFill>
           <a:latin typeface="+mn-lt"/>
-          <a:ea typeface="+mn-ea"/>
-          <a:cs typeface="+mn-cs"/>
+          <a:cs typeface="Amiri" pitchFamily="2" charset="-78"/>
         </a:defRPr>
       </a:lvl8pPr>
       <a:lvl9pPr marL="3886200" indent="-228600" algn="l" defTabSz="914400" rtl="0" eaLnBrk="1" latinLnBrk="0" hangingPunct="1">
@@ -2296,8 +2285,7 @@
             <a:schemeClr val="tx1"/>
           </a:solidFill>
           <a:latin typeface="+mn-lt"/>
-          <a:ea typeface="+mn-ea"/>
-          <a:cs typeface="+mn-cs"/>
+          <a:cs typeface="Amiri" pitchFamily="2" charset="-78"/>
         </a:defRPr>
       </a:lvl9pPr>
     </p:bodyStyle>
@@ -2311,8 +2299,7 @@
             <a:schemeClr val="tx1"/>
           </a:solidFill>
           <a:latin typeface="+mn-lt"/>
-          <a:ea typeface="+mn-ea"/>
-          <a:cs typeface="+mn-cs"/>
+          <a:cs typeface="Amiri" pitchFamily="2" charset="-78"/>
         </a:defRPr>
       </a:lvl1pPr>
       <a:lvl2pPr marL="457200" algn="l" defTabSz="914400" rtl="0" eaLnBrk="1" latinLnBrk="0" hangingPunct="1">
@@ -2321,8 +2308,7 @@
             <a:schemeClr val="tx1"/>
           </a:solidFill>
           <a:latin typeface="+mn-lt"/>
-          <a:ea typeface="+mn-ea"/>
-          <a:cs typeface="+mn-cs"/>
+          <a:cs typeface="Amiri" pitchFamily="2" charset="-78"/>
         </a:defRPr>
       </a:lvl2pPr>
       <a:lvl3pPr marL="914400" algn="l" defTabSz="914400" rtl="0" eaLnBrk="1" latinLnBrk="0" hangingPunct="1">
@@ -2331,8 +2317,7 @@
             <a:schemeClr val="tx1"/>
           </a:solidFill>
           <a:latin typeface="+mn-lt"/>
-          <a:ea typeface="+mn-ea"/>
-          <a:cs typeface="+mn-cs"/>
+          <a:cs typeface="Amiri" pitchFamily="2" charset="-78"/>
         </a:defRPr>
       </a:lvl3pPr>
       <a:lvl4pPr marL="1371600" algn="l" defTabSz="914400" rtl="0" eaLnBrk="1" latinLnBrk="0" hangingPunct="1">
@@ -2341,8 +2326,7 @@
             <a:schemeClr val="tx1"/>
           </a:solidFill>
           <a:latin typeface="+mn-lt"/>
-          <a:ea typeface="+mn-ea"/>
-          <a:cs typeface="+mn-cs"/>
+          <a:cs typeface="Amiri" pitchFamily="2" charset="-78"/>
         </a:defRPr>
       </a:lvl4pPr>
       <a:lvl5pPr marL="1828800" algn="l" defTabSz="914400" rtl="0" eaLnBrk="1" latinLnBrk="0" hangingPunct="1">
@@ -2351,8 +2335,7 @@
             <a:schemeClr val="tx1"/>
           </a:solidFill>
           <a:latin typeface="+mn-lt"/>
-          <a:ea typeface="+mn-ea"/>
-          <a:cs typeface="+mn-cs"/>
+          <a:cs typeface="Amiri" pitchFamily="2" charset="-78"/>
         </a:defRPr>
       </a:lvl5pPr>
       <a:lvl6pPr marL="2286000" algn="l" defTabSz="914400" rtl="0" eaLnBrk="1" latinLnBrk="0" hangingPunct="1">
@@ -2361,8 +2344,7 @@
             <a:schemeClr val="tx1"/>
           </a:solidFill>
           <a:latin typeface="+mn-lt"/>
-          <a:ea typeface="+mn-ea"/>
-          <a:cs typeface="+mn-cs"/>
+          <a:cs typeface="Amiri" pitchFamily="2" charset="-78"/>
         </a:defRPr>
       </a:lvl6pPr>
       <a:lvl7pPr marL="2743200" algn="l" defTabSz="914400" rtl="0" eaLnBrk="1" latinLnBrk="0" hangingPunct="1">
@@ -2371,8 +2353,7 @@
             <a:schemeClr val="tx1"/>
           </a:solidFill>
           <a:latin typeface="+mn-lt"/>
-          <a:ea typeface="+mn-ea"/>
-          <a:cs typeface="+mn-cs"/>
+          <a:cs typeface="Amiri" pitchFamily="2" charset="-78"/>
         </a:defRPr>
       </a:lvl7pPr>
       <a:lvl8pPr marL="3200400" algn="l" defTabSz="914400" rtl="0" eaLnBrk="1" latinLnBrk="0" hangingPunct="1">
@@ -2381,8 +2362,7 @@
             <a:schemeClr val="tx1"/>
           </a:solidFill>
           <a:latin typeface="+mn-lt"/>
-          <a:ea typeface="+mn-ea"/>
-          <a:cs typeface="+mn-cs"/>
+          <a:cs typeface="Amiri" pitchFamily="2" charset="-78"/>
         </a:defRPr>
       </a:lvl8pPr>
       <a:lvl9pPr marL="3657600" algn="l" defTabSz="914400" rtl="0" eaLnBrk="1" latinLnBrk="0" hangingPunct="1">
@@ -2391,8 +2371,7 @@
             <a:schemeClr val="tx1"/>
           </a:solidFill>
           <a:latin typeface="+mn-lt"/>
-          <a:ea typeface="+mn-ea"/>
-          <a:cs typeface="+mn-cs"/>
+          <a:cs typeface="Amiri" pitchFamily="2" charset="-78"/>
         </a:defRPr>
       </a:lvl9pPr>
     </p:otherStyle>
@@ -2552,9 +2531,8 @@
                 <a:solidFill>
                   <a:srgbClr val="D4AF37"/>
                 </a:solidFill>
-                <a:latin typeface="Amiri" pitchFamily="34" charset="0"/>
-                <a:ea typeface="Amiri" pitchFamily="34" charset="-122"/>
-                <a:cs typeface="Amiri" pitchFamily="34" charset="-120"/>
+                <a:latin typeface="Amiri" pitchFamily="2" charset="-78"/>
+                <a:cs typeface="Amiri" pitchFamily="2" charset="-78"/>
               </a:rPr>
               <a:t>م</a:t>
             </a:r>
@@ -2592,8 +2570,7 @@
                   <a:srgbClr val="FFFFFF"/>
                 </a:solidFill>
                 <a:latin typeface="Cambria" pitchFamily="34" charset="0"/>
-                <a:ea typeface="Cambria" pitchFamily="34" charset="-122"/>
-                <a:cs typeface="Cambria" pitchFamily="34" charset="-120"/>
+                <a:cs typeface="Amiri" pitchFamily="2" charset="-78"/>
               </a:rPr>
               <a:t>Al Madina Online School</a:t>
             </a:r>
@@ -2609,8 +2586,7 @@
                   <a:srgbClr val="D4AF37"/>
                 </a:solidFill>
                 <a:latin typeface="Calibri" pitchFamily="34" charset="0"/>
-                <a:ea typeface="Calibri" pitchFamily="34" charset="-122"/>
-                <a:cs typeface="Calibri" pitchFamily="34" charset="-120"/>
+                <a:cs typeface="Amiri" pitchFamily="2" charset="-78"/>
               </a:rPr>
               <a:t>ARABIC DEPARTMENT · MIFTAH ARABIC</a:t>
             </a:r>
@@ -2648,8 +2624,7 @@
                   <a:srgbClr val="D4AF37"/>
                 </a:solidFill>
                 <a:latin typeface="Calibri" pitchFamily="34" charset="0"/>
-                <a:ea typeface="Calibri" pitchFamily="34" charset="-122"/>
-                <a:cs typeface="Calibri" pitchFamily="34" charset="-120"/>
+                <a:cs typeface="Amiri" pitchFamily="2" charset="-78"/>
               </a:rPr>
               <a:t>CAMBRIDGE IGCSE ARABIC 0544  ·  YEAR 9  ·  PROGRESSION P6  ·  P6-L11</a:t>
             </a:r>
@@ -2687,8 +2662,7 @@
                   <a:srgbClr val="9FB3D1"/>
                 </a:solidFill>
                 <a:latin typeface="Cambria" pitchFamily="34" charset="0"/>
-                <a:ea typeface="Cambria" pitchFamily="34" charset="-122"/>
-                <a:cs typeface="Cambria" pitchFamily="34" charset="-120"/>
+                <a:cs typeface="Amiri" pitchFamily="2" charset="-78"/>
               </a:rPr>
               <a:t>P6-L11</a:t>
             </a:r>
@@ -2726,8 +2700,7 @@
                   <a:srgbClr val="FFFFFF"/>
                 </a:solidFill>
                 <a:latin typeface="Cambria" pitchFamily="34" charset="0"/>
-                <a:ea typeface="Cambria" pitchFamily="34" charset="-122"/>
-                <a:cs typeface="Cambria" pitchFamily="34" charset="-120"/>
+                <a:cs typeface="Amiri" pitchFamily="2" charset="-78"/>
               </a:rPr>
               <a:t>Mock Results, Targeted Revision and Final IGCSE Preparation</a:t>
             </a:r>
@@ -2764,9 +2737,8 @@
                 <a:solidFill>
                   <a:srgbClr val="D4AF37"/>
                 </a:solidFill>
-                <a:latin typeface="Amiri" pitchFamily="34" charset="0"/>
-                <a:ea typeface="Amiri" pitchFamily="34" charset="-122"/>
-                <a:cs typeface="Amiri" pitchFamily="34" charset="-120"/>
+                <a:latin typeface="Amiri" pitchFamily="2" charset="-78"/>
+                <a:cs typeface="Amiri" pitchFamily="2" charset="-78"/>
               </a:rPr>
               <a:t>نَتَائِجُ المُحَاكَاةِ وَالمُرَاجَعَةُ المُوَجَّهَةُ وَالاسْتِعْدَادُ النِّهَائِيُّ</a:t>
             </a:r>
@@ -2804,8 +2776,7 @@
                   <a:srgbClr val="C6D2E6"/>
                 </a:solidFill>
                 <a:latin typeface="Calibri" pitchFamily="34" charset="0"/>
-                <a:ea typeface="Calibri" pitchFamily="34" charset="-122"/>
-                <a:cs typeface="Calibri" pitchFamily="34" charset="-120"/>
+                <a:cs typeface="Amiri" pitchFamily="2" charset="-78"/>
               </a:rPr>
               <a:t>Turn four mock scores into one /150 profile, fix the three errors that cost the most Accuracy marks, and leave with a personal revision plan and a readiness checklist for the real exam.</a:t>
             </a:r>
@@ -2870,8 +2841,7 @@
                   <a:srgbClr val="D4AF37"/>
                 </a:solidFill>
                 <a:latin typeface="Calibri" pitchFamily="34" charset="0"/>
-                <a:ea typeface="Calibri" pitchFamily="34" charset="-122"/>
-                <a:cs typeface="Calibri" pitchFamily="34" charset="-120"/>
+                <a:cs typeface="Amiri" pitchFamily="2" charset="-78"/>
               </a:rPr>
               <a:t>LESSON</a:t>
             </a:r>
@@ -2887,8 +2857,7 @@
                   <a:srgbClr val="FFFFFF"/>
                 </a:solidFill>
                 <a:latin typeface="Calibri" pitchFamily="34" charset="0"/>
-                <a:ea typeface="Calibri" pitchFamily="34" charset="-122"/>
-                <a:cs typeface="Calibri" pitchFamily="34" charset="-120"/>
+                <a:cs typeface="Amiri" pitchFamily="2" charset="-78"/>
               </a:rPr>
               <a:t>P6-L11 · Progression P6 · IGCSE Bridge</a:t>
             </a:r>
@@ -2953,8 +2922,7 @@
                   <a:srgbClr val="D4AF37"/>
                 </a:solidFill>
                 <a:latin typeface="Calibri" pitchFamily="34" charset="0"/>
-                <a:ea typeface="Calibri" pitchFamily="34" charset="-122"/>
-                <a:cs typeface="Calibri" pitchFamily="34" charset="-120"/>
+                <a:cs typeface="Amiri" pitchFamily="2" charset="-78"/>
               </a:rPr>
               <a:t>DURATION</a:t>
             </a:r>
@@ -2970,8 +2938,7 @@
                   <a:srgbClr val="FFFFFF"/>
                 </a:solidFill>
                 <a:latin typeface="Calibri" pitchFamily="34" charset="0"/>
-                <a:ea typeface="Calibri" pitchFamily="34" charset="-122"/>
-                <a:cs typeface="Calibri" pitchFamily="34" charset="-120"/>
+                <a:cs typeface="Amiri" pitchFamily="2" charset="-78"/>
               </a:rPr>
               <a:t>60 minutes · Teams</a:t>
             </a:r>
@@ -3036,8 +3003,7 @@
                   <a:srgbClr val="D4AF37"/>
                 </a:solidFill>
                 <a:latin typeface="Calibri" pitchFamily="34" charset="0"/>
-                <a:ea typeface="Calibri" pitchFamily="34" charset="-122"/>
-                <a:cs typeface="Calibri" pitchFamily="34" charset="-120"/>
+                <a:cs typeface="Amiri" pitchFamily="2" charset="-78"/>
               </a:rPr>
               <a:t>LEVEL</a:t>
             </a:r>
@@ -3053,8 +3019,7 @@
                   <a:srgbClr val="FFFFFF"/>
                 </a:solidFill>
                 <a:latin typeface="Calibri" pitchFamily="34" charset="0"/>
-                <a:ea typeface="Calibri" pitchFamily="34" charset="-122"/>
-                <a:cs typeface="Calibri" pitchFamily="34" charset="-120"/>
+                <a:cs typeface="Amiri" pitchFamily="2" charset="-78"/>
               </a:rPr>
               <a:t>Progression · B1 → B2</a:t>
             </a:r>
@@ -3119,8 +3084,7 @@
                   <a:srgbClr val="D4AF37"/>
                 </a:solidFill>
                 <a:latin typeface="Calibri" pitchFamily="34" charset="0"/>
-                <a:ea typeface="Calibri" pitchFamily="34" charset="-122"/>
-                <a:cs typeface="Calibri" pitchFamily="34" charset="-120"/>
+                <a:cs typeface="Amiri" pitchFamily="2" charset="-78"/>
               </a:rPr>
               <a:t>ON THE WEBSITE</a:t>
             </a:r>
@@ -3136,8 +3100,7 @@
                   <a:srgbClr val="FFFFFF"/>
                 </a:solidFill>
                 <a:latin typeface="Calibri" pitchFamily="34" charset="0"/>
-                <a:ea typeface="Calibri" pitchFamily="34" charset="-122"/>
-                <a:cs typeface="Calibri" pitchFamily="34" charset="-120"/>
+                <a:cs typeface="Amiri" pitchFamily="2" charset="-78"/>
               </a:rPr>
               <a:t>Pathways › Progression › P6 › P6-L11</a:t>
             </a:r>
@@ -3231,9 +3194,8 @@
                 <a:solidFill>
                   <a:srgbClr val="D4AF37"/>
                 </a:solidFill>
-                <a:latin typeface="Amiri" pitchFamily="34" charset="0"/>
-                <a:ea typeface="Amiri" pitchFamily="34" charset="-122"/>
-                <a:cs typeface="Amiri" pitchFamily="34" charset="-120"/>
+                <a:latin typeface="Amiri" pitchFamily="2" charset="-78"/>
+                <a:cs typeface="Amiri" pitchFamily="2" charset="-78"/>
               </a:rPr>
               <a:t>م</a:t>
             </a:r>
@@ -3271,8 +3233,7 @@
                   <a:srgbClr val="1B3B6F"/>
                 </a:solidFill>
                 <a:latin typeface="Cambria" pitchFamily="34" charset="0"/>
-                <a:ea typeface="Cambria" pitchFamily="34" charset="-122"/>
-                <a:cs typeface="Cambria" pitchFamily="34" charset="-120"/>
+                <a:cs typeface="Amiri" pitchFamily="2" charset="-78"/>
               </a:rPr>
               <a:t>Al Madina Online School</a:t>
             </a:r>
@@ -3310,8 +3271,7 @@
                   <a:srgbClr val="8A6D1E"/>
                 </a:solidFill>
                 <a:latin typeface="Calibri" pitchFamily="34" charset="0"/>
-                <a:ea typeface="Calibri" pitchFamily="34" charset="-122"/>
-                <a:cs typeface="Calibri" pitchFamily="34" charset="-120"/>
+                <a:cs typeface="Amiri" pitchFamily="2" charset="-78"/>
               </a:rPr>
               <a:t>ARABIC DEPARTMENT · MIFTAH ARABIC · IGCSE 0544</a:t>
             </a:r>
@@ -3376,8 +3336,7 @@
                   <a:srgbClr val="FFFFFF"/>
                 </a:solidFill>
                 <a:latin typeface="Calibri" pitchFamily="34" charset="0"/>
-                <a:ea typeface="Calibri" pitchFamily="34" charset="-122"/>
-                <a:cs typeface="Calibri" pitchFamily="34" charset="-120"/>
+                <a:cs typeface="Amiri" pitchFamily="2" charset="-78"/>
               </a:rPr>
               <a:t>P6-L11 · IGCSE Bridge</a:t>
             </a:r>
@@ -3442,8 +3401,7 @@
                   <a:srgbClr val="FFFFFF"/>
                 </a:solidFill>
                 <a:latin typeface="Calibri" pitchFamily="34" charset="0"/>
-                <a:ea typeface="Calibri" pitchFamily="34" charset="-122"/>
-                <a:cs typeface="Calibri" pitchFamily="34" charset="-120"/>
+                <a:cs typeface="Amiri" pitchFamily="2" charset="-78"/>
               </a:rPr>
               <a:t>WE DO · 6 MIN</a:t>
             </a:r>
@@ -3481,8 +3439,7 @@
                   <a:srgbClr val="2F6FB0"/>
                 </a:solidFill>
                 <a:latin typeface="Calibri" pitchFamily="34" charset="0"/>
-                <a:ea typeface="Calibri" pitchFamily="34" charset="-122"/>
-                <a:cs typeface="Calibri" pitchFamily="34" charset="-120"/>
+                <a:cs typeface="Amiri" pitchFamily="2" charset="-78"/>
               </a:rPr>
               <a:t>WE DO · FIX THE MOST COSTLY ERRORS</a:t>
             </a:r>
@@ -3520,8 +3477,7 @@
                   <a:srgbClr val="1B3B6F"/>
                 </a:solidFill>
                 <a:latin typeface="Cambria" pitchFamily="34" charset="0"/>
-                <a:ea typeface="Cambria" pitchFamily="34" charset="-122"/>
-                <a:cs typeface="Cambria" pitchFamily="34" charset="-120"/>
+                <a:cs typeface="Amiri" pitchFamily="2" charset="-78"/>
               </a:rPr>
               <a:t>Choose the correct form</a:t>
             </a:r>
@@ -3558,9 +3514,8 @@
                 <a:solidFill>
                   <a:srgbClr val="8A6D1E"/>
                 </a:solidFill>
-                <a:latin typeface="Amiri" pitchFamily="34" charset="0"/>
-                <a:ea typeface="Amiri" pitchFamily="34" charset="-122"/>
-                <a:cs typeface="Amiri" pitchFamily="34" charset="-120"/>
+                <a:latin typeface="Amiri" pitchFamily="2" charset="-78"/>
+                <a:cs typeface="Amiri" pitchFamily="2" charset="-78"/>
               </a:rPr>
               <a:t>صَحِّحِ الخَطَأَ</a:t>
             </a:r>
@@ -3598,8 +3553,7 @@
                   <a:srgbClr val="8A93A0"/>
                 </a:solidFill>
                 <a:latin typeface="Calibri" pitchFamily="34" charset="0"/>
-                <a:ea typeface="Calibri" pitchFamily="34" charset="-122"/>
-                <a:cs typeface="Calibri" pitchFamily="34" charset="-120"/>
+                <a:cs typeface="Amiri" pitchFamily="2" charset="-78"/>
               </a:rPr>
               <a:t>Miftah Arabic · Progression P6 · IGCSE Bridge · P6-L11</a:t>
             </a:r>
@@ -3696,8 +3650,7 @@
                   <a:srgbClr val="FFFFFF"/>
                 </a:solidFill>
                 <a:latin typeface="Calibri" pitchFamily="34" charset="0"/>
-                <a:ea typeface="Calibri" pitchFamily="34" charset="-122"/>
-                <a:cs typeface="Calibri" pitchFamily="34" charset="-120"/>
+                <a:cs typeface="Amiri" pitchFamily="2" charset="-78"/>
               </a:rPr>
               <a:t>1</a:t>
             </a:r>
@@ -3735,8 +3688,7 @@
                   <a:srgbClr val="1B3B6F"/>
                 </a:solidFill>
                 <a:latin typeface="Calibri" pitchFamily="34" charset="0"/>
-                <a:ea typeface="Calibri" pitchFamily="34" charset="-122"/>
-                <a:cs typeface="Calibri" pitchFamily="34" charset="-120"/>
+                <a:cs typeface="Amiri" pitchFamily="2" charset="-78"/>
               </a:rPr>
               <a:t>Error 1 · subjunctive: </a:t>
             </a:r>
@@ -3748,9 +3700,8 @@
                 <a:solidFill>
                   <a:srgbClr val="1B3B6F"/>
                 </a:solidFill>
-                <a:latin typeface="Amiri" pitchFamily="34" charset="0"/>
-                <a:ea typeface="Amiri" pitchFamily="34" charset="-122"/>
-                <a:cs typeface="Amiri" pitchFamily="34" charset="-120"/>
+                <a:latin typeface="Amiri" pitchFamily="2" charset="-78"/>
+                <a:cs typeface="Amiri" pitchFamily="2" charset="-78"/>
               </a:rPr>
               <a:t>يَنْبَغِي أَنْ</a:t>
             </a:r>
@@ -3763,8 +3714,7 @@
                   <a:srgbClr val="1B3B6F"/>
                 </a:solidFill>
                 <a:latin typeface="Calibri" pitchFamily="34" charset="0"/>
-                <a:ea typeface="Calibri" pitchFamily="34" charset="-122"/>
-                <a:cs typeface="Calibri" pitchFamily="34" charset="-120"/>
+                <a:cs typeface="Amiri" pitchFamily="2" charset="-78"/>
               </a:rPr>
               <a:t> ___ </a:t>
             </a:r>
@@ -3776,9 +3726,8 @@
                 <a:solidFill>
                   <a:srgbClr val="1B3B6F"/>
                 </a:solidFill>
-                <a:latin typeface="Amiri" pitchFamily="34" charset="0"/>
-                <a:ea typeface="Amiri" pitchFamily="34" charset="-122"/>
-                <a:cs typeface="Amiri" pitchFamily="34" charset="-120"/>
+                <a:latin typeface="Amiri" pitchFamily="2" charset="-78"/>
+                <a:cs typeface="Amiri" pitchFamily="2" charset="-78"/>
               </a:rPr>
               <a:t>المَاءَ بِوَفْرَةٍ</a:t>
             </a:r>
@@ -3791,8 +3740,7 @@
                   <a:srgbClr val="1B3B6F"/>
                 </a:solidFill>
                 <a:latin typeface="Calibri" pitchFamily="34" charset="0"/>
-                <a:ea typeface="Calibri" pitchFamily="34" charset="-122"/>
-                <a:cs typeface="Calibri" pitchFamily="34" charset="-120"/>
+                <a:cs typeface="Amiri" pitchFamily="2" charset="-78"/>
               </a:rPr>
               <a:t>.</a:t>
             </a:r>
@@ -3855,8 +3803,7 @@
                   <a:srgbClr val="1B3B6F"/>
                 </a:solidFill>
                 <a:latin typeface="Calibri" pitchFamily="34" charset="0"/>
-                <a:ea typeface="Calibri" pitchFamily="34" charset="-122"/>
-                <a:cs typeface="Calibri" pitchFamily="34" charset="-120"/>
+                <a:cs typeface="Amiri" pitchFamily="2" charset="-78"/>
               </a:rPr>
               <a:t>A</a:t>
             </a:r>
@@ -3893,9 +3840,8 @@
                 <a:solidFill>
                   <a:srgbClr val="1F2A37"/>
                 </a:solidFill>
-                <a:latin typeface="Amiri" pitchFamily="34" charset="0"/>
-                <a:ea typeface="Amiri" pitchFamily="34" charset="-122"/>
-                <a:cs typeface="Amiri" pitchFamily="34" charset="-120"/>
+                <a:latin typeface="Amiri" pitchFamily="2" charset="-78"/>
+                <a:cs typeface="Amiri" pitchFamily="2" charset="-78"/>
               </a:rPr>
               <a:t>نَشْرَبُ</a:t>
             </a:r>
@@ -3958,8 +3904,7 @@
                   <a:srgbClr val="1B3B6F"/>
                 </a:solidFill>
                 <a:latin typeface="Calibri" pitchFamily="34" charset="0"/>
-                <a:ea typeface="Calibri" pitchFamily="34" charset="-122"/>
-                <a:cs typeface="Calibri" pitchFamily="34" charset="-120"/>
+                <a:cs typeface="Amiri" pitchFamily="2" charset="-78"/>
               </a:rPr>
               <a:t>B</a:t>
             </a:r>
@@ -3996,9 +3941,8 @@
                 <a:solidFill>
                   <a:srgbClr val="1F2A37"/>
                 </a:solidFill>
-                <a:latin typeface="Amiri" pitchFamily="34" charset="0"/>
-                <a:ea typeface="Amiri" pitchFamily="34" charset="-122"/>
-                <a:cs typeface="Amiri" pitchFamily="34" charset="-120"/>
+                <a:latin typeface="Amiri" pitchFamily="2" charset="-78"/>
+                <a:cs typeface="Amiri" pitchFamily="2" charset="-78"/>
               </a:rPr>
               <a:t>نَشْرَبِ</a:t>
             </a:r>
@@ -4061,8 +4005,7 @@
                   <a:srgbClr val="1B3B6F"/>
                 </a:solidFill>
                 <a:latin typeface="Calibri" pitchFamily="34" charset="0"/>
-                <a:ea typeface="Calibri" pitchFamily="34" charset="-122"/>
-                <a:cs typeface="Calibri" pitchFamily="34" charset="-120"/>
+                <a:cs typeface="Amiri" pitchFamily="2" charset="-78"/>
               </a:rPr>
               <a:t>C</a:t>
             </a:r>
@@ -4099,9 +4042,8 @@
                 <a:solidFill>
                   <a:srgbClr val="1F2A37"/>
                 </a:solidFill>
-                <a:latin typeface="Amiri" pitchFamily="34" charset="0"/>
-                <a:ea typeface="Amiri" pitchFamily="34" charset="-122"/>
-                <a:cs typeface="Amiri" pitchFamily="34" charset="-120"/>
+                <a:latin typeface="Amiri" pitchFamily="2" charset="-78"/>
+                <a:cs typeface="Amiri" pitchFamily="2" charset="-78"/>
               </a:rPr>
               <a:t>نَشْرَبَ</a:t>
             </a:r>
@@ -4198,8 +4140,7 @@
                   <a:srgbClr val="FFFFFF"/>
                 </a:solidFill>
                 <a:latin typeface="Calibri" pitchFamily="34" charset="0"/>
-                <a:ea typeface="Calibri" pitchFamily="34" charset="-122"/>
-                <a:cs typeface="Calibri" pitchFamily="34" charset="-120"/>
+                <a:cs typeface="Amiri" pitchFamily="2" charset="-78"/>
               </a:rPr>
               <a:t>2</a:t>
             </a:r>
@@ -4237,8 +4178,7 @@
                   <a:srgbClr val="1B3B6F"/>
                 </a:solidFill>
                 <a:latin typeface="Calibri" pitchFamily="34" charset="0"/>
-                <a:ea typeface="Calibri" pitchFamily="34" charset="-122"/>
-                <a:cs typeface="Calibri" pitchFamily="34" charset="-120"/>
+                <a:cs typeface="Amiri" pitchFamily="2" charset="-78"/>
               </a:rPr>
               <a:t>Error 1 · purpose: </a:t>
             </a:r>
@@ -4250,9 +4190,8 @@
                 <a:solidFill>
                   <a:srgbClr val="1B3B6F"/>
                 </a:solidFill>
-                <a:latin typeface="Amiri" pitchFamily="34" charset="0"/>
-                <a:ea typeface="Amiri" pitchFamily="34" charset="-122"/>
-                <a:cs typeface="Amiri" pitchFamily="34" charset="-120"/>
+                <a:latin typeface="Amiri" pitchFamily="2" charset="-78"/>
+                <a:cs typeface="Amiri" pitchFamily="2" charset="-78"/>
               </a:rPr>
               <a:t>أُطْلِقَ بَرْنَامَجٌ لِكَيْ</a:t>
             </a:r>
@@ -4265,8 +4204,7 @@
                   <a:srgbClr val="1B3B6F"/>
                 </a:solidFill>
                 <a:latin typeface="Calibri" pitchFamily="34" charset="0"/>
-                <a:ea typeface="Calibri" pitchFamily="34" charset="-122"/>
-                <a:cs typeface="Calibri" pitchFamily="34" charset="-120"/>
+                <a:cs typeface="Amiri" pitchFamily="2" charset="-78"/>
               </a:rPr>
               <a:t> ___ </a:t>
             </a:r>
@@ -4278,9 +4216,8 @@
                 <a:solidFill>
                   <a:srgbClr val="1B3B6F"/>
                 </a:solidFill>
-                <a:latin typeface="Amiri" pitchFamily="34" charset="0"/>
-                <a:ea typeface="Amiri" pitchFamily="34" charset="-122"/>
-                <a:cs typeface="Amiri" pitchFamily="34" charset="-120"/>
+                <a:latin typeface="Amiri" pitchFamily="2" charset="-78"/>
+                <a:cs typeface="Amiri" pitchFamily="2" charset="-78"/>
               </a:rPr>
               <a:t>الشَّبَابَ</a:t>
             </a:r>
@@ -4293,8 +4230,7 @@
                   <a:srgbClr val="1B3B6F"/>
                 </a:solidFill>
                 <a:latin typeface="Calibri" pitchFamily="34" charset="0"/>
-                <a:ea typeface="Calibri" pitchFamily="34" charset="-122"/>
-                <a:cs typeface="Calibri" pitchFamily="34" charset="-120"/>
+                <a:cs typeface="Amiri" pitchFamily="2" charset="-78"/>
               </a:rPr>
               <a:t>.</a:t>
             </a:r>
@@ -4357,8 +4293,7 @@
                   <a:srgbClr val="1B3B6F"/>
                 </a:solidFill>
                 <a:latin typeface="Calibri" pitchFamily="34" charset="0"/>
-                <a:ea typeface="Calibri" pitchFamily="34" charset="-122"/>
-                <a:cs typeface="Calibri" pitchFamily="34" charset="-120"/>
+                <a:cs typeface="Amiri" pitchFamily="2" charset="-78"/>
               </a:rPr>
               <a:t>A</a:t>
             </a:r>
@@ -4395,9 +4330,8 @@
                 <a:solidFill>
                   <a:srgbClr val="1F2A37"/>
                 </a:solidFill>
-                <a:latin typeface="Amiri" pitchFamily="34" charset="0"/>
-                <a:ea typeface="Amiri" pitchFamily="34" charset="-122"/>
-                <a:cs typeface="Amiri" pitchFamily="34" charset="-120"/>
+                <a:latin typeface="Amiri" pitchFamily="2" charset="-78"/>
+                <a:cs typeface="Amiri" pitchFamily="2" charset="-78"/>
               </a:rPr>
               <a:t>يُسَاعِدَ</a:t>
             </a:r>
@@ -4460,8 +4394,7 @@
                   <a:srgbClr val="1B3B6F"/>
                 </a:solidFill>
                 <a:latin typeface="Calibri" pitchFamily="34" charset="0"/>
-                <a:ea typeface="Calibri" pitchFamily="34" charset="-122"/>
-                <a:cs typeface="Calibri" pitchFamily="34" charset="-120"/>
+                <a:cs typeface="Amiri" pitchFamily="2" charset="-78"/>
               </a:rPr>
               <a:t>B</a:t>
             </a:r>
@@ -4498,9 +4431,8 @@
                 <a:solidFill>
                   <a:srgbClr val="1F2A37"/>
                 </a:solidFill>
-                <a:latin typeface="Amiri" pitchFamily="34" charset="0"/>
-                <a:ea typeface="Amiri" pitchFamily="34" charset="-122"/>
-                <a:cs typeface="Amiri" pitchFamily="34" charset="-120"/>
+                <a:latin typeface="Amiri" pitchFamily="2" charset="-78"/>
+                <a:cs typeface="Amiri" pitchFamily="2" charset="-78"/>
               </a:rPr>
               <a:t>يُسَاعِدُ</a:t>
             </a:r>
@@ -4563,8 +4495,7 @@
                   <a:srgbClr val="1B3B6F"/>
                 </a:solidFill>
                 <a:latin typeface="Calibri" pitchFamily="34" charset="0"/>
-                <a:ea typeface="Calibri" pitchFamily="34" charset="-122"/>
-                <a:cs typeface="Calibri" pitchFamily="34" charset="-120"/>
+                <a:cs typeface="Amiri" pitchFamily="2" charset="-78"/>
               </a:rPr>
               <a:t>C</a:t>
             </a:r>
@@ -4601,9 +4532,8 @@
                 <a:solidFill>
                   <a:srgbClr val="1F2A37"/>
                 </a:solidFill>
-                <a:latin typeface="Amiri" pitchFamily="34" charset="0"/>
-                <a:ea typeface="Amiri" pitchFamily="34" charset="-122"/>
-                <a:cs typeface="Amiri" pitchFamily="34" charset="-120"/>
+                <a:latin typeface="Amiri" pitchFamily="2" charset="-78"/>
+                <a:cs typeface="Amiri" pitchFamily="2" charset="-78"/>
               </a:rPr>
               <a:t>سَاعَدَ</a:t>
             </a:r>
@@ -4700,8 +4630,7 @@
                   <a:srgbClr val="FFFFFF"/>
                 </a:solidFill>
                 <a:latin typeface="Calibri" pitchFamily="34" charset="0"/>
-                <a:ea typeface="Calibri" pitchFamily="34" charset="-122"/>
-                <a:cs typeface="Calibri" pitchFamily="34" charset="-120"/>
+                <a:cs typeface="Amiri" pitchFamily="2" charset="-78"/>
               </a:rPr>
               <a:t>3</a:t>
             </a:r>
@@ -4739,8 +4668,7 @@
                   <a:srgbClr val="1B3B6F"/>
                 </a:solidFill>
                 <a:latin typeface="Calibri" pitchFamily="34" charset="0"/>
-                <a:ea typeface="Calibri" pitchFamily="34" charset="-122"/>
-                <a:cs typeface="Calibri" pitchFamily="34" charset="-120"/>
+                <a:cs typeface="Amiri" pitchFamily="2" charset="-78"/>
               </a:rPr>
               <a:t>Error 2 · Type 2: </a:t>
             </a:r>
@@ -4752,9 +4680,8 @@
                 <a:solidFill>
                   <a:srgbClr val="1B3B6F"/>
                 </a:solidFill>
-                <a:latin typeface="Amiri" pitchFamily="34" charset="0"/>
-                <a:ea typeface="Amiri" pitchFamily="34" charset="-122"/>
-                <a:cs typeface="Amiri" pitchFamily="34" charset="-120"/>
+                <a:latin typeface="Amiri" pitchFamily="2" charset="-78"/>
+                <a:cs typeface="Amiri" pitchFamily="2" charset="-78"/>
               </a:rPr>
               <a:t>لَوْ قَرَأْتُ أَكْثَرَ،</a:t>
             </a:r>
@@ -4767,8 +4694,7 @@
                   <a:srgbClr val="1B3B6F"/>
                 </a:solidFill>
                 <a:latin typeface="Calibri" pitchFamily="34" charset="0"/>
-                <a:ea typeface="Calibri" pitchFamily="34" charset="-122"/>
-                <a:cs typeface="Calibri" pitchFamily="34" charset="-120"/>
+                <a:cs typeface="Amiri" pitchFamily="2" charset="-78"/>
               </a:rPr>
               <a:t> ___ </a:t>
             </a:r>
@@ -4780,9 +4706,8 @@
                 <a:solidFill>
                   <a:srgbClr val="1B3B6F"/>
                 </a:solidFill>
-                <a:latin typeface="Amiri" pitchFamily="34" charset="0"/>
-                <a:ea typeface="Amiri" pitchFamily="34" charset="-122"/>
-                <a:cs typeface="Amiri" pitchFamily="34" charset="-120"/>
+                <a:latin typeface="Amiri" pitchFamily="2" charset="-78"/>
+                <a:cs typeface="Amiri" pitchFamily="2" charset="-78"/>
               </a:rPr>
               <a:t>مُفْرَدَاتِي</a:t>
             </a:r>
@@ -4795,8 +4720,7 @@
                   <a:srgbClr val="1B3B6F"/>
                 </a:solidFill>
                 <a:latin typeface="Calibri" pitchFamily="34" charset="0"/>
-                <a:ea typeface="Calibri" pitchFamily="34" charset="-122"/>
-                <a:cs typeface="Calibri" pitchFamily="34" charset="-120"/>
+                <a:cs typeface="Amiri" pitchFamily="2" charset="-78"/>
               </a:rPr>
               <a:t>.</a:t>
             </a:r>
@@ -4859,8 +4783,7 @@
                   <a:srgbClr val="1B3B6F"/>
                 </a:solidFill>
                 <a:latin typeface="Calibri" pitchFamily="34" charset="0"/>
-                <a:ea typeface="Calibri" pitchFamily="34" charset="-122"/>
-                <a:cs typeface="Calibri" pitchFamily="34" charset="-120"/>
+                <a:cs typeface="Amiri" pitchFamily="2" charset="-78"/>
               </a:rPr>
               <a:t>A</a:t>
             </a:r>
@@ -4897,9 +4820,8 @@
                 <a:solidFill>
                   <a:srgbClr val="1F2A37"/>
                 </a:solidFill>
-                <a:latin typeface="Amiri" pitchFamily="34" charset="0"/>
-                <a:ea typeface="Amiri" pitchFamily="34" charset="-122"/>
-                <a:cs typeface="Amiri" pitchFamily="34" charset="-120"/>
+                <a:latin typeface="Amiri" pitchFamily="2" charset="-78"/>
+                <a:cs typeface="Amiri" pitchFamily="2" charset="-78"/>
               </a:rPr>
               <a:t>زَادَتْ</a:t>
             </a:r>
@@ -4962,8 +4884,7 @@
                   <a:srgbClr val="1B3B6F"/>
                 </a:solidFill>
                 <a:latin typeface="Calibri" pitchFamily="34" charset="0"/>
-                <a:ea typeface="Calibri" pitchFamily="34" charset="-122"/>
-                <a:cs typeface="Calibri" pitchFamily="34" charset="-120"/>
+                <a:cs typeface="Amiri" pitchFamily="2" charset="-78"/>
               </a:rPr>
               <a:t>B</a:t>
             </a:r>
@@ -5000,9 +4921,8 @@
                 <a:solidFill>
                   <a:srgbClr val="1F2A37"/>
                 </a:solidFill>
-                <a:latin typeface="Amiri" pitchFamily="34" charset="0"/>
-                <a:ea typeface="Amiri" pitchFamily="34" charset="-122"/>
-                <a:cs typeface="Amiri" pitchFamily="34" charset="-120"/>
+                <a:latin typeface="Amiri" pitchFamily="2" charset="-78"/>
+                <a:cs typeface="Amiri" pitchFamily="2" charset="-78"/>
               </a:rPr>
               <a:t>لَزَادَتْ</a:t>
             </a:r>
@@ -5065,8 +4985,7 @@
                   <a:srgbClr val="1B3B6F"/>
                 </a:solidFill>
                 <a:latin typeface="Calibri" pitchFamily="34" charset="0"/>
-                <a:ea typeface="Calibri" pitchFamily="34" charset="-122"/>
-                <a:cs typeface="Calibri" pitchFamily="34" charset="-120"/>
+                <a:cs typeface="Amiri" pitchFamily="2" charset="-78"/>
               </a:rPr>
               <a:t>C</a:t>
             </a:r>
@@ -5103,9 +5022,8 @@
                 <a:solidFill>
                   <a:srgbClr val="1F2A37"/>
                 </a:solidFill>
-                <a:latin typeface="Amiri" pitchFamily="34" charset="0"/>
-                <a:ea typeface="Amiri" pitchFamily="34" charset="-122"/>
-                <a:cs typeface="Amiri" pitchFamily="34" charset="-120"/>
+                <a:latin typeface="Amiri" pitchFamily="2" charset="-78"/>
+                <a:cs typeface="Amiri" pitchFamily="2" charset="-78"/>
               </a:rPr>
               <a:t>سَتَزِيدُ</a:t>
             </a:r>
@@ -5202,8 +5120,7 @@
                   <a:srgbClr val="FFFFFF"/>
                 </a:solidFill>
                 <a:latin typeface="Calibri" pitchFamily="34" charset="0"/>
-                <a:ea typeface="Calibri" pitchFamily="34" charset="-122"/>
-                <a:cs typeface="Calibri" pitchFamily="34" charset="-120"/>
+                <a:cs typeface="Amiri" pitchFamily="2" charset="-78"/>
               </a:rPr>
               <a:t>4</a:t>
             </a:r>
@@ -5241,8 +5158,7 @@
                   <a:srgbClr val="1B3B6F"/>
                 </a:solidFill>
                 <a:latin typeface="Calibri" pitchFamily="34" charset="0"/>
-                <a:ea typeface="Calibri" pitchFamily="34" charset="-122"/>
-                <a:cs typeface="Calibri" pitchFamily="34" charset="-120"/>
+                <a:cs typeface="Amiri" pitchFamily="2" charset="-78"/>
               </a:rPr>
               <a:t>Error 3 · reported fact: </a:t>
             </a:r>
@@ -5254,9 +5170,8 @@
                 <a:solidFill>
                   <a:srgbClr val="1B3B6F"/>
                 </a:solidFill>
-                <a:latin typeface="Amiri" pitchFamily="34" charset="0"/>
-                <a:ea typeface="Amiri" pitchFamily="34" charset="-122"/>
-                <a:cs typeface="Amiri" pitchFamily="34" charset="-120"/>
+                <a:latin typeface="Amiri" pitchFamily="2" charset="-78"/>
+                <a:cs typeface="Amiri" pitchFamily="2" charset="-78"/>
               </a:rPr>
               <a:t>أَكَّدَ المُعَلِّمُ</a:t>
             </a:r>
@@ -5269,8 +5184,7 @@
                   <a:srgbClr val="1B3B6F"/>
                 </a:solidFill>
                 <a:latin typeface="Calibri" pitchFamily="34" charset="0"/>
-                <a:ea typeface="Calibri" pitchFamily="34" charset="-122"/>
-                <a:cs typeface="Calibri" pitchFamily="34" charset="-120"/>
+                <a:cs typeface="Amiri" pitchFamily="2" charset="-78"/>
               </a:rPr>
               <a:t> ___ </a:t>
             </a:r>
@@ -5282,9 +5196,8 @@
                 <a:solidFill>
                   <a:srgbClr val="1B3B6F"/>
                 </a:solidFill>
-                <a:latin typeface="Amiri" pitchFamily="34" charset="0"/>
-                <a:ea typeface="Amiri" pitchFamily="34" charset="-122"/>
-                <a:cs typeface="Amiri" pitchFamily="34" charset="-120"/>
+                <a:latin typeface="Amiri" pitchFamily="2" charset="-78"/>
+                <a:cs typeface="Amiri" pitchFamily="2" charset="-78"/>
               </a:rPr>
               <a:t>الامْتِحَانَ قَرِيبٌ</a:t>
             </a:r>
@@ -5297,8 +5210,7 @@
                   <a:srgbClr val="1B3B6F"/>
                 </a:solidFill>
                 <a:latin typeface="Calibri" pitchFamily="34" charset="0"/>
-                <a:ea typeface="Calibri" pitchFamily="34" charset="-122"/>
-                <a:cs typeface="Calibri" pitchFamily="34" charset="-120"/>
+                <a:cs typeface="Amiri" pitchFamily="2" charset="-78"/>
               </a:rPr>
               <a:t>.</a:t>
             </a:r>
@@ -5361,8 +5273,7 @@
                   <a:srgbClr val="1B3B6F"/>
                 </a:solidFill>
                 <a:latin typeface="Calibri" pitchFamily="34" charset="0"/>
-                <a:ea typeface="Calibri" pitchFamily="34" charset="-122"/>
-                <a:cs typeface="Calibri" pitchFamily="34" charset="-120"/>
+                <a:cs typeface="Amiri" pitchFamily="2" charset="-78"/>
               </a:rPr>
               <a:t>A</a:t>
             </a:r>
@@ -5399,9 +5310,8 @@
                 <a:solidFill>
                   <a:srgbClr val="1F2A37"/>
                 </a:solidFill>
-                <a:latin typeface="Amiri" pitchFamily="34" charset="0"/>
-                <a:ea typeface="Amiri" pitchFamily="34" charset="-122"/>
-                <a:cs typeface="Amiri" pitchFamily="34" charset="-120"/>
+                <a:latin typeface="Amiri" pitchFamily="2" charset="-78"/>
+                <a:cs typeface="Amiri" pitchFamily="2" charset="-78"/>
               </a:rPr>
               <a:t>أَنَّ</a:t>
             </a:r>
@@ -5464,8 +5374,7 @@
                   <a:srgbClr val="1B3B6F"/>
                 </a:solidFill>
                 <a:latin typeface="Calibri" pitchFamily="34" charset="0"/>
-                <a:ea typeface="Calibri" pitchFamily="34" charset="-122"/>
-                <a:cs typeface="Calibri" pitchFamily="34" charset="-120"/>
+                <a:cs typeface="Amiri" pitchFamily="2" charset="-78"/>
               </a:rPr>
               <a:t>B</a:t>
             </a:r>
@@ -5502,9 +5411,8 @@
                 <a:solidFill>
                   <a:srgbClr val="1F2A37"/>
                 </a:solidFill>
-                <a:latin typeface="Amiri" pitchFamily="34" charset="0"/>
-                <a:ea typeface="Amiri" pitchFamily="34" charset="-122"/>
-                <a:cs typeface="Amiri" pitchFamily="34" charset="-120"/>
+                <a:latin typeface="Amiri" pitchFamily="2" charset="-78"/>
+                <a:cs typeface="Amiri" pitchFamily="2" charset="-78"/>
               </a:rPr>
               <a:t>أَنْ</a:t>
             </a:r>
@@ -5567,8 +5475,7 @@
                   <a:srgbClr val="1B3B6F"/>
                 </a:solidFill>
                 <a:latin typeface="Calibri" pitchFamily="34" charset="0"/>
-                <a:ea typeface="Calibri" pitchFamily="34" charset="-122"/>
-                <a:cs typeface="Calibri" pitchFamily="34" charset="-120"/>
+                <a:cs typeface="Amiri" pitchFamily="2" charset="-78"/>
               </a:rPr>
               <a:t>C</a:t>
             </a:r>
@@ -5605,9 +5512,8 @@
                 <a:solidFill>
                   <a:srgbClr val="1F2A37"/>
                 </a:solidFill>
-                <a:latin typeface="Amiri" pitchFamily="34" charset="0"/>
-                <a:ea typeface="Amiri" pitchFamily="34" charset="-122"/>
-                <a:cs typeface="Amiri" pitchFamily="34" charset="-120"/>
+                <a:latin typeface="Amiri" pitchFamily="2" charset="-78"/>
+                <a:cs typeface="Amiri" pitchFamily="2" charset="-78"/>
               </a:rPr>
               <a:t>لِكَيْ</a:t>
             </a:r>
@@ -5704,8 +5610,7 @@
                   <a:srgbClr val="FFFFFF"/>
                 </a:solidFill>
                 <a:latin typeface="Calibri" pitchFamily="34" charset="0"/>
-                <a:ea typeface="Calibri" pitchFamily="34" charset="-122"/>
-                <a:cs typeface="Calibri" pitchFamily="34" charset="-120"/>
+                <a:cs typeface="Amiri" pitchFamily="2" charset="-78"/>
               </a:rPr>
               <a:t>5</a:t>
             </a:r>
@@ -5743,8 +5648,7 @@
                   <a:srgbClr val="1B3B6F"/>
                 </a:solidFill>
                 <a:latin typeface="Calibri" pitchFamily="34" charset="0"/>
-                <a:ea typeface="Calibri" pitchFamily="34" charset="-122"/>
-                <a:cs typeface="Calibri" pitchFamily="34" charset="-120"/>
+                <a:cs typeface="Amiri" pitchFamily="2" charset="-78"/>
               </a:rPr>
               <a:t>Error 3 · concession: </a:t>
             </a:r>
@@ -5756,9 +5660,8 @@
                 <a:solidFill>
                   <a:srgbClr val="1B3B6F"/>
                 </a:solidFill>
-                <a:latin typeface="Amiri" pitchFamily="34" charset="0"/>
-                <a:ea typeface="Amiri" pitchFamily="34" charset="-122"/>
-                <a:cs typeface="Amiri" pitchFamily="34" charset="-120"/>
+                <a:latin typeface="Amiri" pitchFamily="2" charset="-78"/>
+                <a:cs typeface="Amiri" pitchFamily="2" charset="-78"/>
               </a:rPr>
               <a:t>صَحِيحٌ أَنَّ التِّقْنِيَّةَ</a:t>
             </a:r>
@@ -5771,8 +5674,7 @@
                   <a:srgbClr val="1B3B6F"/>
                 </a:solidFill>
                 <a:latin typeface="Calibri" pitchFamily="34" charset="0"/>
-                <a:ea typeface="Calibri" pitchFamily="34" charset="-122"/>
-                <a:cs typeface="Calibri" pitchFamily="34" charset="-120"/>
+                <a:cs typeface="Amiri" pitchFamily="2" charset="-78"/>
               </a:rPr>
               <a:t> ___ </a:t>
             </a:r>
@@ -5784,9 +5686,8 @@
                 <a:solidFill>
                   <a:srgbClr val="1B3B6F"/>
                 </a:solidFill>
-                <a:latin typeface="Amiri" pitchFamily="34" charset="0"/>
-                <a:ea typeface="Amiri" pitchFamily="34" charset="-122"/>
-                <a:cs typeface="Amiri" pitchFamily="34" charset="-120"/>
+                <a:latin typeface="Amiri" pitchFamily="2" charset="-78"/>
+                <a:cs typeface="Amiri" pitchFamily="2" charset="-78"/>
               </a:rPr>
               <a:t>البَعِيدَ</a:t>
             </a:r>
@@ -5799,8 +5700,7 @@
                   <a:srgbClr val="1B3B6F"/>
                 </a:solidFill>
                 <a:latin typeface="Calibri" pitchFamily="34" charset="0"/>
-                <a:ea typeface="Calibri" pitchFamily="34" charset="-122"/>
-                <a:cs typeface="Calibri" pitchFamily="34" charset="-120"/>
+                <a:cs typeface="Amiri" pitchFamily="2" charset="-78"/>
               </a:rPr>
               <a:t>.</a:t>
             </a:r>
@@ -5863,8 +5763,7 @@
                   <a:srgbClr val="1B3B6F"/>
                 </a:solidFill>
                 <a:latin typeface="Calibri" pitchFamily="34" charset="0"/>
-                <a:ea typeface="Calibri" pitchFamily="34" charset="-122"/>
-                <a:cs typeface="Calibri" pitchFamily="34" charset="-120"/>
+                <a:cs typeface="Amiri" pitchFamily="2" charset="-78"/>
               </a:rPr>
               <a:t>A</a:t>
             </a:r>
@@ -5901,9 +5800,8 @@
                 <a:solidFill>
                   <a:srgbClr val="1F2A37"/>
                 </a:solidFill>
-                <a:latin typeface="Amiri" pitchFamily="34" charset="0"/>
-                <a:ea typeface="Amiri" pitchFamily="34" charset="-122"/>
-                <a:cs typeface="Amiri" pitchFamily="34" charset="-120"/>
+                <a:latin typeface="Amiri" pitchFamily="2" charset="-78"/>
+                <a:cs typeface="Amiri" pitchFamily="2" charset="-78"/>
               </a:rPr>
               <a:t>تُقَرِّبَ</a:t>
             </a:r>
@@ -5966,8 +5864,7 @@
                   <a:srgbClr val="1B3B6F"/>
                 </a:solidFill>
                 <a:latin typeface="Calibri" pitchFamily="34" charset="0"/>
-                <a:ea typeface="Calibri" pitchFamily="34" charset="-122"/>
-                <a:cs typeface="Calibri" pitchFamily="34" charset="-120"/>
+                <a:cs typeface="Amiri" pitchFamily="2" charset="-78"/>
               </a:rPr>
               <a:t>B</a:t>
             </a:r>
@@ -6004,9 +5901,8 @@
                 <a:solidFill>
                   <a:srgbClr val="1F2A37"/>
                 </a:solidFill>
-                <a:latin typeface="Amiri" pitchFamily="34" charset="0"/>
-                <a:ea typeface="Amiri" pitchFamily="34" charset="-122"/>
-                <a:cs typeface="Amiri" pitchFamily="34" charset="-120"/>
+                <a:latin typeface="Amiri" pitchFamily="2" charset="-78"/>
+                <a:cs typeface="Amiri" pitchFamily="2" charset="-78"/>
               </a:rPr>
               <a:t>لَقَرَّبَتْ</a:t>
             </a:r>
@@ -6069,8 +5965,7 @@
                   <a:srgbClr val="1B3B6F"/>
                 </a:solidFill>
                 <a:latin typeface="Calibri" pitchFamily="34" charset="0"/>
-                <a:ea typeface="Calibri" pitchFamily="34" charset="-122"/>
-                <a:cs typeface="Calibri" pitchFamily="34" charset="-120"/>
+                <a:cs typeface="Amiri" pitchFamily="2" charset="-78"/>
               </a:rPr>
               <a:t>C</a:t>
             </a:r>
@@ -6107,9 +6002,8 @@
                 <a:solidFill>
                   <a:srgbClr val="1F2A37"/>
                 </a:solidFill>
-                <a:latin typeface="Amiri" pitchFamily="34" charset="0"/>
-                <a:ea typeface="Amiri" pitchFamily="34" charset="-122"/>
-                <a:cs typeface="Amiri" pitchFamily="34" charset="-120"/>
+                <a:latin typeface="Amiri" pitchFamily="2" charset="-78"/>
+                <a:cs typeface="Amiri" pitchFamily="2" charset="-78"/>
               </a:rPr>
               <a:t>تُقَرِّبُ</a:t>
             </a:r>
@@ -6206,8 +6100,7 @@
                   <a:srgbClr val="FFFFFF"/>
                 </a:solidFill>
                 <a:latin typeface="Calibri" pitchFamily="34" charset="0"/>
-                <a:ea typeface="Calibri" pitchFamily="34" charset="-122"/>
-                <a:cs typeface="Calibri" pitchFamily="34" charset="-120"/>
+                <a:cs typeface="Amiri" pitchFamily="2" charset="-78"/>
               </a:rPr>
               <a:t>6</a:t>
             </a:r>
@@ -6245,8 +6138,7 @@
                   <a:srgbClr val="1B3B6F"/>
                 </a:solidFill>
                 <a:latin typeface="Calibri" pitchFamily="34" charset="0"/>
-                <a:ea typeface="Calibri" pitchFamily="34" charset="-122"/>
-                <a:cs typeface="Calibri" pitchFamily="34" charset="-120"/>
+                <a:cs typeface="Amiri" pitchFamily="2" charset="-78"/>
               </a:rPr>
               <a:t>Passive agreement: </a:t>
             </a:r>
@@ -6258,9 +6150,8 @@
                 <a:solidFill>
                   <a:srgbClr val="1B3B6F"/>
                 </a:solidFill>
-                <a:latin typeface="Amiri" pitchFamily="34" charset="0"/>
-                <a:ea typeface="Amiri" pitchFamily="34" charset="-122"/>
-                <a:cs typeface="Amiri" pitchFamily="34" charset="-120"/>
+                <a:latin typeface="Amiri" pitchFamily="2" charset="-78"/>
+                <a:cs typeface="Amiri" pitchFamily="2" charset="-78"/>
               </a:rPr>
               <a:t>الرِّسَالَةُ</a:t>
             </a:r>
@@ -6273,8 +6164,7 @@
                   <a:srgbClr val="1B3B6F"/>
                 </a:solidFill>
                 <a:latin typeface="Calibri" pitchFamily="34" charset="0"/>
-                <a:ea typeface="Calibri" pitchFamily="34" charset="-122"/>
-                <a:cs typeface="Calibri" pitchFamily="34" charset="-120"/>
+                <a:cs typeface="Amiri" pitchFamily="2" charset="-78"/>
               </a:rPr>
               <a:t> ___ </a:t>
             </a:r>
@@ -6286,9 +6176,8 @@
                 <a:solidFill>
                   <a:srgbClr val="1B3B6F"/>
                 </a:solidFill>
-                <a:latin typeface="Amiri" pitchFamily="34" charset="0"/>
-                <a:ea typeface="Amiri" pitchFamily="34" charset="-122"/>
-                <a:cs typeface="Amiri" pitchFamily="34" charset="-120"/>
+                <a:latin typeface="Amiri" pitchFamily="2" charset="-78"/>
+                <a:cs typeface="Amiri" pitchFamily="2" charset="-78"/>
               </a:rPr>
               <a:t>أَمْسِ</a:t>
             </a:r>
@@ -6301,8 +6190,7 @@
                   <a:srgbClr val="1B3B6F"/>
                 </a:solidFill>
                 <a:latin typeface="Calibri" pitchFamily="34" charset="0"/>
-                <a:ea typeface="Calibri" pitchFamily="34" charset="-122"/>
-                <a:cs typeface="Calibri" pitchFamily="34" charset="-120"/>
+                <a:cs typeface="Amiri" pitchFamily="2" charset="-78"/>
               </a:rPr>
               <a:t>.</a:t>
             </a:r>
@@ -6365,8 +6253,7 @@
                   <a:srgbClr val="1B3B6F"/>
                 </a:solidFill>
                 <a:latin typeface="Calibri" pitchFamily="34" charset="0"/>
-                <a:ea typeface="Calibri" pitchFamily="34" charset="-122"/>
-                <a:cs typeface="Calibri" pitchFamily="34" charset="-120"/>
+                <a:cs typeface="Amiri" pitchFamily="2" charset="-78"/>
               </a:rPr>
               <a:t>A</a:t>
             </a:r>
@@ -6403,9 +6290,8 @@
                 <a:solidFill>
                   <a:srgbClr val="1F2A37"/>
                 </a:solidFill>
-                <a:latin typeface="Amiri" pitchFamily="34" charset="0"/>
-                <a:ea typeface="Amiri" pitchFamily="34" charset="-122"/>
-                <a:cs typeface="Amiri" pitchFamily="34" charset="-120"/>
+                <a:latin typeface="Amiri" pitchFamily="2" charset="-78"/>
+                <a:cs typeface="Amiri" pitchFamily="2" charset="-78"/>
               </a:rPr>
               <a:t>كُتِبَ</a:t>
             </a:r>
@@ -6468,8 +6354,7 @@
                   <a:srgbClr val="1B3B6F"/>
                 </a:solidFill>
                 <a:latin typeface="Calibri" pitchFamily="34" charset="0"/>
-                <a:ea typeface="Calibri" pitchFamily="34" charset="-122"/>
-                <a:cs typeface="Calibri" pitchFamily="34" charset="-120"/>
+                <a:cs typeface="Amiri" pitchFamily="2" charset="-78"/>
               </a:rPr>
               <a:t>B</a:t>
             </a:r>
@@ -6506,9 +6391,8 @@
                 <a:solidFill>
                   <a:srgbClr val="1F2A37"/>
                 </a:solidFill>
-                <a:latin typeface="Amiri" pitchFamily="34" charset="0"/>
-                <a:ea typeface="Amiri" pitchFamily="34" charset="-122"/>
-                <a:cs typeface="Amiri" pitchFamily="34" charset="-120"/>
+                <a:latin typeface="Amiri" pitchFamily="2" charset="-78"/>
+                <a:cs typeface="Amiri" pitchFamily="2" charset="-78"/>
               </a:rPr>
               <a:t>كُتِبَتْ</a:t>
             </a:r>
@@ -6571,8 +6455,7 @@
                   <a:srgbClr val="1B3B6F"/>
                 </a:solidFill>
                 <a:latin typeface="Calibri" pitchFamily="34" charset="0"/>
-                <a:ea typeface="Calibri" pitchFamily="34" charset="-122"/>
-                <a:cs typeface="Calibri" pitchFamily="34" charset="-120"/>
+                <a:cs typeface="Amiri" pitchFamily="2" charset="-78"/>
               </a:rPr>
               <a:t>C</a:t>
             </a:r>
@@ -6609,9 +6492,8 @@
                 <a:solidFill>
                   <a:srgbClr val="1F2A37"/>
                 </a:solidFill>
-                <a:latin typeface="Amiri" pitchFamily="34" charset="0"/>
-                <a:ea typeface="Amiri" pitchFamily="34" charset="-122"/>
-                <a:cs typeface="Amiri" pitchFamily="34" charset="-120"/>
+                <a:latin typeface="Amiri" pitchFamily="2" charset="-78"/>
+                <a:cs typeface="Amiri" pitchFamily="2" charset="-78"/>
               </a:rPr>
               <a:t>كَتَبَتْ</a:t>
             </a:r>
@@ -6649,8 +6531,7 @@
                   <a:srgbClr val="8A93A0"/>
                 </a:solidFill>
                 <a:latin typeface="Calibri" pitchFamily="34" charset="0"/>
-                <a:ea typeface="Calibri" pitchFamily="34" charset="-122"/>
-                <a:cs typeface="Calibri" pitchFamily="34" charset="-120"/>
+                <a:cs typeface="Amiri" pitchFamily="2" charset="-78"/>
               </a:rPr>
               <a:t>10 / 18</a:t>
             </a:r>
@@ -6744,9 +6625,8 @@
                 <a:solidFill>
                   <a:srgbClr val="D4AF37"/>
                 </a:solidFill>
-                <a:latin typeface="Amiri" pitchFamily="34" charset="0"/>
-                <a:ea typeface="Amiri" pitchFamily="34" charset="-122"/>
-                <a:cs typeface="Amiri" pitchFamily="34" charset="-120"/>
+                <a:latin typeface="Amiri" pitchFamily="2" charset="-78"/>
+                <a:cs typeface="Amiri" pitchFamily="2" charset="-78"/>
               </a:rPr>
               <a:t>م</a:t>
             </a:r>
@@ -6784,8 +6664,7 @@
                   <a:srgbClr val="1B3B6F"/>
                 </a:solidFill>
                 <a:latin typeface="Cambria" pitchFamily="34" charset="0"/>
-                <a:ea typeface="Cambria" pitchFamily="34" charset="-122"/>
-                <a:cs typeface="Cambria" pitchFamily="34" charset="-120"/>
+                <a:cs typeface="Amiri" pitchFamily="2" charset="-78"/>
               </a:rPr>
               <a:t>Al Madina Online School</a:t>
             </a:r>
@@ -6823,8 +6702,7 @@
                   <a:srgbClr val="8A6D1E"/>
                 </a:solidFill>
                 <a:latin typeface="Calibri" pitchFamily="34" charset="0"/>
-                <a:ea typeface="Calibri" pitchFamily="34" charset="-122"/>
-                <a:cs typeface="Calibri" pitchFamily="34" charset="-120"/>
+                <a:cs typeface="Amiri" pitchFamily="2" charset="-78"/>
               </a:rPr>
               <a:t>ARABIC DEPARTMENT · MIFTAH ARABIC · IGCSE 0544</a:t>
             </a:r>
@@ -6889,8 +6767,7 @@
                   <a:srgbClr val="FFFFFF"/>
                 </a:solidFill>
                 <a:latin typeface="Calibri" pitchFamily="34" charset="0"/>
-                <a:ea typeface="Calibri" pitchFamily="34" charset="-122"/>
-                <a:cs typeface="Calibri" pitchFamily="34" charset="-120"/>
+                <a:cs typeface="Amiri" pitchFamily="2" charset="-78"/>
               </a:rPr>
               <a:t>P6-L11 · IGCSE Bridge</a:t>
             </a:r>
@@ -6955,8 +6832,7 @@
                   <a:srgbClr val="FFFFFF"/>
                 </a:solidFill>
                 <a:latin typeface="Calibri" pitchFamily="34" charset="0"/>
-                <a:ea typeface="Calibri" pitchFamily="34" charset="-122"/>
-                <a:cs typeface="Calibri" pitchFamily="34" charset="-120"/>
+                <a:cs typeface="Amiri" pitchFamily="2" charset="-78"/>
               </a:rPr>
               <a:t>WE DO · 2 MIN</a:t>
             </a:r>
@@ -6994,8 +6870,7 @@
                   <a:srgbClr val="2F6FB0"/>
                 </a:solidFill>
                 <a:latin typeface="Calibri" pitchFamily="34" charset="0"/>
-                <a:ea typeface="Calibri" pitchFamily="34" charset="-122"/>
-                <a:cs typeface="Calibri" pitchFamily="34" charset="-120"/>
+                <a:cs typeface="Amiri" pitchFamily="2" charset="-78"/>
               </a:rPr>
               <a:t>WE DO · ANSWERS</a:t>
             </a:r>
@@ -7033,8 +6908,7 @@
                   <a:srgbClr val="1B3B6F"/>
                 </a:solidFill>
                 <a:latin typeface="Cambria" pitchFamily="34" charset="0"/>
-                <a:ea typeface="Cambria" pitchFamily="34" charset="-122"/>
-                <a:cs typeface="Cambria" pitchFamily="34" charset="-120"/>
+                <a:cs typeface="Amiri" pitchFamily="2" charset="-78"/>
               </a:rPr>
               <a:t>Answers and the rule behind each</a:t>
             </a:r>
@@ -7071,9 +6945,8 @@
                 <a:solidFill>
                   <a:srgbClr val="8A6D1E"/>
                 </a:solidFill>
-                <a:latin typeface="Amiri" pitchFamily="34" charset="0"/>
-                <a:ea typeface="Amiri" pitchFamily="34" charset="-122"/>
-                <a:cs typeface="Amiri" pitchFamily="34" charset="-120"/>
+                <a:latin typeface="Amiri" pitchFamily="2" charset="-78"/>
+                <a:cs typeface="Amiri" pitchFamily="2" charset="-78"/>
               </a:rPr>
               <a:t>الإِجَابَاتُ وَالتَّعْلِيلُ</a:t>
             </a:r>
@@ -7111,8 +6984,7 @@
                   <a:srgbClr val="8A93A0"/>
                 </a:solidFill>
                 <a:latin typeface="Calibri" pitchFamily="34" charset="0"/>
-                <a:ea typeface="Calibri" pitchFamily="34" charset="-122"/>
-                <a:cs typeface="Calibri" pitchFamily="34" charset="-120"/>
+                <a:cs typeface="Amiri" pitchFamily="2" charset="-78"/>
               </a:rPr>
               <a:t>Miftah Arabic · Progression P6 · IGCSE Bridge · P6-L11</a:t>
             </a:r>
@@ -7209,8 +7081,7 @@
                   <a:srgbClr val="FFFFFF"/>
                 </a:solidFill>
                 <a:latin typeface="Calibri" pitchFamily="34" charset="0"/>
-                <a:ea typeface="Calibri" pitchFamily="34" charset="-122"/>
-                <a:cs typeface="Calibri" pitchFamily="34" charset="-120"/>
+                <a:cs typeface="Amiri" pitchFamily="2" charset="-78"/>
               </a:rPr>
               <a:t>1</a:t>
             </a:r>
@@ -7248,8 +7119,7 @@
                   <a:srgbClr val="1B3B6F"/>
                 </a:solidFill>
                 <a:latin typeface="Calibri" pitchFamily="34" charset="0"/>
-                <a:ea typeface="Calibri" pitchFamily="34" charset="-122"/>
-                <a:cs typeface="Calibri" pitchFamily="34" charset="-120"/>
+                <a:cs typeface="Amiri" pitchFamily="2" charset="-78"/>
               </a:rPr>
               <a:t>Error 1 · subjunctive: </a:t>
             </a:r>
@@ -7261,9 +7131,8 @@
                 <a:solidFill>
                   <a:srgbClr val="1B3B6F"/>
                 </a:solidFill>
-                <a:latin typeface="Amiri" pitchFamily="34" charset="0"/>
-                <a:ea typeface="Amiri" pitchFamily="34" charset="-122"/>
-                <a:cs typeface="Amiri" pitchFamily="34" charset="-120"/>
+                <a:latin typeface="Amiri" pitchFamily="2" charset="-78"/>
+                <a:cs typeface="Amiri" pitchFamily="2" charset="-78"/>
               </a:rPr>
               <a:t>يَنْبَغِي أَنْ</a:t>
             </a:r>
@@ -7276,8 +7145,7 @@
                   <a:srgbClr val="1B3B6F"/>
                 </a:solidFill>
                 <a:latin typeface="Calibri" pitchFamily="34" charset="0"/>
-                <a:ea typeface="Calibri" pitchFamily="34" charset="-122"/>
-                <a:cs typeface="Calibri" pitchFamily="34" charset="-120"/>
+                <a:cs typeface="Amiri" pitchFamily="2" charset="-78"/>
               </a:rPr>
               <a:t> ___ </a:t>
             </a:r>
@@ -7289,9 +7157,8 @@
                 <a:solidFill>
                   <a:srgbClr val="1B3B6F"/>
                 </a:solidFill>
-                <a:latin typeface="Amiri" pitchFamily="34" charset="0"/>
-                <a:ea typeface="Amiri" pitchFamily="34" charset="-122"/>
-                <a:cs typeface="Amiri" pitchFamily="34" charset="-120"/>
+                <a:latin typeface="Amiri" pitchFamily="2" charset="-78"/>
+                <a:cs typeface="Amiri" pitchFamily="2" charset="-78"/>
               </a:rPr>
               <a:t>المَاءَ بِوَفْرَةٍ</a:t>
             </a:r>
@@ -7304,8 +7171,7 @@
                   <a:srgbClr val="1B3B6F"/>
                 </a:solidFill>
                 <a:latin typeface="Calibri" pitchFamily="34" charset="0"/>
-                <a:ea typeface="Calibri" pitchFamily="34" charset="-122"/>
-                <a:cs typeface="Calibri" pitchFamily="34" charset="-120"/>
+                <a:cs typeface="Amiri" pitchFamily="2" charset="-78"/>
               </a:rPr>
               <a:t>.</a:t>
             </a:r>
@@ -7368,8 +7234,7 @@
                   <a:srgbClr val="1B3B6F"/>
                 </a:solidFill>
                 <a:latin typeface="Calibri" pitchFamily="34" charset="0"/>
-                <a:ea typeface="Calibri" pitchFamily="34" charset="-122"/>
-                <a:cs typeface="Calibri" pitchFamily="34" charset="-120"/>
+                <a:cs typeface="Amiri" pitchFamily="2" charset="-78"/>
               </a:rPr>
               <a:t>A</a:t>
             </a:r>
@@ -7406,9 +7271,8 @@
                 <a:solidFill>
                   <a:srgbClr val="9AA1AB"/>
                 </a:solidFill>
-                <a:latin typeface="Amiri" pitchFamily="34" charset="0"/>
-                <a:ea typeface="Amiri" pitchFamily="34" charset="-122"/>
-                <a:cs typeface="Amiri" pitchFamily="34" charset="-120"/>
+                <a:latin typeface="Amiri" pitchFamily="2" charset="-78"/>
+                <a:cs typeface="Amiri" pitchFamily="2" charset="-78"/>
               </a:rPr>
               <a:t>نَشْرَبُ</a:t>
             </a:r>
@@ -7471,8 +7335,7 @@
                   <a:srgbClr val="1B3B6F"/>
                 </a:solidFill>
                 <a:latin typeface="Calibri" pitchFamily="34" charset="0"/>
-                <a:ea typeface="Calibri" pitchFamily="34" charset="-122"/>
-                <a:cs typeface="Calibri" pitchFamily="34" charset="-120"/>
+                <a:cs typeface="Amiri" pitchFamily="2" charset="-78"/>
               </a:rPr>
               <a:t>B</a:t>
             </a:r>
@@ -7509,9 +7372,8 @@
                 <a:solidFill>
                   <a:srgbClr val="9AA1AB"/>
                 </a:solidFill>
-                <a:latin typeface="Amiri" pitchFamily="34" charset="0"/>
-                <a:ea typeface="Amiri" pitchFamily="34" charset="-122"/>
-                <a:cs typeface="Amiri" pitchFamily="34" charset="-120"/>
+                <a:latin typeface="Amiri" pitchFamily="2" charset="-78"/>
+                <a:cs typeface="Amiri" pitchFamily="2" charset="-78"/>
               </a:rPr>
               <a:t>نَشْرَبِ</a:t>
             </a:r>
@@ -7601,8 +7463,7 @@
                   <a:srgbClr val="FFFFFF"/>
                 </a:solidFill>
                 <a:latin typeface="Calibri" pitchFamily="34" charset="0"/>
-                <a:ea typeface="Calibri" pitchFamily="34" charset="-122"/>
-                <a:cs typeface="Calibri" pitchFamily="34" charset="-120"/>
+                <a:cs typeface="Amiri" pitchFamily="2" charset="-78"/>
               </a:rPr>
               <a:t>C</a:t>
             </a:r>
@@ -7639,9 +7500,8 @@
                 <a:solidFill>
                   <a:srgbClr val="1F2A37"/>
                 </a:solidFill>
-                <a:latin typeface="Amiri" pitchFamily="34" charset="0"/>
-                <a:ea typeface="Amiri" pitchFamily="34" charset="-122"/>
-                <a:cs typeface="Amiri" pitchFamily="34" charset="-120"/>
+                <a:latin typeface="Amiri" pitchFamily="2" charset="-78"/>
+                <a:cs typeface="Amiri" pitchFamily="2" charset="-78"/>
               </a:rPr>
               <a:t>نَشْرَبَ</a:t>
             </a:r>
@@ -7679,8 +7539,7 @@
                   <a:srgbClr val="8A6D1E"/>
                 </a:solidFill>
                 <a:latin typeface="Calibri" pitchFamily="34" charset="0"/>
-                <a:ea typeface="Calibri" pitchFamily="34" charset="-122"/>
-                <a:cs typeface="Calibri" pitchFamily="34" charset="-120"/>
+                <a:cs typeface="Amiri" pitchFamily="2" charset="-78"/>
               </a:rPr>
               <a:t>an + subjunctive: nashraba.</a:t>
             </a:r>
@@ -7777,8 +7636,7 @@
                   <a:srgbClr val="FFFFFF"/>
                 </a:solidFill>
                 <a:latin typeface="Calibri" pitchFamily="34" charset="0"/>
-                <a:ea typeface="Calibri" pitchFamily="34" charset="-122"/>
-                <a:cs typeface="Calibri" pitchFamily="34" charset="-120"/>
+                <a:cs typeface="Amiri" pitchFamily="2" charset="-78"/>
               </a:rPr>
               <a:t>2</a:t>
             </a:r>
@@ -7816,8 +7674,7 @@
                   <a:srgbClr val="1B3B6F"/>
                 </a:solidFill>
                 <a:latin typeface="Calibri" pitchFamily="34" charset="0"/>
-                <a:ea typeface="Calibri" pitchFamily="34" charset="-122"/>
-                <a:cs typeface="Calibri" pitchFamily="34" charset="-120"/>
+                <a:cs typeface="Amiri" pitchFamily="2" charset="-78"/>
               </a:rPr>
               <a:t>Error 1 · purpose: </a:t>
             </a:r>
@@ -7829,9 +7686,8 @@
                 <a:solidFill>
                   <a:srgbClr val="1B3B6F"/>
                 </a:solidFill>
-                <a:latin typeface="Amiri" pitchFamily="34" charset="0"/>
-                <a:ea typeface="Amiri" pitchFamily="34" charset="-122"/>
-                <a:cs typeface="Amiri" pitchFamily="34" charset="-120"/>
+                <a:latin typeface="Amiri" pitchFamily="2" charset="-78"/>
+                <a:cs typeface="Amiri" pitchFamily="2" charset="-78"/>
               </a:rPr>
               <a:t>أُطْلِقَ بَرْنَامَجٌ لِكَيْ</a:t>
             </a:r>
@@ -7844,8 +7700,7 @@
                   <a:srgbClr val="1B3B6F"/>
                 </a:solidFill>
                 <a:latin typeface="Calibri" pitchFamily="34" charset="0"/>
-                <a:ea typeface="Calibri" pitchFamily="34" charset="-122"/>
-                <a:cs typeface="Calibri" pitchFamily="34" charset="-120"/>
+                <a:cs typeface="Amiri" pitchFamily="2" charset="-78"/>
               </a:rPr>
               <a:t> ___ </a:t>
             </a:r>
@@ -7857,9 +7712,8 @@
                 <a:solidFill>
                   <a:srgbClr val="1B3B6F"/>
                 </a:solidFill>
-                <a:latin typeface="Amiri" pitchFamily="34" charset="0"/>
-                <a:ea typeface="Amiri" pitchFamily="34" charset="-122"/>
-                <a:cs typeface="Amiri" pitchFamily="34" charset="-120"/>
+                <a:latin typeface="Amiri" pitchFamily="2" charset="-78"/>
+                <a:cs typeface="Amiri" pitchFamily="2" charset="-78"/>
               </a:rPr>
               <a:t>الشَّبَابَ</a:t>
             </a:r>
@@ -7872,8 +7726,7 @@
                   <a:srgbClr val="1B3B6F"/>
                 </a:solidFill>
                 <a:latin typeface="Calibri" pitchFamily="34" charset="0"/>
-                <a:ea typeface="Calibri" pitchFamily="34" charset="-122"/>
-                <a:cs typeface="Calibri" pitchFamily="34" charset="-120"/>
+                <a:cs typeface="Amiri" pitchFamily="2" charset="-78"/>
               </a:rPr>
               <a:t>.</a:t>
             </a:r>
@@ -7963,8 +7816,7 @@
                   <a:srgbClr val="FFFFFF"/>
                 </a:solidFill>
                 <a:latin typeface="Calibri" pitchFamily="34" charset="0"/>
-                <a:ea typeface="Calibri" pitchFamily="34" charset="-122"/>
-                <a:cs typeface="Calibri" pitchFamily="34" charset="-120"/>
+                <a:cs typeface="Amiri" pitchFamily="2" charset="-78"/>
               </a:rPr>
               <a:t>A</a:t>
             </a:r>
@@ -8001,9 +7853,8 @@
                 <a:solidFill>
                   <a:srgbClr val="1F2A37"/>
                 </a:solidFill>
-                <a:latin typeface="Amiri" pitchFamily="34" charset="0"/>
-                <a:ea typeface="Amiri" pitchFamily="34" charset="-122"/>
-                <a:cs typeface="Amiri" pitchFamily="34" charset="-120"/>
+                <a:latin typeface="Amiri" pitchFamily="2" charset="-78"/>
+                <a:cs typeface="Amiri" pitchFamily="2" charset="-78"/>
               </a:rPr>
               <a:t>يُسَاعِدَ</a:t>
             </a:r>
@@ -8066,8 +7917,7 @@
                   <a:srgbClr val="1B3B6F"/>
                 </a:solidFill>
                 <a:latin typeface="Calibri" pitchFamily="34" charset="0"/>
-                <a:ea typeface="Calibri" pitchFamily="34" charset="-122"/>
-                <a:cs typeface="Calibri" pitchFamily="34" charset="-120"/>
+                <a:cs typeface="Amiri" pitchFamily="2" charset="-78"/>
               </a:rPr>
               <a:t>B</a:t>
             </a:r>
@@ -8104,9 +7954,8 @@
                 <a:solidFill>
                   <a:srgbClr val="9AA1AB"/>
                 </a:solidFill>
-                <a:latin typeface="Amiri" pitchFamily="34" charset="0"/>
-                <a:ea typeface="Amiri" pitchFamily="34" charset="-122"/>
-                <a:cs typeface="Amiri" pitchFamily="34" charset="-120"/>
+                <a:latin typeface="Amiri" pitchFamily="2" charset="-78"/>
+                <a:cs typeface="Amiri" pitchFamily="2" charset="-78"/>
               </a:rPr>
               <a:t>يُسَاعِدُ</a:t>
             </a:r>
@@ -8169,8 +8018,7 @@
                   <a:srgbClr val="1B3B6F"/>
                 </a:solidFill>
                 <a:latin typeface="Calibri" pitchFamily="34" charset="0"/>
-                <a:ea typeface="Calibri" pitchFamily="34" charset="-122"/>
-                <a:cs typeface="Calibri" pitchFamily="34" charset="-120"/>
+                <a:cs typeface="Amiri" pitchFamily="2" charset="-78"/>
               </a:rPr>
               <a:t>C</a:t>
             </a:r>
@@ -8207,9 +8055,8 @@
                 <a:solidFill>
                   <a:srgbClr val="9AA1AB"/>
                 </a:solidFill>
-                <a:latin typeface="Amiri" pitchFamily="34" charset="0"/>
-                <a:ea typeface="Amiri" pitchFamily="34" charset="-122"/>
-                <a:cs typeface="Amiri" pitchFamily="34" charset="-120"/>
+                <a:latin typeface="Amiri" pitchFamily="2" charset="-78"/>
+                <a:cs typeface="Amiri" pitchFamily="2" charset="-78"/>
               </a:rPr>
               <a:t>سَاعَدَ</a:t>
             </a:r>
@@ -8247,8 +8094,7 @@
                   <a:srgbClr val="8A6D1E"/>
                 </a:solidFill>
                 <a:latin typeface="Calibri" pitchFamily="34" charset="0"/>
-                <a:ea typeface="Calibri" pitchFamily="34" charset="-122"/>
-                <a:cs typeface="Calibri" pitchFamily="34" charset="-120"/>
+                <a:cs typeface="Amiri" pitchFamily="2" charset="-78"/>
               </a:rPr>
               <a:t>likay + subjunctive: yusāʿida.</a:t>
             </a:r>
@@ -8345,8 +8191,7 @@
                   <a:srgbClr val="FFFFFF"/>
                 </a:solidFill>
                 <a:latin typeface="Calibri" pitchFamily="34" charset="0"/>
-                <a:ea typeface="Calibri" pitchFamily="34" charset="-122"/>
-                <a:cs typeface="Calibri" pitchFamily="34" charset="-120"/>
+                <a:cs typeface="Amiri" pitchFamily="2" charset="-78"/>
               </a:rPr>
               <a:t>3</a:t>
             </a:r>
@@ -8384,8 +8229,7 @@
                   <a:srgbClr val="1B3B6F"/>
                 </a:solidFill>
                 <a:latin typeface="Calibri" pitchFamily="34" charset="0"/>
-                <a:ea typeface="Calibri" pitchFamily="34" charset="-122"/>
-                <a:cs typeface="Calibri" pitchFamily="34" charset="-120"/>
+                <a:cs typeface="Amiri" pitchFamily="2" charset="-78"/>
               </a:rPr>
               <a:t>Error 2 · Type 2: </a:t>
             </a:r>
@@ -8397,9 +8241,8 @@
                 <a:solidFill>
                   <a:srgbClr val="1B3B6F"/>
                 </a:solidFill>
-                <a:latin typeface="Amiri" pitchFamily="34" charset="0"/>
-                <a:ea typeface="Amiri" pitchFamily="34" charset="-122"/>
-                <a:cs typeface="Amiri" pitchFamily="34" charset="-120"/>
+                <a:latin typeface="Amiri" pitchFamily="2" charset="-78"/>
+                <a:cs typeface="Amiri" pitchFamily="2" charset="-78"/>
               </a:rPr>
               <a:t>لَوْ قَرَأْتُ أَكْثَرَ،</a:t>
             </a:r>
@@ -8412,8 +8255,7 @@
                   <a:srgbClr val="1B3B6F"/>
                 </a:solidFill>
                 <a:latin typeface="Calibri" pitchFamily="34" charset="0"/>
-                <a:ea typeface="Calibri" pitchFamily="34" charset="-122"/>
-                <a:cs typeface="Calibri" pitchFamily="34" charset="-120"/>
+                <a:cs typeface="Amiri" pitchFamily="2" charset="-78"/>
               </a:rPr>
               <a:t> ___ </a:t>
             </a:r>
@@ -8425,9 +8267,8 @@
                 <a:solidFill>
                   <a:srgbClr val="1B3B6F"/>
                 </a:solidFill>
-                <a:latin typeface="Amiri" pitchFamily="34" charset="0"/>
-                <a:ea typeface="Amiri" pitchFamily="34" charset="-122"/>
-                <a:cs typeface="Amiri" pitchFamily="34" charset="-120"/>
+                <a:latin typeface="Amiri" pitchFamily="2" charset="-78"/>
+                <a:cs typeface="Amiri" pitchFamily="2" charset="-78"/>
               </a:rPr>
               <a:t>مُفْرَدَاتِي</a:t>
             </a:r>
@@ -8440,8 +8281,7 @@
                   <a:srgbClr val="1B3B6F"/>
                 </a:solidFill>
                 <a:latin typeface="Calibri" pitchFamily="34" charset="0"/>
-                <a:ea typeface="Calibri" pitchFamily="34" charset="-122"/>
-                <a:cs typeface="Calibri" pitchFamily="34" charset="-120"/>
+                <a:cs typeface="Amiri" pitchFamily="2" charset="-78"/>
               </a:rPr>
               <a:t>.</a:t>
             </a:r>
@@ -8504,8 +8344,7 @@
                   <a:srgbClr val="1B3B6F"/>
                 </a:solidFill>
                 <a:latin typeface="Calibri" pitchFamily="34" charset="0"/>
-                <a:ea typeface="Calibri" pitchFamily="34" charset="-122"/>
-                <a:cs typeface="Calibri" pitchFamily="34" charset="-120"/>
+                <a:cs typeface="Amiri" pitchFamily="2" charset="-78"/>
               </a:rPr>
               <a:t>A</a:t>
             </a:r>
@@ -8542,9 +8381,8 @@
                 <a:solidFill>
                   <a:srgbClr val="9AA1AB"/>
                 </a:solidFill>
-                <a:latin typeface="Amiri" pitchFamily="34" charset="0"/>
-                <a:ea typeface="Amiri" pitchFamily="34" charset="-122"/>
-                <a:cs typeface="Amiri" pitchFamily="34" charset="-120"/>
+                <a:latin typeface="Amiri" pitchFamily="2" charset="-78"/>
+                <a:cs typeface="Amiri" pitchFamily="2" charset="-78"/>
               </a:rPr>
               <a:t>زَادَتْ</a:t>
             </a:r>
@@ -8634,8 +8472,7 @@
                   <a:srgbClr val="FFFFFF"/>
                 </a:solidFill>
                 <a:latin typeface="Calibri" pitchFamily="34" charset="0"/>
-                <a:ea typeface="Calibri" pitchFamily="34" charset="-122"/>
-                <a:cs typeface="Calibri" pitchFamily="34" charset="-120"/>
+                <a:cs typeface="Amiri" pitchFamily="2" charset="-78"/>
               </a:rPr>
               <a:t>B</a:t>
             </a:r>
@@ -8672,9 +8509,8 @@
                 <a:solidFill>
                   <a:srgbClr val="1F2A37"/>
                 </a:solidFill>
-                <a:latin typeface="Amiri" pitchFamily="34" charset="0"/>
-                <a:ea typeface="Amiri" pitchFamily="34" charset="-122"/>
-                <a:cs typeface="Amiri" pitchFamily="34" charset="-120"/>
+                <a:latin typeface="Amiri" pitchFamily="2" charset="-78"/>
+                <a:cs typeface="Amiri" pitchFamily="2" charset="-78"/>
               </a:rPr>
               <a:t>لَزَادَتْ</a:t>
             </a:r>
@@ -8737,8 +8573,7 @@
                   <a:srgbClr val="1B3B6F"/>
                 </a:solidFill>
                 <a:latin typeface="Calibri" pitchFamily="34" charset="0"/>
-                <a:ea typeface="Calibri" pitchFamily="34" charset="-122"/>
-                <a:cs typeface="Calibri" pitchFamily="34" charset="-120"/>
+                <a:cs typeface="Amiri" pitchFamily="2" charset="-78"/>
               </a:rPr>
               <a:t>C</a:t>
             </a:r>
@@ -8775,9 +8610,8 @@
                 <a:solidFill>
                   <a:srgbClr val="9AA1AB"/>
                 </a:solidFill>
-                <a:latin typeface="Amiri" pitchFamily="34" charset="0"/>
-                <a:ea typeface="Amiri" pitchFamily="34" charset="-122"/>
-                <a:cs typeface="Amiri" pitchFamily="34" charset="-120"/>
+                <a:latin typeface="Amiri" pitchFamily="2" charset="-78"/>
+                <a:cs typeface="Amiri" pitchFamily="2" charset="-78"/>
               </a:rPr>
               <a:t>سَتَزِيدُ</a:t>
             </a:r>
@@ -8815,8 +8649,7 @@
                   <a:srgbClr val="8A6D1E"/>
                 </a:solidFill>
                 <a:latin typeface="Calibri" pitchFamily="34" charset="0"/>
-                <a:ea typeface="Calibri" pitchFamily="34" charset="-122"/>
-                <a:cs typeface="Calibri" pitchFamily="34" charset="-120"/>
+                <a:cs typeface="Amiri" pitchFamily="2" charset="-78"/>
               </a:rPr>
               <a:t>lau + past → la- + past.</a:t>
             </a:r>
@@ -8913,8 +8746,7 @@
                   <a:srgbClr val="FFFFFF"/>
                 </a:solidFill>
                 <a:latin typeface="Calibri" pitchFamily="34" charset="0"/>
-                <a:ea typeface="Calibri" pitchFamily="34" charset="-122"/>
-                <a:cs typeface="Calibri" pitchFamily="34" charset="-120"/>
+                <a:cs typeface="Amiri" pitchFamily="2" charset="-78"/>
               </a:rPr>
               <a:t>4</a:t>
             </a:r>
@@ -8952,8 +8784,7 @@
                   <a:srgbClr val="1B3B6F"/>
                 </a:solidFill>
                 <a:latin typeface="Calibri" pitchFamily="34" charset="0"/>
-                <a:ea typeface="Calibri" pitchFamily="34" charset="-122"/>
-                <a:cs typeface="Calibri" pitchFamily="34" charset="-120"/>
+                <a:cs typeface="Amiri" pitchFamily="2" charset="-78"/>
               </a:rPr>
               <a:t>Error 3 · reported fact: </a:t>
             </a:r>
@@ -8965,9 +8796,8 @@
                 <a:solidFill>
                   <a:srgbClr val="1B3B6F"/>
                 </a:solidFill>
-                <a:latin typeface="Amiri" pitchFamily="34" charset="0"/>
-                <a:ea typeface="Amiri" pitchFamily="34" charset="-122"/>
-                <a:cs typeface="Amiri" pitchFamily="34" charset="-120"/>
+                <a:latin typeface="Amiri" pitchFamily="2" charset="-78"/>
+                <a:cs typeface="Amiri" pitchFamily="2" charset="-78"/>
               </a:rPr>
               <a:t>أَكَّدَ المُعَلِّمُ</a:t>
             </a:r>
@@ -8980,8 +8810,7 @@
                   <a:srgbClr val="1B3B6F"/>
                 </a:solidFill>
                 <a:latin typeface="Calibri" pitchFamily="34" charset="0"/>
-                <a:ea typeface="Calibri" pitchFamily="34" charset="-122"/>
-                <a:cs typeface="Calibri" pitchFamily="34" charset="-120"/>
+                <a:cs typeface="Amiri" pitchFamily="2" charset="-78"/>
               </a:rPr>
               <a:t> ___ </a:t>
             </a:r>
@@ -8993,9 +8822,8 @@
                 <a:solidFill>
                   <a:srgbClr val="1B3B6F"/>
                 </a:solidFill>
-                <a:latin typeface="Amiri" pitchFamily="34" charset="0"/>
-                <a:ea typeface="Amiri" pitchFamily="34" charset="-122"/>
-                <a:cs typeface="Amiri" pitchFamily="34" charset="-120"/>
+                <a:latin typeface="Amiri" pitchFamily="2" charset="-78"/>
+                <a:cs typeface="Amiri" pitchFamily="2" charset="-78"/>
               </a:rPr>
               <a:t>الامْتِحَانَ قَرِيبٌ</a:t>
             </a:r>
@@ -9008,8 +8836,7 @@
                   <a:srgbClr val="1B3B6F"/>
                 </a:solidFill>
                 <a:latin typeface="Calibri" pitchFamily="34" charset="0"/>
-                <a:ea typeface="Calibri" pitchFamily="34" charset="-122"/>
-                <a:cs typeface="Calibri" pitchFamily="34" charset="-120"/>
+                <a:cs typeface="Amiri" pitchFamily="2" charset="-78"/>
               </a:rPr>
               <a:t>.</a:t>
             </a:r>
@@ -9099,8 +8926,7 @@
                   <a:srgbClr val="FFFFFF"/>
                 </a:solidFill>
                 <a:latin typeface="Calibri" pitchFamily="34" charset="0"/>
-                <a:ea typeface="Calibri" pitchFamily="34" charset="-122"/>
-                <a:cs typeface="Calibri" pitchFamily="34" charset="-120"/>
+                <a:cs typeface="Amiri" pitchFamily="2" charset="-78"/>
               </a:rPr>
               <a:t>A</a:t>
             </a:r>
@@ -9137,9 +8963,8 @@
                 <a:solidFill>
                   <a:srgbClr val="1F2A37"/>
                 </a:solidFill>
-                <a:latin typeface="Amiri" pitchFamily="34" charset="0"/>
-                <a:ea typeface="Amiri" pitchFamily="34" charset="-122"/>
-                <a:cs typeface="Amiri" pitchFamily="34" charset="-120"/>
+                <a:latin typeface="Amiri" pitchFamily="2" charset="-78"/>
+                <a:cs typeface="Amiri" pitchFamily="2" charset="-78"/>
               </a:rPr>
               <a:t>أَنَّ</a:t>
             </a:r>
@@ -9202,8 +9027,7 @@
                   <a:srgbClr val="1B3B6F"/>
                 </a:solidFill>
                 <a:latin typeface="Calibri" pitchFamily="34" charset="0"/>
-                <a:ea typeface="Calibri" pitchFamily="34" charset="-122"/>
-                <a:cs typeface="Calibri" pitchFamily="34" charset="-120"/>
+                <a:cs typeface="Amiri" pitchFamily="2" charset="-78"/>
               </a:rPr>
               <a:t>B</a:t>
             </a:r>
@@ -9240,9 +9064,8 @@
                 <a:solidFill>
                   <a:srgbClr val="9AA1AB"/>
                 </a:solidFill>
-                <a:latin typeface="Amiri" pitchFamily="34" charset="0"/>
-                <a:ea typeface="Amiri" pitchFamily="34" charset="-122"/>
-                <a:cs typeface="Amiri" pitchFamily="34" charset="-120"/>
+                <a:latin typeface="Amiri" pitchFamily="2" charset="-78"/>
+                <a:cs typeface="Amiri" pitchFamily="2" charset="-78"/>
               </a:rPr>
               <a:t>أَنْ</a:t>
             </a:r>
@@ -9305,8 +9128,7 @@
                   <a:srgbClr val="1B3B6F"/>
                 </a:solidFill>
                 <a:latin typeface="Calibri" pitchFamily="34" charset="0"/>
-                <a:ea typeface="Calibri" pitchFamily="34" charset="-122"/>
-                <a:cs typeface="Calibri" pitchFamily="34" charset="-120"/>
+                <a:cs typeface="Amiri" pitchFamily="2" charset="-78"/>
               </a:rPr>
               <a:t>C</a:t>
             </a:r>
@@ -9343,9 +9165,8 @@
                 <a:solidFill>
                   <a:srgbClr val="9AA1AB"/>
                 </a:solidFill>
-                <a:latin typeface="Amiri" pitchFamily="34" charset="0"/>
-                <a:ea typeface="Amiri" pitchFamily="34" charset="-122"/>
-                <a:cs typeface="Amiri" pitchFamily="34" charset="-120"/>
+                <a:latin typeface="Amiri" pitchFamily="2" charset="-78"/>
+                <a:cs typeface="Amiri" pitchFamily="2" charset="-78"/>
               </a:rPr>
               <a:t>لِكَيْ</a:t>
             </a:r>
@@ -9383,8 +9204,7 @@
                   <a:srgbClr val="8A6D1E"/>
                 </a:solidFill>
                 <a:latin typeface="Calibri" pitchFamily="34" charset="0"/>
-                <a:ea typeface="Calibri" pitchFamily="34" charset="-122"/>
-                <a:cs typeface="Calibri" pitchFamily="34" charset="-120"/>
+                <a:cs typeface="Amiri" pitchFamily="2" charset="-78"/>
               </a:rPr>
               <a:t>A reported fact: anna + noun.</a:t>
             </a:r>
@@ -9481,8 +9301,7 @@
                   <a:srgbClr val="FFFFFF"/>
                 </a:solidFill>
                 <a:latin typeface="Calibri" pitchFamily="34" charset="0"/>
-                <a:ea typeface="Calibri" pitchFamily="34" charset="-122"/>
-                <a:cs typeface="Calibri" pitchFamily="34" charset="-120"/>
+                <a:cs typeface="Amiri" pitchFamily="2" charset="-78"/>
               </a:rPr>
               <a:t>5</a:t>
             </a:r>
@@ -9520,8 +9339,7 @@
                   <a:srgbClr val="1B3B6F"/>
                 </a:solidFill>
                 <a:latin typeface="Calibri" pitchFamily="34" charset="0"/>
-                <a:ea typeface="Calibri" pitchFamily="34" charset="-122"/>
-                <a:cs typeface="Calibri" pitchFamily="34" charset="-120"/>
+                <a:cs typeface="Amiri" pitchFamily="2" charset="-78"/>
               </a:rPr>
               <a:t>Error 3 · concession: </a:t>
             </a:r>
@@ -9533,9 +9351,8 @@
                 <a:solidFill>
                   <a:srgbClr val="1B3B6F"/>
                 </a:solidFill>
-                <a:latin typeface="Amiri" pitchFamily="34" charset="0"/>
-                <a:ea typeface="Amiri" pitchFamily="34" charset="-122"/>
-                <a:cs typeface="Amiri" pitchFamily="34" charset="-120"/>
+                <a:latin typeface="Amiri" pitchFamily="2" charset="-78"/>
+                <a:cs typeface="Amiri" pitchFamily="2" charset="-78"/>
               </a:rPr>
               <a:t>صَحِيحٌ أَنَّ التِّقْنِيَّةَ</a:t>
             </a:r>
@@ -9548,8 +9365,7 @@
                   <a:srgbClr val="1B3B6F"/>
                 </a:solidFill>
                 <a:latin typeface="Calibri" pitchFamily="34" charset="0"/>
-                <a:ea typeface="Calibri" pitchFamily="34" charset="-122"/>
-                <a:cs typeface="Calibri" pitchFamily="34" charset="-120"/>
+                <a:cs typeface="Amiri" pitchFamily="2" charset="-78"/>
               </a:rPr>
               <a:t> ___ </a:t>
             </a:r>
@@ -9561,9 +9377,8 @@
                 <a:solidFill>
                   <a:srgbClr val="1B3B6F"/>
                 </a:solidFill>
-                <a:latin typeface="Amiri" pitchFamily="34" charset="0"/>
-                <a:ea typeface="Amiri" pitchFamily="34" charset="-122"/>
-                <a:cs typeface="Amiri" pitchFamily="34" charset="-120"/>
+                <a:latin typeface="Amiri" pitchFamily="2" charset="-78"/>
+                <a:cs typeface="Amiri" pitchFamily="2" charset="-78"/>
               </a:rPr>
               <a:t>البَعِيدَ</a:t>
             </a:r>
@@ -9576,8 +9391,7 @@
                   <a:srgbClr val="1B3B6F"/>
                 </a:solidFill>
                 <a:latin typeface="Calibri" pitchFamily="34" charset="0"/>
-                <a:ea typeface="Calibri" pitchFamily="34" charset="-122"/>
-                <a:cs typeface="Calibri" pitchFamily="34" charset="-120"/>
+                <a:cs typeface="Amiri" pitchFamily="2" charset="-78"/>
               </a:rPr>
               <a:t>.</a:t>
             </a:r>
@@ -9640,8 +9454,7 @@
                   <a:srgbClr val="1B3B6F"/>
                 </a:solidFill>
                 <a:latin typeface="Calibri" pitchFamily="34" charset="0"/>
-                <a:ea typeface="Calibri" pitchFamily="34" charset="-122"/>
-                <a:cs typeface="Calibri" pitchFamily="34" charset="-120"/>
+                <a:cs typeface="Amiri" pitchFamily="2" charset="-78"/>
               </a:rPr>
               <a:t>A</a:t>
             </a:r>
@@ -9678,9 +9491,8 @@
                 <a:solidFill>
                   <a:srgbClr val="9AA1AB"/>
                 </a:solidFill>
-                <a:latin typeface="Amiri" pitchFamily="34" charset="0"/>
-                <a:ea typeface="Amiri" pitchFamily="34" charset="-122"/>
-                <a:cs typeface="Amiri" pitchFamily="34" charset="-120"/>
+                <a:latin typeface="Amiri" pitchFamily="2" charset="-78"/>
+                <a:cs typeface="Amiri" pitchFamily="2" charset="-78"/>
               </a:rPr>
               <a:t>تُقَرِّبَ</a:t>
             </a:r>
@@ -9743,8 +9555,7 @@
                   <a:srgbClr val="1B3B6F"/>
                 </a:solidFill>
                 <a:latin typeface="Calibri" pitchFamily="34" charset="0"/>
-                <a:ea typeface="Calibri" pitchFamily="34" charset="-122"/>
-                <a:cs typeface="Calibri" pitchFamily="34" charset="-120"/>
+                <a:cs typeface="Amiri" pitchFamily="2" charset="-78"/>
               </a:rPr>
               <a:t>B</a:t>
             </a:r>
@@ -9781,9 +9592,8 @@
                 <a:solidFill>
                   <a:srgbClr val="9AA1AB"/>
                 </a:solidFill>
-                <a:latin typeface="Amiri" pitchFamily="34" charset="0"/>
-                <a:ea typeface="Amiri" pitchFamily="34" charset="-122"/>
-                <a:cs typeface="Amiri" pitchFamily="34" charset="-120"/>
+                <a:latin typeface="Amiri" pitchFamily="2" charset="-78"/>
+                <a:cs typeface="Amiri" pitchFamily="2" charset="-78"/>
               </a:rPr>
               <a:t>لَقَرَّبَتْ</a:t>
             </a:r>
@@ -9873,8 +9683,7 @@
                   <a:srgbClr val="FFFFFF"/>
                 </a:solidFill>
                 <a:latin typeface="Calibri" pitchFamily="34" charset="0"/>
-                <a:ea typeface="Calibri" pitchFamily="34" charset="-122"/>
-                <a:cs typeface="Calibri" pitchFamily="34" charset="-120"/>
+                <a:cs typeface="Amiri" pitchFamily="2" charset="-78"/>
               </a:rPr>
               <a:t>C</a:t>
             </a:r>
@@ -9911,9 +9720,8 @@
                 <a:solidFill>
                   <a:srgbClr val="1F2A37"/>
                 </a:solidFill>
-                <a:latin typeface="Amiri" pitchFamily="34" charset="0"/>
-                <a:ea typeface="Amiri" pitchFamily="34" charset="-122"/>
-                <a:cs typeface="Amiri" pitchFamily="34" charset="-120"/>
+                <a:latin typeface="Amiri" pitchFamily="2" charset="-78"/>
+                <a:cs typeface="Amiri" pitchFamily="2" charset="-78"/>
               </a:rPr>
               <a:t>تُقَرِّبُ</a:t>
             </a:r>
@@ -9951,8 +9759,7 @@
                   <a:srgbClr val="8A6D1E"/>
                 </a:solidFill>
                 <a:latin typeface="Calibri" pitchFamily="34" charset="0"/>
-                <a:ea typeface="Calibri" pitchFamily="34" charset="-122"/>
-                <a:cs typeface="Calibri" pitchFamily="34" charset="-120"/>
+                <a:cs typeface="Amiri" pitchFamily="2" charset="-78"/>
               </a:rPr>
               <a:t>ṣaḥīḥun anna + indicative: tuqarribu.</a:t>
             </a:r>
@@ -10049,8 +9856,7 @@
                   <a:srgbClr val="FFFFFF"/>
                 </a:solidFill>
                 <a:latin typeface="Calibri" pitchFamily="34" charset="0"/>
-                <a:ea typeface="Calibri" pitchFamily="34" charset="-122"/>
-                <a:cs typeface="Calibri" pitchFamily="34" charset="-120"/>
+                <a:cs typeface="Amiri" pitchFamily="2" charset="-78"/>
               </a:rPr>
               <a:t>6</a:t>
             </a:r>
@@ -10088,8 +9894,7 @@
                   <a:srgbClr val="1B3B6F"/>
                 </a:solidFill>
                 <a:latin typeface="Calibri" pitchFamily="34" charset="0"/>
-                <a:ea typeface="Calibri" pitchFamily="34" charset="-122"/>
-                <a:cs typeface="Calibri" pitchFamily="34" charset="-120"/>
+                <a:cs typeface="Amiri" pitchFamily="2" charset="-78"/>
               </a:rPr>
               <a:t>Passive agreement: </a:t>
             </a:r>
@@ -10101,9 +9906,8 @@
                 <a:solidFill>
                   <a:srgbClr val="1B3B6F"/>
                 </a:solidFill>
-                <a:latin typeface="Amiri" pitchFamily="34" charset="0"/>
-                <a:ea typeface="Amiri" pitchFamily="34" charset="-122"/>
-                <a:cs typeface="Amiri" pitchFamily="34" charset="-120"/>
+                <a:latin typeface="Amiri" pitchFamily="2" charset="-78"/>
+                <a:cs typeface="Amiri" pitchFamily="2" charset="-78"/>
               </a:rPr>
               <a:t>الرِّسَالَةُ</a:t>
             </a:r>
@@ -10116,8 +9920,7 @@
                   <a:srgbClr val="1B3B6F"/>
                 </a:solidFill>
                 <a:latin typeface="Calibri" pitchFamily="34" charset="0"/>
-                <a:ea typeface="Calibri" pitchFamily="34" charset="-122"/>
-                <a:cs typeface="Calibri" pitchFamily="34" charset="-120"/>
+                <a:cs typeface="Amiri" pitchFamily="2" charset="-78"/>
               </a:rPr>
               <a:t> ___ </a:t>
             </a:r>
@@ -10129,9 +9932,8 @@
                 <a:solidFill>
                   <a:srgbClr val="1B3B6F"/>
                 </a:solidFill>
-                <a:latin typeface="Amiri" pitchFamily="34" charset="0"/>
-                <a:ea typeface="Amiri" pitchFamily="34" charset="-122"/>
-                <a:cs typeface="Amiri" pitchFamily="34" charset="-120"/>
+                <a:latin typeface="Amiri" pitchFamily="2" charset="-78"/>
+                <a:cs typeface="Amiri" pitchFamily="2" charset="-78"/>
               </a:rPr>
               <a:t>أَمْسِ</a:t>
             </a:r>
@@ -10144,8 +9946,7 @@
                   <a:srgbClr val="1B3B6F"/>
                 </a:solidFill>
                 <a:latin typeface="Calibri" pitchFamily="34" charset="0"/>
-                <a:ea typeface="Calibri" pitchFamily="34" charset="-122"/>
-                <a:cs typeface="Calibri" pitchFamily="34" charset="-120"/>
+                <a:cs typeface="Amiri" pitchFamily="2" charset="-78"/>
               </a:rPr>
               <a:t>.</a:t>
             </a:r>
@@ -10208,8 +10009,7 @@
                   <a:srgbClr val="1B3B6F"/>
                 </a:solidFill>
                 <a:latin typeface="Calibri" pitchFamily="34" charset="0"/>
-                <a:ea typeface="Calibri" pitchFamily="34" charset="-122"/>
-                <a:cs typeface="Calibri" pitchFamily="34" charset="-120"/>
+                <a:cs typeface="Amiri" pitchFamily="2" charset="-78"/>
               </a:rPr>
               <a:t>A</a:t>
             </a:r>
@@ -10246,9 +10046,8 @@
                 <a:solidFill>
                   <a:srgbClr val="9AA1AB"/>
                 </a:solidFill>
-                <a:latin typeface="Amiri" pitchFamily="34" charset="0"/>
-                <a:ea typeface="Amiri" pitchFamily="34" charset="-122"/>
-                <a:cs typeface="Amiri" pitchFamily="34" charset="-120"/>
+                <a:latin typeface="Amiri" pitchFamily="2" charset="-78"/>
+                <a:cs typeface="Amiri" pitchFamily="2" charset="-78"/>
               </a:rPr>
               <a:t>كُتِبَ</a:t>
             </a:r>
@@ -10338,8 +10137,7 @@
                   <a:srgbClr val="FFFFFF"/>
                 </a:solidFill>
                 <a:latin typeface="Calibri" pitchFamily="34" charset="0"/>
-                <a:ea typeface="Calibri" pitchFamily="34" charset="-122"/>
-                <a:cs typeface="Calibri" pitchFamily="34" charset="-120"/>
+                <a:cs typeface="Amiri" pitchFamily="2" charset="-78"/>
               </a:rPr>
               <a:t>B</a:t>
             </a:r>
@@ -10376,9 +10174,8 @@
                 <a:solidFill>
                   <a:srgbClr val="1F2A37"/>
                 </a:solidFill>
-                <a:latin typeface="Amiri" pitchFamily="34" charset="0"/>
-                <a:ea typeface="Amiri" pitchFamily="34" charset="-122"/>
-                <a:cs typeface="Amiri" pitchFamily="34" charset="-120"/>
+                <a:latin typeface="Amiri" pitchFamily="2" charset="-78"/>
+                <a:cs typeface="Amiri" pitchFamily="2" charset="-78"/>
               </a:rPr>
               <a:t>كُتِبَتْ</a:t>
             </a:r>
@@ -10441,8 +10238,7 @@
                   <a:srgbClr val="1B3B6F"/>
                 </a:solidFill>
                 <a:latin typeface="Calibri" pitchFamily="34" charset="0"/>
-                <a:ea typeface="Calibri" pitchFamily="34" charset="-122"/>
-                <a:cs typeface="Calibri" pitchFamily="34" charset="-120"/>
+                <a:cs typeface="Amiri" pitchFamily="2" charset="-78"/>
               </a:rPr>
               <a:t>C</a:t>
             </a:r>
@@ -10479,9 +10275,8 @@
                 <a:solidFill>
                   <a:srgbClr val="9AA1AB"/>
                 </a:solidFill>
-                <a:latin typeface="Amiri" pitchFamily="34" charset="0"/>
-                <a:ea typeface="Amiri" pitchFamily="34" charset="-122"/>
-                <a:cs typeface="Amiri" pitchFamily="34" charset="-120"/>
+                <a:latin typeface="Amiri" pitchFamily="2" charset="-78"/>
+                <a:cs typeface="Amiri" pitchFamily="2" charset="-78"/>
               </a:rPr>
               <a:t>كَتَبَتْ</a:t>
             </a:r>
@@ -10519,8 +10314,7 @@
                   <a:srgbClr val="8A6D1E"/>
                 </a:solidFill>
                 <a:latin typeface="Calibri" pitchFamily="34" charset="0"/>
-                <a:ea typeface="Calibri" pitchFamily="34" charset="-122"/>
-                <a:cs typeface="Calibri" pitchFamily="34" charset="-120"/>
+                <a:cs typeface="Amiri" pitchFamily="2" charset="-78"/>
               </a:rPr>
               <a:t>Feminine subject → kutibat (passive).</a:t>
             </a:r>
@@ -10558,8 +10352,7 @@
                   <a:srgbClr val="8A93A0"/>
                 </a:solidFill>
                 <a:latin typeface="Calibri" pitchFamily="34" charset="0"/>
-                <a:ea typeface="Calibri" pitchFamily="34" charset="-122"/>
-                <a:cs typeface="Calibri" pitchFamily="34" charset="-120"/>
+                <a:cs typeface="Amiri" pitchFamily="2" charset="-78"/>
               </a:rPr>
               <a:t>11 / 18</a:t>
             </a:r>
@@ -10653,9 +10446,8 @@
                 <a:solidFill>
                   <a:srgbClr val="D4AF37"/>
                 </a:solidFill>
-                <a:latin typeface="Amiri" pitchFamily="34" charset="0"/>
-                <a:ea typeface="Amiri" pitchFamily="34" charset="-122"/>
-                <a:cs typeface="Amiri" pitchFamily="34" charset="-120"/>
+                <a:latin typeface="Amiri" pitchFamily="2" charset="-78"/>
+                <a:cs typeface="Amiri" pitchFamily="2" charset="-78"/>
               </a:rPr>
               <a:t>م</a:t>
             </a:r>
@@ -10693,8 +10485,7 @@
                   <a:srgbClr val="1B3B6F"/>
                 </a:solidFill>
                 <a:latin typeface="Cambria" pitchFamily="34" charset="0"/>
-                <a:ea typeface="Cambria" pitchFamily="34" charset="-122"/>
-                <a:cs typeface="Cambria" pitchFamily="34" charset="-120"/>
+                <a:cs typeface="Amiri" pitchFamily="2" charset="-78"/>
               </a:rPr>
               <a:t>Al Madina Online School</a:t>
             </a:r>
@@ -10732,8 +10523,7 @@
                   <a:srgbClr val="8A6D1E"/>
                 </a:solidFill>
                 <a:latin typeface="Calibri" pitchFamily="34" charset="0"/>
-                <a:ea typeface="Calibri" pitchFamily="34" charset="-122"/>
-                <a:cs typeface="Calibri" pitchFamily="34" charset="-120"/>
+                <a:cs typeface="Amiri" pitchFamily="2" charset="-78"/>
               </a:rPr>
               <a:t>ARABIC DEPARTMENT · MIFTAH ARABIC · IGCSE 0544</a:t>
             </a:r>
@@ -10798,8 +10588,7 @@
                   <a:srgbClr val="FFFFFF"/>
                 </a:solidFill>
                 <a:latin typeface="Calibri" pitchFamily="34" charset="0"/>
-                <a:ea typeface="Calibri" pitchFamily="34" charset="-122"/>
-                <a:cs typeface="Calibri" pitchFamily="34" charset="-120"/>
+                <a:cs typeface="Amiri" pitchFamily="2" charset="-78"/>
               </a:rPr>
               <a:t>P6-L11 · IGCSE Bridge</a:t>
             </a:r>
@@ -10864,8 +10653,7 @@
                   <a:srgbClr val="FFFFFF"/>
                 </a:solidFill>
                 <a:latin typeface="Calibri" pitchFamily="34" charset="0"/>
-                <a:ea typeface="Calibri" pitchFamily="34" charset="-122"/>
-                <a:cs typeface="Calibri" pitchFamily="34" charset="-120"/>
+                <a:cs typeface="Amiri" pitchFamily="2" charset="-78"/>
               </a:rPr>
               <a:t>TEACHER INSTRUCTION · 4 MIN</a:t>
             </a:r>
@@ -10903,8 +10691,7 @@
                   <a:srgbClr val="1B3B6F"/>
                 </a:solidFill>
                 <a:latin typeface="Calibri" pitchFamily="34" charset="0"/>
-                <a:ea typeface="Calibri" pitchFamily="34" charset="-122"/>
-                <a:cs typeface="Calibri" pitchFamily="34" charset="-120"/>
+                <a:cs typeface="Amiri" pitchFamily="2" charset="-78"/>
               </a:rPr>
               <a:t>TEACH · REVISE IN THIS ORDER — MOST MARKS PER MINUTE (WEBSITE)</a:t>
             </a:r>
@@ -10942,8 +10729,7 @@
                   <a:srgbClr val="1B3B6F"/>
                 </a:solidFill>
                 <a:latin typeface="Cambria" pitchFamily="34" charset="0"/>
-                <a:ea typeface="Cambria" pitchFamily="34" charset="-122"/>
-                <a:cs typeface="Cambria" pitchFamily="34" charset="-120"/>
+                <a:cs typeface="Amiri" pitchFamily="2" charset="-78"/>
               </a:rPr>
               <a:t>Grammar revision hierarchy — most marks per minute</a:t>
             </a:r>
@@ -10980,9 +10766,8 @@
                 <a:solidFill>
                   <a:srgbClr val="8A6D1E"/>
                 </a:solidFill>
-                <a:latin typeface="Amiri" pitchFamily="34" charset="0"/>
-                <a:ea typeface="Amiri" pitchFamily="34" charset="-122"/>
-                <a:cs typeface="Amiri" pitchFamily="34" charset="-120"/>
+                <a:latin typeface="Amiri" pitchFamily="2" charset="-78"/>
+                <a:cs typeface="Amiri" pitchFamily="2" charset="-78"/>
               </a:rPr>
               <a:t>تَرْتِيبُ المُرَاجَعَةِ</a:t>
             </a:r>
@@ -11020,8 +10805,7 @@
                   <a:srgbClr val="8A93A0"/>
                 </a:solidFill>
                 <a:latin typeface="Calibri" pitchFamily="34" charset="0"/>
-                <a:ea typeface="Calibri" pitchFamily="34" charset="-122"/>
-                <a:cs typeface="Calibri" pitchFamily="34" charset="-120"/>
+                <a:cs typeface="Amiri" pitchFamily="2" charset="-78"/>
               </a:rPr>
               <a:t>Miftah Arabic · Progression P6 · IGCSE Bridge · P6-L11</a:t>
             </a:r>
@@ -11093,8 +10877,7 @@
                   <a:srgbClr val="1B3B6F"/>
                 </a:solidFill>
                 <a:latin typeface="Calibri" pitchFamily="34" charset="0"/>
-                <a:ea typeface="Calibri" pitchFamily="34" charset="-122"/>
-                <a:cs typeface="Calibri" pitchFamily="34" charset="-120"/>
+                <a:cs typeface="Amiri" pitchFamily="2" charset="-78"/>
               </a:rPr>
               <a:t>REVISE IN THIS ORDER</a:t>
             </a:r>
@@ -11157,8 +10940,7 @@
                   <a:srgbClr val="D4AF37"/>
                 </a:solidFill>
                 <a:latin typeface="Calibri" pitchFamily="34" charset="0"/>
-                <a:ea typeface="Calibri" pitchFamily="34" charset="-122"/>
-                <a:cs typeface="Calibri" pitchFamily="34" charset="-120"/>
+                <a:cs typeface="Amiri" pitchFamily="2" charset="-78"/>
               </a:rPr>
               <a:t>1</a:t>
             </a:r>
@@ -11196,8 +10978,7 @@
                   <a:srgbClr val="1F2A37"/>
                 </a:solidFill>
                 <a:latin typeface="Calibri" pitchFamily="34" charset="0"/>
-                <a:ea typeface="Calibri" pitchFamily="34" charset="-122"/>
-                <a:cs typeface="Calibri" pitchFamily="34" charset="-120"/>
+                <a:cs typeface="Amiri" pitchFamily="2" charset="-78"/>
               </a:rPr>
               <a:t>1 · Subjunctive -a marker — high-frequency, 2 Accuracy marks.</a:t>
             </a:r>
@@ -11260,8 +11041,7 @@
                   <a:srgbClr val="D4AF37"/>
                 </a:solidFill>
                 <a:latin typeface="Calibri" pitchFamily="34" charset="0"/>
-                <a:ea typeface="Calibri" pitchFamily="34" charset="-122"/>
-                <a:cs typeface="Calibri" pitchFamily="34" charset="-120"/>
+                <a:cs typeface="Amiri" pitchFamily="2" charset="-78"/>
               </a:rPr>
               <a:t>2</a:t>
             </a:r>
@@ -11299,8 +11079,7 @@
                   <a:srgbClr val="1F2A37"/>
                 </a:solidFill>
                 <a:latin typeface="Calibri" pitchFamily="34" charset="0"/>
-                <a:ea typeface="Calibri" pitchFamily="34" charset="-122"/>
-                <a:cs typeface="Calibri" pitchFamily="34" charset="-120"/>
+                <a:cs typeface="Amiri" pitchFamily="2" charset="-78"/>
               </a:rPr>
               <a:t>2 · Type 2 la- prefix — common error, 2 Accuracy marks.</a:t>
             </a:r>
@@ -11363,8 +11142,7 @@
                   <a:srgbClr val="D4AF37"/>
                 </a:solidFill>
                 <a:latin typeface="Calibri" pitchFamily="34" charset="0"/>
-                <a:ea typeface="Calibri" pitchFamily="34" charset="-122"/>
-                <a:cs typeface="Calibri" pitchFamily="34" charset="-120"/>
+                <a:cs typeface="Amiri" pitchFamily="2" charset="-78"/>
               </a:rPr>
               <a:t>3</a:t>
             </a:r>
@@ -11402,8 +11180,7 @@
                   <a:srgbClr val="1F2A37"/>
                 </a:solidFill>
                 <a:latin typeface="Calibri" pitchFamily="34" charset="0"/>
-                <a:ea typeface="Calibri" pitchFamily="34" charset="-122"/>
-                <a:cs typeface="Calibri" pitchFamily="34" charset="-120"/>
+                <a:cs typeface="Amiri" pitchFamily="2" charset="-78"/>
               </a:rPr>
               <a:t>3 · Reported speech inna / anna — 2 Accuracy marks.</a:t>
             </a:r>
@@ -11466,8 +11243,7 @@
                   <a:srgbClr val="D4AF37"/>
                 </a:solidFill>
                 <a:latin typeface="Calibri" pitchFamily="34" charset="0"/>
-                <a:ea typeface="Calibri" pitchFamily="34" charset="-122"/>
-                <a:cs typeface="Calibri" pitchFamily="34" charset="-120"/>
+                <a:cs typeface="Amiri" pitchFamily="2" charset="-78"/>
               </a:rPr>
               <a:t>4</a:t>
             </a:r>
@@ -11505,8 +11281,7 @@
                   <a:srgbClr val="1F2A37"/>
                 </a:solidFill>
                 <a:latin typeface="Calibri" pitchFamily="34" charset="0"/>
-                <a:ea typeface="Calibri" pitchFamily="34" charset="-122"/>
-                <a:cs typeface="Calibri" pitchFamily="34" charset="-120"/>
+                <a:cs typeface="Amiri" pitchFamily="2" charset="-78"/>
               </a:rPr>
               <a:t>4 · ṣaḥīḥun anna + indicative — 1 mark, crucial for Task Completion.</a:t>
             </a:r>
@@ -11569,8 +11344,7 @@
                   <a:srgbClr val="D4AF37"/>
                 </a:solidFill>
                 <a:latin typeface="Calibri" pitchFamily="34" charset="0"/>
-                <a:ea typeface="Calibri" pitchFamily="34" charset="-122"/>
-                <a:cs typeface="Calibri" pitchFamily="34" charset="-120"/>
+                <a:cs typeface="Amiri" pitchFamily="2" charset="-78"/>
               </a:rPr>
               <a:t>5</a:t>
             </a:r>
@@ -11608,8 +11382,7 @@
                   <a:srgbClr val="1F2A37"/>
                 </a:solidFill>
                 <a:latin typeface="Calibri" pitchFamily="34" charset="0"/>
-                <a:ea typeface="Calibri" pitchFamily="34" charset="-122"/>
-                <a:cs typeface="Calibri" pitchFamily="34" charset="-120"/>
+                <a:cs typeface="Amiri" pitchFamily="2" charset="-78"/>
               </a:rPr>
               <a:t>5 · Passive agreement — 1 Accuracy mark.</a:t>
             </a:r>
@@ -11672,8 +11445,7 @@
                   <a:srgbClr val="D4AF37"/>
                 </a:solidFill>
                 <a:latin typeface="Calibri" pitchFamily="34" charset="0"/>
-                <a:ea typeface="Calibri" pitchFamily="34" charset="-122"/>
-                <a:cs typeface="Calibri" pitchFamily="34" charset="-120"/>
+                <a:cs typeface="Amiri" pitchFamily="2" charset="-78"/>
               </a:rPr>
               <a:t>6</a:t>
             </a:r>
@@ -11711,8 +11483,7 @@
                   <a:srgbClr val="1F2A37"/>
                 </a:solidFill>
                 <a:latin typeface="Calibri" pitchFamily="34" charset="0"/>
-                <a:ea typeface="Calibri" pitchFamily="34" charset="-122"/>
-                <a:cs typeface="Calibri" pitchFamily="34" charset="-120"/>
+                <a:cs typeface="Amiri" pitchFamily="2" charset="-78"/>
               </a:rPr>
               <a:t>6 · Vocabulary by topic — your three weakest topic areas.</a:t>
             </a:r>
@@ -11784,8 +11555,7 @@
                   <a:srgbClr val="8A6D1E"/>
                 </a:solidFill>
                 <a:latin typeface="Calibri" pitchFamily="34" charset="0"/>
-                <a:ea typeface="Calibri" pitchFamily="34" charset="-122"/>
-                <a:cs typeface="Calibri" pitchFamily="34" charset="-120"/>
+                <a:cs typeface="Amiri" pitchFamily="2" charset="-78"/>
               </a:rPr>
               <a:t>IN ARABIC</a:t>
             </a:r>
@@ -11822,9 +11592,8 @@
                 <a:solidFill>
                   <a:srgbClr val="1B3B6F"/>
                 </a:solidFill>
-                <a:latin typeface="Amiri" pitchFamily="34" charset="0"/>
-                <a:ea typeface="Amiri" pitchFamily="34" charset="-122"/>
-                <a:cs typeface="Amiri" pitchFamily="34" charset="-120"/>
+                <a:latin typeface="Amiri" pitchFamily="2" charset="-78"/>
+                <a:cs typeface="Amiri" pitchFamily="2" charset="-78"/>
               </a:rPr>
               <a:t>قَالَ: «إِنَّ الوَقْتَ يَنْفَدُ.»</a:t>
             </a:r>
@@ -11862,8 +11631,7 @@
                   <a:srgbClr val="5A6472"/>
                 </a:solidFill>
                 <a:latin typeface="Calibri" pitchFamily="34" charset="0"/>
-                <a:ea typeface="Calibri" pitchFamily="34" charset="-122"/>
-                <a:cs typeface="Calibri" pitchFamily="34" charset="-120"/>
+                <a:cs typeface="Amiri" pitchFamily="2" charset="-78"/>
               </a:rPr>
               <a:t>direct speech → inna</a:t>
             </a:r>
@@ -11923,9 +11691,8 @@
                 <a:solidFill>
                   <a:srgbClr val="1B3B6F"/>
                 </a:solidFill>
-                <a:latin typeface="Amiri" pitchFamily="34" charset="0"/>
-                <a:ea typeface="Amiri" pitchFamily="34" charset="-122"/>
-                <a:cs typeface="Amiri" pitchFamily="34" charset="-120"/>
+                <a:latin typeface="Amiri" pitchFamily="2" charset="-78"/>
+                <a:cs typeface="Amiri" pitchFamily="2" charset="-78"/>
               </a:rPr>
               <a:t>قَالَ إِنَّ الوَقْتَ يَنْفَدُ.</a:t>
             </a:r>
@@ -11963,8 +11730,7 @@
                   <a:srgbClr val="5A6472"/>
                 </a:solidFill>
                 <a:latin typeface="Calibri" pitchFamily="34" charset="0"/>
-                <a:ea typeface="Calibri" pitchFamily="34" charset="-122"/>
-                <a:cs typeface="Calibri" pitchFamily="34" charset="-120"/>
+                <a:cs typeface="Amiri" pitchFamily="2" charset="-78"/>
               </a:rPr>
               <a:t>after qāla → inna</a:t>
             </a:r>
@@ -12024,9 +11790,8 @@
                 <a:solidFill>
                   <a:srgbClr val="1B3B6F"/>
                 </a:solidFill>
-                <a:latin typeface="Amiri" pitchFamily="34" charset="0"/>
-                <a:ea typeface="Amiri" pitchFamily="34" charset="-122"/>
-                <a:cs typeface="Amiri" pitchFamily="34" charset="-120"/>
+                <a:latin typeface="Amiri" pitchFamily="2" charset="-78"/>
+                <a:cs typeface="Amiri" pitchFamily="2" charset="-78"/>
               </a:rPr>
               <a:t>ذَكَرَ أَنَّ الوَقْتَ يَنْفَدُ.</a:t>
             </a:r>
@@ -12064,8 +11829,7 @@
                   <a:srgbClr val="5A6472"/>
                 </a:solidFill>
                 <a:latin typeface="Calibri" pitchFamily="34" charset="0"/>
-                <a:ea typeface="Calibri" pitchFamily="34" charset="-122"/>
-                <a:cs typeface="Calibri" pitchFamily="34" charset="-120"/>
+                <a:cs typeface="Amiri" pitchFamily="2" charset="-78"/>
               </a:rPr>
               <a:t>after other verbs → anna</a:t>
             </a:r>
@@ -12103,8 +11867,7 @@
                   <a:srgbClr val="8A93A0"/>
                 </a:solidFill>
                 <a:latin typeface="Calibri" pitchFamily="34" charset="0"/>
-                <a:ea typeface="Calibri" pitchFamily="34" charset="-122"/>
-                <a:cs typeface="Calibri" pitchFamily="34" charset="-120"/>
+                <a:cs typeface="Amiri" pitchFamily="2" charset="-78"/>
               </a:rPr>
               <a:t>12 / 18</a:t>
             </a:r>
@@ -12198,9 +11961,8 @@
                 <a:solidFill>
                   <a:srgbClr val="D4AF37"/>
                 </a:solidFill>
-                <a:latin typeface="Amiri" pitchFamily="34" charset="0"/>
-                <a:ea typeface="Amiri" pitchFamily="34" charset="-122"/>
-                <a:cs typeface="Amiri" pitchFamily="34" charset="-120"/>
+                <a:latin typeface="Amiri" pitchFamily="2" charset="-78"/>
+                <a:cs typeface="Amiri" pitchFamily="2" charset="-78"/>
               </a:rPr>
               <a:t>م</a:t>
             </a:r>
@@ -12238,8 +12000,7 @@
                   <a:srgbClr val="1B3B6F"/>
                 </a:solidFill>
                 <a:latin typeface="Cambria" pitchFamily="34" charset="0"/>
-                <a:ea typeface="Cambria" pitchFamily="34" charset="-122"/>
-                <a:cs typeface="Cambria" pitchFamily="34" charset="-120"/>
+                <a:cs typeface="Amiri" pitchFamily="2" charset="-78"/>
               </a:rPr>
               <a:t>Al Madina Online School</a:t>
             </a:r>
@@ -12277,8 +12038,7 @@
                   <a:srgbClr val="8A6D1E"/>
                 </a:solidFill>
                 <a:latin typeface="Calibri" pitchFamily="34" charset="0"/>
-                <a:ea typeface="Calibri" pitchFamily="34" charset="-122"/>
-                <a:cs typeface="Calibri" pitchFamily="34" charset="-120"/>
+                <a:cs typeface="Amiri" pitchFamily="2" charset="-78"/>
               </a:rPr>
               <a:t>ARABIC DEPARTMENT · MIFTAH ARABIC · IGCSE 0544</a:t>
             </a:r>
@@ -12343,8 +12103,7 @@
                   <a:srgbClr val="FFFFFF"/>
                 </a:solidFill>
                 <a:latin typeface="Calibri" pitchFamily="34" charset="0"/>
-                <a:ea typeface="Calibri" pitchFamily="34" charset="-122"/>
-                <a:cs typeface="Calibri" pitchFamily="34" charset="-120"/>
+                <a:cs typeface="Amiri" pitchFamily="2" charset="-78"/>
               </a:rPr>
               <a:t>P6-L11 · IGCSE Bridge</a:t>
             </a:r>
@@ -12409,8 +12168,7 @@
                   <a:srgbClr val="FFFFFF"/>
                 </a:solidFill>
                 <a:latin typeface="Calibri" pitchFamily="34" charset="0"/>
-                <a:ea typeface="Calibri" pitchFamily="34" charset="-122"/>
-                <a:cs typeface="Calibri" pitchFamily="34" charset="-120"/>
+                <a:cs typeface="Amiri" pitchFamily="2" charset="-78"/>
               </a:rPr>
               <a:t>YOU DO · 8 MIN</a:t>
             </a:r>
@@ -12448,8 +12206,7 @@
                   <a:srgbClr val="1E6B52"/>
                 </a:solidFill>
                 <a:latin typeface="Calibri" pitchFamily="34" charset="0"/>
-                <a:ea typeface="Calibri" pitchFamily="34" charset="-122"/>
-                <a:cs typeface="Calibri" pitchFamily="34" charset="-120"/>
+                <a:cs typeface="Amiri" pitchFamily="2" charset="-78"/>
               </a:rPr>
               <a:t>YOU DO · TICK WHAT IS SECURE (WEBSITE)</a:t>
             </a:r>
@@ -12487,8 +12244,7 @@
                   <a:srgbClr val="1B3B6F"/>
                 </a:solidFill>
                 <a:latin typeface="Cambria" pitchFamily="34" charset="0"/>
-                <a:ea typeface="Cambria" pitchFamily="34" charset="-122"/>
-                <a:cs typeface="Cambria" pitchFamily="34" charset="-120"/>
+                <a:cs typeface="Amiri" pitchFamily="2" charset="-78"/>
               </a:rPr>
               <a:t>Final exam-readiness checklist</a:t>
             </a:r>
@@ -12525,9 +12281,8 @@
                 <a:solidFill>
                   <a:srgbClr val="8A6D1E"/>
                 </a:solidFill>
-                <a:latin typeface="Amiri" pitchFamily="34" charset="0"/>
-                <a:ea typeface="Amiri" pitchFamily="34" charset="-122"/>
-                <a:cs typeface="Amiri" pitchFamily="34" charset="-120"/>
+                <a:latin typeface="Amiri" pitchFamily="2" charset="-78"/>
+                <a:cs typeface="Amiri" pitchFamily="2" charset="-78"/>
               </a:rPr>
               <a:t>قَائِمَةُ التَّحَقُّقِ</a:t>
             </a:r>
@@ -12565,8 +12320,7 @@
                   <a:srgbClr val="8A93A0"/>
                 </a:solidFill>
                 <a:latin typeface="Calibri" pitchFamily="34" charset="0"/>
-                <a:ea typeface="Calibri" pitchFamily="34" charset="-122"/>
-                <a:cs typeface="Calibri" pitchFamily="34" charset="-120"/>
+                <a:cs typeface="Amiri" pitchFamily="2" charset="-78"/>
               </a:rPr>
               <a:t>Miftah Arabic · Progression P6 · IGCSE Bridge · P6-L11</a:t>
             </a:r>
@@ -12629,8 +12383,7 @@
                   <a:srgbClr val="FFFFFF"/>
                 </a:solidFill>
                 <a:latin typeface="Calibri" pitchFamily="34" charset="0"/>
-                <a:ea typeface="Calibri" pitchFamily="34" charset="-122"/>
-                <a:cs typeface="Calibri" pitchFamily="34" charset="-120"/>
+                <a:cs typeface="Amiri" pitchFamily="2" charset="-78"/>
               </a:rPr>
               <a:t>Model</a:t>
             </a:r>
@@ -12668,8 +12421,7 @@
                   <a:srgbClr val="FFFFFF"/>
                 </a:solidFill>
                 <a:latin typeface="Calibri" pitchFamily="34" charset="0"/>
-                <a:ea typeface="Calibri" pitchFamily="34" charset="-122"/>
-                <a:cs typeface="Calibri" pitchFamily="34" charset="-120"/>
+                <a:cs typeface="Amiri" pitchFamily="2" charset="-78"/>
               </a:rPr>
               <a:t>I can …</a:t>
             </a:r>
@@ -12707,8 +12459,7 @@
                   <a:srgbClr val="FFFFFF"/>
                 </a:solidFill>
                 <a:latin typeface="Calibri" pitchFamily="34" charset="0"/>
-                <a:ea typeface="Calibri" pitchFamily="34" charset="-122"/>
-                <a:cs typeface="Calibri" pitchFamily="34" charset="-120"/>
+                <a:cs typeface="Amiri" pitchFamily="2" charset="-78"/>
               </a:rPr>
               <a:t>Secure?</a:t>
             </a:r>
@@ -12772,9 +12523,8 @@
                 <a:solidFill>
                   <a:srgbClr val="1B3B6F"/>
                 </a:solidFill>
-                <a:latin typeface="Amiri" pitchFamily="34" charset="0"/>
-                <a:ea typeface="Amiri" pitchFamily="34" charset="-122"/>
-                <a:cs typeface="Amiri" pitchFamily="34" charset="-120"/>
+                <a:latin typeface="Amiri" pitchFamily="2" charset="-78"/>
+                <a:cs typeface="Amiri" pitchFamily="2" charset="-78"/>
               </a:rPr>
               <a:t>يَنْبَغِي أَنْ نَعْمَلَ لِكَيْ نَنْجَحَ.</a:t>
             </a:r>
@@ -12812,8 +12562,7 @@
                   <a:srgbClr val="5A6472"/>
                 </a:solidFill>
                 <a:latin typeface="Calibri" pitchFamily="34" charset="0"/>
-                <a:ea typeface="Calibri" pitchFamily="34" charset="-122"/>
-                <a:cs typeface="Calibri" pitchFamily="34" charset="-120"/>
+                <a:cs typeface="Amiri" pitchFamily="2" charset="-78"/>
               </a:rPr>
               <a:t>I can form the subjunctive after every trigger (likay · yanbaghī an · yataṭallabu an).</a:t>
             </a:r>
@@ -12851,8 +12600,7 @@
                   <a:srgbClr val="5A6472"/>
                 </a:solidFill>
                 <a:latin typeface="Calibri" pitchFamily="34" charset="0"/>
-                <a:ea typeface="Calibri" pitchFamily="34" charset="-122"/>
-                <a:cs typeface="Calibri" pitchFamily="34" charset="-120"/>
+                <a:cs typeface="Amiri" pitchFamily="2" charset="-78"/>
               </a:rPr>
               <a:t>☐</a:t>
             </a:r>
@@ -12916,9 +12664,8 @@
                 <a:solidFill>
                   <a:srgbClr val="1B3B6F"/>
                 </a:solidFill>
-                <a:latin typeface="Amiri" pitchFamily="34" charset="0"/>
-                <a:ea typeface="Amiri" pitchFamily="34" charset="-122"/>
-                <a:cs typeface="Amiri" pitchFamily="34" charset="-120"/>
+                <a:latin typeface="Amiri" pitchFamily="2" charset="-78"/>
+                <a:cs typeface="Amiri" pitchFamily="2" charset="-78"/>
               </a:rPr>
               <a:t>لَوْ دَرَسْتُ، لَنَجَحْتُ.</a:t>
             </a:r>
@@ -12956,8 +12703,7 @@
                   <a:srgbClr val="5A6472"/>
                 </a:solidFill>
                 <a:latin typeface="Calibri" pitchFamily="34" charset="0"/>
-                <a:ea typeface="Calibri" pitchFamily="34" charset="-122"/>
-                <a:cs typeface="Calibri" pitchFamily="34" charset="-120"/>
+                <a:cs typeface="Amiri" pitchFamily="2" charset="-78"/>
               </a:rPr>
               <a:t>I keep the la- prefix in every Type 2 result.</a:t>
             </a:r>
@@ -12995,8 +12741,7 @@
                   <a:srgbClr val="5A6472"/>
                 </a:solidFill>
                 <a:latin typeface="Calibri" pitchFamily="34" charset="0"/>
-                <a:ea typeface="Calibri" pitchFamily="34" charset="-122"/>
-                <a:cs typeface="Calibri" pitchFamily="34" charset="-120"/>
+                <a:cs typeface="Amiri" pitchFamily="2" charset="-78"/>
               </a:rPr>
               <a:t>☐</a:t>
             </a:r>
@@ -13060,9 +12805,8 @@
                 <a:solidFill>
                   <a:srgbClr val="1B3B6F"/>
                 </a:solidFill>
-                <a:latin typeface="Amiri" pitchFamily="34" charset="0"/>
-                <a:ea typeface="Amiri" pitchFamily="34" charset="-122"/>
-                <a:cs typeface="Amiri" pitchFamily="34" charset="-120"/>
+                <a:latin typeface="Amiri" pitchFamily="2" charset="-78"/>
+                <a:cs typeface="Amiri" pitchFamily="2" charset="-78"/>
               </a:rPr>
               <a:t>أُرِيدُ أَنْ أَنْجَحَ · ذَكَرَ أَنَّ الوَقْتَ قَصِيرٌ.</a:t>
             </a:r>
@@ -13100,8 +12844,7 @@
                   <a:srgbClr val="5A6472"/>
                 </a:solidFill>
                 <a:latin typeface="Calibri" pitchFamily="34" charset="0"/>
-                <a:ea typeface="Calibri" pitchFamily="34" charset="-122"/>
-                <a:cs typeface="Calibri" pitchFamily="34" charset="-120"/>
+                <a:cs typeface="Amiri" pitchFamily="2" charset="-78"/>
               </a:rPr>
               <a:t>I use an before a subjunctive and anna before a reported fact.</a:t>
             </a:r>
@@ -13139,8 +12882,7 @@
                   <a:srgbClr val="5A6472"/>
                 </a:solidFill>
                 <a:latin typeface="Calibri" pitchFamily="34" charset="0"/>
-                <a:ea typeface="Calibri" pitchFamily="34" charset="-122"/>
-                <a:cs typeface="Calibri" pitchFamily="34" charset="-120"/>
+                <a:cs typeface="Amiri" pitchFamily="2" charset="-78"/>
               </a:rPr>
               <a:t>☐</a:t>
             </a:r>
@@ -13204,9 +12946,8 @@
                 <a:solidFill>
                   <a:srgbClr val="1B3B6F"/>
                 </a:solidFill>
-                <a:latin typeface="Amiri" pitchFamily="34" charset="0"/>
-                <a:ea typeface="Amiri" pitchFamily="34" charset="-122"/>
-                <a:cs typeface="Amiri" pitchFamily="34" charset="-120"/>
+                <a:latin typeface="Amiri" pitchFamily="2" charset="-78"/>
+                <a:cs typeface="Amiri" pitchFamily="2" charset="-78"/>
               </a:rPr>
               <a:t>صَحِيحٌ أَنَّ الوَقْتَ مَحْدُودٌ …</a:t>
             </a:r>
@@ -13244,8 +12985,7 @@
                   <a:srgbClr val="5A6472"/>
                 </a:solidFill>
                 <a:latin typeface="Calibri" pitchFamily="34" charset="0"/>
-                <a:ea typeface="Calibri" pitchFamily="34" charset="-122"/>
-                <a:cs typeface="Calibri" pitchFamily="34" charset="-120"/>
+                <a:cs typeface="Amiri" pitchFamily="2" charset="-78"/>
               </a:rPr>
               <a:t>I keep the indicative after ṣaḥīḥun anna.</a:t>
             </a:r>
@@ -13283,8 +13023,7 @@
                   <a:srgbClr val="5A6472"/>
                 </a:solidFill>
                 <a:latin typeface="Calibri" pitchFamily="34" charset="0"/>
-                <a:ea typeface="Calibri" pitchFamily="34" charset="-122"/>
-                <a:cs typeface="Calibri" pitchFamily="34" charset="-120"/>
+                <a:cs typeface="Amiri" pitchFamily="2" charset="-78"/>
               </a:rPr>
               <a:t>☐</a:t>
             </a:r>
@@ -13348,9 +13087,8 @@
                 <a:solidFill>
                   <a:srgbClr val="1B3B6F"/>
                 </a:solidFill>
-                <a:latin typeface="Amiri" pitchFamily="34" charset="0"/>
-                <a:ea typeface="Amiri" pitchFamily="34" charset="-122"/>
-                <a:cs typeface="Amiri" pitchFamily="34" charset="-120"/>
+                <a:latin typeface="Amiri" pitchFamily="2" charset="-78"/>
+                <a:cs typeface="Amiri" pitchFamily="2" charset="-78"/>
               </a:rPr>
               <a:t>أُطْرُوحَةٌ ← دَلِيلٌ ← تَنَازُلٌ ← رَدٌّ ← خَاتِمَةٌ</a:t>
             </a:r>
@@ -13388,8 +13126,7 @@
                   <a:srgbClr val="5A6472"/>
                 </a:solidFill>
                 <a:latin typeface="Calibri" pitchFamily="34" charset="0"/>
-                <a:ea typeface="Calibri" pitchFamily="34" charset="-122"/>
-                <a:cs typeface="Calibri" pitchFamily="34" charset="-120"/>
+                <a:cs typeface="Amiri" pitchFamily="2" charset="-78"/>
               </a:rPr>
               <a:t>I can build the full essay architecture from memory.</a:t>
             </a:r>
@@ -13427,8 +13164,7 @@
                   <a:srgbClr val="5A6472"/>
                 </a:solidFill>
                 <a:latin typeface="Calibri" pitchFamily="34" charset="0"/>
-                <a:ea typeface="Calibri" pitchFamily="34" charset="-122"/>
-                <a:cs typeface="Calibri" pitchFamily="34" charset="-120"/>
+                <a:cs typeface="Amiri" pitchFamily="2" charset="-78"/>
               </a:rPr>
               <a:t>☐</a:t>
             </a:r>
@@ -13521,8 +13257,7 @@
                   <a:srgbClr val="5A6472"/>
                 </a:solidFill>
                 <a:latin typeface="Calibri" pitchFamily="34" charset="0"/>
-                <a:ea typeface="Calibri" pitchFamily="34" charset="-122"/>
-                <a:cs typeface="Calibri" pitchFamily="34" charset="-120"/>
+                <a:cs typeface="Amiri" pitchFamily="2" charset="-78"/>
               </a:rPr>
               <a:t>I remember my top Paper 1 listening strategy (annotate + second listen)</a:t>
             </a:r>
@@ -13560,8 +13295,7 @@
                   <a:srgbClr val="5A6472"/>
                 </a:solidFill>
                 <a:latin typeface="Calibri" pitchFamily="34" charset="0"/>
-                <a:ea typeface="Calibri" pitchFamily="34" charset="-122"/>
-                <a:cs typeface="Calibri" pitchFamily="34" charset="-120"/>
+                <a:cs typeface="Amiri" pitchFamily="2" charset="-78"/>
               </a:rPr>
               <a:t>☐</a:t>
             </a:r>
@@ -13654,8 +13388,7 @@
                   <a:srgbClr val="5A6472"/>
                 </a:solidFill>
                 <a:latin typeface="Calibri" pitchFamily="34" charset="0"/>
-                <a:ea typeface="Calibri" pitchFamily="34" charset="-122"/>
-                <a:cs typeface="Calibri" pitchFamily="34" charset="-120"/>
+                <a:cs typeface="Amiri" pitchFamily="2" charset="-78"/>
               </a:rPr>
               <a:t>I remember my Paper 2 R3 strategy (analyse the language choice)</a:t>
             </a:r>
@@ -13693,8 +13426,7 @@
                   <a:srgbClr val="5A6472"/>
                 </a:solidFill>
                 <a:latin typeface="Calibri" pitchFamily="34" charset="0"/>
-                <a:ea typeface="Calibri" pitchFamily="34" charset="-122"/>
-                <a:cs typeface="Calibri" pitchFamily="34" charset="-120"/>
+                <a:cs typeface="Amiri" pitchFamily="2" charset="-78"/>
               </a:rPr>
               <a:t>☐</a:t>
             </a:r>
@@ -13758,9 +13490,8 @@
                 <a:solidFill>
                   <a:srgbClr val="1B3B6F"/>
                 </a:solidFill>
-                <a:latin typeface="Amiri" pitchFamily="34" charset="0"/>
-                <a:ea typeface="Amiri" pitchFamily="34" charset="-122"/>
-                <a:cs typeface="Amiri" pitchFamily="34" charset="-120"/>
+                <a:latin typeface="Amiri" pitchFamily="2" charset="-78"/>
+                <a:cs typeface="Amiri" pitchFamily="2" charset="-78"/>
               </a:rPr>
               <a:t>يُشَارُ إِلَى أَنَّ …</a:t>
             </a:r>
@@ -13798,8 +13529,7 @@
                   <a:srgbClr val="5A6472"/>
                 </a:solidFill>
                 <a:latin typeface="Calibri" pitchFamily="34" charset="0"/>
-                <a:ea typeface="Calibri" pitchFamily="34" charset="-122"/>
-                <a:cs typeface="Calibri" pitchFamily="34" charset="-120"/>
+                <a:cs typeface="Amiri" pitchFamily="2" charset="-78"/>
               </a:rPr>
               <a:t>I have emergency topic sentences for my three weakest speaking topics</a:t>
             </a:r>
@@ -13837,8 +13567,7 @@
                   <a:srgbClr val="5A6472"/>
                 </a:solidFill>
                 <a:latin typeface="Calibri" pitchFamily="34" charset="0"/>
-                <a:ea typeface="Calibri" pitchFamily="34" charset="-122"/>
-                <a:cs typeface="Calibri" pitchFamily="34" charset="-120"/>
+                <a:cs typeface="Amiri" pitchFamily="2" charset="-78"/>
               </a:rPr>
               <a:t>☐</a:t>
             </a:r>
@@ -13876,8 +13605,7 @@
                   <a:srgbClr val="1B3B6F"/>
                 </a:solidFill>
                 <a:latin typeface="Calibri" pitchFamily="34" charset="0"/>
-                <a:ea typeface="Calibri" pitchFamily="34" charset="-122"/>
-                <a:cs typeface="Calibri" pitchFamily="34" charset="-120"/>
+                <a:cs typeface="Amiri" pitchFamily="2" charset="-78"/>
               </a:rPr>
               <a:t>Anything unticked is your final revision list.</a:t>
             </a:r>
@@ -13915,8 +13643,7 @@
                   <a:srgbClr val="8A93A0"/>
                 </a:solidFill>
                 <a:latin typeface="Calibri" pitchFamily="34" charset="0"/>
-                <a:ea typeface="Calibri" pitchFamily="34" charset="-122"/>
-                <a:cs typeface="Calibri" pitchFamily="34" charset="-120"/>
+                <a:cs typeface="Amiri" pitchFamily="2" charset="-78"/>
               </a:rPr>
               <a:t>13 / 18</a:t>
             </a:r>
@@ -14010,9 +13737,8 @@
                 <a:solidFill>
                   <a:srgbClr val="D4AF37"/>
                 </a:solidFill>
-                <a:latin typeface="Amiri" pitchFamily="34" charset="0"/>
-                <a:ea typeface="Amiri" pitchFamily="34" charset="-122"/>
-                <a:cs typeface="Amiri" pitchFamily="34" charset="-120"/>
+                <a:latin typeface="Amiri" pitchFamily="2" charset="-78"/>
+                <a:cs typeface="Amiri" pitchFamily="2" charset="-78"/>
               </a:rPr>
               <a:t>م</a:t>
             </a:r>
@@ -14050,8 +13776,7 @@
                   <a:srgbClr val="1B3B6F"/>
                 </a:solidFill>
                 <a:latin typeface="Cambria" pitchFamily="34" charset="0"/>
-                <a:ea typeface="Cambria" pitchFamily="34" charset="-122"/>
-                <a:cs typeface="Cambria" pitchFamily="34" charset="-120"/>
+                <a:cs typeface="Amiri" pitchFamily="2" charset="-78"/>
               </a:rPr>
               <a:t>Al Madina Online School</a:t>
             </a:r>
@@ -14089,8 +13814,7 @@
                   <a:srgbClr val="8A6D1E"/>
                 </a:solidFill>
                 <a:latin typeface="Calibri" pitchFamily="34" charset="0"/>
-                <a:ea typeface="Calibri" pitchFamily="34" charset="-122"/>
-                <a:cs typeface="Calibri" pitchFamily="34" charset="-120"/>
+                <a:cs typeface="Amiri" pitchFamily="2" charset="-78"/>
               </a:rPr>
               <a:t>ARABIC DEPARTMENT · MIFTAH ARABIC · IGCSE 0544</a:t>
             </a:r>
@@ -14155,8 +13879,7 @@
                   <a:srgbClr val="FFFFFF"/>
                 </a:solidFill>
                 <a:latin typeface="Calibri" pitchFamily="34" charset="0"/>
-                <a:ea typeface="Calibri" pitchFamily="34" charset="-122"/>
-                <a:cs typeface="Calibri" pitchFamily="34" charset="-120"/>
+                <a:cs typeface="Amiri" pitchFamily="2" charset="-78"/>
               </a:rPr>
               <a:t>P6-L11 · IGCSE Bridge</a:t>
             </a:r>
@@ -14221,8 +13944,7 @@
                   <a:srgbClr val="FFFFFF"/>
                 </a:solidFill>
                 <a:latin typeface="Calibri" pitchFamily="34" charset="0"/>
-                <a:ea typeface="Calibri" pitchFamily="34" charset="-122"/>
-                <a:cs typeface="Calibri" pitchFamily="34" charset="-120"/>
+                <a:cs typeface="Amiri" pitchFamily="2" charset="-78"/>
               </a:rPr>
               <a:t>YOU DO · 8 MIN</a:t>
             </a:r>
@@ -14260,8 +13982,7 @@
                   <a:srgbClr val="1E6B52"/>
                 </a:solidFill>
                 <a:latin typeface="Calibri" pitchFamily="34" charset="0"/>
-                <a:ea typeface="Calibri" pitchFamily="34" charset="-122"/>
-                <a:cs typeface="Calibri" pitchFamily="34" charset="-120"/>
+                <a:cs typeface="Amiri" pitchFamily="2" charset="-78"/>
               </a:rPr>
               <a:t>YOU DO · PRIORITISE · ACT (WEBSITE)</a:t>
             </a:r>
@@ -14299,8 +14020,7 @@
                   <a:srgbClr val="1B3B6F"/>
                 </a:solidFill>
                 <a:latin typeface="Cambria" pitchFamily="34" charset="0"/>
-                <a:ea typeface="Cambria" pitchFamily="34" charset="-122"/>
-                <a:cs typeface="Cambria" pitchFamily="34" charset="-120"/>
+                <a:cs typeface="Amiri" pitchFamily="2" charset="-78"/>
               </a:rPr>
               <a:t>My final revision plan</a:t>
             </a:r>
@@ -14337,9 +14057,8 @@
                 <a:solidFill>
                   <a:srgbClr val="8A6D1E"/>
                 </a:solidFill>
-                <a:latin typeface="Amiri" pitchFamily="34" charset="0"/>
-                <a:ea typeface="Amiri" pitchFamily="34" charset="-122"/>
-                <a:cs typeface="Amiri" pitchFamily="34" charset="-120"/>
+                <a:latin typeface="Amiri" pitchFamily="2" charset="-78"/>
+                <a:cs typeface="Amiri" pitchFamily="2" charset="-78"/>
               </a:rPr>
               <a:t>خُطَّةُ المُرَاجَعَةِ</a:t>
             </a:r>
@@ -14377,8 +14096,7 @@
                   <a:srgbClr val="8A93A0"/>
                 </a:solidFill>
                 <a:latin typeface="Calibri" pitchFamily="34" charset="0"/>
-                <a:ea typeface="Calibri" pitchFamily="34" charset="-122"/>
-                <a:cs typeface="Calibri" pitchFamily="34" charset="-120"/>
+                <a:cs typeface="Amiri" pitchFamily="2" charset="-78"/>
               </a:rPr>
               <a:t>Miftah Arabic · Progression P6 · IGCSE Bridge · P6-L11</a:t>
             </a:r>
@@ -14441,8 +14159,7 @@
                   <a:srgbClr val="FFFFFF"/>
                 </a:solidFill>
                 <a:latin typeface="Calibri" pitchFamily="34" charset="0"/>
-                <a:ea typeface="Calibri" pitchFamily="34" charset="-122"/>
-                <a:cs typeface="Calibri" pitchFamily="34" charset="-120"/>
+                <a:cs typeface="Amiri" pitchFamily="2" charset="-78"/>
               </a:rPr>
               <a:t>Yours</a:t>
             </a:r>
@@ -14480,8 +14197,7 @@
                   <a:srgbClr val="FFFFFF"/>
                 </a:solidFill>
                 <a:latin typeface="Calibri" pitchFamily="34" charset="0"/>
-                <a:ea typeface="Calibri" pitchFamily="34" charset="-122"/>
-                <a:cs typeface="Calibri" pitchFamily="34" charset="-120"/>
+                <a:cs typeface="Amiri" pitchFamily="2" charset="-78"/>
               </a:rPr>
               <a:t>Example</a:t>
             </a:r>
@@ -14519,8 +14235,7 @@
                   <a:srgbClr val="FFFFFF"/>
                 </a:solidFill>
                 <a:latin typeface="Calibri" pitchFamily="34" charset="0"/>
-                <a:ea typeface="Calibri" pitchFamily="34" charset="-122"/>
-                <a:cs typeface="Calibri" pitchFamily="34" charset="-120"/>
+                <a:cs typeface="Amiri" pitchFamily="2" charset="-78"/>
               </a:rPr>
               <a:t>My plan</a:t>
             </a:r>
@@ -14585,8 +14300,7 @@
                   <a:srgbClr val="5A6472"/>
                 </a:solidFill>
                 <a:latin typeface="Calibri" pitchFamily="34" charset="0"/>
-                <a:ea typeface="Calibri" pitchFamily="34" charset="-122"/>
-                <a:cs typeface="Calibri" pitchFamily="34" charset="-120"/>
+                <a:cs typeface="Amiri" pitchFamily="2" charset="-78"/>
               </a:rPr>
               <a:t>______________</a:t>
             </a:r>
@@ -14624,8 +14338,7 @@
                   <a:srgbClr val="5A6472"/>
                 </a:solidFill>
                 <a:latin typeface="Calibri" pitchFamily="34" charset="0"/>
-                <a:ea typeface="Calibri" pitchFamily="34" charset="-122"/>
-                <a:cs typeface="Calibri" pitchFamily="34" charset="-120"/>
+                <a:cs typeface="Amiri" pitchFamily="2" charset="-78"/>
               </a:rPr>
               <a:t>Paper 1 Listening — keep annotating</a:t>
             </a:r>
@@ -14663,8 +14376,7 @@
                   <a:srgbClr val="5A6472"/>
                 </a:solidFill>
                 <a:latin typeface="Calibri" pitchFamily="34" charset="0"/>
-                <a:ea typeface="Calibri" pitchFamily="34" charset="-122"/>
-                <a:cs typeface="Calibri" pitchFamily="34" charset="-120"/>
+                <a:cs typeface="Amiri" pitchFamily="2" charset="-78"/>
               </a:rPr>
               <a:t>My highest-scoring paper (build on it)</a:t>
             </a:r>
@@ -14729,8 +14441,7 @@
                   <a:srgbClr val="FFFFFF"/>
                 </a:solidFill>
                 <a:latin typeface="Calibri" pitchFamily="34" charset="0"/>
-                <a:ea typeface="Calibri" pitchFamily="34" charset="-122"/>
-                <a:cs typeface="Calibri" pitchFamily="34" charset="-120"/>
+                <a:cs typeface="Amiri" pitchFamily="2" charset="-78"/>
               </a:rPr>
               <a:t>CORE</a:t>
             </a:r>
@@ -14795,8 +14506,7 @@
                   <a:srgbClr val="5A6472"/>
                 </a:solidFill>
                 <a:latin typeface="Calibri" pitchFamily="34" charset="0"/>
-                <a:ea typeface="Calibri" pitchFamily="34" charset="-122"/>
-                <a:cs typeface="Calibri" pitchFamily="34" charset="-120"/>
+                <a:cs typeface="Amiri" pitchFamily="2" charset="-78"/>
               </a:rPr>
               <a:t>______________</a:t>
             </a:r>
@@ -14834,8 +14544,7 @@
                   <a:srgbClr val="5A6472"/>
                 </a:solidFill>
                 <a:latin typeface="Calibri" pitchFamily="34" charset="0"/>
-                <a:ea typeface="Calibri" pitchFamily="34" charset="-122"/>
-                <a:cs typeface="Calibri" pitchFamily="34" charset="-120"/>
+                <a:cs typeface="Amiri" pitchFamily="2" charset="-78"/>
               </a:rPr>
               <a:t>Paper 4 Writing — the biggest gain</a:t>
             </a:r>
@@ -14873,8 +14582,7 @@
                   <a:srgbClr val="5A6472"/>
                 </a:solidFill>
                 <a:latin typeface="Calibri" pitchFamily="34" charset="0"/>
-                <a:ea typeface="Calibri" pitchFamily="34" charset="-122"/>
-                <a:cs typeface="Calibri" pitchFamily="34" charset="-120"/>
+                <a:cs typeface="Amiri" pitchFamily="2" charset="-78"/>
               </a:rPr>
               <a:t>My lowest-scoring paper (greatest opportunity)</a:t>
             </a:r>
@@ -14939,8 +14647,7 @@
                   <a:srgbClr val="FFFFFF"/>
                 </a:solidFill>
                 <a:latin typeface="Calibri" pitchFamily="34" charset="0"/>
-                <a:ea typeface="Calibri" pitchFamily="34" charset="-122"/>
-                <a:cs typeface="Calibri" pitchFamily="34" charset="-120"/>
+                <a:cs typeface="Amiri" pitchFamily="2" charset="-78"/>
               </a:rPr>
               <a:t>CORE</a:t>
             </a:r>
@@ -15005,8 +14712,7 @@
                   <a:srgbClr val="5A6472"/>
                 </a:solidFill>
                 <a:latin typeface="Calibri" pitchFamily="34" charset="0"/>
-                <a:ea typeface="Calibri" pitchFamily="34" charset="-122"/>
-                <a:cs typeface="Calibri" pitchFamily="34" charset="-120"/>
+                <a:cs typeface="Amiri" pitchFamily="2" charset="-78"/>
               </a:rPr>
               <a:t>______________</a:t>
             </a:r>
@@ -15044,8 +14750,7 @@
                   <a:srgbClr val="5A6472"/>
                 </a:solidFill>
                 <a:latin typeface="Calibri" pitchFamily="34" charset="0"/>
-                <a:ea typeface="Calibri" pitchFamily="34" charset="-122"/>
-                <a:cs typeface="Calibri" pitchFamily="34" charset="-120"/>
+                <a:cs typeface="Amiri" pitchFamily="2" charset="-78"/>
               </a:rPr>
               <a:t>the subjunctive fatḥa · Type 2 la-</a:t>
             </a:r>
@@ -15083,8 +14788,7 @@
                   <a:srgbClr val="5A6472"/>
                 </a:solidFill>
                 <a:latin typeface="Calibri" pitchFamily="34" charset="0"/>
-                <a:ea typeface="Calibri" pitchFamily="34" charset="-122"/>
-                <a:cs typeface="Calibri" pitchFamily="34" charset="-120"/>
+                <a:cs typeface="Amiri" pitchFamily="2" charset="-78"/>
               </a:rPr>
               <a:t>My two weakest grammar structures</a:t>
             </a:r>
@@ -15149,8 +14853,7 @@
                   <a:srgbClr val="5A6472"/>
                 </a:solidFill>
                 <a:latin typeface="Calibri" pitchFamily="34" charset="0"/>
-                <a:ea typeface="Calibri" pitchFamily="34" charset="-122"/>
-                <a:cs typeface="Calibri" pitchFamily="34" charset="-120"/>
+                <a:cs typeface="Amiri" pitchFamily="2" charset="-78"/>
               </a:rPr>
               <a:t>______________</a:t>
             </a:r>
@@ -15188,8 +14891,7 @@
                   <a:srgbClr val="5A6472"/>
                 </a:solidFill>
                 <a:latin typeface="Calibri" pitchFamily="34" charset="0"/>
-                <a:ea typeface="Calibri" pitchFamily="34" charset="-122"/>
-                <a:cs typeface="Calibri" pitchFamily="34" charset="-120"/>
+                <a:cs typeface="Amiri" pitchFamily="2" charset="-78"/>
               </a:rPr>
               <a:t>one timed essay every week until the exam</a:t>
             </a:r>
@@ -15227,8 +14929,7 @@
                   <a:srgbClr val="5A6472"/>
                 </a:solidFill>
                 <a:latin typeface="Calibri" pitchFamily="34" charset="0"/>
-                <a:ea typeface="Calibri" pitchFamily="34" charset="-122"/>
-                <a:cs typeface="Calibri" pitchFamily="34" charset="-120"/>
+                <a:cs typeface="Amiri" pitchFamily="2" charset="-78"/>
               </a:rPr>
               <a:t>My single most important revision action before the exam</a:t>
             </a:r>
@@ -15266,8 +14967,7 @@
                   <a:srgbClr val="1B3B6F"/>
                 </a:solidFill>
                 <a:latin typeface="Calibri" pitchFamily="34" charset="0"/>
-                <a:ea typeface="Calibri" pitchFamily="34" charset="-122"/>
-                <a:cs typeface="Calibri" pitchFamily="34" charset="-120"/>
+                <a:cs typeface="Amiri" pitchFamily="2" charset="-78"/>
               </a:rPr>
               <a:t>Stretch: put a date beside each action for the next two weeks.</a:t>
             </a:r>
@@ -15305,8 +15005,7 @@
                   <a:srgbClr val="8A93A0"/>
                 </a:solidFill>
                 <a:latin typeface="Calibri" pitchFamily="34" charset="0"/>
-                <a:ea typeface="Calibri" pitchFamily="34" charset="-122"/>
-                <a:cs typeface="Calibri" pitchFamily="34" charset="-120"/>
+                <a:cs typeface="Amiri" pitchFamily="2" charset="-78"/>
               </a:rPr>
               <a:t>14 / 18</a:t>
             </a:r>
@@ -15400,9 +15099,8 @@
                 <a:solidFill>
                   <a:srgbClr val="D4AF37"/>
                 </a:solidFill>
-                <a:latin typeface="Amiri" pitchFamily="34" charset="0"/>
-                <a:ea typeface="Amiri" pitchFamily="34" charset="-122"/>
-                <a:cs typeface="Amiri" pitchFamily="34" charset="-120"/>
+                <a:latin typeface="Amiri" pitchFamily="2" charset="-78"/>
+                <a:cs typeface="Amiri" pitchFamily="2" charset="-78"/>
               </a:rPr>
               <a:t>م</a:t>
             </a:r>
@@ -15440,8 +15138,7 @@
                   <a:srgbClr val="1B3B6F"/>
                 </a:solidFill>
                 <a:latin typeface="Cambria" pitchFamily="34" charset="0"/>
-                <a:ea typeface="Cambria" pitchFamily="34" charset="-122"/>
-                <a:cs typeface="Cambria" pitchFamily="34" charset="-120"/>
+                <a:cs typeface="Amiri" pitchFamily="2" charset="-78"/>
               </a:rPr>
               <a:t>Al Madina Online School</a:t>
             </a:r>
@@ -15479,8 +15176,7 @@
                   <a:srgbClr val="8A6D1E"/>
                 </a:solidFill>
                 <a:latin typeface="Calibri" pitchFamily="34" charset="0"/>
-                <a:ea typeface="Calibri" pitchFamily="34" charset="-122"/>
-                <a:cs typeface="Calibri" pitchFamily="34" charset="-120"/>
+                <a:cs typeface="Amiri" pitchFamily="2" charset="-78"/>
               </a:rPr>
               <a:t>ARABIC DEPARTMENT · MIFTAH ARABIC · IGCSE 0544</a:t>
             </a:r>
@@ -15545,8 +15241,7 @@
                   <a:srgbClr val="FFFFFF"/>
                 </a:solidFill>
                 <a:latin typeface="Calibri" pitchFamily="34" charset="0"/>
-                <a:ea typeface="Calibri" pitchFamily="34" charset="-122"/>
-                <a:cs typeface="Calibri" pitchFamily="34" charset="-120"/>
+                <a:cs typeface="Amiri" pitchFamily="2" charset="-78"/>
               </a:rPr>
               <a:t>P6-L11 · IGCSE Bridge</a:t>
             </a:r>
@@ -15611,8 +15306,7 @@
                   <a:srgbClr val="FFFFFF"/>
                 </a:solidFill>
                 <a:latin typeface="Calibri" pitchFamily="34" charset="0"/>
-                <a:ea typeface="Calibri" pitchFamily="34" charset="-122"/>
-                <a:cs typeface="Calibri" pitchFamily="34" charset="-120"/>
+                <a:cs typeface="Amiri" pitchFamily="2" charset="-78"/>
               </a:rPr>
               <a:t>FEEDBACK · 3 MIN</a:t>
             </a:r>
@@ -15650,8 +15344,7 @@
                   <a:srgbClr val="8A6D1E"/>
                 </a:solidFill>
                 <a:latin typeface="Calibri" pitchFamily="34" charset="0"/>
-                <a:ea typeface="Calibri" pitchFamily="34" charset="-122"/>
-                <a:cs typeface="Calibri" pitchFamily="34" charset="-120"/>
+                <a:cs typeface="Amiri" pitchFamily="2" charset="-78"/>
               </a:rPr>
               <a:t>FEEDBACK · THREE YEARS OF ARABIC (WEBSITE)</a:t>
             </a:r>
@@ -15689,8 +15382,7 @@
                   <a:srgbClr val="1B3B6F"/>
                 </a:solidFill>
                 <a:latin typeface="Cambria" pitchFamily="34" charset="0"/>
-                <a:ea typeface="Cambria" pitchFamily="34" charset="-122"/>
-                <a:cs typeface="Cambria" pitchFamily="34" charset="-120"/>
+                <a:cs typeface="Amiri" pitchFamily="2" charset="-78"/>
               </a:rPr>
               <a:t>What we know now that we did not know in F1</a:t>
             </a:r>
@@ -15727,9 +15419,8 @@
                 <a:solidFill>
                   <a:srgbClr val="8A6D1E"/>
                 </a:solidFill>
-                <a:latin typeface="Amiri" pitchFamily="34" charset="0"/>
-                <a:ea typeface="Amiri" pitchFamily="34" charset="-122"/>
-                <a:cs typeface="Amiri" pitchFamily="34" charset="-120"/>
+                <a:latin typeface="Amiri" pitchFamily="2" charset="-78"/>
+                <a:cs typeface="Amiri" pitchFamily="2" charset="-78"/>
               </a:rPr>
               <a:t>التَّأَمُّلُ</a:t>
             </a:r>
@@ -15767,8 +15458,7 @@
                   <a:srgbClr val="8A93A0"/>
                 </a:solidFill>
                 <a:latin typeface="Calibri" pitchFamily="34" charset="0"/>
-                <a:ea typeface="Calibri" pitchFamily="34" charset="-122"/>
-                <a:cs typeface="Calibri" pitchFamily="34" charset="-120"/>
+                <a:cs typeface="Amiri" pitchFamily="2" charset="-78"/>
               </a:rPr>
               <a:t>Miftah Arabic · Progression P6 · IGCSE Bridge · P6-L11</a:t>
             </a:r>
@@ -15831,8 +15521,7 @@
                   <a:srgbClr val="FFFFFF"/>
                 </a:solidFill>
                 <a:latin typeface="Calibri" pitchFamily="34" charset="0"/>
-                <a:ea typeface="Calibri" pitchFamily="34" charset="-122"/>
-                <a:cs typeface="Calibri" pitchFamily="34" charset="-120"/>
+                <a:cs typeface="Amiri" pitchFamily="2" charset="-78"/>
               </a:rPr>
               <a:t>Model ending</a:t>
             </a:r>
@@ -15870,8 +15559,7 @@
                   <a:srgbClr val="FFFFFF"/>
                 </a:solidFill>
                 <a:latin typeface="Calibri" pitchFamily="34" charset="0"/>
-                <a:ea typeface="Calibri" pitchFamily="34" charset="-122"/>
-                <a:cs typeface="Calibri" pitchFamily="34" charset="-120"/>
+                <a:cs typeface="Amiri" pitchFamily="2" charset="-78"/>
               </a:rPr>
               <a:t>Meaning</a:t>
             </a:r>
@@ -15909,8 +15597,7 @@
                   <a:srgbClr val="FFFFFF"/>
                 </a:solidFill>
                 <a:latin typeface="Calibri" pitchFamily="34" charset="0"/>
-                <a:ea typeface="Calibri" pitchFamily="34" charset="-122"/>
-                <a:cs typeface="Calibri" pitchFamily="34" charset="-120"/>
+                <a:cs typeface="Amiri" pitchFamily="2" charset="-78"/>
               </a:rPr>
               <a:t>Reflection frame (website)</a:t>
             </a:r>
@@ -15977,9 +15664,8 @@
                 <a:solidFill>
                   <a:srgbClr val="1B3B6F"/>
                 </a:solidFill>
-                <a:latin typeface="Amiri" pitchFamily="34" charset="0"/>
-                <a:ea typeface="Amiri" pitchFamily="34" charset="-122"/>
-                <a:cs typeface="Amiri" pitchFamily="34" charset="-120"/>
+                <a:latin typeface="Amiri" pitchFamily="2" charset="-78"/>
+                <a:cs typeface="Amiri" pitchFamily="2" charset="-78"/>
               </a:rPr>
               <a:t>لَوْ لَمْ أَتَعَلَّمِ العَرَبِيَّةَ، لَمَا فَهِمْتُ القُرْآنَ بِهٰذَا العُمْقِ.</a:t>
             </a:r>
@@ -16017,8 +15703,7 @@
                   <a:srgbClr val="5A6472"/>
                 </a:solidFill>
                 <a:latin typeface="Calibri" pitchFamily="34" charset="0"/>
-                <a:ea typeface="Calibri" pitchFamily="34" charset="-122"/>
-                <a:cs typeface="Calibri" pitchFamily="34" charset="-120"/>
+                <a:cs typeface="Amiri" pitchFamily="2" charset="-78"/>
               </a:rPr>
               <a:t>my most important Arabic sentence</a:t>
             </a:r>
@@ -16056,8 +15741,7 @@
                   <a:srgbClr val="5A6472"/>
                 </a:solidFill>
                 <a:latin typeface="Calibri" pitchFamily="34" charset="0"/>
-                <a:ea typeface="Calibri" pitchFamily="34" charset="-122"/>
-                <a:cs typeface="Calibri" pitchFamily="34" charset="-120"/>
+                <a:cs typeface="Amiri" pitchFamily="2" charset="-78"/>
               </a:rPr>
               <a:t>My most important Arabic sentence is…</a:t>
             </a:r>
@@ -16122,8 +15806,7 @@
                   <a:srgbClr val="5A6472"/>
                 </a:solidFill>
                 <a:latin typeface="Calibri" pitchFamily="34" charset="0"/>
-                <a:ea typeface="Calibri" pitchFamily="34" charset="-122"/>
-                <a:cs typeface="Calibri" pitchFamily="34" charset="-120"/>
+                <a:cs typeface="Amiri" pitchFamily="2" charset="-78"/>
               </a:rPr>
               <a:t>Paper 4 — the subjunctive fatḥa</a:t>
             </a:r>
@@ -16161,8 +15844,7 @@
                   <a:srgbClr val="5A6472"/>
                 </a:solidFill>
                 <a:latin typeface="Calibri" pitchFamily="34" charset="0"/>
-                <a:ea typeface="Calibri" pitchFamily="34" charset="-122"/>
-                <a:cs typeface="Calibri" pitchFamily="34" charset="-120"/>
+                <a:cs typeface="Amiri" pitchFamily="2" charset="-78"/>
               </a:rPr>
               <a:t>my final revision priority</a:t>
             </a:r>
@@ -16200,8 +15882,7 @@
                   <a:srgbClr val="5A6472"/>
                 </a:solidFill>
                 <a:latin typeface="Calibri" pitchFamily="34" charset="0"/>
-                <a:ea typeface="Calibri" pitchFamily="34" charset="-122"/>
-                <a:cs typeface="Calibri" pitchFamily="34" charset="-120"/>
+                <a:cs typeface="Amiri" pitchFamily="2" charset="-78"/>
               </a:rPr>
               <a:t>My final revision priority is…</a:t>
             </a:r>
@@ -16239,8 +15920,7 @@
                   <a:srgbClr val="1B3B6F"/>
                 </a:solidFill>
                 <a:latin typeface="Calibri" pitchFamily="34" charset="0"/>
-                <a:ea typeface="Calibri" pitchFamily="34" charset="-122"/>
-                <a:cs typeface="Calibri" pitchFamily="34" charset="-120"/>
+                <a:cs typeface="Amiri" pitchFamily="2" charset="-78"/>
               </a:rPr>
               <a:t>In F1 you could not read one Arabic letter. Today you read academic texts, write argumentative essays and speak on complex topics.</a:t>
             </a:r>
@@ -16278,8 +15958,7 @@
                   <a:srgbClr val="8A93A0"/>
                 </a:solidFill>
                 <a:latin typeface="Calibri" pitchFamily="34" charset="0"/>
-                <a:ea typeface="Calibri" pitchFamily="34" charset="-122"/>
-                <a:cs typeface="Calibri" pitchFamily="34" charset="-120"/>
+                <a:cs typeface="Amiri" pitchFamily="2" charset="-78"/>
               </a:rPr>
               <a:t>15 / 18</a:t>
             </a:r>
@@ -16373,9 +16052,8 @@
                 <a:solidFill>
                   <a:srgbClr val="D4AF37"/>
                 </a:solidFill>
-                <a:latin typeface="Amiri" pitchFamily="34" charset="0"/>
-                <a:ea typeface="Amiri" pitchFamily="34" charset="-122"/>
-                <a:cs typeface="Amiri" pitchFamily="34" charset="-120"/>
+                <a:latin typeface="Amiri" pitchFamily="2" charset="-78"/>
+                <a:cs typeface="Amiri" pitchFamily="2" charset="-78"/>
               </a:rPr>
               <a:t>م</a:t>
             </a:r>
@@ -16413,8 +16091,7 @@
                   <a:srgbClr val="1B3B6F"/>
                 </a:solidFill>
                 <a:latin typeface="Cambria" pitchFamily="34" charset="0"/>
-                <a:ea typeface="Cambria" pitchFamily="34" charset="-122"/>
-                <a:cs typeface="Cambria" pitchFamily="34" charset="-120"/>
+                <a:cs typeface="Amiri" pitchFamily="2" charset="-78"/>
               </a:rPr>
               <a:t>Al Madina Online School</a:t>
             </a:r>
@@ -16452,8 +16129,7 @@
                   <a:srgbClr val="8A6D1E"/>
                 </a:solidFill>
                 <a:latin typeface="Calibri" pitchFamily="34" charset="0"/>
-                <a:ea typeface="Calibri" pitchFamily="34" charset="-122"/>
-                <a:cs typeface="Calibri" pitchFamily="34" charset="-120"/>
+                <a:cs typeface="Amiri" pitchFamily="2" charset="-78"/>
               </a:rPr>
               <a:t>ARABIC DEPARTMENT · MIFTAH ARABIC · IGCSE 0544</a:t>
             </a:r>
@@ -16518,8 +16194,7 @@
                   <a:srgbClr val="FFFFFF"/>
                 </a:solidFill>
                 <a:latin typeface="Calibri" pitchFamily="34" charset="0"/>
-                <a:ea typeface="Calibri" pitchFamily="34" charset="-122"/>
-                <a:cs typeface="Calibri" pitchFamily="34" charset="-120"/>
+                <a:cs typeface="Amiri" pitchFamily="2" charset="-78"/>
               </a:rPr>
               <a:t>P6-L11 · IGCSE Bridge</a:t>
             </a:r>
@@ -16584,8 +16259,7 @@
                   <a:srgbClr val="FFFFFF"/>
                 </a:solidFill>
                 <a:latin typeface="Calibri" pitchFamily="34" charset="0"/>
-                <a:ea typeface="Calibri" pitchFamily="34" charset="-122"/>
-                <a:cs typeface="Calibri" pitchFamily="34" charset="-120"/>
+                <a:cs typeface="Amiri" pitchFamily="2" charset="-78"/>
               </a:rPr>
               <a:t>FEEDBACK · 1 MIN</a:t>
             </a:r>
@@ -16623,8 +16297,7 @@
                   <a:srgbClr val="8A6D1E"/>
                 </a:solidFill>
                 <a:latin typeface="Calibri" pitchFamily="34" charset="0"/>
-                <a:ea typeface="Calibri" pitchFamily="34" charset="-122"/>
-                <a:cs typeface="Calibri" pitchFamily="34" charset="-120"/>
+                <a:cs typeface="Amiri" pitchFamily="2" charset="-78"/>
               </a:rPr>
               <a:t>FEEDBACK · SUCCESS CRITERIA</a:t>
             </a:r>
@@ -16662,8 +16335,7 @@
                   <a:srgbClr val="1B3B6F"/>
                 </a:solidFill>
                 <a:latin typeface="Cambria" pitchFamily="34" charset="0"/>
-                <a:ea typeface="Cambria" pitchFamily="34" charset="-122"/>
-                <a:cs typeface="Cambria" pitchFamily="34" charset="-120"/>
+                <a:cs typeface="Amiri" pitchFamily="2" charset="-78"/>
               </a:rPr>
               <a:t>Check your work</a:t>
             </a:r>
@@ -16700,9 +16372,8 @@
                 <a:solidFill>
                   <a:srgbClr val="8A6D1E"/>
                 </a:solidFill>
-                <a:latin typeface="Amiri" pitchFamily="34" charset="0"/>
-                <a:ea typeface="Amiri" pitchFamily="34" charset="-122"/>
-                <a:cs typeface="Amiri" pitchFamily="34" charset="-120"/>
+                <a:latin typeface="Amiri" pitchFamily="2" charset="-78"/>
+                <a:cs typeface="Amiri" pitchFamily="2" charset="-78"/>
               </a:rPr>
               <a:t>قَيِّمْ عَمَلَكَ</a:t>
             </a:r>
@@ -16740,8 +16411,7 @@
                   <a:srgbClr val="8A93A0"/>
                 </a:solidFill>
                 <a:latin typeface="Calibri" pitchFamily="34" charset="0"/>
-                <a:ea typeface="Calibri" pitchFamily="34" charset="-122"/>
-                <a:cs typeface="Calibri" pitchFamily="34" charset="-120"/>
+                <a:cs typeface="Amiri" pitchFamily="2" charset="-78"/>
               </a:rPr>
               <a:t>Miftah Arabic · Progression P6 · IGCSE Bridge · P6-L11</a:t>
             </a:r>
@@ -16838,8 +16508,7 @@
                   <a:srgbClr val="1F2A37"/>
                 </a:solidFill>
                 <a:latin typeface="Calibri" pitchFamily="34" charset="0"/>
-                <a:ea typeface="Calibri" pitchFamily="34" charset="-122"/>
-                <a:cs typeface="Calibri" pitchFamily="34" charset="-120"/>
+                <a:cs typeface="Amiri" pitchFamily="2" charset="-78"/>
               </a:rPr>
               <a:t>I know my mock total and predicted grade.</a:t>
             </a:r>
@@ -16904,8 +16573,7 @@
                   <a:srgbClr val="FFFFFF"/>
                 </a:solidFill>
                 <a:latin typeface="Calibri" pitchFamily="34" charset="0"/>
-                <a:ea typeface="Calibri" pitchFamily="34" charset="-122"/>
-                <a:cs typeface="Calibri" pitchFamily="34" charset="-120"/>
+                <a:cs typeface="Amiri" pitchFamily="2" charset="-78"/>
               </a:rPr>
               <a:t>CORE</a:t>
             </a:r>
@@ -17002,8 +16670,7 @@
                   <a:srgbClr val="1F2A37"/>
                 </a:solidFill>
                 <a:latin typeface="Calibri" pitchFamily="34" charset="0"/>
-                <a:ea typeface="Calibri" pitchFamily="34" charset="-122"/>
-                <a:cs typeface="Calibri" pitchFamily="34" charset="-120"/>
+                <a:cs typeface="Amiri" pitchFamily="2" charset="-78"/>
               </a:rPr>
               <a:t>I can state and correct the three most common errors.</a:t>
             </a:r>
@@ -17068,8 +16735,7 @@
                   <a:srgbClr val="FFFFFF"/>
                 </a:solidFill>
                 <a:latin typeface="Calibri" pitchFamily="34" charset="0"/>
-                <a:ea typeface="Calibri" pitchFamily="34" charset="-122"/>
-                <a:cs typeface="Calibri" pitchFamily="34" charset="-120"/>
+                <a:cs typeface="Amiri" pitchFamily="2" charset="-78"/>
               </a:rPr>
               <a:t>DEVELOP</a:t>
             </a:r>
@@ -17166,8 +16832,7 @@
                   <a:srgbClr val="1F2A37"/>
                 </a:solidFill>
                 <a:latin typeface="Calibri" pitchFamily="34" charset="0"/>
-                <a:ea typeface="Calibri" pitchFamily="34" charset="-122"/>
-                <a:cs typeface="Calibri" pitchFamily="34" charset="-120"/>
+                <a:cs typeface="Amiri" pitchFamily="2" charset="-78"/>
               </a:rPr>
               <a:t>I have revised my two weakest structures with examples.</a:t>
             </a:r>
@@ -17232,8 +16897,7 @@
                   <a:srgbClr val="FFFFFF"/>
                 </a:solidFill>
                 <a:latin typeface="Calibri" pitchFamily="34" charset="0"/>
-                <a:ea typeface="Calibri" pitchFamily="34" charset="-122"/>
-                <a:cs typeface="Calibri" pitchFamily="34" charset="-120"/>
+                <a:cs typeface="Amiri" pitchFamily="2" charset="-78"/>
               </a:rPr>
               <a:t>STRETCH</a:t>
             </a:r>
@@ -17330,8 +16994,7 @@
                   <a:srgbClr val="1F2A37"/>
                 </a:solidFill>
                 <a:latin typeface="Calibri" pitchFamily="34" charset="0"/>
-                <a:ea typeface="Calibri" pitchFamily="34" charset="-122"/>
-                <a:cs typeface="Calibri" pitchFamily="34" charset="-120"/>
+                <a:cs typeface="Amiri" pitchFamily="2" charset="-78"/>
               </a:rPr>
               <a:t>My readiness checklist shows what to do before the exam.</a:t>
             </a:r>
@@ -17396,8 +17059,7 @@
                   <a:srgbClr val="FFFFFF"/>
                 </a:solidFill>
                 <a:latin typeface="Calibri" pitchFamily="34" charset="0"/>
-                <a:ea typeface="Calibri" pitchFamily="34" charset="-122"/>
-                <a:cs typeface="Calibri" pitchFamily="34" charset="-120"/>
+                <a:cs typeface="Amiri" pitchFamily="2" charset="-78"/>
               </a:rPr>
               <a:t>DEVELOP</a:t>
             </a:r>
@@ -17469,8 +17131,7 @@
                   <a:srgbClr val="2E8B57"/>
                 </a:solidFill>
                 <a:latin typeface="Calibri" pitchFamily="34" charset="0"/>
-                <a:ea typeface="Calibri" pitchFamily="34" charset="-122"/>
-                <a:cs typeface="Calibri" pitchFamily="34" charset="-120"/>
+                <a:cs typeface="Amiri" pitchFamily="2" charset="-78"/>
               </a:rPr>
               <a:t>WWW</a:t>
             </a:r>
@@ -17486,8 +17147,7 @@
                   <a:srgbClr val="1F2A37"/>
                 </a:solidFill>
                 <a:latin typeface="Calibri" pitchFamily="34" charset="0"/>
-                <a:ea typeface="Calibri" pitchFamily="34" charset="-122"/>
-                <a:cs typeface="Calibri" pitchFamily="34" charset="-120"/>
+                <a:cs typeface="Amiri" pitchFamily="2" charset="-78"/>
               </a:rPr>
               <a:t>What went well? One thing you did accurately.</a:t>
             </a:r>
@@ -17559,8 +17219,7 @@
                   <a:srgbClr val="C9780A"/>
                 </a:solidFill>
                 <a:latin typeface="Calibri" pitchFamily="34" charset="0"/>
-                <a:ea typeface="Calibri" pitchFamily="34" charset="-122"/>
-                <a:cs typeface="Calibri" pitchFamily="34" charset="-120"/>
+                <a:cs typeface="Amiri" pitchFamily="2" charset="-78"/>
               </a:rPr>
               <a:t>EBI</a:t>
             </a:r>
@@ -17576,8 +17235,7 @@
                   <a:srgbClr val="1F2A37"/>
                 </a:solidFill>
                 <a:latin typeface="Calibri" pitchFamily="34" charset="0"/>
-                <a:ea typeface="Calibri" pitchFamily="34" charset="-122"/>
-                <a:cs typeface="Calibri" pitchFamily="34" charset="-120"/>
+                <a:cs typeface="Amiri" pitchFamily="2" charset="-78"/>
               </a:rPr>
               <a:t>Even better if… One thing you will fix or add.</a:t>
             </a:r>
@@ -17615,8 +17273,7 @@
                   <a:srgbClr val="8A93A0"/>
                 </a:solidFill>
                 <a:latin typeface="Calibri" pitchFamily="34" charset="0"/>
-                <a:ea typeface="Calibri" pitchFamily="34" charset="-122"/>
-                <a:cs typeface="Calibri" pitchFamily="34" charset="-120"/>
+                <a:cs typeface="Amiri" pitchFamily="2" charset="-78"/>
               </a:rPr>
               <a:t>16 / 18</a:t>
             </a:r>
@@ -17710,9 +17367,8 @@
                 <a:solidFill>
                   <a:srgbClr val="D4AF37"/>
                 </a:solidFill>
-                <a:latin typeface="Amiri" pitchFamily="34" charset="0"/>
-                <a:ea typeface="Amiri" pitchFamily="34" charset="-122"/>
-                <a:cs typeface="Amiri" pitchFamily="34" charset="-120"/>
+                <a:latin typeface="Amiri" pitchFamily="2" charset="-78"/>
+                <a:cs typeface="Amiri" pitchFamily="2" charset="-78"/>
               </a:rPr>
               <a:t>م</a:t>
             </a:r>
@@ -17750,8 +17406,7 @@
                   <a:srgbClr val="1B3B6F"/>
                 </a:solidFill>
                 <a:latin typeface="Cambria" pitchFamily="34" charset="0"/>
-                <a:ea typeface="Cambria" pitchFamily="34" charset="-122"/>
-                <a:cs typeface="Cambria" pitchFamily="34" charset="-120"/>
+                <a:cs typeface="Amiri" pitchFamily="2" charset="-78"/>
               </a:rPr>
               <a:t>Al Madina Online School</a:t>
             </a:r>
@@ -17789,8 +17444,7 @@
                   <a:srgbClr val="8A6D1E"/>
                 </a:solidFill>
                 <a:latin typeface="Calibri" pitchFamily="34" charset="0"/>
-                <a:ea typeface="Calibri" pitchFamily="34" charset="-122"/>
-                <a:cs typeface="Calibri" pitchFamily="34" charset="-120"/>
+                <a:cs typeface="Amiri" pitchFamily="2" charset="-78"/>
               </a:rPr>
               <a:t>ARABIC DEPARTMENT · MIFTAH ARABIC · IGCSE 0544</a:t>
             </a:r>
@@ -17855,8 +17509,7 @@
                   <a:srgbClr val="FFFFFF"/>
                 </a:solidFill>
                 <a:latin typeface="Calibri" pitchFamily="34" charset="0"/>
-                <a:ea typeface="Calibri" pitchFamily="34" charset="-122"/>
-                <a:cs typeface="Calibri" pitchFamily="34" charset="-120"/>
+                <a:cs typeface="Amiri" pitchFamily="2" charset="-78"/>
               </a:rPr>
               <a:t>P6-L11 · IGCSE Bridge</a:t>
             </a:r>
@@ -17921,8 +17574,7 @@
                   <a:srgbClr val="FFFFFF"/>
                 </a:solidFill>
                 <a:latin typeface="Calibri" pitchFamily="34" charset="0"/>
-                <a:ea typeface="Calibri" pitchFamily="34" charset="-122"/>
-                <a:cs typeface="Calibri" pitchFamily="34" charset="-120"/>
+                <a:cs typeface="Amiri" pitchFamily="2" charset="-78"/>
               </a:rPr>
               <a:t>PREPARATION · 2 MIN</a:t>
             </a:r>
@@ -17960,8 +17612,7 @@
                   <a:srgbClr val="C45A3C"/>
                 </a:solidFill>
                 <a:latin typeface="Calibri" pitchFamily="34" charset="0"/>
-                <a:ea typeface="Calibri" pitchFamily="34" charset="-122"/>
-                <a:cs typeface="Calibri" pitchFamily="34" charset="-120"/>
+                <a:cs typeface="Amiri" pitchFamily="2" charset="-78"/>
               </a:rPr>
               <a:t>PREPARATION FOR NEXT LESSON · ABOUT 10 MINUTES</a:t>
             </a:r>
@@ -17999,8 +17650,7 @@
                   <a:srgbClr val="1B3B6F"/>
                 </a:solidFill>
                 <a:latin typeface="Cambria" pitchFamily="34" charset="0"/>
-                <a:ea typeface="Cambria" pitchFamily="34" charset="-122"/>
-                <a:cs typeface="Cambria" pitchFamily="34" charset="-120"/>
+                <a:cs typeface="Amiri" pitchFamily="2" charset="-78"/>
               </a:rPr>
               <a:t>Before P6-L12: get ready at home</a:t>
             </a:r>
@@ -18037,9 +17687,8 @@
                 <a:solidFill>
                   <a:srgbClr val="8A6D1E"/>
                 </a:solidFill>
-                <a:latin typeface="Amiri" pitchFamily="34" charset="0"/>
-                <a:ea typeface="Amiri" pitchFamily="34" charset="-122"/>
-                <a:cs typeface="Amiri" pitchFamily="34" charset="-120"/>
+                <a:latin typeface="Amiri" pitchFamily="2" charset="-78"/>
+                <a:cs typeface="Amiri" pitchFamily="2" charset="-78"/>
               </a:rPr>
               <a:t>التَّحْضِيرُ لِلدَّرْسِ القَادِمِ</a:t>
             </a:r>
@@ -18077,8 +17726,7 @@
                   <a:srgbClr val="8A93A0"/>
                 </a:solidFill>
                 <a:latin typeface="Calibri" pitchFamily="34" charset="0"/>
-                <a:ea typeface="Calibri" pitchFamily="34" charset="-122"/>
-                <a:cs typeface="Calibri" pitchFamily="34" charset="-120"/>
+                <a:cs typeface="Amiri" pitchFamily="2" charset="-78"/>
               </a:rPr>
               <a:t>Miftah Arabic · Progression P6 · IGCSE Bridge · P6-L11</a:t>
             </a:r>
@@ -18199,8 +17847,7 @@
                   <a:srgbClr val="C45A3C"/>
                 </a:solidFill>
                 <a:latin typeface="Calibri" pitchFamily="34" charset="0"/>
-                <a:ea typeface="Calibri" pitchFamily="34" charset="-122"/>
-                <a:cs typeface="Calibri" pitchFamily="34" charset="-120"/>
+                <a:cs typeface="Amiri" pitchFamily="2" charset="-78"/>
               </a:rPr>
               <a:t>LEARN THESE 5 WORDS</a:t>
             </a:r>
@@ -18216,8 +17863,7 @@
                   <a:srgbClr val="5A6472"/>
                 </a:solidFill>
                 <a:latin typeface="Calibri" pitchFamily="34" charset="0"/>
-                <a:ea typeface="Calibri" pitchFamily="34" charset="-122"/>
-                <a:cs typeface="Calibri" pitchFamily="34" charset="-120"/>
+                <a:cs typeface="Amiri" pitchFamily="2" charset="-78"/>
               </a:rPr>
               <a:t>for P6-L12 · Celebration — Reflection and the Road Ahead</a:t>
             </a:r>
@@ -18254,9 +17900,8 @@
                 <a:solidFill>
                   <a:srgbClr val="1B3B6F"/>
                 </a:solidFill>
-                <a:latin typeface="Amiri" pitchFamily="34" charset="0"/>
-                <a:ea typeface="Amiri" pitchFamily="34" charset="-122"/>
-                <a:cs typeface="Amiri" pitchFamily="34" charset="-120"/>
+                <a:latin typeface="Amiri" pitchFamily="2" charset="-78"/>
+                <a:cs typeface="Amiri" pitchFamily="2" charset="-78"/>
               </a:rPr>
               <a:t>الاحْتِفَالُ</a:t>
             </a:r>
@@ -18294,8 +17939,7 @@
                   <a:srgbClr val="1F2A37"/>
                 </a:solidFill>
                 <a:latin typeface="Calibri" pitchFamily="34" charset="0"/>
-                <a:ea typeface="Calibri" pitchFamily="34" charset="-122"/>
-                <a:cs typeface="Calibri" pitchFamily="34" charset="-120"/>
+                <a:cs typeface="Amiri" pitchFamily="2" charset="-78"/>
               </a:rPr>
               <a:t>celebration</a:t>
             </a:r>
@@ -18308,8 +17952,7 @@
                   <a:srgbClr val="5A6472"/>
                 </a:solidFill>
                 <a:latin typeface="Calibri" pitchFamily="34" charset="0"/>
-                <a:ea typeface="Calibri" pitchFamily="34" charset="-122"/>
-                <a:cs typeface="Calibri" pitchFamily="34" charset="-120"/>
+                <a:cs typeface="Amiri" pitchFamily="2" charset="-78"/>
               </a:rPr>
               <a:t>  pl. احْتِفَالَاتٌ</a:t>
             </a:r>
@@ -18346,9 +17989,8 @@
                 <a:solidFill>
                   <a:srgbClr val="1B3B6F"/>
                 </a:solidFill>
-                <a:latin typeface="Amiri" pitchFamily="34" charset="0"/>
-                <a:ea typeface="Amiri" pitchFamily="34" charset="-122"/>
-                <a:cs typeface="Amiri" pitchFamily="34" charset="-120"/>
+                <a:latin typeface="Amiri" pitchFamily="2" charset="-78"/>
+                <a:cs typeface="Amiri" pitchFamily="2" charset="-78"/>
               </a:rPr>
               <a:t>الإِنْجَازُ</a:t>
             </a:r>
@@ -18386,8 +18028,7 @@
                   <a:srgbClr val="1F2A37"/>
                 </a:solidFill>
                 <a:latin typeface="Calibri" pitchFamily="34" charset="0"/>
-                <a:ea typeface="Calibri" pitchFamily="34" charset="-122"/>
-                <a:cs typeface="Calibri" pitchFamily="34" charset="-120"/>
+                <a:cs typeface="Amiri" pitchFamily="2" charset="-78"/>
               </a:rPr>
               <a:t>achievement</a:t>
             </a:r>
@@ -18400,8 +18041,7 @@
                   <a:srgbClr val="5A6472"/>
                 </a:solidFill>
                 <a:latin typeface="Calibri" pitchFamily="34" charset="0"/>
-                <a:ea typeface="Calibri" pitchFamily="34" charset="-122"/>
-                <a:cs typeface="Calibri" pitchFamily="34" charset="-120"/>
+                <a:cs typeface="Amiri" pitchFamily="2" charset="-78"/>
               </a:rPr>
               <a:t>  pl. إِنْجَازَاتٌ</a:t>
             </a:r>
@@ -18438,9 +18078,8 @@
                 <a:solidFill>
                   <a:srgbClr val="1B3B6F"/>
                 </a:solidFill>
-                <a:latin typeface="Amiri" pitchFamily="34" charset="0"/>
-                <a:ea typeface="Amiri" pitchFamily="34" charset="-122"/>
-                <a:cs typeface="Amiri" pitchFamily="34" charset="-120"/>
+                <a:latin typeface="Amiri" pitchFamily="2" charset="-78"/>
+                <a:cs typeface="Amiri" pitchFamily="2" charset="-78"/>
               </a:rPr>
               <a:t>الرِّحْلَةُ</a:t>
             </a:r>
@@ -18478,8 +18117,7 @@
                   <a:srgbClr val="1F2A37"/>
                 </a:solidFill>
                 <a:latin typeface="Calibri" pitchFamily="34" charset="0"/>
-                <a:ea typeface="Calibri" pitchFamily="34" charset="-122"/>
-                <a:cs typeface="Calibri" pitchFamily="34" charset="-120"/>
+                <a:cs typeface="Amiri" pitchFamily="2" charset="-78"/>
               </a:rPr>
               <a:t>the journey</a:t>
             </a:r>
@@ -18492,8 +18130,7 @@
                   <a:srgbClr val="5A6472"/>
                 </a:solidFill>
                 <a:latin typeface="Calibri" pitchFamily="34" charset="0"/>
-                <a:ea typeface="Calibri" pitchFamily="34" charset="-122"/>
-                <a:cs typeface="Calibri" pitchFamily="34" charset="-120"/>
+                <a:cs typeface="Amiri" pitchFamily="2" charset="-78"/>
               </a:rPr>
               <a:t>  pl. رِحْلَاتٌ</a:t>
             </a:r>
@@ -18530,9 +18167,8 @@
                 <a:solidFill>
                   <a:srgbClr val="1B3B6F"/>
                 </a:solidFill>
-                <a:latin typeface="Amiri" pitchFamily="34" charset="0"/>
-                <a:ea typeface="Amiri" pitchFamily="34" charset="-122"/>
-                <a:cs typeface="Amiri" pitchFamily="34" charset="-120"/>
+                <a:latin typeface="Amiri" pitchFamily="2" charset="-78"/>
+                <a:cs typeface="Amiri" pitchFamily="2" charset="-78"/>
               </a:rPr>
               <a:t>الطُّمُوحُ</a:t>
             </a:r>
@@ -18570,8 +18206,7 @@
                   <a:srgbClr val="1F2A37"/>
                 </a:solidFill>
                 <a:latin typeface="Calibri" pitchFamily="34" charset="0"/>
-                <a:ea typeface="Calibri" pitchFamily="34" charset="-122"/>
-                <a:cs typeface="Calibri" pitchFamily="34" charset="-120"/>
+                <a:cs typeface="Amiri" pitchFamily="2" charset="-78"/>
               </a:rPr>
               <a:t>ambition</a:t>
             </a:r>
@@ -18584,8 +18219,7 @@
                   <a:srgbClr val="5A6472"/>
                 </a:solidFill>
                 <a:latin typeface="Calibri" pitchFamily="34" charset="0"/>
-                <a:ea typeface="Calibri" pitchFamily="34" charset="-122"/>
-                <a:cs typeface="Calibri" pitchFamily="34" charset="-120"/>
+                <a:cs typeface="Amiri" pitchFamily="2" charset="-78"/>
               </a:rPr>
               <a:t>  —</a:t>
             </a:r>
@@ -18622,9 +18256,8 @@
                 <a:solidFill>
                   <a:srgbClr val="1B3B6F"/>
                 </a:solidFill>
-                <a:latin typeface="Amiri" pitchFamily="34" charset="0"/>
-                <a:ea typeface="Amiri" pitchFamily="34" charset="-122"/>
-                <a:cs typeface="Amiri" pitchFamily="34" charset="-120"/>
+                <a:latin typeface="Amiri" pitchFamily="2" charset="-78"/>
+                <a:cs typeface="Amiri" pitchFamily="2" charset="-78"/>
               </a:rPr>
               <a:t>الطَّرِيقُ إِلَى الأَمَامِ</a:t>
             </a:r>
@@ -18662,8 +18295,7 @@
                   <a:srgbClr val="1F2A37"/>
                 </a:solidFill>
                 <a:latin typeface="Calibri" pitchFamily="34" charset="0"/>
-                <a:ea typeface="Calibri" pitchFamily="34" charset="-122"/>
-                <a:cs typeface="Calibri" pitchFamily="34" charset="-120"/>
+                <a:cs typeface="Amiri" pitchFamily="2" charset="-78"/>
               </a:rPr>
               <a:t>the road ahead</a:t>
             </a:r>
@@ -18676,8 +18308,7 @@
                   <a:srgbClr val="5A6472"/>
                 </a:solidFill>
                 <a:latin typeface="Calibri" pitchFamily="34" charset="0"/>
-                <a:ea typeface="Calibri" pitchFamily="34" charset="-122"/>
-                <a:cs typeface="Calibri" pitchFamily="34" charset="-120"/>
+                <a:cs typeface="Amiri" pitchFamily="2" charset="-78"/>
               </a:rPr>
               <a:t>  pl. طُرُقٌ</a:t>
             </a:r>
@@ -18715,8 +18346,7 @@
                   <a:srgbClr val="C45A3C"/>
                 </a:solidFill>
                 <a:latin typeface="Calibri" pitchFamily="34" charset="0"/>
-                <a:ea typeface="Calibri" pitchFamily="34" charset="-122"/>
-                <a:cs typeface="Calibri" pitchFamily="34" charset="-120"/>
+                <a:cs typeface="Amiri" pitchFamily="2" charset="-78"/>
               </a:rPr>
               <a:t>AND ANSWER ONE QUESTION</a:t>
             </a:r>
@@ -18754,8 +18384,7 @@
                   <a:srgbClr val="1F2A37"/>
                 </a:solidFill>
                 <a:latin typeface="Calibri" pitchFamily="34" charset="0"/>
-                <a:ea typeface="Calibri" pitchFamily="34" charset="-122"/>
-                <a:cs typeface="Calibri" pitchFamily="34" charset="-120"/>
+                <a:cs typeface="Amiri" pitchFamily="2" charset="-78"/>
               </a:rPr>
               <a:t>Write the most beautiful Arabic sentence you can — it will go on your certificate.</a:t>
             </a:r>
@@ -18795,9 +18424,8 @@
                 <a:solidFill>
                   <a:srgbClr val="1B3B6F"/>
                 </a:solidFill>
-                <a:latin typeface="Amiri" pitchFamily="34" charset="0"/>
-                <a:ea typeface="Amiri" pitchFamily="34" charset="-122"/>
-                <a:cs typeface="Amiri" pitchFamily="34" charset="-120"/>
+                <a:latin typeface="Amiri" pitchFamily="2" charset="-78"/>
+                <a:cs typeface="Amiri" pitchFamily="2" charset="-78"/>
               </a:rPr>
               <a:t>فِي الصَّفِّ الأَوَّلِ كُنْتُ ______ ، أَمَّا اليَوْمَ فَأَسْتَطِيعُ أَنْ ______ .</a:t>
             </a:r>
@@ -18835,8 +18463,7 @@
                   <a:srgbClr val="1B3B6F"/>
                 </a:solidFill>
                 <a:latin typeface="Calibri" pitchFamily="34" charset="0"/>
-                <a:ea typeface="Calibri" pitchFamily="34" charset="-122"/>
-                <a:cs typeface="Calibri" pitchFamily="34" charset="-120"/>
+                <a:cs typeface="Amiri" pitchFamily="2" charset="-78"/>
               </a:rPr>
               <a:t>HOMEWORK — CHOOSE YOUR ROUTE</a:t>
             </a:r>
@@ -18935,8 +18562,7 @@
                   <a:srgbClr val="FFFFFF"/>
                 </a:solidFill>
                 <a:latin typeface="Calibri" pitchFamily="34" charset="0"/>
-                <a:ea typeface="Calibri" pitchFamily="34" charset="-122"/>
-                <a:cs typeface="Calibri" pitchFamily="34" charset="-120"/>
+                <a:cs typeface="Amiri" pitchFamily="2" charset="-78"/>
               </a:rPr>
               <a:t>CORE</a:t>
             </a:r>
@@ -18974,8 +18600,7 @@
                   <a:srgbClr val="1F2A37"/>
                 </a:solidFill>
                 <a:latin typeface="Calibri" pitchFamily="34" charset="0"/>
-                <a:ea typeface="Calibri" pitchFamily="34" charset="-122"/>
-                <a:cs typeface="Calibri" pitchFamily="34" charset="-120"/>
+                <a:cs typeface="Amiri" pitchFamily="2" charset="-78"/>
               </a:rPr>
               <a:t>Do one revision action from your plan; learn the five words.</a:t>
             </a:r>
@@ -19074,8 +18699,7 @@
                   <a:srgbClr val="FFFFFF"/>
                 </a:solidFill>
                 <a:latin typeface="Calibri" pitchFamily="34" charset="0"/>
-                <a:ea typeface="Calibri" pitchFamily="34" charset="-122"/>
-                <a:cs typeface="Calibri" pitchFamily="34" charset="-120"/>
+                <a:cs typeface="Amiri" pitchFamily="2" charset="-78"/>
               </a:rPr>
               <a:t>DEVELOP</a:t>
             </a:r>
@@ -19113,8 +18737,7 @@
                   <a:srgbClr val="1F2A37"/>
                 </a:solidFill>
                 <a:latin typeface="Calibri" pitchFamily="34" charset="0"/>
-                <a:ea typeface="Calibri" pitchFamily="34" charset="-122"/>
-                <a:cs typeface="Calibri" pitchFamily="34" charset="-120"/>
+                <a:cs typeface="Amiri" pitchFamily="2" charset="-78"/>
               </a:rPr>
               <a:t>Do two revision actions and re-test the checklist; learn the five words.</a:t>
             </a:r>
@@ -19213,8 +18836,7 @@
                   <a:srgbClr val="FFFFFF"/>
                 </a:solidFill>
                 <a:latin typeface="Calibri" pitchFamily="34" charset="0"/>
-                <a:ea typeface="Calibri" pitchFamily="34" charset="-122"/>
-                <a:cs typeface="Calibri" pitchFamily="34" charset="-120"/>
+                <a:cs typeface="Amiri" pitchFamily="2" charset="-78"/>
               </a:rPr>
               <a:t>STRETCH</a:t>
             </a:r>
@@ -19252,8 +18874,7 @@
                   <a:srgbClr val="1F2A37"/>
                 </a:solidFill>
                 <a:latin typeface="Calibri" pitchFamily="34" charset="0"/>
-                <a:ea typeface="Calibri" pitchFamily="34" charset="-122"/>
-                <a:cs typeface="Calibri" pitchFamily="34" charset="-120"/>
+                <a:cs typeface="Amiri" pitchFamily="2" charset="-78"/>
               </a:rPr>
               <a:t>Follow day 1 of your dated plan; draft your certificate sentence; learn the five words.</a:t>
             </a:r>
@@ -19291,8 +18912,7 @@
                   <a:srgbClr val="8A93A0"/>
                 </a:solidFill>
                 <a:latin typeface="Calibri" pitchFamily="34" charset="0"/>
-                <a:ea typeface="Calibri" pitchFamily="34" charset="-122"/>
-                <a:cs typeface="Calibri" pitchFamily="34" charset="-120"/>
+                <a:cs typeface="Amiri" pitchFamily="2" charset="-78"/>
               </a:rPr>
               <a:t>17 / 18</a:t>
             </a:r>
@@ -19436,8 +19056,7 @@
                   <a:srgbClr val="D4AF37"/>
                 </a:solidFill>
                 <a:latin typeface="Calibri" pitchFamily="34" charset="0"/>
-                <a:ea typeface="Calibri" pitchFamily="34" charset="-122"/>
-                <a:cs typeface="Calibri" pitchFamily="34" charset="-120"/>
+                <a:cs typeface="Amiri" pitchFamily="2" charset="-78"/>
               </a:rPr>
               <a:t>P6-L11 COMPLETE</a:t>
             </a:r>
@@ -19474,9 +19093,8 @@
                 <a:solidFill>
                   <a:srgbClr val="FFFFFF"/>
                 </a:solidFill>
-                <a:latin typeface="Amiri" pitchFamily="34" charset="0"/>
-                <a:ea typeface="Amiri" pitchFamily="34" charset="-122"/>
-                <a:cs typeface="Amiri" pitchFamily="34" charset="-120"/>
+                <a:latin typeface="Amiri" pitchFamily="2" charset="-78"/>
+                <a:cs typeface="Amiri" pitchFamily="2" charset="-78"/>
               </a:rPr>
               <a:t>أَحْسَنْتُمْ! إِلَى اللِّقَاءِ</a:t>
             </a:r>
@@ -19514,8 +19132,7 @@
                   <a:srgbClr val="C6D2E6"/>
                 </a:solidFill>
                 <a:latin typeface="Calibri" pitchFamily="34" charset="0"/>
-                <a:ea typeface="Calibri" pitchFamily="34" charset="-122"/>
-                <a:cs typeface="Calibri" pitchFamily="34" charset="-120"/>
+                <a:cs typeface="Amiri" pitchFamily="2" charset="-78"/>
               </a:rPr>
               <a:t>Well done — see you next lesson.</a:t>
             </a:r>
@@ -19553,8 +19170,7 @@
                   <a:srgbClr val="D4AF37"/>
                 </a:solidFill>
                 <a:latin typeface="Calibri" pitchFamily="34" charset="0"/>
-                <a:ea typeface="Calibri" pitchFamily="34" charset="-122"/>
-                <a:cs typeface="Calibri" pitchFamily="34" charset="-120"/>
+                <a:cs typeface="Amiri" pitchFamily="2" charset="-78"/>
               </a:rPr>
               <a:t>NEXT LESSON</a:t>
             </a:r>
@@ -19592,8 +19208,7 @@
                   <a:srgbClr val="FFFFFF"/>
                 </a:solidFill>
                 <a:latin typeface="Cambria" pitchFamily="34" charset="0"/>
-                <a:ea typeface="Cambria" pitchFamily="34" charset="-122"/>
-                <a:cs typeface="Cambria" pitchFamily="34" charset="-120"/>
+                <a:cs typeface="Amiri" pitchFamily="2" charset="-78"/>
               </a:rPr>
               <a:t>P6-L12 · Celebration — Reflection and the Road Ahead</a:t>
             </a:r>
@@ -19630,9 +19245,8 @@
                 <a:solidFill>
                   <a:srgbClr val="D4AF37"/>
                 </a:solidFill>
-                <a:latin typeface="Amiri" pitchFamily="34" charset="0"/>
-                <a:ea typeface="Amiri" pitchFamily="34" charset="-122"/>
-                <a:cs typeface="Amiri" pitchFamily="34" charset="-120"/>
+                <a:latin typeface="Amiri" pitchFamily="2" charset="-78"/>
+                <a:cs typeface="Amiri" pitchFamily="2" charset="-78"/>
               </a:rPr>
               <a:t>الاحْتِفَالُ وَالتَّأَمُّلُ وَالطَّرِيقُ إِلَى الأَمَامِ</a:t>
             </a:r>
@@ -19670,8 +19284,7 @@
                   <a:srgbClr val="FFFFFF"/>
                 </a:solidFill>
                 <a:latin typeface="Calibri" pitchFamily="34" charset="0"/>
-                <a:ea typeface="Calibri" pitchFamily="34" charset="-122"/>
-                <a:cs typeface="Calibri" pitchFamily="34" charset="-120"/>
+                <a:cs typeface="Amiri" pitchFamily="2" charset="-78"/>
               </a:rPr>
               <a:t>Remember: your mock is not your final score — fix the subjunctive fatḥa, keep the la- in Type 2 results, use anna for facts, and follow your plan.</a:t>
             </a:r>
@@ -19765,9 +19378,8 @@
                 <a:solidFill>
                   <a:srgbClr val="D4AF37"/>
                 </a:solidFill>
-                <a:latin typeface="Amiri" pitchFamily="34" charset="0"/>
-                <a:ea typeface="Amiri" pitchFamily="34" charset="-122"/>
-                <a:cs typeface="Amiri" pitchFamily="34" charset="-120"/>
+                <a:latin typeface="Amiri" pitchFamily="2" charset="-78"/>
+                <a:cs typeface="Amiri" pitchFamily="2" charset="-78"/>
               </a:rPr>
               <a:t>م</a:t>
             </a:r>
@@ -19805,8 +19417,7 @@
                   <a:srgbClr val="1B3B6F"/>
                 </a:solidFill>
                 <a:latin typeface="Cambria" pitchFamily="34" charset="0"/>
-                <a:ea typeface="Cambria" pitchFamily="34" charset="-122"/>
-                <a:cs typeface="Cambria" pitchFamily="34" charset="-120"/>
+                <a:cs typeface="Amiri" pitchFamily="2" charset="-78"/>
               </a:rPr>
               <a:t>Al Madina Online School</a:t>
             </a:r>
@@ -19844,8 +19455,7 @@
                   <a:srgbClr val="8A6D1E"/>
                 </a:solidFill>
                 <a:latin typeface="Calibri" pitchFamily="34" charset="0"/>
-                <a:ea typeface="Calibri" pitchFamily="34" charset="-122"/>
-                <a:cs typeface="Calibri" pitchFamily="34" charset="-120"/>
+                <a:cs typeface="Amiri" pitchFamily="2" charset="-78"/>
               </a:rPr>
               <a:t>ARABIC DEPARTMENT · MIFTAH ARABIC · IGCSE 0544</a:t>
             </a:r>
@@ -19910,8 +19520,7 @@
                   <a:srgbClr val="FFFFFF"/>
                 </a:solidFill>
                 <a:latin typeface="Calibri" pitchFamily="34" charset="0"/>
-                <a:ea typeface="Calibri" pitchFamily="34" charset="-122"/>
-                <a:cs typeface="Calibri" pitchFamily="34" charset="-120"/>
+                <a:cs typeface="Amiri" pitchFamily="2" charset="-78"/>
               </a:rPr>
               <a:t>P6-L11 · IGCSE Bridge</a:t>
             </a:r>
@@ -19976,8 +19585,7 @@
                   <a:srgbClr val="FFFFFF"/>
                 </a:solidFill>
                 <a:latin typeface="Calibri" pitchFamily="34" charset="0"/>
-                <a:ea typeface="Calibri" pitchFamily="34" charset="-122"/>
-                <a:cs typeface="Calibri" pitchFamily="34" charset="-120"/>
+                <a:cs typeface="Amiri" pitchFamily="2" charset="-78"/>
               </a:rPr>
               <a:t>WELCOME · 1 MIN</a:t>
             </a:r>
@@ -20015,8 +19623,7 @@
                   <a:srgbClr val="5A6472"/>
                 </a:solidFill>
                 <a:latin typeface="Calibri" pitchFamily="34" charset="0"/>
-                <a:ea typeface="Calibri" pitchFamily="34" charset="-122"/>
-                <a:cs typeface="Calibri" pitchFamily="34" charset="-120"/>
+                <a:cs typeface="Amiri" pitchFamily="2" charset="-78"/>
               </a:rPr>
               <a:t>BEFORE WE BEGIN</a:t>
             </a:r>
@@ -20054,8 +19661,7 @@
                   <a:srgbClr val="1B3B6F"/>
                 </a:solidFill>
                 <a:latin typeface="Cambria" pitchFamily="34" charset="0"/>
-                <a:ea typeface="Cambria" pitchFamily="34" charset="-122"/>
-                <a:cs typeface="Cambria" pitchFamily="34" charset="-120"/>
+                <a:cs typeface="Amiri" pitchFamily="2" charset="-78"/>
               </a:rPr>
               <a:t>Our online classroom</a:t>
             </a:r>
@@ -20092,9 +19698,8 @@
                 <a:solidFill>
                   <a:srgbClr val="8A6D1E"/>
                 </a:solidFill>
-                <a:latin typeface="Amiri" pitchFamily="34" charset="0"/>
-                <a:ea typeface="Amiri" pitchFamily="34" charset="-122"/>
-                <a:cs typeface="Amiri" pitchFamily="34" charset="-120"/>
+                <a:latin typeface="Amiri" pitchFamily="2" charset="-78"/>
+                <a:cs typeface="Amiri" pitchFamily="2" charset="-78"/>
               </a:rPr>
               <a:t>آدَابُ الصَّفِّ</a:t>
             </a:r>
@@ -20132,8 +19737,7 @@
                   <a:srgbClr val="8A93A0"/>
                 </a:solidFill>
                 <a:latin typeface="Calibri" pitchFamily="34" charset="0"/>
-                <a:ea typeface="Calibri" pitchFamily="34" charset="-122"/>
-                <a:cs typeface="Calibri" pitchFamily="34" charset="-120"/>
+                <a:cs typeface="Amiri" pitchFamily="2" charset="-78"/>
               </a:rPr>
               <a:t>Miftah Arabic · Progression P6 · IGCSE Bridge · P6-L11</a:t>
             </a:r>
@@ -20254,8 +19858,7 @@
                   <a:srgbClr val="1B3B6F"/>
                 </a:solidFill>
                 <a:latin typeface="Calibri" pitchFamily="34" charset="0"/>
-                <a:ea typeface="Calibri" pitchFamily="34" charset="-122"/>
-                <a:cs typeface="Calibri" pitchFamily="34" charset="-120"/>
+                <a:cs typeface="Amiri" pitchFamily="2" charset="-78"/>
               </a:rPr>
               <a:t>Camera on</a:t>
             </a:r>
@@ -20271,8 +19874,7 @@
                   <a:srgbClr val="5A6472"/>
                 </a:solidFill>
                 <a:latin typeface="Calibri" pitchFamily="34" charset="0"/>
-                <a:ea typeface="Calibri" pitchFamily="34" charset="-122"/>
-                <a:cs typeface="Calibri" pitchFamily="34" charset="-120"/>
+                <a:cs typeface="Amiri" pitchFamily="2" charset="-78"/>
               </a:rPr>
               <a:t>So I can see you learning and help you quickly.</a:t>
             </a:r>
@@ -20393,8 +19995,7 @@
                   <a:srgbClr val="1B3B6F"/>
                 </a:solidFill>
                 <a:latin typeface="Calibri" pitchFamily="34" charset="0"/>
-                <a:ea typeface="Calibri" pitchFamily="34" charset="-122"/>
-                <a:cs typeface="Calibri" pitchFamily="34" charset="-120"/>
+                <a:cs typeface="Amiri" pitchFamily="2" charset="-78"/>
               </a:rPr>
               <a:t>Mic muted</a:t>
             </a:r>
@@ -20410,8 +20011,7 @@
                   <a:srgbClr val="5A6472"/>
                 </a:solidFill>
                 <a:latin typeface="Calibri" pitchFamily="34" charset="0"/>
-                <a:ea typeface="Calibri" pitchFamily="34" charset="-122"/>
-                <a:cs typeface="Calibri" pitchFamily="34" charset="-120"/>
+                <a:cs typeface="Amiri" pitchFamily="2" charset="-78"/>
               </a:rPr>
               <a:t>Unmute only when invited to speak.</a:t>
             </a:r>
@@ -20532,8 +20132,7 @@
                   <a:srgbClr val="1B3B6F"/>
                 </a:solidFill>
                 <a:latin typeface="Calibri" pitchFamily="34" charset="0"/>
-                <a:ea typeface="Calibri" pitchFamily="34" charset="-122"/>
-                <a:cs typeface="Calibri" pitchFamily="34" charset="-120"/>
+                <a:cs typeface="Amiri" pitchFamily="2" charset="-78"/>
               </a:rPr>
               <a:t>Chat for learning</a:t>
             </a:r>
@@ -20549,8 +20148,7 @@
                   <a:srgbClr val="5A6472"/>
                 </a:solidFill>
                 <a:latin typeface="Calibri" pitchFamily="34" charset="0"/>
-                <a:ea typeface="Calibri" pitchFamily="34" charset="-122"/>
-                <a:cs typeface="Calibri" pitchFamily="34" charset="-120"/>
+                <a:cs typeface="Amiri" pitchFamily="2" charset="-78"/>
               </a:rPr>
               <a:t>Answers, questions and Arabic only.</a:t>
             </a:r>
@@ -20671,8 +20269,7 @@
                   <a:srgbClr val="1B3B6F"/>
                 </a:solidFill>
                 <a:latin typeface="Calibri" pitchFamily="34" charset="0"/>
-                <a:ea typeface="Calibri" pitchFamily="34" charset="-122"/>
-                <a:cs typeface="Calibri" pitchFamily="34" charset="-120"/>
+                <a:cs typeface="Amiri" pitchFamily="2" charset="-78"/>
               </a:rPr>
               <a:t>Raise your hand</a:t>
             </a:r>
@@ -20688,8 +20285,7 @@
                   <a:srgbClr val="5A6472"/>
                 </a:solidFill>
                 <a:latin typeface="Calibri" pitchFamily="34" charset="0"/>
-                <a:ea typeface="Calibri" pitchFamily="34" charset="-122"/>
-                <a:cs typeface="Calibri" pitchFamily="34" charset="-120"/>
+                <a:cs typeface="Amiri" pitchFamily="2" charset="-78"/>
               </a:rPr>
               <a:t>Use the hand button to ask for help.</a:t>
             </a:r>
@@ -20761,8 +20357,7 @@
                   <a:srgbClr val="1B3B6F"/>
                 </a:solidFill>
                 <a:latin typeface="Calibri" pitchFamily="34" charset="0"/>
-                <a:ea typeface="Calibri" pitchFamily="34" charset="-122"/>
-                <a:cs typeface="Calibri" pitchFamily="34" charset="-120"/>
+                <a:cs typeface="Amiri" pitchFamily="2" charset="-78"/>
               </a:rPr>
               <a:t>HOW WE TALK — THE ORACY CODE</a:t>
             </a:r>
@@ -20825,8 +20420,7 @@
                   <a:srgbClr val="D4AF37"/>
                 </a:solidFill>
                 <a:latin typeface="Arial" pitchFamily="34" charset="0"/>
-                <a:ea typeface="Arial" pitchFamily="34" charset="-122"/>
-                <a:cs typeface="Arial" pitchFamily="34" charset="-120"/>
+                <a:cs typeface="Amiri" pitchFamily="2" charset="-78"/>
               </a:rPr>
               <a:t>●</a:t>
             </a:r>
@@ -20864,8 +20458,7 @@
                   <a:srgbClr val="1B3B6F"/>
                 </a:solidFill>
                 <a:latin typeface="Calibri" pitchFamily="34" charset="0"/>
-                <a:ea typeface="Calibri" pitchFamily="34" charset="-122"/>
-                <a:cs typeface="Calibri" pitchFamily="34" charset="-120"/>
+                <a:cs typeface="Amiri" pitchFamily="2" charset="-78"/>
               </a:rPr>
               <a:t>Think</a:t>
             </a:r>
@@ -20881,8 +20474,7 @@
                   <a:srgbClr val="5A6472"/>
                 </a:solidFill>
                 <a:latin typeface="Calibri" pitchFamily="34" charset="0"/>
-                <a:ea typeface="Calibri" pitchFamily="34" charset="-122"/>
-                <a:cs typeface="Calibri" pitchFamily="34" charset="-120"/>
+                <a:cs typeface="Amiri" pitchFamily="2" charset="-78"/>
               </a:rPr>
               <a:t>silent preparation</a:t>
             </a:r>
@@ -20945,8 +20537,7 @@
                   <a:srgbClr val="D4AF37"/>
                 </a:solidFill>
                 <a:latin typeface="Arial" pitchFamily="34" charset="0"/>
-                <a:ea typeface="Arial" pitchFamily="34" charset="-122"/>
-                <a:cs typeface="Arial" pitchFamily="34" charset="-120"/>
+                <a:cs typeface="Amiri" pitchFamily="2" charset="-78"/>
               </a:rPr>
               <a:t>↔</a:t>
             </a:r>
@@ -20984,8 +20575,7 @@
                   <a:srgbClr val="1B3B6F"/>
                 </a:solidFill>
                 <a:latin typeface="Calibri" pitchFamily="34" charset="0"/>
-                <a:ea typeface="Calibri" pitchFamily="34" charset="-122"/>
-                <a:cs typeface="Calibri" pitchFamily="34" charset="-120"/>
+                <a:cs typeface="Amiri" pitchFamily="2" charset="-78"/>
               </a:rPr>
               <a:t>Rehearse</a:t>
             </a:r>
@@ -21001,8 +20591,7 @@
                   <a:srgbClr val="5A6472"/>
                 </a:solidFill>
                 <a:latin typeface="Calibri" pitchFamily="34" charset="0"/>
-                <a:ea typeface="Calibri" pitchFamily="34" charset="-122"/>
-                <a:cs typeface="Calibri" pitchFamily="34" charset="-120"/>
+                <a:cs typeface="Amiri" pitchFamily="2" charset="-78"/>
               </a:rPr>
               <a:t>both partners speak</a:t>
             </a:r>
@@ -21065,8 +20654,7 @@
                   <a:srgbClr val="D4AF37"/>
                 </a:solidFill>
                 <a:latin typeface="Arial" pitchFamily="34" charset="0"/>
-                <a:ea typeface="Arial" pitchFamily="34" charset="-122"/>
-                <a:cs typeface="Arial" pitchFamily="34" charset="-120"/>
+                <a:cs typeface="Amiri" pitchFamily="2" charset="-78"/>
               </a:rPr>
               <a:t>+</a:t>
             </a:r>
@@ -21104,8 +20692,7 @@
                   <a:srgbClr val="1B3B6F"/>
                 </a:solidFill>
                 <a:latin typeface="Calibri" pitchFamily="34" charset="0"/>
-                <a:ea typeface="Calibri" pitchFamily="34" charset="-122"/>
-                <a:cs typeface="Calibri" pitchFamily="34" charset="-120"/>
+                <a:cs typeface="Amiri" pitchFamily="2" charset="-78"/>
               </a:rPr>
               <a:t>Build</a:t>
             </a:r>
@@ -21121,8 +20708,7 @@
                   <a:srgbClr val="5A6472"/>
                 </a:solidFill>
                 <a:latin typeface="Calibri" pitchFamily="34" charset="0"/>
-                <a:ea typeface="Calibri" pitchFamily="34" charset="-122"/>
-                <a:cs typeface="Calibri" pitchFamily="34" charset="-120"/>
+                <a:cs typeface="Amiri" pitchFamily="2" charset="-78"/>
               </a:rPr>
               <a:t>add a reason or detail</a:t>
             </a:r>
@@ -21185,8 +20771,7 @@
                   <a:srgbClr val="D4AF37"/>
                 </a:solidFill>
                 <a:latin typeface="Arial" pitchFamily="34" charset="0"/>
-                <a:ea typeface="Arial" pitchFamily="34" charset="-122"/>
-                <a:cs typeface="Arial" pitchFamily="34" charset="-120"/>
+                <a:cs typeface="Amiri" pitchFamily="2" charset="-78"/>
               </a:rPr>
               <a:t>?</a:t>
             </a:r>
@@ -21224,8 +20809,7 @@
                   <a:srgbClr val="1B3B6F"/>
                 </a:solidFill>
                 <a:latin typeface="Calibri" pitchFamily="34" charset="0"/>
-                <a:ea typeface="Calibri" pitchFamily="34" charset="-122"/>
-                <a:cs typeface="Calibri" pitchFamily="34" charset="-120"/>
+                <a:cs typeface="Amiri" pitchFamily="2" charset="-78"/>
               </a:rPr>
               <a:t>Challenge</a:t>
             </a:r>
@@ -21241,8 +20825,7 @@
                   <a:srgbClr val="5A6472"/>
                 </a:solidFill>
                 <a:latin typeface="Calibri" pitchFamily="34" charset="0"/>
-                <a:ea typeface="Calibri" pitchFamily="34" charset="-122"/>
-                <a:cs typeface="Calibri" pitchFamily="34" charset="-120"/>
+                <a:cs typeface="Amiri" pitchFamily="2" charset="-78"/>
               </a:rPr>
               <a:t>question respectfully</a:t>
             </a:r>
@@ -21305,8 +20888,7 @@
                   <a:srgbClr val="D4AF37"/>
                 </a:solidFill>
                 <a:latin typeface="Arial" pitchFamily="34" charset="0"/>
-                <a:ea typeface="Arial" pitchFamily="34" charset="-122"/>
-                <a:cs typeface="Arial" pitchFamily="34" charset="-120"/>
+                <a:cs typeface="Amiri" pitchFamily="2" charset="-78"/>
               </a:rPr>
               <a:t>◎</a:t>
             </a:r>
@@ -21344,8 +20926,7 @@
                   <a:srgbClr val="1B3B6F"/>
                 </a:solidFill>
                 <a:latin typeface="Calibri" pitchFamily="34" charset="0"/>
-                <a:ea typeface="Calibri" pitchFamily="34" charset="-122"/>
-                <a:cs typeface="Calibri" pitchFamily="34" charset="-120"/>
+                <a:cs typeface="Amiri" pitchFamily="2" charset="-78"/>
               </a:rPr>
               <a:t>Share</a:t>
             </a:r>
@@ -21361,8 +20942,7 @@
                   <a:srgbClr val="5A6472"/>
                 </a:solidFill>
                 <a:latin typeface="Calibri" pitchFamily="34" charset="0"/>
-                <a:ea typeface="Calibri" pitchFamily="34" charset="-122"/>
-                <a:cs typeface="Calibri" pitchFamily="34" charset="-120"/>
+                <a:cs typeface="Amiri" pitchFamily="2" charset="-78"/>
               </a:rPr>
               <a:t>anyone may be invited</a:t>
             </a:r>
@@ -21425,8 +21005,7 @@
                   <a:srgbClr val="D4AF37"/>
                 </a:solidFill>
                 <a:latin typeface="Arial" pitchFamily="34" charset="0"/>
-                <a:ea typeface="Arial" pitchFamily="34" charset="-122"/>
-                <a:cs typeface="Arial" pitchFamily="34" charset="-120"/>
+                <a:cs typeface="Amiri" pitchFamily="2" charset="-78"/>
               </a:rPr>
               <a:t>↺</a:t>
             </a:r>
@@ -21464,8 +21043,7 @@
                   <a:srgbClr val="1B3B6F"/>
                 </a:solidFill>
                 <a:latin typeface="Calibri" pitchFamily="34" charset="0"/>
-                <a:ea typeface="Calibri" pitchFamily="34" charset="-122"/>
-                <a:cs typeface="Calibri" pitchFamily="34" charset="-120"/>
+                <a:cs typeface="Amiri" pitchFamily="2" charset="-78"/>
               </a:rPr>
               <a:t>Summarise</a:t>
             </a:r>
@@ -21481,8 +21059,7 @@
                   <a:srgbClr val="5A6472"/>
                 </a:solidFill>
                 <a:latin typeface="Calibri" pitchFamily="34" charset="0"/>
-                <a:ea typeface="Calibri" pitchFamily="34" charset="-122"/>
-                <a:cs typeface="Calibri" pitchFamily="34" charset="-120"/>
+                <a:cs typeface="Amiri" pitchFamily="2" charset="-78"/>
               </a:rPr>
               <a:t>say it more precisely</a:t>
             </a:r>
@@ -21520,8 +21097,7 @@
                   <a:srgbClr val="8A6D1E"/>
                 </a:solidFill>
                 <a:latin typeface="Calibri" pitchFamily="34" charset="0"/>
-                <a:ea typeface="Calibri" pitchFamily="34" charset="-122"/>
-                <a:cs typeface="Calibri" pitchFamily="34" charset="-120"/>
+                <a:cs typeface="Amiri" pitchFamily="2" charset="-78"/>
               </a:rPr>
               <a:t>I will always give you thinking and practice time before I ask anyone. Reading aloud is by invitation — you can always say “pass, please come back to me”.</a:t>
             </a:r>
@@ -21559,8 +21135,7 @@
                   <a:srgbClr val="8A93A0"/>
                 </a:solidFill>
                 <a:latin typeface="Calibri" pitchFamily="34" charset="0"/>
-                <a:ea typeface="Calibri" pitchFamily="34" charset="-122"/>
-                <a:cs typeface="Calibri" pitchFamily="34" charset="-120"/>
+                <a:cs typeface="Amiri" pitchFamily="2" charset="-78"/>
               </a:rPr>
               <a:t>2 / 18</a:t>
             </a:r>
@@ -21654,9 +21229,8 @@
                 <a:solidFill>
                   <a:srgbClr val="D4AF37"/>
                 </a:solidFill>
-                <a:latin typeface="Amiri" pitchFamily="34" charset="0"/>
-                <a:ea typeface="Amiri" pitchFamily="34" charset="-122"/>
-                <a:cs typeface="Amiri" pitchFamily="34" charset="-120"/>
+                <a:latin typeface="Amiri" pitchFamily="2" charset="-78"/>
+                <a:cs typeface="Amiri" pitchFamily="2" charset="-78"/>
               </a:rPr>
               <a:t>م</a:t>
             </a:r>
@@ -21694,8 +21268,7 @@
                   <a:srgbClr val="1B3B6F"/>
                 </a:solidFill>
                 <a:latin typeface="Cambria" pitchFamily="34" charset="0"/>
-                <a:ea typeface="Cambria" pitchFamily="34" charset="-122"/>
-                <a:cs typeface="Cambria" pitchFamily="34" charset="-120"/>
+                <a:cs typeface="Amiri" pitchFamily="2" charset="-78"/>
               </a:rPr>
               <a:t>Al Madina Online School</a:t>
             </a:r>
@@ -21733,8 +21306,7 @@
                   <a:srgbClr val="8A6D1E"/>
                 </a:solidFill>
                 <a:latin typeface="Calibri" pitchFamily="34" charset="0"/>
-                <a:ea typeface="Calibri" pitchFamily="34" charset="-122"/>
-                <a:cs typeface="Calibri" pitchFamily="34" charset="-120"/>
+                <a:cs typeface="Amiri" pitchFamily="2" charset="-78"/>
               </a:rPr>
               <a:t>ARABIC DEPARTMENT · MIFTAH ARABIC · IGCSE 0544</a:t>
             </a:r>
@@ -21799,8 +21371,7 @@
                   <a:srgbClr val="FFFFFF"/>
                 </a:solidFill>
                 <a:latin typeface="Calibri" pitchFamily="34" charset="0"/>
-                <a:ea typeface="Calibri" pitchFamily="34" charset="-122"/>
-                <a:cs typeface="Calibri" pitchFamily="34" charset="-120"/>
+                <a:cs typeface="Amiri" pitchFamily="2" charset="-78"/>
               </a:rPr>
               <a:t>P6-L11 · IGCSE Bridge</a:t>
             </a:r>
@@ -21865,8 +21436,7 @@
                   <a:srgbClr val="FFFFFF"/>
                 </a:solidFill>
                 <a:latin typeface="Calibri" pitchFamily="34" charset="0"/>
-                <a:ea typeface="Calibri" pitchFamily="34" charset="-122"/>
-                <a:cs typeface="Calibri" pitchFamily="34" charset="-120"/>
+                <a:cs typeface="Amiri" pitchFamily="2" charset="-78"/>
               </a:rPr>
               <a:t>WELCOME</a:t>
             </a:r>
@@ -21904,8 +21474,7 @@
                   <a:srgbClr val="5A6472"/>
                 </a:solidFill>
                 <a:latin typeface="Calibri" pitchFamily="34" charset="0"/>
-                <a:ea typeface="Calibri" pitchFamily="34" charset="-122"/>
-                <a:cs typeface="Calibri" pitchFamily="34" charset="-120"/>
+                <a:cs typeface="Amiri" pitchFamily="2" charset="-78"/>
               </a:rPr>
               <a:t>TODAY’S LESSON MAP</a:t>
             </a:r>
@@ -21943,8 +21512,7 @@
                   <a:srgbClr val="1B3B6F"/>
                 </a:solidFill>
                 <a:latin typeface="Cambria" pitchFamily="34" charset="0"/>
-                <a:ea typeface="Cambria" pitchFamily="34" charset="-122"/>
-                <a:cs typeface="Cambria" pitchFamily="34" charset="-120"/>
+                <a:cs typeface="Amiri" pitchFamily="2" charset="-78"/>
               </a:rPr>
               <a:t>Our lesson today, step by step</a:t>
             </a:r>
@@ -21981,9 +21549,8 @@
                 <a:solidFill>
                   <a:srgbClr val="8A6D1E"/>
                 </a:solidFill>
-                <a:latin typeface="Amiri" pitchFamily="34" charset="0"/>
-                <a:ea typeface="Amiri" pitchFamily="34" charset="-122"/>
-                <a:cs typeface="Amiri" pitchFamily="34" charset="-120"/>
+                <a:latin typeface="Amiri" pitchFamily="2" charset="-78"/>
+                <a:cs typeface="Amiri" pitchFamily="2" charset="-78"/>
               </a:rPr>
               <a:t>خَرِيطَةُ الدَّرْسِ</a:t>
             </a:r>
@@ -22021,8 +21588,7 @@
                   <a:srgbClr val="8A93A0"/>
                 </a:solidFill>
                 <a:latin typeface="Calibri" pitchFamily="34" charset="0"/>
-                <a:ea typeface="Calibri" pitchFamily="34" charset="-122"/>
-                <a:cs typeface="Calibri" pitchFamily="34" charset="-120"/>
+                <a:cs typeface="Amiri" pitchFamily="2" charset="-78"/>
               </a:rPr>
               <a:t>Miftah Arabic · Progression P6 · IGCSE Bridge · P6-L11</a:t>
             </a:r>
@@ -22121,8 +21687,7 @@
                   <a:srgbClr val="FFFFFF"/>
                 </a:solidFill>
                 <a:latin typeface="Calibri" pitchFamily="34" charset="0"/>
-                <a:ea typeface="Calibri" pitchFamily="34" charset="-122"/>
-                <a:cs typeface="Calibri" pitchFamily="34" charset="-120"/>
+                <a:cs typeface="Amiri" pitchFamily="2" charset="-78"/>
               </a:rPr>
               <a:t>DO NOW</a:t>
             </a:r>
@@ -22160,8 +21725,7 @@
                   <a:srgbClr val="E8EDF5"/>
                 </a:solidFill>
                 <a:latin typeface="Calibri" pitchFamily="34" charset="0"/>
-                <a:ea typeface="Calibri" pitchFamily="34" charset="-122"/>
-                <a:cs typeface="Calibri" pitchFamily="34" charset="-120"/>
+                <a:cs typeface="Amiri" pitchFamily="2" charset="-78"/>
               </a:rPr>
               <a:t>6 min</a:t>
             </a:r>
@@ -22224,8 +21788,7 @@
                   <a:srgbClr val="1B3B6F"/>
                 </a:solidFill>
                 <a:latin typeface="Calibri" pitchFamily="34" charset="0"/>
-                <a:ea typeface="Calibri" pitchFamily="34" charset="-122"/>
-                <a:cs typeface="Calibri" pitchFamily="34" charset="-120"/>
+                <a:cs typeface="Amiri" pitchFamily="2" charset="-78"/>
               </a:rPr>
               <a:t>1</a:t>
             </a:r>
@@ -22263,8 +21826,7 @@
                   <a:srgbClr val="1F2A37"/>
                 </a:solidFill>
                 <a:latin typeface="Calibri" pitchFamily="34" charset="0"/>
-                <a:ea typeface="Calibri" pitchFamily="34" charset="-122"/>
-                <a:cs typeface="Calibri" pitchFamily="34" charset="-120"/>
+                <a:cs typeface="Amiri" pitchFamily="2" charset="-78"/>
               </a:rPr>
               <a:t>Retrieval: revision words and two quick fixes.</a:t>
             </a:r>
@@ -22301,9 +21863,8 @@
                 <a:solidFill>
                   <a:srgbClr val="0E7C86"/>
                 </a:solidFill>
-                <a:latin typeface="Amiri" pitchFamily="34" charset="0"/>
-                <a:ea typeface="Amiri" pitchFamily="34" charset="-122"/>
-                <a:cs typeface="Amiri" pitchFamily="34" charset="-120"/>
+                <a:latin typeface="Amiri" pitchFamily="2" charset="-78"/>
+                <a:cs typeface="Amiri" pitchFamily="2" charset="-78"/>
               </a:rPr>
               <a:t>اِبْدَأِ الآنَ</a:t>
             </a:r>
@@ -22402,8 +21963,7 @@
                   <a:srgbClr val="FFFFFF"/>
                 </a:solidFill>
                 <a:latin typeface="Calibri" pitchFamily="34" charset="0"/>
-                <a:ea typeface="Calibri" pitchFamily="34" charset="-122"/>
-                <a:cs typeface="Calibri" pitchFamily="34" charset="-120"/>
+                <a:cs typeface="Amiri" pitchFamily="2" charset="-78"/>
               </a:rPr>
               <a:t>TEACHER INSTRUCTION</a:t>
             </a:r>
@@ -22441,8 +22001,7 @@
                   <a:srgbClr val="E8EDF5"/>
                 </a:solidFill>
                 <a:latin typeface="Calibri" pitchFamily="34" charset="0"/>
-                <a:ea typeface="Calibri" pitchFamily="34" charset="-122"/>
-                <a:cs typeface="Calibri" pitchFamily="34" charset="-120"/>
+                <a:cs typeface="Amiri" pitchFamily="2" charset="-78"/>
               </a:rPr>
               <a:t>8 min</a:t>
             </a:r>
@@ -22505,8 +22064,7 @@
                   <a:srgbClr val="1B3B6F"/>
                 </a:solidFill>
                 <a:latin typeface="Calibri" pitchFamily="34" charset="0"/>
-                <a:ea typeface="Calibri" pitchFamily="34" charset="-122"/>
-                <a:cs typeface="Calibri" pitchFamily="34" charset="-120"/>
+                <a:cs typeface="Amiri" pitchFamily="2" charset="-78"/>
               </a:rPr>
               <a:t>2</a:t>
             </a:r>
@@ -22544,8 +22102,7 @@
                   <a:srgbClr val="1F2A37"/>
                 </a:solidFill>
                 <a:latin typeface="Calibri" pitchFamily="34" charset="0"/>
-                <a:ea typeface="Calibri" pitchFamily="34" charset="-122"/>
-                <a:cs typeface="Calibri" pitchFamily="34" charset="-120"/>
+                <a:cs typeface="Amiri" pitchFamily="2" charset="-78"/>
               </a:rPr>
               <a:t>Your mock profile and the /150 calculator.</a:t>
             </a:r>
@@ -22582,9 +22139,8 @@
                 <a:solidFill>
                   <a:srgbClr val="1B3B6F"/>
                 </a:solidFill>
-                <a:latin typeface="Amiri" pitchFamily="34" charset="0"/>
-                <a:ea typeface="Amiri" pitchFamily="34" charset="-122"/>
-                <a:cs typeface="Amiri" pitchFamily="34" charset="-120"/>
+                <a:latin typeface="Amiri" pitchFamily="2" charset="-78"/>
+                <a:cs typeface="Amiri" pitchFamily="2" charset="-78"/>
               </a:rPr>
               <a:t>النَّتَائِجُ</a:t>
             </a:r>
@@ -22683,8 +22239,7 @@
                   <a:srgbClr val="FFFFFF"/>
                 </a:solidFill>
                 <a:latin typeface="Calibri" pitchFamily="34" charset="0"/>
-                <a:ea typeface="Calibri" pitchFamily="34" charset="-122"/>
-                <a:cs typeface="Calibri" pitchFamily="34" charset="-120"/>
+                <a:cs typeface="Amiri" pitchFamily="2" charset="-78"/>
               </a:rPr>
               <a:t>I DO</a:t>
             </a:r>
@@ -22722,8 +22277,7 @@
                   <a:srgbClr val="E8EDF5"/>
                 </a:solidFill>
                 <a:latin typeface="Calibri" pitchFamily="34" charset="0"/>
-                <a:ea typeface="Calibri" pitchFamily="34" charset="-122"/>
-                <a:cs typeface="Calibri" pitchFamily="34" charset="-120"/>
+                <a:cs typeface="Amiri" pitchFamily="2" charset="-78"/>
               </a:rPr>
               <a:t>5 min</a:t>
             </a:r>
@@ -22786,8 +22340,7 @@
                   <a:srgbClr val="1B3B6F"/>
                 </a:solidFill>
                 <a:latin typeface="Calibri" pitchFamily="34" charset="0"/>
-                <a:ea typeface="Calibri" pitchFamily="34" charset="-122"/>
-                <a:cs typeface="Calibri" pitchFamily="34" charset="-120"/>
+                <a:cs typeface="Amiri" pitchFamily="2" charset="-78"/>
               </a:rPr>
               <a:t>3</a:t>
             </a:r>
@@ -22825,8 +22378,7 @@
                   <a:srgbClr val="1F2A37"/>
                 </a:solidFill>
                 <a:latin typeface="Calibri" pitchFamily="34" charset="0"/>
-                <a:ea typeface="Calibri" pitchFamily="34" charset="-122"/>
-                <a:cs typeface="Calibri" pitchFamily="34" charset="-120"/>
+                <a:cs typeface="Amiri" pitchFamily="2" charset="-78"/>
               </a:rPr>
               <a:t>The three most common errors.</a:t>
             </a:r>
@@ -22863,9 +22415,8 @@
                 <a:solidFill>
                   <a:srgbClr val="6B4C9A"/>
                 </a:solidFill>
-                <a:latin typeface="Amiri" pitchFamily="34" charset="0"/>
-                <a:ea typeface="Amiri" pitchFamily="34" charset="-122"/>
-                <a:cs typeface="Amiri" pitchFamily="34" charset="-120"/>
+                <a:latin typeface="Amiri" pitchFamily="2" charset="-78"/>
+                <a:cs typeface="Amiri" pitchFamily="2" charset="-78"/>
               </a:rPr>
               <a:t>الأَخْطَاءُ</a:t>
             </a:r>
@@ -22964,8 +22515,7 @@
                   <a:srgbClr val="FFFFFF"/>
                 </a:solidFill>
                 <a:latin typeface="Calibri" pitchFamily="34" charset="0"/>
-                <a:ea typeface="Calibri" pitchFamily="34" charset="-122"/>
-                <a:cs typeface="Calibri" pitchFamily="34" charset="-120"/>
+                <a:cs typeface="Amiri" pitchFamily="2" charset="-78"/>
               </a:rPr>
               <a:t>WE DO</a:t>
             </a:r>
@@ -23003,8 +22553,7 @@
                   <a:srgbClr val="E8EDF5"/>
                 </a:solidFill>
                 <a:latin typeface="Calibri" pitchFamily="34" charset="0"/>
-                <a:ea typeface="Calibri" pitchFamily="34" charset="-122"/>
-                <a:cs typeface="Calibri" pitchFamily="34" charset="-120"/>
+                <a:cs typeface="Amiri" pitchFamily="2" charset="-78"/>
               </a:rPr>
               <a:t>8 min</a:t>
             </a:r>
@@ -23067,8 +22616,7 @@
                   <a:srgbClr val="1B3B6F"/>
                 </a:solidFill>
                 <a:latin typeface="Calibri" pitchFamily="34" charset="0"/>
-                <a:ea typeface="Calibri" pitchFamily="34" charset="-122"/>
-                <a:cs typeface="Calibri" pitchFamily="34" charset="-120"/>
+                <a:cs typeface="Amiri" pitchFamily="2" charset="-78"/>
               </a:rPr>
               <a:t>4</a:t>
             </a:r>
@@ -23106,8 +22654,7 @@
                   <a:srgbClr val="1F2A37"/>
                 </a:solidFill>
                 <a:latin typeface="Calibri" pitchFamily="34" charset="0"/>
-                <a:ea typeface="Calibri" pitchFamily="34" charset="-122"/>
-                <a:cs typeface="Calibri" pitchFamily="34" charset="-120"/>
+                <a:cs typeface="Amiri" pitchFamily="2" charset="-78"/>
               </a:rPr>
               <a:t>Fix the errors.</a:t>
             </a:r>
@@ -23144,9 +22691,8 @@
                 <a:solidFill>
                   <a:srgbClr val="2F6FB0"/>
                 </a:solidFill>
-                <a:latin typeface="Amiri" pitchFamily="34" charset="0"/>
-                <a:ea typeface="Amiri" pitchFamily="34" charset="-122"/>
-                <a:cs typeface="Amiri" pitchFamily="34" charset="-120"/>
+                <a:latin typeface="Amiri" pitchFamily="2" charset="-78"/>
+                <a:cs typeface="Amiri" pitchFamily="2" charset="-78"/>
               </a:rPr>
               <a:t>صَحِّحْ</a:t>
             </a:r>
@@ -23245,8 +22791,7 @@
                   <a:srgbClr val="FFFFFF"/>
                 </a:solidFill>
                 <a:latin typeface="Calibri" pitchFamily="34" charset="0"/>
-                <a:ea typeface="Calibri" pitchFamily="34" charset="-122"/>
-                <a:cs typeface="Calibri" pitchFamily="34" charset="-120"/>
+                <a:cs typeface="Amiri" pitchFamily="2" charset="-78"/>
               </a:rPr>
               <a:t>YOU DO</a:t>
             </a:r>
@@ -23284,8 +22829,7 @@
                   <a:srgbClr val="E8EDF5"/>
                 </a:solidFill>
                 <a:latin typeface="Calibri" pitchFamily="34" charset="0"/>
-                <a:ea typeface="Calibri" pitchFamily="34" charset="-122"/>
-                <a:cs typeface="Calibri" pitchFamily="34" charset="-120"/>
+                <a:cs typeface="Amiri" pitchFamily="2" charset="-78"/>
               </a:rPr>
               <a:t>20 min</a:t>
             </a:r>
@@ -23348,8 +22892,7 @@
                   <a:srgbClr val="1B3B6F"/>
                 </a:solidFill>
                 <a:latin typeface="Calibri" pitchFamily="34" charset="0"/>
-                <a:ea typeface="Calibri" pitchFamily="34" charset="-122"/>
-                <a:cs typeface="Calibri" pitchFamily="34" charset="-120"/>
+                <a:cs typeface="Amiri" pitchFamily="2" charset="-78"/>
               </a:rPr>
               <a:t>5</a:t>
             </a:r>
@@ -23387,8 +22930,7 @@
                   <a:srgbClr val="1F2A37"/>
                 </a:solidFill>
                 <a:latin typeface="Calibri" pitchFamily="34" charset="0"/>
-                <a:ea typeface="Calibri" pitchFamily="34" charset="-122"/>
-                <a:cs typeface="Calibri" pitchFamily="34" charset="-120"/>
+                <a:cs typeface="Amiri" pitchFamily="2" charset="-78"/>
               </a:rPr>
               <a:t>Revision hierarchy, checklist, my plan.</a:t>
             </a:r>
@@ -23425,9 +22967,8 @@
                 <a:solidFill>
                   <a:srgbClr val="1E6B52"/>
                 </a:solidFill>
-                <a:latin typeface="Amiri" pitchFamily="34" charset="0"/>
-                <a:ea typeface="Amiri" pitchFamily="34" charset="-122"/>
-                <a:cs typeface="Amiri" pitchFamily="34" charset="-120"/>
+                <a:latin typeface="Amiri" pitchFamily="2" charset="-78"/>
+                <a:cs typeface="Amiri" pitchFamily="2" charset="-78"/>
               </a:rPr>
               <a:t>خُطَّتِي</a:t>
             </a:r>
@@ -23526,8 +23067,7 @@
                   <a:srgbClr val="FFFFFF"/>
                 </a:solidFill>
                 <a:latin typeface="Calibri" pitchFamily="34" charset="0"/>
-                <a:ea typeface="Calibri" pitchFamily="34" charset="-122"/>
-                <a:cs typeface="Calibri" pitchFamily="34" charset="-120"/>
+                <a:cs typeface="Amiri" pitchFamily="2" charset="-78"/>
               </a:rPr>
               <a:t>FEEDBACK</a:t>
             </a:r>
@@ -23565,8 +23105,7 @@
                   <a:srgbClr val="E8EDF5"/>
                 </a:solidFill>
                 <a:latin typeface="Calibri" pitchFamily="34" charset="0"/>
-                <a:ea typeface="Calibri" pitchFamily="34" charset="-122"/>
-                <a:cs typeface="Calibri" pitchFamily="34" charset="-120"/>
+                <a:cs typeface="Amiri" pitchFamily="2" charset="-78"/>
               </a:rPr>
               <a:t>6 min</a:t>
             </a:r>
@@ -23629,8 +23168,7 @@
                   <a:srgbClr val="1B3B6F"/>
                 </a:solidFill>
                 <a:latin typeface="Calibri" pitchFamily="34" charset="0"/>
-                <a:ea typeface="Calibri" pitchFamily="34" charset="-122"/>
-                <a:cs typeface="Calibri" pitchFamily="34" charset="-120"/>
+                <a:cs typeface="Amiri" pitchFamily="2" charset="-78"/>
               </a:rPr>
               <a:t>6</a:t>
             </a:r>
@@ -23668,8 +23206,7 @@
                   <a:srgbClr val="1F2A37"/>
                 </a:solidFill>
                 <a:latin typeface="Calibri" pitchFamily="34" charset="0"/>
-                <a:ea typeface="Calibri" pitchFamily="34" charset="-122"/>
-                <a:cs typeface="Calibri" pitchFamily="34" charset="-120"/>
+                <a:cs typeface="Amiri" pitchFamily="2" charset="-78"/>
               </a:rPr>
               <a:t>Reflection, self-check, preparation.</a:t>
             </a:r>
@@ -23706,9 +23243,8 @@
                 <a:solidFill>
                   <a:srgbClr val="8A6D1E"/>
                 </a:solidFill>
-                <a:latin typeface="Amiri" pitchFamily="34" charset="0"/>
-                <a:ea typeface="Amiri" pitchFamily="34" charset="-122"/>
-                <a:cs typeface="Amiri" pitchFamily="34" charset="-120"/>
+                <a:latin typeface="Amiri" pitchFamily="2" charset="-78"/>
+                <a:cs typeface="Amiri" pitchFamily="2" charset="-78"/>
               </a:rPr>
               <a:t>قَيِّمْ</a:t>
             </a:r>
@@ -23780,8 +23316,7 @@
                   <a:srgbClr val="1E6B52"/>
                 </a:solidFill>
                 <a:latin typeface="Calibri" pitchFamily="34" charset="0"/>
-                <a:ea typeface="Calibri" pitchFamily="34" charset="-122"/>
-                <a:cs typeface="Calibri" pitchFamily="34" charset="-120"/>
+                <a:cs typeface="Amiri" pitchFamily="2" charset="-78"/>
               </a:rPr>
               <a:t>IF ARABIC FEELS HARD TODAY</a:t>
             </a:r>
@@ -23819,8 +23354,7 @@
                   <a:srgbClr val="1F2A37"/>
                 </a:solidFill>
                 <a:latin typeface="Calibri" pitchFamily="34" charset="0"/>
-                <a:ea typeface="Calibri" pitchFamily="34" charset="-122"/>
-                <a:cs typeface="Calibri" pitchFamily="34" charset="-120"/>
+                <a:cs typeface="Amiri" pitchFamily="2" charset="-78"/>
               </a:rPr>
               <a:t>This is an exam-preparation lesson. Every task uses the real IGCSE format — Core students use the green boxes, frames and English support; nobody is expected to get everything right first time.</a:t>
             </a:r>
@@ -23858,8 +23392,7 @@
                   <a:srgbClr val="8A93A0"/>
                 </a:solidFill>
                 <a:latin typeface="Calibri" pitchFamily="34" charset="0"/>
-                <a:ea typeface="Calibri" pitchFamily="34" charset="-122"/>
-                <a:cs typeface="Calibri" pitchFamily="34" charset="-120"/>
+                <a:cs typeface="Amiri" pitchFamily="2" charset="-78"/>
               </a:rPr>
               <a:t>3 / 18</a:t>
             </a:r>
@@ -23953,9 +23486,8 @@
                 <a:solidFill>
                   <a:srgbClr val="D4AF37"/>
                 </a:solidFill>
-                <a:latin typeface="Amiri" pitchFamily="34" charset="0"/>
-                <a:ea typeface="Amiri" pitchFamily="34" charset="-122"/>
-                <a:cs typeface="Amiri" pitchFamily="34" charset="-120"/>
+                <a:latin typeface="Amiri" pitchFamily="2" charset="-78"/>
+                <a:cs typeface="Amiri" pitchFamily="2" charset="-78"/>
               </a:rPr>
               <a:t>م</a:t>
             </a:r>
@@ -23993,8 +23525,7 @@
                   <a:srgbClr val="1B3B6F"/>
                 </a:solidFill>
                 <a:latin typeface="Cambria" pitchFamily="34" charset="0"/>
-                <a:ea typeface="Cambria" pitchFamily="34" charset="-122"/>
-                <a:cs typeface="Cambria" pitchFamily="34" charset="-120"/>
+                <a:cs typeface="Amiri" pitchFamily="2" charset="-78"/>
               </a:rPr>
               <a:t>Al Madina Online School</a:t>
             </a:r>
@@ -24032,8 +23563,7 @@
                   <a:srgbClr val="8A6D1E"/>
                 </a:solidFill>
                 <a:latin typeface="Calibri" pitchFamily="34" charset="0"/>
-                <a:ea typeface="Calibri" pitchFamily="34" charset="-122"/>
-                <a:cs typeface="Calibri" pitchFamily="34" charset="-120"/>
+                <a:cs typeface="Amiri" pitchFamily="2" charset="-78"/>
               </a:rPr>
               <a:t>ARABIC DEPARTMENT · MIFTAH ARABIC · IGCSE 0544</a:t>
             </a:r>
@@ -24098,8 +23628,7 @@
                   <a:srgbClr val="FFFFFF"/>
                 </a:solidFill>
                 <a:latin typeface="Calibri" pitchFamily="34" charset="0"/>
-                <a:ea typeface="Calibri" pitchFamily="34" charset="-122"/>
-                <a:cs typeface="Calibri" pitchFamily="34" charset="-120"/>
+                <a:cs typeface="Amiri" pitchFamily="2" charset="-78"/>
               </a:rPr>
               <a:t>P6-L11 · IGCSE Bridge</a:t>
             </a:r>
@@ -24164,8 +23693,7 @@
                   <a:srgbClr val="FFFFFF"/>
                 </a:solidFill>
                 <a:latin typeface="Calibri" pitchFamily="34" charset="0"/>
-                <a:ea typeface="Calibri" pitchFamily="34" charset="-122"/>
-                <a:cs typeface="Calibri" pitchFamily="34" charset="-120"/>
+                <a:cs typeface="Amiri" pitchFamily="2" charset="-78"/>
               </a:rPr>
               <a:t>DO NOW · 5 MIN</a:t>
             </a:r>
@@ -24203,8 +23731,7 @@
                   <a:srgbClr val="0E7C86"/>
                 </a:solidFill>
                 <a:latin typeface="Calibri" pitchFamily="34" charset="0"/>
-                <a:ea typeface="Calibri" pitchFamily="34" charset="-122"/>
-                <a:cs typeface="Calibri" pitchFamily="34" charset="-120"/>
+                <a:cs typeface="Amiri" pitchFamily="2" charset="-78"/>
               </a:rPr>
               <a:t>DO NOW · ON YOUR OWN · 5 MINUTES</a:t>
             </a:r>
@@ -24242,8 +23769,7 @@
                   <a:srgbClr val="1B3B6F"/>
                 </a:solidFill>
                 <a:latin typeface="Cambria" pitchFamily="34" charset="0"/>
-                <a:ea typeface="Cambria" pitchFamily="34" charset="-122"/>
-                <a:cs typeface="Cambria" pitchFamily="34" charset="-120"/>
+                <a:cs typeface="Amiri" pitchFamily="2" charset="-78"/>
               </a:rPr>
               <a:t>Retrieval: what do you remember?</a:t>
             </a:r>
@@ -24280,9 +23806,8 @@
                 <a:solidFill>
                   <a:srgbClr val="8A6D1E"/>
                 </a:solidFill>
-                <a:latin typeface="Amiri" pitchFamily="34" charset="0"/>
-                <a:ea typeface="Amiri" pitchFamily="34" charset="-122"/>
-                <a:cs typeface="Amiri" pitchFamily="34" charset="-120"/>
+                <a:latin typeface="Amiri" pitchFamily="2" charset="-78"/>
+                <a:cs typeface="Amiri" pitchFamily="2" charset="-78"/>
               </a:rPr>
               <a:t>اِبْدَأِ الآنَ</a:t>
             </a:r>
@@ -24320,8 +23845,7 @@
                   <a:srgbClr val="8A93A0"/>
                 </a:solidFill>
                 <a:latin typeface="Calibri" pitchFamily="34" charset="0"/>
-                <a:ea typeface="Calibri" pitchFamily="34" charset="-122"/>
-                <a:cs typeface="Calibri" pitchFamily="34" charset="-120"/>
+                <a:cs typeface="Amiri" pitchFamily="2" charset="-78"/>
               </a:rPr>
               <a:t>Miftah Arabic · Progression P6 · IGCSE Bridge · P6-L11</a:t>
             </a:r>
@@ -24418,8 +23942,7 @@
                   <a:srgbClr val="FFFFFF"/>
                 </a:solidFill>
                 <a:latin typeface="Calibri" pitchFamily="34" charset="0"/>
-                <a:ea typeface="Calibri" pitchFamily="34" charset="-122"/>
-                <a:cs typeface="Calibri" pitchFamily="34" charset="-120"/>
+                <a:cs typeface="Amiri" pitchFamily="2" charset="-78"/>
               </a:rPr>
               <a:t>1</a:t>
             </a:r>
@@ -24457,8 +23980,7 @@
                   <a:srgbClr val="1B3B6F"/>
                 </a:solidFill>
                 <a:latin typeface="Calibri" pitchFamily="34" charset="0"/>
-                <a:ea typeface="Calibri" pitchFamily="34" charset="-122"/>
-                <a:cs typeface="Calibri" pitchFamily="34" charset="-120"/>
+                <a:cs typeface="Amiri" pitchFamily="2" charset="-78"/>
               </a:rPr>
               <a:t>What does </a:t>
             </a:r>
@@ -24470,9 +23992,8 @@
                 <a:solidFill>
                   <a:srgbClr val="1B3B6F"/>
                 </a:solidFill>
-                <a:latin typeface="Amiri" pitchFamily="34" charset="0"/>
-                <a:ea typeface="Amiri" pitchFamily="34" charset="-122"/>
-                <a:cs typeface="Amiri" pitchFamily="34" charset="-120"/>
+                <a:latin typeface="Amiri" pitchFamily="2" charset="-78"/>
+                <a:cs typeface="Amiri" pitchFamily="2" charset="-78"/>
               </a:rPr>
               <a:t>نِقَاطُ الضَّعْفِ</a:t>
             </a:r>
@@ -24485,8 +24006,7 @@
                   <a:srgbClr val="1B3B6F"/>
                 </a:solidFill>
                 <a:latin typeface="Calibri" pitchFamily="34" charset="0"/>
-                <a:ea typeface="Calibri" pitchFamily="34" charset="-122"/>
-                <a:cs typeface="Calibri" pitchFamily="34" charset="-120"/>
+                <a:cs typeface="Amiri" pitchFamily="2" charset="-78"/>
               </a:rPr>
               <a:t> mean?</a:t>
             </a:r>
@@ -24549,8 +24069,7 @@
                   <a:srgbClr val="1B3B6F"/>
                 </a:solidFill>
                 <a:latin typeface="Calibri" pitchFamily="34" charset="0"/>
-                <a:ea typeface="Calibri" pitchFamily="34" charset="-122"/>
-                <a:cs typeface="Calibri" pitchFamily="34" charset="-120"/>
+                <a:cs typeface="Amiri" pitchFamily="2" charset="-78"/>
               </a:rPr>
               <a:t>A</a:t>
             </a:r>
@@ -24588,8 +24107,7 @@
                   <a:srgbClr val="1F2A37"/>
                 </a:solidFill>
                 <a:latin typeface="Calibri" pitchFamily="34" charset="0"/>
-                <a:ea typeface="Calibri" pitchFamily="34" charset="-122"/>
-                <a:cs typeface="Calibri" pitchFamily="34" charset="-120"/>
+                <a:cs typeface="Amiri" pitchFamily="2" charset="-78"/>
               </a:rPr>
               <a:t>strengths</a:t>
             </a:r>
@@ -24652,8 +24170,7 @@
                   <a:srgbClr val="1B3B6F"/>
                 </a:solidFill>
                 <a:latin typeface="Calibri" pitchFamily="34" charset="0"/>
-                <a:ea typeface="Calibri" pitchFamily="34" charset="-122"/>
-                <a:cs typeface="Calibri" pitchFamily="34" charset="-120"/>
+                <a:cs typeface="Amiri" pitchFamily="2" charset="-78"/>
               </a:rPr>
               <a:t>B</a:t>
             </a:r>
@@ -24691,8 +24208,7 @@
                   <a:srgbClr val="1F2A37"/>
                 </a:solidFill>
                 <a:latin typeface="Calibri" pitchFamily="34" charset="0"/>
-                <a:ea typeface="Calibri" pitchFamily="34" charset="-122"/>
-                <a:cs typeface="Calibri" pitchFamily="34" charset="-120"/>
+                <a:cs typeface="Amiri" pitchFamily="2" charset="-78"/>
               </a:rPr>
               <a:t>weaknesses</a:t>
             </a:r>
@@ -24755,8 +24271,7 @@
                   <a:srgbClr val="1B3B6F"/>
                 </a:solidFill>
                 <a:latin typeface="Calibri" pitchFamily="34" charset="0"/>
-                <a:ea typeface="Calibri" pitchFamily="34" charset="-122"/>
-                <a:cs typeface="Calibri" pitchFamily="34" charset="-120"/>
+                <a:cs typeface="Amiri" pitchFamily="2" charset="-78"/>
               </a:rPr>
               <a:t>C</a:t>
             </a:r>
@@ -24794,8 +24309,7 @@
                   <a:srgbClr val="1F2A37"/>
                 </a:solidFill>
                 <a:latin typeface="Calibri" pitchFamily="34" charset="0"/>
-                <a:ea typeface="Calibri" pitchFamily="34" charset="-122"/>
-                <a:cs typeface="Calibri" pitchFamily="34" charset="-120"/>
+                <a:cs typeface="Amiri" pitchFamily="2" charset="-78"/>
               </a:rPr>
               <a:t>points scored</a:t>
             </a:r>
@@ -24892,8 +24406,7 @@
                   <a:srgbClr val="FFFFFF"/>
                 </a:solidFill>
                 <a:latin typeface="Calibri" pitchFamily="34" charset="0"/>
-                <a:ea typeface="Calibri" pitchFamily="34" charset="-122"/>
-                <a:cs typeface="Calibri" pitchFamily="34" charset="-120"/>
+                <a:cs typeface="Amiri" pitchFamily="2" charset="-78"/>
               </a:rPr>
               <a:t>2</a:t>
             </a:r>
@@ -24931,8 +24444,7 @@
                   <a:srgbClr val="1B3B6F"/>
                 </a:solidFill>
                 <a:latin typeface="Calibri" pitchFamily="34" charset="0"/>
-                <a:ea typeface="Calibri" pitchFamily="34" charset="-122"/>
-                <a:cs typeface="Calibri" pitchFamily="34" charset="-120"/>
+                <a:cs typeface="Amiri" pitchFamily="2" charset="-78"/>
               </a:rPr>
               <a:t>What does </a:t>
             </a:r>
@@ -24944,9 +24456,8 @@
                 <a:solidFill>
                   <a:srgbClr val="1B3B6F"/>
                 </a:solidFill>
-                <a:latin typeface="Amiri" pitchFamily="34" charset="0"/>
-                <a:ea typeface="Amiri" pitchFamily="34" charset="-122"/>
-                <a:cs typeface="Amiri" pitchFamily="34" charset="-120"/>
+                <a:latin typeface="Amiri" pitchFamily="2" charset="-78"/>
+                <a:cs typeface="Amiri" pitchFamily="2" charset="-78"/>
               </a:rPr>
               <a:t>الأَخْطَاءُ الشَّائِعَةُ</a:t>
             </a:r>
@@ -24959,8 +24470,7 @@
                   <a:srgbClr val="1B3B6F"/>
                 </a:solidFill>
                 <a:latin typeface="Calibri" pitchFamily="34" charset="0"/>
-                <a:ea typeface="Calibri" pitchFamily="34" charset="-122"/>
-                <a:cs typeface="Calibri" pitchFamily="34" charset="-120"/>
+                <a:cs typeface="Amiri" pitchFamily="2" charset="-78"/>
               </a:rPr>
               <a:t> mean?</a:t>
             </a:r>
@@ -25023,8 +24533,7 @@
                   <a:srgbClr val="1B3B6F"/>
                 </a:solidFill>
                 <a:latin typeface="Calibri" pitchFamily="34" charset="0"/>
-                <a:ea typeface="Calibri" pitchFamily="34" charset="-122"/>
-                <a:cs typeface="Calibri" pitchFamily="34" charset="-120"/>
+                <a:cs typeface="Amiri" pitchFamily="2" charset="-78"/>
               </a:rPr>
               <a:t>A</a:t>
             </a:r>
@@ -25062,8 +24571,7 @@
                   <a:srgbClr val="1F2A37"/>
                 </a:solidFill>
                 <a:latin typeface="Calibri" pitchFamily="34" charset="0"/>
-                <a:ea typeface="Calibri" pitchFamily="34" charset="-122"/>
-                <a:cs typeface="Calibri" pitchFamily="34" charset="-120"/>
+                <a:cs typeface="Amiri" pitchFamily="2" charset="-78"/>
               </a:rPr>
               <a:t>common errors</a:t>
             </a:r>
@@ -25126,8 +24634,7 @@
                   <a:srgbClr val="1B3B6F"/>
                 </a:solidFill>
                 <a:latin typeface="Calibri" pitchFamily="34" charset="0"/>
-                <a:ea typeface="Calibri" pitchFamily="34" charset="-122"/>
-                <a:cs typeface="Calibri" pitchFamily="34" charset="-120"/>
+                <a:cs typeface="Amiri" pitchFamily="2" charset="-78"/>
               </a:rPr>
               <a:t>B</a:t>
             </a:r>
@@ -25165,8 +24672,7 @@
                   <a:srgbClr val="1F2A37"/>
                 </a:solidFill>
                 <a:latin typeface="Calibri" pitchFamily="34" charset="0"/>
-                <a:ea typeface="Calibri" pitchFamily="34" charset="-122"/>
-                <a:cs typeface="Calibri" pitchFamily="34" charset="-120"/>
+                <a:cs typeface="Amiri" pitchFamily="2" charset="-78"/>
               </a:rPr>
               <a:t>rare errors</a:t>
             </a:r>
@@ -25229,8 +24735,7 @@
                   <a:srgbClr val="1B3B6F"/>
                 </a:solidFill>
                 <a:latin typeface="Calibri" pitchFamily="34" charset="0"/>
-                <a:ea typeface="Calibri" pitchFamily="34" charset="-122"/>
-                <a:cs typeface="Calibri" pitchFamily="34" charset="-120"/>
+                <a:cs typeface="Amiri" pitchFamily="2" charset="-78"/>
               </a:rPr>
               <a:t>C</a:t>
             </a:r>
@@ -25268,8 +24773,7 @@
                   <a:srgbClr val="1F2A37"/>
                 </a:solidFill>
                 <a:latin typeface="Calibri" pitchFamily="34" charset="0"/>
-                <a:ea typeface="Calibri" pitchFamily="34" charset="-122"/>
-                <a:cs typeface="Calibri" pitchFamily="34" charset="-120"/>
+                <a:cs typeface="Amiri" pitchFamily="2" charset="-78"/>
               </a:rPr>
               <a:t>corrected errors</a:t>
             </a:r>
@@ -25366,8 +24870,7 @@
                   <a:srgbClr val="FFFFFF"/>
                 </a:solidFill>
                 <a:latin typeface="Calibri" pitchFamily="34" charset="0"/>
-                <a:ea typeface="Calibri" pitchFamily="34" charset="-122"/>
-                <a:cs typeface="Calibri" pitchFamily="34" charset="-120"/>
+                <a:cs typeface="Amiri" pitchFamily="2" charset="-78"/>
               </a:rPr>
               <a:t>3</a:t>
             </a:r>
@@ -25405,8 +24908,7 @@
                   <a:srgbClr val="1B3B6F"/>
                 </a:solidFill>
                 <a:latin typeface="Calibri" pitchFamily="34" charset="0"/>
-                <a:ea typeface="Calibri" pitchFamily="34" charset="-122"/>
-                <a:cs typeface="Calibri" pitchFamily="34" charset="-120"/>
+                <a:cs typeface="Amiri" pitchFamily="2" charset="-78"/>
               </a:rPr>
               <a:t>What does </a:t>
             </a:r>
@@ -25418,9 +24920,8 @@
                 <a:solidFill>
                   <a:srgbClr val="1B3B6F"/>
                 </a:solidFill>
-                <a:latin typeface="Amiri" pitchFamily="34" charset="0"/>
-                <a:ea typeface="Amiri" pitchFamily="34" charset="-122"/>
-                <a:cs typeface="Amiri" pitchFamily="34" charset="-120"/>
+                <a:latin typeface="Amiri" pitchFamily="2" charset="-78"/>
+                <a:cs typeface="Amiri" pitchFamily="2" charset="-78"/>
               </a:rPr>
               <a:t>خُطَّةُ المُرَاجَعَةِ</a:t>
             </a:r>
@@ -25433,8 +24934,7 @@
                   <a:srgbClr val="1B3B6F"/>
                 </a:solidFill>
                 <a:latin typeface="Calibri" pitchFamily="34" charset="0"/>
-                <a:ea typeface="Calibri" pitchFamily="34" charset="-122"/>
-                <a:cs typeface="Calibri" pitchFamily="34" charset="-120"/>
+                <a:cs typeface="Amiri" pitchFamily="2" charset="-78"/>
               </a:rPr>
               <a:t> mean?</a:t>
             </a:r>
@@ -25497,8 +24997,7 @@
                   <a:srgbClr val="1B3B6F"/>
                 </a:solidFill>
                 <a:latin typeface="Calibri" pitchFamily="34" charset="0"/>
-                <a:ea typeface="Calibri" pitchFamily="34" charset="-122"/>
-                <a:cs typeface="Calibri" pitchFamily="34" charset="-120"/>
+                <a:cs typeface="Amiri" pitchFamily="2" charset="-78"/>
               </a:rPr>
               <a:t>A</a:t>
             </a:r>
@@ -25536,8 +25035,7 @@
                   <a:srgbClr val="1F2A37"/>
                 </a:solidFill>
                 <a:latin typeface="Calibri" pitchFamily="34" charset="0"/>
-                <a:ea typeface="Calibri" pitchFamily="34" charset="-122"/>
-                <a:cs typeface="Calibri" pitchFamily="34" charset="-120"/>
+                <a:cs typeface="Amiri" pitchFamily="2" charset="-78"/>
               </a:rPr>
               <a:t>exam paper</a:t>
             </a:r>
@@ -25600,8 +25098,7 @@
                   <a:srgbClr val="1B3B6F"/>
                 </a:solidFill>
                 <a:latin typeface="Calibri" pitchFamily="34" charset="0"/>
-                <a:ea typeface="Calibri" pitchFamily="34" charset="-122"/>
-                <a:cs typeface="Calibri" pitchFamily="34" charset="-120"/>
+                <a:cs typeface="Amiri" pitchFamily="2" charset="-78"/>
               </a:rPr>
               <a:t>B</a:t>
             </a:r>
@@ -25639,8 +25136,7 @@
                   <a:srgbClr val="1F2A37"/>
                 </a:solidFill>
                 <a:latin typeface="Calibri" pitchFamily="34" charset="0"/>
-                <a:ea typeface="Calibri" pitchFamily="34" charset="-122"/>
-                <a:cs typeface="Calibri" pitchFamily="34" charset="-120"/>
+                <a:cs typeface="Amiri" pitchFamily="2" charset="-78"/>
               </a:rPr>
               <a:t>final result</a:t>
             </a:r>
@@ -25703,8 +25199,7 @@
                   <a:srgbClr val="1B3B6F"/>
                 </a:solidFill>
                 <a:latin typeface="Calibri" pitchFamily="34" charset="0"/>
-                <a:ea typeface="Calibri" pitchFamily="34" charset="-122"/>
-                <a:cs typeface="Calibri" pitchFamily="34" charset="-120"/>
+                <a:cs typeface="Amiri" pitchFamily="2" charset="-78"/>
               </a:rPr>
               <a:t>C</a:t>
             </a:r>
@@ -25742,8 +25237,7 @@
                   <a:srgbClr val="1F2A37"/>
                 </a:solidFill>
                 <a:latin typeface="Calibri" pitchFamily="34" charset="0"/>
-                <a:ea typeface="Calibri" pitchFamily="34" charset="-122"/>
-                <a:cs typeface="Calibri" pitchFamily="34" charset="-120"/>
+                <a:cs typeface="Amiri" pitchFamily="2" charset="-78"/>
               </a:rPr>
               <a:t>revision plan</a:t>
             </a:r>
@@ -25840,8 +25334,7 @@
                   <a:srgbClr val="FFFFFF"/>
                 </a:solidFill>
                 <a:latin typeface="Calibri" pitchFamily="34" charset="0"/>
-                <a:ea typeface="Calibri" pitchFamily="34" charset="-122"/>
-                <a:cs typeface="Calibri" pitchFamily="34" charset="-120"/>
+                <a:cs typeface="Amiri" pitchFamily="2" charset="-78"/>
               </a:rPr>
               <a:t>4</a:t>
             </a:r>
@@ -25879,8 +25372,7 @@
                   <a:srgbClr val="1B3B6F"/>
                 </a:solidFill>
                 <a:latin typeface="Calibri" pitchFamily="34" charset="0"/>
-                <a:ea typeface="Calibri" pitchFamily="34" charset="-122"/>
-                <a:cs typeface="Calibri" pitchFamily="34" charset="-120"/>
+                <a:cs typeface="Amiri" pitchFamily="2" charset="-78"/>
               </a:rPr>
               <a:t>Choose the correct verb: </a:t>
             </a:r>
@@ -25892,9 +25384,8 @@
                 <a:solidFill>
                   <a:srgbClr val="1B3B6F"/>
                 </a:solidFill>
-                <a:latin typeface="Amiri" pitchFamily="34" charset="0"/>
-                <a:ea typeface="Amiri" pitchFamily="34" charset="-122"/>
-                <a:cs typeface="Amiri" pitchFamily="34" charset="-120"/>
+                <a:latin typeface="Amiri" pitchFamily="2" charset="-78"/>
+                <a:cs typeface="Amiri" pitchFamily="2" charset="-78"/>
               </a:rPr>
               <a:t>يَنْبَغِي أَنْ</a:t>
             </a:r>
@@ -25907,8 +25398,7 @@
                   <a:srgbClr val="1B3B6F"/>
                 </a:solidFill>
                 <a:latin typeface="Calibri" pitchFamily="34" charset="0"/>
-                <a:ea typeface="Calibri" pitchFamily="34" charset="-122"/>
-                <a:cs typeface="Calibri" pitchFamily="34" charset="-120"/>
+                <a:cs typeface="Amiri" pitchFamily="2" charset="-78"/>
               </a:rPr>
               <a:t> ___ </a:t>
             </a:r>
@@ -25920,9 +25410,8 @@
                 <a:solidFill>
                   <a:srgbClr val="1B3B6F"/>
                 </a:solidFill>
-                <a:latin typeface="Amiri" pitchFamily="34" charset="0"/>
-                <a:ea typeface="Amiri" pitchFamily="34" charset="-122"/>
-                <a:cs typeface="Amiri" pitchFamily="34" charset="-120"/>
+                <a:latin typeface="Amiri" pitchFamily="2" charset="-78"/>
+                <a:cs typeface="Amiri" pitchFamily="2" charset="-78"/>
               </a:rPr>
               <a:t>بِجِدٍّ</a:t>
             </a:r>
@@ -25935,8 +25424,7 @@
                   <a:srgbClr val="1B3B6F"/>
                 </a:solidFill>
                 <a:latin typeface="Calibri" pitchFamily="34" charset="0"/>
-                <a:ea typeface="Calibri" pitchFamily="34" charset="-122"/>
-                <a:cs typeface="Calibri" pitchFamily="34" charset="-120"/>
+                <a:cs typeface="Amiri" pitchFamily="2" charset="-78"/>
               </a:rPr>
               <a:t>.</a:t>
             </a:r>
@@ -25999,8 +25487,7 @@
                   <a:srgbClr val="1B3B6F"/>
                 </a:solidFill>
                 <a:latin typeface="Calibri" pitchFamily="34" charset="0"/>
-                <a:ea typeface="Calibri" pitchFamily="34" charset="-122"/>
-                <a:cs typeface="Calibri" pitchFamily="34" charset="-120"/>
+                <a:cs typeface="Amiri" pitchFamily="2" charset="-78"/>
               </a:rPr>
               <a:t>A</a:t>
             </a:r>
@@ -26037,9 +25524,8 @@
                 <a:solidFill>
                   <a:srgbClr val="1F2A37"/>
                 </a:solidFill>
-                <a:latin typeface="Amiri" pitchFamily="34" charset="0"/>
-                <a:ea typeface="Amiri" pitchFamily="34" charset="-122"/>
-                <a:cs typeface="Amiri" pitchFamily="34" charset="-120"/>
+                <a:latin typeface="Amiri" pitchFamily="2" charset="-78"/>
+                <a:cs typeface="Amiri" pitchFamily="2" charset="-78"/>
               </a:rPr>
               <a:t>نَعْمَلُ</a:t>
             </a:r>
@@ -26102,8 +25588,7 @@
                   <a:srgbClr val="1B3B6F"/>
                 </a:solidFill>
                 <a:latin typeface="Calibri" pitchFamily="34" charset="0"/>
-                <a:ea typeface="Calibri" pitchFamily="34" charset="-122"/>
-                <a:cs typeface="Calibri" pitchFamily="34" charset="-120"/>
+                <a:cs typeface="Amiri" pitchFamily="2" charset="-78"/>
               </a:rPr>
               <a:t>B</a:t>
             </a:r>
@@ -26140,9 +25625,8 @@
                 <a:solidFill>
                   <a:srgbClr val="1F2A37"/>
                 </a:solidFill>
-                <a:latin typeface="Amiri" pitchFamily="34" charset="0"/>
-                <a:ea typeface="Amiri" pitchFamily="34" charset="-122"/>
-                <a:cs typeface="Amiri" pitchFamily="34" charset="-120"/>
+                <a:latin typeface="Amiri" pitchFamily="2" charset="-78"/>
+                <a:cs typeface="Amiri" pitchFamily="2" charset="-78"/>
               </a:rPr>
               <a:t>عَمِلْنَا</a:t>
             </a:r>
@@ -26205,8 +25689,7 @@
                   <a:srgbClr val="1B3B6F"/>
                 </a:solidFill>
                 <a:latin typeface="Calibri" pitchFamily="34" charset="0"/>
-                <a:ea typeface="Calibri" pitchFamily="34" charset="-122"/>
-                <a:cs typeface="Calibri" pitchFamily="34" charset="-120"/>
+                <a:cs typeface="Amiri" pitchFamily="2" charset="-78"/>
               </a:rPr>
               <a:t>C</a:t>
             </a:r>
@@ -26243,9 +25726,8 @@
                 <a:solidFill>
                   <a:srgbClr val="1F2A37"/>
                 </a:solidFill>
-                <a:latin typeface="Amiri" pitchFamily="34" charset="0"/>
-                <a:ea typeface="Amiri" pitchFamily="34" charset="-122"/>
-                <a:cs typeface="Amiri" pitchFamily="34" charset="-120"/>
+                <a:latin typeface="Amiri" pitchFamily="2" charset="-78"/>
+                <a:cs typeface="Amiri" pitchFamily="2" charset="-78"/>
               </a:rPr>
               <a:t>نَعْمَلَ</a:t>
             </a:r>
@@ -26342,8 +25824,7 @@
                   <a:srgbClr val="FFFFFF"/>
                 </a:solidFill>
                 <a:latin typeface="Calibri" pitchFamily="34" charset="0"/>
-                <a:ea typeface="Calibri" pitchFamily="34" charset="-122"/>
-                <a:cs typeface="Calibri" pitchFamily="34" charset="-120"/>
+                <a:cs typeface="Amiri" pitchFamily="2" charset="-78"/>
               </a:rPr>
               <a:t>5</a:t>
             </a:r>
@@ -26381,8 +25862,7 @@
                   <a:srgbClr val="1B3B6F"/>
                 </a:solidFill>
                 <a:latin typeface="Calibri" pitchFamily="34" charset="0"/>
-                <a:ea typeface="Calibri" pitchFamily="34" charset="-122"/>
-                <a:cs typeface="Calibri" pitchFamily="34" charset="-120"/>
+                <a:cs typeface="Amiri" pitchFamily="2" charset="-78"/>
               </a:rPr>
               <a:t>Choose the correct result: </a:t>
             </a:r>
@@ -26394,9 +25874,8 @@
                 <a:solidFill>
                   <a:srgbClr val="1B3B6F"/>
                 </a:solidFill>
-                <a:latin typeface="Amiri" pitchFamily="34" charset="0"/>
-                <a:ea typeface="Amiri" pitchFamily="34" charset="-122"/>
-                <a:cs typeface="Amiri" pitchFamily="34" charset="-120"/>
+                <a:latin typeface="Amiri" pitchFamily="2" charset="-78"/>
+                <a:cs typeface="Amiri" pitchFamily="2" charset="-78"/>
               </a:rPr>
               <a:t>لَوْ تَدَرَّبْتُ أَكْثَرَ،</a:t>
             </a:r>
@@ -26409,8 +25888,7 @@
                   <a:srgbClr val="1B3B6F"/>
                 </a:solidFill>
                 <a:latin typeface="Calibri" pitchFamily="34" charset="0"/>
-                <a:ea typeface="Calibri" pitchFamily="34" charset="-122"/>
-                <a:cs typeface="Calibri" pitchFamily="34" charset="-120"/>
+                <a:cs typeface="Amiri" pitchFamily="2" charset="-78"/>
               </a:rPr>
               <a:t> ___ .</a:t>
             </a:r>
@@ -26473,8 +25951,7 @@
                   <a:srgbClr val="1B3B6F"/>
                 </a:solidFill>
                 <a:latin typeface="Calibri" pitchFamily="34" charset="0"/>
-                <a:ea typeface="Calibri" pitchFamily="34" charset="-122"/>
-                <a:cs typeface="Calibri" pitchFamily="34" charset="-120"/>
+                <a:cs typeface="Amiri" pitchFamily="2" charset="-78"/>
               </a:rPr>
               <a:t>A</a:t>
             </a:r>
@@ -26511,9 +25988,8 @@
                 <a:solidFill>
                   <a:srgbClr val="1F2A37"/>
                 </a:solidFill>
-                <a:latin typeface="Amiri" pitchFamily="34" charset="0"/>
-                <a:ea typeface="Amiri" pitchFamily="34" charset="-122"/>
-                <a:cs typeface="Amiri" pitchFamily="34" charset="-120"/>
+                <a:latin typeface="Amiri" pitchFamily="2" charset="-78"/>
+                <a:cs typeface="Amiri" pitchFamily="2" charset="-78"/>
               </a:rPr>
               <a:t>لَتَحَسَّنْتُ</a:t>
             </a:r>
@@ -26576,8 +26052,7 @@
                   <a:srgbClr val="1B3B6F"/>
                 </a:solidFill>
                 <a:latin typeface="Calibri" pitchFamily="34" charset="0"/>
-                <a:ea typeface="Calibri" pitchFamily="34" charset="-122"/>
-                <a:cs typeface="Calibri" pitchFamily="34" charset="-120"/>
+                <a:cs typeface="Amiri" pitchFamily="2" charset="-78"/>
               </a:rPr>
               <a:t>B</a:t>
             </a:r>
@@ -26614,9 +26089,8 @@
                 <a:solidFill>
                   <a:srgbClr val="1F2A37"/>
                 </a:solidFill>
-                <a:latin typeface="Amiri" pitchFamily="34" charset="0"/>
-                <a:ea typeface="Amiri" pitchFamily="34" charset="-122"/>
-                <a:cs typeface="Amiri" pitchFamily="34" charset="-120"/>
+                <a:latin typeface="Amiri" pitchFamily="2" charset="-78"/>
+                <a:cs typeface="Amiri" pitchFamily="2" charset="-78"/>
               </a:rPr>
               <a:t>تَحَسَّنْتُ</a:t>
             </a:r>
@@ -26679,8 +26153,7 @@
                   <a:srgbClr val="1B3B6F"/>
                 </a:solidFill>
                 <a:latin typeface="Calibri" pitchFamily="34" charset="0"/>
-                <a:ea typeface="Calibri" pitchFamily="34" charset="-122"/>
-                <a:cs typeface="Calibri" pitchFamily="34" charset="-120"/>
+                <a:cs typeface="Amiri" pitchFamily="2" charset="-78"/>
               </a:rPr>
               <a:t>C</a:t>
             </a:r>
@@ -26717,9 +26190,8 @@
                 <a:solidFill>
                   <a:srgbClr val="1F2A37"/>
                 </a:solidFill>
-                <a:latin typeface="Amiri" pitchFamily="34" charset="0"/>
-                <a:ea typeface="Amiri" pitchFamily="34" charset="-122"/>
-                <a:cs typeface="Amiri" pitchFamily="34" charset="-120"/>
+                <a:latin typeface="Amiri" pitchFamily="2" charset="-78"/>
+                <a:cs typeface="Amiri" pitchFamily="2" charset="-78"/>
               </a:rPr>
               <a:t>سَأَتَحَسَّنُ</a:t>
             </a:r>
@@ -26791,8 +26263,7 @@
                   <a:srgbClr val="0E7C86"/>
                 </a:solidFill>
                 <a:latin typeface="Calibri" pitchFamily="34" charset="0"/>
-                <a:ea typeface="Calibri" pitchFamily="34" charset="-122"/>
-                <a:cs typeface="Calibri" pitchFamily="34" charset="-120"/>
+                <a:cs typeface="Amiri" pitchFamily="2" charset="-78"/>
               </a:rPr>
               <a:t>HOW TO ANSWER</a:t>
             </a:r>
@@ -26830,8 +26301,7 @@
                   <a:srgbClr val="1F2A37"/>
                 </a:solidFill>
                 <a:latin typeface="Calibri" pitchFamily="34" charset="0"/>
-                <a:ea typeface="Calibri" pitchFamily="34" charset="-122"/>
-                <a:cs typeface="Calibri" pitchFamily="34" charset="-120"/>
+                <a:cs typeface="Amiri" pitchFamily="2" charset="-78"/>
               </a:rPr>
               <a:t>Work on your own in silence.</a:t>
             </a:r>
@@ -26847,8 +26317,7 @@
                   <a:srgbClr val="1F2A37"/>
                 </a:solidFill>
                 <a:latin typeface="Calibri" pitchFamily="34" charset="0"/>
-                <a:ea typeface="Calibri" pitchFamily="34" charset="-122"/>
-                <a:cs typeface="Calibri" pitchFamily="34" charset="-120"/>
+                <a:cs typeface="Amiri" pitchFamily="2" charset="-78"/>
               </a:rPr>
               <a:t>When the timer ends, type in the chat:</a:t>
             </a:r>
@@ -26886,8 +26355,7 @@
                   <a:srgbClr val="1B3B6F"/>
                 </a:solidFill>
                 <a:latin typeface="Consolas" pitchFamily="34" charset="0"/>
-                <a:ea typeface="Consolas" pitchFamily="34" charset="-122"/>
-                <a:cs typeface="Consolas" pitchFamily="34" charset="-120"/>
+                <a:cs typeface="Amiri" pitchFamily="2" charset="-78"/>
               </a:rPr>
               <a:t>1_  2_  3_  4_  5_</a:t>
             </a:r>
@@ -26925,8 +26393,7 @@
                   <a:srgbClr val="0E7C86"/>
                 </a:solidFill>
                 <a:latin typeface="Calibri" pitchFamily="34" charset="0"/>
-                <a:ea typeface="Calibri" pitchFamily="34" charset="-122"/>
-                <a:cs typeface="Calibri" pitchFamily="34" charset="-120"/>
+                <a:cs typeface="Amiri" pitchFamily="2" charset="-78"/>
               </a:rPr>
               <a:t>⏱  5 : 00</a:t>
             </a:r>
@@ -26964,8 +26431,7 @@
                   <a:srgbClr val="8A93A0"/>
                 </a:solidFill>
                 <a:latin typeface="Calibri" pitchFamily="34" charset="0"/>
-                <a:ea typeface="Calibri" pitchFamily="34" charset="-122"/>
-                <a:cs typeface="Calibri" pitchFamily="34" charset="-120"/>
+                <a:cs typeface="Amiri" pitchFamily="2" charset="-78"/>
               </a:rPr>
               <a:t>4 / 18</a:t>
             </a:r>
@@ -27059,9 +26525,8 @@
                 <a:solidFill>
                   <a:srgbClr val="D4AF37"/>
                 </a:solidFill>
-                <a:latin typeface="Amiri" pitchFamily="34" charset="0"/>
-                <a:ea typeface="Amiri" pitchFamily="34" charset="-122"/>
-                <a:cs typeface="Amiri" pitchFamily="34" charset="-120"/>
+                <a:latin typeface="Amiri" pitchFamily="2" charset="-78"/>
+                <a:cs typeface="Amiri" pitchFamily="2" charset="-78"/>
               </a:rPr>
               <a:t>م</a:t>
             </a:r>
@@ -27099,8 +26564,7 @@
                   <a:srgbClr val="1B3B6F"/>
                 </a:solidFill>
                 <a:latin typeface="Cambria" pitchFamily="34" charset="0"/>
-                <a:ea typeface="Cambria" pitchFamily="34" charset="-122"/>
-                <a:cs typeface="Cambria" pitchFamily="34" charset="-120"/>
+                <a:cs typeface="Amiri" pitchFamily="2" charset="-78"/>
               </a:rPr>
               <a:t>Al Madina Online School</a:t>
             </a:r>
@@ -27138,8 +26602,7 @@
                   <a:srgbClr val="8A6D1E"/>
                 </a:solidFill>
                 <a:latin typeface="Calibri" pitchFamily="34" charset="0"/>
-                <a:ea typeface="Calibri" pitchFamily="34" charset="-122"/>
-                <a:cs typeface="Calibri" pitchFamily="34" charset="-120"/>
+                <a:cs typeface="Amiri" pitchFamily="2" charset="-78"/>
               </a:rPr>
               <a:t>ARABIC DEPARTMENT · MIFTAH ARABIC · IGCSE 0544</a:t>
             </a:r>
@@ -27204,8 +26667,7 @@
                   <a:srgbClr val="FFFFFF"/>
                 </a:solidFill>
                 <a:latin typeface="Calibri" pitchFamily="34" charset="0"/>
-                <a:ea typeface="Calibri" pitchFamily="34" charset="-122"/>
-                <a:cs typeface="Calibri" pitchFamily="34" charset="-120"/>
+                <a:cs typeface="Amiri" pitchFamily="2" charset="-78"/>
               </a:rPr>
               <a:t>P6-L11 · IGCSE Bridge</a:t>
             </a:r>
@@ -27270,8 +26732,7 @@
                   <a:srgbClr val="FFFFFF"/>
                 </a:solidFill>
                 <a:latin typeface="Calibri" pitchFamily="34" charset="0"/>
-                <a:ea typeface="Calibri" pitchFamily="34" charset="-122"/>
-                <a:cs typeface="Calibri" pitchFamily="34" charset="-120"/>
+                <a:cs typeface="Amiri" pitchFamily="2" charset="-78"/>
               </a:rPr>
               <a:t>DO NOW · 2 MIN</a:t>
             </a:r>
@@ -27309,8 +26770,7 @@
                   <a:srgbClr val="0E7C86"/>
                 </a:solidFill>
                 <a:latin typeface="Calibri" pitchFamily="34" charset="0"/>
-                <a:ea typeface="Calibri" pitchFamily="34" charset="-122"/>
-                <a:cs typeface="Calibri" pitchFamily="34" charset="-120"/>
+                <a:cs typeface="Amiri" pitchFamily="2" charset="-78"/>
               </a:rPr>
               <a:t>DO NOW · ANSWERS AND REASONS</a:t>
             </a:r>
@@ -27348,8 +26808,7 @@
                   <a:srgbClr val="1B3B6F"/>
                 </a:solidFill>
                 <a:latin typeface="Cambria" pitchFamily="34" charset="0"/>
-                <a:ea typeface="Cambria" pitchFamily="34" charset="-122"/>
-                <a:cs typeface="Cambria" pitchFamily="34" charset="-120"/>
+                <a:cs typeface="Amiri" pitchFamily="2" charset="-78"/>
               </a:rPr>
               <a:t>Let’s check — and explain why</a:t>
             </a:r>
@@ -27386,9 +26845,8 @@
                 <a:solidFill>
                   <a:srgbClr val="8A6D1E"/>
                 </a:solidFill>
-                <a:latin typeface="Amiri" pitchFamily="34" charset="0"/>
-                <a:ea typeface="Amiri" pitchFamily="34" charset="-122"/>
-                <a:cs typeface="Amiri" pitchFamily="34" charset="-120"/>
+                <a:latin typeface="Amiri" pitchFamily="2" charset="-78"/>
+                <a:cs typeface="Amiri" pitchFamily="2" charset="-78"/>
               </a:rPr>
               <a:t>الإِجَابَاتُ وَالتَّعْلِيلُ</a:t>
             </a:r>
@@ -27426,8 +26884,7 @@
                   <a:srgbClr val="8A93A0"/>
                 </a:solidFill>
                 <a:latin typeface="Calibri" pitchFamily="34" charset="0"/>
-                <a:ea typeface="Calibri" pitchFamily="34" charset="-122"/>
-                <a:cs typeface="Calibri" pitchFamily="34" charset="-120"/>
+                <a:cs typeface="Amiri" pitchFamily="2" charset="-78"/>
               </a:rPr>
               <a:t>Miftah Arabic · Progression P6 · IGCSE Bridge · P6-L11</a:t>
             </a:r>
@@ -27524,8 +26981,7 @@
                   <a:srgbClr val="FFFFFF"/>
                 </a:solidFill>
                 <a:latin typeface="Calibri" pitchFamily="34" charset="0"/>
-                <a:ea typeface="Calibri" pitchFamily="34" charset="-122"/>
-                <a:cs typeface="Calibri" pitchFamily="34" charset="-120"/>
+                <a:cs typeface="Amiri" pitchFamily="2" charset="-78"/>
               </a:rPr>
               <a:t>1</a:t>
             </a:r>
@@ -27563,8 +27019,7 @@
                   <a:srgbClr val="1B3B6F"/>
                 </a:solidFill>
                 <a:latin typeface="Calibri" pitchFamily="34" charset="0"/>
-                <a:ea typeface="Calibri" pitchFamily="34" charset="-122"/>
-                <a:cs typeface="Calibri" pitchFamily="34" charset="-120"/>
+                <a:cs typeface="Amiri" pitchFamily="2" charset="-78"/>
               </a:rPr>
               <a:t>What does </a:t>
             </a:r>
@@ -27576,9 +27031,8 @@
                 <a:solidFill>
                   <a:srgbClr val="1B3B6F"/>
                 </a:solidFill>
-                <a:latin typeface="Amiri" pitchFamily="34" charset="0"/>
-                <a:ea typeface="Amiri" pitchFamily="34" charset="-122"/>
-                <a:cs typeface="Amiri" pitchFamily="34" charset="-120"/>
+                <a:latin typeface="Amiri" pitchFamily="2" charset="-78"/>
+                <a:cs typeface="Amiri" pitchFamily="2" charset="-78"/>
               </a:rPr>
               <a:t>نِقَاطُ الضَّعْفِ</a:t>
             </a:r>
@@ -27591,8 +27045,7 @@
                   <a:srgbClr val="1B3B6F"/>
                 </a:solidFill>
                 <a:latin typeface="Calibri" pitchFamily="34" charset="0"/>
-                <a:ea typeface="Calibri" pitchFamily="34" charset="-122"/>
-                <a:cs typeface="Calibri" pitchFamily="34" charset="-120"/>
+                <a:cs typeface="Amiri" pitchFamily="2" charset="-78"/>
               </a:rPr>
               <a:t> mean?</a:t>
             </a:r>
@@ -27655,8 +27108,7 @@
                   <a:srgbClr val="1B3B6F"/>
                 </a:solidFill>
                 <a:latin typeface="Calibri" pitchFamily="34" charset="0"/>
-                <a:ea typeface="Calibri" pitchFamily="34" charset="-122"/>
-                <a:cs typeface="Calibri" pitchFamily="34" charset="-120"/>
+                <a:cs typeface="Amiri" pitchFamily="2" charset="-78"/>
               </a:rPr>
               <a:t>A</a:t>
             </a:r>
@@ -27694,8 +27146,7 @@
                   <a:srgbClr val="9AA1AB"/>
                 </a:solidFill>
                 <a:latin typeface="Calibri" pitchFamily="34" charset="0"/>
-                <a:ea typeface="Calibri" pitchFamily="34" charset="-122"/>
-                <a:cs typeface="Calibri" pitchFamily="34" charset="-120"/>
+                <a:cs typeface="Amiri" pitchFamily="2" charset="-78"/>
               </a:rPr>
               <a:t>strengths</a:t>
             </a:r>
@@ -27785,8 +27236,7 @@
                   <a:srgbClr val="FFFFFF"/>
                 </a:solidFill>
                 <a:latin typeface="Calibri" pitchFamily="34" charset="0"/>
-                <a:ea typeface="Calibri" pitchFamily="34" charset="-122"/>
-                <a:cs typeface="Calibri" pitchFamily="34" charset="-120"/>
+                <a:cs typeface="Amiri" pitchFamily="2" charset="-78"/>
               </a:rPr>
               <a:t>B</a:t>
             </a:r>
@@ -27824,8 +27274,7 @@
                   <a:srgbClr val="1F2A37"/>
                 </a:solidFill>
                 <a:latin typeface="Calibri" pitchFamily="34" charset="0"/>
-                <a:ea typeface="Calibri" pitchFamily="34" charset="-122"/>
-                <a:cs typeface="Calibri" pitchFamily="34" charset="-120"/>
+                <a:cs typeface="Amiri" pitchFamily="2" charset="-78"/>
               </a:rPr>
               <a:t>weaknesses</a:t>
             </a:r>
@@ -27888,8 +27337,7 @@
                   <a:srgbClr val="1B3B6F"/>
                 </a:solidFill>
                 <a:latin typeface="Calibri" pitchFamily="34" charset="0"/>
-                <a:ea typeface="Calibri" pitchFamily="34" charset="-122"/>
-                <a:cs typeface="Calibri" pitchFamily="34" charset="-120"/>
+                <a:cs typeface="Amiri" pitchFamily="2" charset="-78"/>
               </a:rPr>
               <a:t>C</a:t>
             </a:r>
@@ -27927,8 +27375,7 @@
                   <a:srgbClr val="9AA1AB"/>
                 </a:solidFill>
                 <a:latin typeface="Calibri" pitchFamily="34" charset="0"/>
-                <a:ea typeface="Calibri" pitchFamily="34" charset="-122"/>
-                <a:cs typeface="Calibri" pitchFamily="34" charset="-120"/>
+                <a:cs typeface="Amiri" pitchFamily="2" charset="-78"/>
               </a:rPr>
               <a:t>points scored</a:t>
             </a:r>
@@ -27966,8 +27413,7 @@
                   <a:srgbClr val="8A6D1E"/>
                 </a:solidFill>
                 <a:latin typeface="Calibri" pitchFamily="34" charset="0"/>
-                <a:ea typeface="Calibri" pitchFamily="34" charset="-122"/>
-                <a:cs typeface="Calibri" pitchFamily="34" charset="-120"/>
+                <a:cs typeface="Amiri" pitchFamily="2" charset="-78"/>
               </a:rPr>
               <a:t>Prepared at home (P6-L10).</a:t>
             </a:r>
@@ -28064,8 +27510,7 @@
                   <a:srgbClr val="FFFFFF"/>
                 </a:solidFill>
                 <a:latin typeface="Calibri" pitchFamily="34" charset="0"/>
-                <a:ea typeface="Calibri" pitchFamily="34" charset="-122"/>
-                <a:cs typeface="Calibri" pitchFamily="34" charset="-120"/>
+                <a:cs typeface="Amiri" pitchFamily="2" charset="-78"/>
               </a:rPr>
               <a:t>2</a:t>
             </a:r>
@@ -28103,8 +27548,7 @@
                   <a:srgbClr val="1B3B6F"/>
                 </a:solidFill>
                 <a:latin typeface="Calibri" pitchFamily="34" charset="0"/>
-                <a:ea typeface="Calibri" pitchFamily="34" charset="-122"/>
-                <a:cs typeface="Calibri" pitchFamily="34" charset="-120"/>
+                <a:cs typeface="Amiri" pitchFamily="2" charset="-78"/>
               </a:rPr>
               <a:t>What does </a:t>
             </a:r>
@@ -28116,9 +27560,8 @@
                 <a:solidFill>
                   <a:srgbClr val="1B3B6F"/>
                 </a:solidFill>
-                <a:latin typeface="Amiri" pitchFamily="34" charset="0"/>
-                <a:ea typeface="Amiri" pitchFamily="34" charset="-122"/>
-                <a:cs typeface="Amiri" pitchFamily="34" charset="-120"/>
+                <a:latin typeface="Amiri" pitchFamily="2" charset="-78"/>
+                <a:cs typeface="Amiri" pitchFamily="2" charset="-78"/>
               </a:rPr>
               <a:t>الأَخْطَاءُ الشَّائِعَةُ</a:t>
             </a:r>
@@ -28131,8 +27574,7 @@
                   <a:srgbClr val="1B3B6F"/>
                 </a:solidFill>
                 <a:latin typeface="Calibri" pitchFamily="34" charset="0"/>
-                <a:ea typeface="Calibri" pitchFamily="34" charset="-122"/>
-                <a:cs typeface="Calibri" pitchFamily="34" charset="-120"/>
+                <a:cs typeface="Amiri" pitchFamily="2" charset="-78"/>
               </a:rPr>
               <a:t> mean?</a:t>
             </a:r>
@@ -28222,8 +27664,7 @@
                   <a:srgbClr val="FFFFFF"/>
                 </a:solidFill>
                 <a:latin typeface="Calibri" pitchFamily="34" charset="0"/>
-                <a:ea typeface="Calibri" pitchFamily="34" charset="-122"/>
-                <a:cs typeface="Calibri" pitchFamily="34" charset="-120"/>
+                <a:cs typeface="Amiri" pitchFamily="2" charset="-78"/>
               </a:rPr>
               <a:t>A</a:t>
             </a:r>
@@ -28261,8 +27702,7 @@
                   <a:srgbClr val="1F2A37"/>
                 </a:solidFill>
                 <a:latin typeface="Calibri" pitchFamily="34" charset="0"/>
-                <a:ea typeface="Calibri" pitchFamily="34" charset="-122"/>
-                <a:cs typeface="Calibri" pitchFamily="34" charset="-120"/>
+                <a:cs typeface="Amiri" pitchFamily="2" charset="-78"/>
               </a:rPr>
               <a:t>common errors</a:t>
             </a:r>
@@ -28325,8 +27765,7 @@
                   <a:srgbClr val="1B3B6F"/>
                 </a:solidFill>
                 <a:latin typeface="Calibri" pitchFamily="34" charset="0"/>
-                <a:ea typeface="Calibri" pitchFamily="34" charset="-122"/>
-                <a:cs typeface="Calibri" pitchFamily="34" charset="-120"/>
+                <a:cs typeface="Amiri" pitchFamily="2" charset="-78"/>
               </a:rPr>
               <a:t>B</a:t>
             </a:r>
@@ -28364,8 +27803,7 @@
                   <a:srgbClr val="9AA1AB"/>
                 </a:solidFill>
                 <a:latin typeface="Calibri" pitchFamily="34" charset="0"/>
-                <a:ea typeface="Calibri" pitchFamily="34" charset="-122"/>
-                <a:cs typeface="Calibri" pitchFamily="34" charset="-120"/>
+                <a:cs typeface="Amiri" pitchFamily="2" charset="-78"/>
               </a:rPr>
               <a:t>rare errors</a:t>
             </a:r>
@@ -28428,8 +27866,7 @@
                   <a:srgbClr val="1B3B6F"/>
                 </a:solidFill>
                 <a:latin typeface="Calibri" pitchFamily="34" charset="0"/>
-                <a:ea typeface="Calibri" pitchFamily="34" charset="-122"/>
-                <a:cs typeface="Calibri" pitchFamily="34" charset="-120"/>
+                <a:cs typeface="Amiri" pitchFamily="2" charset="-78"/>
               </a:rPr>
               <a:t>C</a:t>
             </a:r>
@@ -28467,8 +27904,7 @@
                   <a:srgbClr val="9AA1AB"/>
                 </a:solidFill>
                 <a:latin typeface="Calibri" pitchFamily="34" charset="0"/>
-                <a:ea typeface="Calibri" pitchFamily="34" charset="-122"/>
-                <a:cs typeface="Calibri" pitchFamily="34" charset="-120"/>
+                <a:cs typeface="Amiri" pitchFamily="2" charset="-78"/>
               </a:rPr>
               <a:t>corrected errors</a:t>
             </a:r>
@@ -28506,8 +27942,7 @@
                   <a:srgbClr val="8A6D1E"/>
                 </a:solidFill>
                 <a:latin typeface="Calibri" pitchFamily="34" charset="0"/>
-                <a:ea typeface="Calibri" pitchFamily="34" charset="-122"/>
-                <a:cs typeface="Calibri" pitchFamily="34" charset="-120"/>
+                <a:cs typeface="Amiri" pitchFamily="2" charset="-78"/>
               </a:rPr>
               <a:t>Prepared at home (P6-L10).</a:t>
             </a:r>
@@ -28604,8 +28039,7 @@
                   <a:srgbClr val="FFFFFF"/>
                 </a:solidFill>
                 <a:latin typeface="Calibri" pitchFamily="34" charset="0"/>
-                <a:ea typeface="Calibri" pitchFamily="34" charset="-122"/>
-                <a:cs typeface="Calibri" pitchFamily="34" charset="-120"/>
+                <a:cs typeface="Amiri" pitchFamily="2" charset="-78"/>
               </a:rPr>
               <a:t>3</a:t>
             </a:r>
@@ -28643,8 +28077,7 @@
                   <a:srgbClr val="1B3B6F"/>
                 </a:solidFill>
                 <a:latin typeface="Calibri" pitchFamily="34" charset="0"/>
-                <a:ea typeface="Calibri" pitchFamily="34" charset="-122"/>
-                <a:cs typeface="Calibri" pitchFamily="34" charset="-120"/>
+                <a:cs typeface="Amiri" pitchFamily="2" charset="-78"/>
               </a:rPr>
               <a:t>What does </a:t>
             </a:r>
@@ -28656,9 +28089,8 @@
                 <a:solidFill>
                   <a:srgbClr val="1B3B6F"/>
                 </a:solidFill>
-                <a:latin typeface="Amiri" pitchFamily="34" charset="0"/>
-                <a:ea typeface="Amiri" pitchFamily="34" charset="-122"/>
-                <a:cs typeface="Amiri" pitchFamily="34" charset="-120"/>
+                <a:latin typeface="Amiri" pitchFamily="2" charset="-78"/>
+                <a:cs typeface="Amiri" pitchFamily="2" charset="-78"/>
               </a:rPr>
               <a:t>خُطَّةُ المُرَاجَعَةِ</a:t>
             </a:r>
@@ -28671,8 +28103,7 @@
                   <a:srgbClr val="1B3B6F"/>
                 </a:solidFill>
                 <a:latin typeface="Calibri" pitchFamily="34" charset="0"/>
-                <a:ea typeface="Calibri" pitchFamily="34" charset="-122"/>
-                <a:cs typeface="Calibri" pitchFamily="34" charset="-120"/>
+                <a:cs typeface="Amiri" pitchFamily="2" charset="-78"/>
               </a:rPr>
               <a:t> mean?</a:t>
             </a:r>
@@ -28735,8 +28166,7 @@
                   <a:srgbClr val="1B3B6F"/>
                 </a:solidFill>
                 <a:latin typeface="Calibri" pitchFamily="34" charset="0"/>
-                <a:ea typeface="Calibri" pitchFamily="34" charset="-122"/>
-                <a:cs typeface="Calibri" pitchFamily="34" charset="-120"/>
+                <a:cs typeface="Amiri" pitchFamily="2" charset="-78"/>
               </a:rPr>
               <a:t>A</a:t>
             </a:r>
@@ -28774,8 +28204,7 @@
                   <a:srgbClr val="9AA1AB"/>
                 </a:solidFill>
                 <a:latin typeface="Calibri" pitchFamily="34" charset="0"/>
-                <a:ea typeface="Calibri" pitchFamily="34" charset="-122"/>
-                <a:cs typeface="Calibri" pitchFamily="34" charset="-120"/>
+                <a:cs typeface="Amiri" pitchFamily="2" charset="-78"/>
               </a:rPr>
               <a:t>exam paper</a:t>
             </a:r>
@@ -28838,8 +28267,7 @@
                   <a:srgbClr val="1B3B6F"/>
                 </a:solidFill>
                 <a:latin typeface="Calibri" pitchFamily="34" charset="0"/>
-                <a:ea typeface="Calibri" pitchFamily="34" charset="-122"/>
-                <a:cs typeface="Calibri" pitchFamily="34" charset="-120"/>
+                <a:cs typeface="Amiri" pitchFamily="2" charset="-78"/>
               </a:rPr>
               <a:t>B</a:t>
             </a:r>
@@ -28877,8 +28305,7 @@
                   <a:srgbClr val="9AA1AB"/>
                 </a:solidFill>
                 <a:latin typeface="Calibri" pitchFamily="34" charset="0"/>
-                <a:ea typeface="Calibri" pitchFamily="34" charset="-122"/>
-                <a:cs typeface="Calibri" pitchFamily="34" charset="-120"/>
+                <a:cs typeface="Amiri" pitchFamily="2" charset="-78"/>
               </a:rPr>
               <a:t>final result</a:t>
             </a:r>
@@ -28968,8 +28395,7 @@
                   <a:srgbClr val="FFFFFF"/>
                 </a:solidFill>
                 <a:latin typeface="Calibri" pitchFamily="34" charset="0"/>
-                <a:ea typeface="Calibri" pitchFamily="34" charset="-122"/>
-                <a:cs typeface="Calibri" pitchFamily="34" charset="-120"/>
+                <a:cs typeface="Amiri" pitchFamily="2" charset="-78"/>
               </a:rPr>
               <a:t>C</a:t>
             </a:r>
@@ -29007,8 +28433,7 @@
                   <a:srgbClr val="1F2A37"/>
                 </a:solidFill>
                 <a:latin typeface="Calibri" pitchFamily="34" charset="0"/>
-                <a:ea typeface="Calibri" pitchFamily="34" charset="-122"/>
-                <a:cs typeface="Calibri" pitchFamily="34" charset="-120"/>
+                <a:cs typeface="Amiri" pitchFamily="2" charset="-78"/>
               </a:rPr>
               <a:t>revision plan</a:t>
             </a:r>
@@ -29046,8 +28471,7 @@
                   <a:srgbClr val="8A6D1E"/>
                 </a:solidFill>
                 <a:latin typeface="Calibri" pitchFamily="34" charset="0"/>
-                <a:ea typeface="Calibri" pitchFamily="34" charset="-122"/>
-                <a:cs typeface="Calibri" pitchFamily="34" charset="-120"/>
+                <a:cs typeface="Amiri" pitchFamily="2" charset="-78"/>
               </a:rPr>
               <a:t>Prepared at home (P6-L10).</a:t>
             </a:r>
@@ -29144,8 +28568,7 @@
                   <a:srgbClr val="FFFFFF"/>
                 </a:solidFill>
                 <a:latin typeface="Calibri" pitchFamily="34" charset="0"/>
-                <a:ea typeface="Calibri" pitchFamily="34" charset="-122"/>
-                <a:cs typeface="Calibri" pitchFamily="34" charset="-120"/>
+                <a:cs typeface="Amiri" pitchFamily="2" charset="-78"/>
               </a:rPr>
               <a:t>4</a:t>
             </a:r>
@@ -29183,8 +28606,7 @@
                   <a:srgbClr val="1B3B6F"/>
                 </a:solidFill>
                 <a:latin typeface="Calibri" pitchFamily="34" charset="0"/>
-                <a:ea typeface="Calibri" pitchFamily="34" charset="-122"/>
-                <a:cs typeface="Calibri" pitchFamily="34" charset="-120"/>
+                <a:cs typeface="Amiri" pitchFamily="2" charset="-78"/>
               </a:rPr>
               <a:t>Choose the correct verb: </a:t>
             </a:r>
@@ -29196,9 +28618,8 @@
                 <a:solidFill>
                   <a:srgbClr val="1B3B6F"/>
                 </a:solidFill>
-                <a:latin typeface="Amiri" pitchFamily="34" charset="0"/>
-                <a:ea typeface="Amiri" pitchFamily="34" charset="-122"/>
-                <a:cs typeface="Amiri" pitchFamily="34" charset="-120"/>
+                <a:latin typeface="Amiri" pitchFamily="2" charset="-78"/>
+                <a:cs typeface="Amiri" pitchFamily="2" charset="-78"/>
               </a:rPr>
               <a:t>يَنْبَغِي أَنْ</a:t>
             </a:r>
@@ -29211,8 +28632,7 @@
                   <a:srgbClr val="1B3B6F"/>
                 </a:solidFill>
                 <a:latin typeface="Calibri" pitchFamily="34" charset="0"/>
-                <a:ea typeface="Calibri" pitchFamily="34" charset="-122"/>
-                <a:cs typeface="Calibri" pitchFamily="34" charset="-120"/>
+                <a:cs typeface="Amiri" pitchFamily="2" charset="-78"/>
               </a:rPr>
               <a:t> ___ </a:t>
             </a:r>
@@ -29224,9 +28644,8 @@
                 <a:solidFill>
                   <a:srgbClr val="1B3B6F"/>
                 </a:solidFill>
-                <a:latin typeface="Amiri" pitchFamily="34" charset="0"/>
-                <a:ea typeface="Amiri" pitchFamily="34" charset="-122"/>
-                <a:cs typeface="Amiri" pitchFamily="34" charset="-120"/>
+                <a:latin typeface="Amiri" pitchFamily="2" charset="-78"/>
+                <a:cs typeface="Amiri" pitchFamily="2" charset="-78"/>
               </a:rPr>
               <a:t>بِجِدٍّ</a:t>
             </a:r>
@@ -29239,8 +28658,7 @@
                   <a:srgbClr val="1B3B6F"/>
                 </a:solidFill>
                 <a:latin typeface="Calibri" pitchFamily="34" charset="0"/>
-                <a:ea typeface="Calibri" pitchFamily="34" charset="-122"/>
-                <a:cs typeface="Calibri" pitchFamily="34" charset="-120"/>
+                <a:cs typeface="Amiri" pitchFamily="2" charset="-78"/>
               </a:rPr>
               <a:t>.</a:t>
             </a:r>
@@ -29303,8 +28721,7 @@
                   <a:srgbClr val="1B3B6F"/>
                 </a:solidFill>
                 <a:latin typeface="Calibri" pitchFamily="34" charset="0"/>
-                <a:ea typeface="Calibri" pitchFamily="34" charset="-122"/>
-                <a:cs typeface="Calibri" pitchFamily="34" charset="-120"/>
+                <a:cs typeface="Amiri" pitchFamily="2" charset="-78"/>
               </a:rPr>
               <a:t>A</a:t>
             </a:r>
@@ -29341,9 +28758,8 @@
                 <a:solidFill>
                   <a:srgbClr val="9AA1AB"/>
                 </a:solidFill>
-                <a:latin typeface="Amiri" pitchFamily="34" charset="0"/>
-                <a:ea typeface="Amiri" pitchFamily="34" charset="-122"/>
-                <a:cs typeface="Amiri" pitchFamily="34" charset="-120"/>
+                <a:latin typeface="Amiri" pitchFamily="2" charset="-78"/>
+                <a:cs typeface="Amiri" pitchFamily="2" charset="-78"/>
               </a:rPr>
               <a:t>نَعْمَلُ</a:t>
             </a:r>
@@ -29406,8 +28822,7 @@
                   <a:srgbClr val="1B3B6F"/>
                 </a:solidFill>
                 <a:latin typeface="Calibri" pitchFamily="34" charset="0"/>
-                <a:ea typeface="Calibri" pitchFamily="34" charset="-122"/>
-                <a:cs typeface="Calibri" pitchFamily="34" charset="-120"/>
+                <a:cs typeface="Amiri" pitchFamily="2" charset="-78"/>
               </a:rPr>
               <a:t>B</a:t>
             </a:r>
@@ -29444,9 +28859,8 @@
                 <a:solidFill>
                   <a:srgbClr val="9AA1AB"/>
                 </a:solidFill>
-                <a:latin typeface="Amiri" pitchFamily="34" charset="0"/>
-                <a:ea typeface="Amiri" pitchFamily="34" charset="-122"/>
-                <a:cs typeface="Amiri" pitchFamily="34" charset="-120"/>
+                <a:latin typeface="Amiri" pitchFamily="2" charset="-78"/>
+                <a:cs typeface="Amiri" pitchFamily="2" charset="-78"/>
               </a:rPr>
               <a:t>عَمِلْنَا</a:t>
             </a:r>
@@ -29536,8 +28950,7 @@
                   <a:srgbClr val="FFFFFF"/>
                 </a:solidFill>
                 <a:latin typeface="Calibri" pitchFamily="34" charset="0"/>
-                <a:ea typeface="Calibri" pitchFamily="34" charset="-122"/>
-                <a:cs typeface="Calibri" pitchFamily="34" charset="-120"/>
+                <a:cs typeface="Amiri" pitchFamily="2" charset="-78"/>
               </a:rPr>
               <a:t>C</a:t>
             </a:r>
@@ -29574,9 +28987,8 @@
                 <a:solidFill>
                   <a:srgbClr val="1F2A37"/>
                 </a:solidFill>
-                <a:latin typeface="Amiri" pitchFamily="34" charset="0"/>
-                <a:ea typeface="Amiri" pitchFamily="34" charset="-122"/>
-                <a:cs typeface="Amiri" pitchFamily="34" charset="-120"/>
+                <a:latin typeface="Amiri" pitchFamily="2" charset="-78"/>
+                <a:cs typeface="Amiri" pitchFamily="2" charset="-78"/>
               </a:rPr>
               <a:t>نَعْمَلَ</a:t>
             </a:r>
@@ -29614,8 +29026,7 @@
                   <a:srgbClr val="8A6D1E"/>
                 </a:solidFill>
                 <a:latin typeface="Calibri" pitchFamily="34" charset="0"/>
-                <a:ea typeface="Calibri" pitchFamily="34" charset="-122"/>
-                <a:cs typeface="Calibri" pitchFamily="34" charset="-120"/>
+                <a:cs typeface="Amiri" pitchFamily="2" charset="-78"/>
               </a:rPr>
               <a:t>After a trigger + an: the fatḥa.</a:t>
             </a:r>
@@ -29712,8 +29123,7 @@
                   <a:srgbClr val="FFFFFF"/>
                 </a:solidFill>
                 <a:latin typeface="Calibri" pitchFamily="34" charset="0"/>
-                <a:ea typeface="Calibri" pitchFamily="34" charset="-122"/>
-                <a:cs typeface="Calibri" pitchFamily="34" charset="-120"/>
+                <a:cs typeface="Amiri" pitchFamily="2" charset="-78"/>
               </a:rPr>
               <a:t>5</a:t>
             </a:r>
@@ -29751,8 +29161,7 @@
                   <a:srgbClr val="1B3B6F"/>
                 </a:solidFill>
                 <a:latin typeface="Calibri" pitchFamily="34" charset="0"/>
-                <a:ea typeface="Calibri" pitchFamily="34" charset="-122"/>
-                <a:cs typeface="Calibri" pitchFamily="34" charset="-120"/>
+                <a:cs typeface="Amiri" pitchFamily="2" charset="-78"/>
               </a:rPr>
               <a:t>Choose the correct result: </a:t>
             </a:r>
@@ -29764,9 +29173,8 @@
                 <a:solidFill>
                   <a:srgbClr val="1B3B6F"/>
                 </a:solidFill>
-                <a:latin typeface="Amiri" pitchFamily="34" charset="0"/>
-                <a:ea typeface="Amiri" pitchFamily="34" charset="-122"/>
-                <a:cs typeface="Amiri" pitchFamily="34" charset="-120"/>
+                <a:latin typeface="Amiri" pitchFamily="2" charset="-78"/>
+                <a:cs typeface="Amiri" pitchFamily="2" charset="-78"/>
               </a:rPr>
               <a:t>لَوْ تَدَرَّبْتُ أَكْثَرَ،</a:t>
             </a:r>
@@ -29779,8 +29187,7 @@
                   <a:srgbClr val="1B3B6F"/>
                 </a:solidFill>
                 <a:latin typeface="Calibri" pitchFamily="34" charset="0"/>
-                <a:ea typeface="Calibri" pitchFamily="34" charset="-122"/>
-                <a:cs typeface="Calibri" pitchFamily="34" charset="-120"/>
+                <a:cs typeface="Amiri" pitchFamily="2" charset="-78"/>
               </a:rPr>
               <a:t> ___ .</a:t>
             </a:r>
@@ -29870,8 +29277,7 @@
                   <a:srgbClr val="FFFFFF"/>
                 </a:solidFill>
                 <a:latin typeface="Calibri" pitchFamily="34" charset="0"/>
-                <a:ea typeface="Calibri" pitchFamily="34" charset="-122"/>
-                <a:cs typeface="Calibri" pitchFamily="34" charset="-120"/>
+                <a:cs typeface="Amiri" pitchFamily="2" charset="-78"/>
               </a:rPr>
               <a:t>A</a:t>
             </a:r>
@@ -29908,9 +29314,8 @@
                 <a:solidFill>
                   <a:srgbClr val="1F2A37"/>
                 </a:solidFill>
-                <a:latin typeface="Amiri" pitchFamily="34" charset="0"/>
-                <a:ea typeface="Amiri" pitchFamily="34" charset="-122"/>
-                <a:cs typeface="Amiri" pitchFamily="34" charset="-120"/>
+                <a:latin typeface="Amiri" pitchFamily="2" charset="-78"/>
+                <a:cs typeface="Amiri" pitchFamily="2" charset="-78"/>
               </a:rPr>
               <a:t>لَتَحَسَّنْتُ</a:t>
             </a:r>
@@ -29973,8 +29378,7 @@
                   <a:srgbClr val="1B3B6F"/>
                 </a:solidFill>
                 <a:latin typeface="Calibri" pitchFamily="34" charset="0"/>
-                <a:ea typeface="Calibri" pitchFamily="34" charset="-122"/>
-                <a:cs typeface="Calibri" pitchFamily="34" charset="-120"/>
+                <a:cs typeface="Amiri" pitchFamily="2" charset="-78"/>
               </a:rPr>
               <a:t>B</a:t>
             </a:r>
@@ -30011,9 +29415,8 @@
                 <a:solidFill>
                   <a:srgbClr val="9AA1AB"/>
                 </a:solidFill>
-                <a:latin typeface="Amiri" pitchFamily="34" charset="0"/>
-                <a:ea typeface="Amiri" pitchFamily="34" charset="-122"/>
-                <a:cs typeface="Amiri" pitchFamily="34" charset="-120"/>
+                <a:latin typeface="Amiri" pitchFamily="2" charset="-78"/>
+                <a:cs typeface="Amiri" pitchFamily="2" charset="-78"/>
               </a:rPr>
               <a:t>تَحَسَّنْتُ</a:t>
             </a:r>
@@ -30076,8 +29479,7 @@
                   <a:srgbClr val="1B3B6F"/>
                 </a:solidFill>
                 <a:latin typeface="Calibri" pitchFamily="34" charset="0"/>
-                <a:ea typeface="Calibri" pitchFamily="34" charset="-122"/>
-                <a:cs typeface="Calibri" pitchFamily="34" charset="-120"/>
+                <a:cs typeface="Amiri" pitchFamily="2" charset="-78"/>
               </a:rPr>
               <a:t>C</a:t>
             </a:r>
@@ -30114,9 +29516,8 @@
                 <a:solidFill>
                   <a:srgbClr val="9AA1AB"/>
                 </a:solidFill>
-                <a:latin typeface="Amiri" pitchFamily="34" charset="0"/>
-                <a:ea typeface="Amiri" pitchFamily="34" charset="-122"/>
-                <a:cs typeface="Amiri" pitchFamily="34" charset="-120"/>
+                <a:latin typeface="Amiri" pitchFamily="2" charset="-78"/>
+                <a:cs typeface="Amiri" pitchFamily="2" charset="-78"/>
               </a:rPr>
               <a:t>سَأَتَحَسَّنُ</a:t>
             </a:r>
@@ -30154,8 +29555,7 @@
                   <a:srgbClr val="8A6D1E"/>
                 </a:solidFill>
                 <a:latin typeface="Calibri" pitchFamily="34" charset="0"/>
-                <a:ea typeface="Calibri" pitchFamily="34" charset="-122"/>
-                <a:cs typeface="Calibri" pitchFamily="34" charset="-120"/>
+                <a:cs typeface="Amiri" pitchFamily="2" charset="-78"/>
               </a:rPr>
               <a:t>Type 2: lau + past, la- + past.</a:t>
             </a:r>
@@ -30227,8 +29627,7 @@
                   <a:srgbClr val="8A6D1E"/>
                 </a:solidFill>
                 <a:latin typeface="Calibri" pitchFamily="34" charset="0"/>
-                <a:ea typeface="Calibri" pitchFamily="34" charset="-122"/>
-                <a:cs typeface="Calibri" pitchFamily="34" charset="-120"/>
+                <a:cs typeface="Amiri" pitchFamily="2" charset="-78"/>
               </a:rPr>
               <a:t>THE KEY IDEA FOR TODAY</a:t>
             </a:r>
@@ -30266,8 +29665,7 @@
                   <a:srgbClr val="1F2A37"/>
                 </a:solidFill>
                 <a:latin typeface="Calibri" pitchFamily="34" charset="0"/>
-                <a:ea typeface="Calibri" pitchFamily="34" charset="-122"/>
-                <a:cs typeface="Calibri" pitchFamily="34" charset="-120"/>
+                <a:cs typeface="Amiri" pitchFamily="2" charset="-78"/>
               </a:rPr>
               <a:t>The gap between your mock and your target is today’s agenda.</a:t>
             </a:r>
@@ -30307,9 +29705,8 @@
                 <a:solidFill>
                   <a:srgbClr val="1B3B6F"/>
                 </a:solidFill>
-                <a:latin typeface="Amiri" pitchFamily="34" charset="0"/>
-                <a:ea typeface="Amiri" pitchFamily="34" charset="-122"/>
-                <a:cs typeface="Amiri" pitchFamily="34" charset="-120"/>
+                <a:latin typeface="Amiri" pitchFamily="2" charset="-78"/>
+                <a:cs typeface="Amiri" pitchFamily="2" charset="-78"/>
               </a:rPr>
               <a:t>نَتِيجَةُ المُحَاكَاةِ لَيْسَتْ نَتِيجَتَكَ النِّهَائِيَّةَ.</a:t>
             </a:r>
@@ -30347,8 +29744,7 @@
                   <a:srgbClr val="8A93A0"/>
                 </a:solidFill>
                 <a:latin typeface="Calibri" pitchFamily="34" charset="0"/>
-                <a:ea typeface="Calibri" pitchFamily="34" charset="-122"/>
-                <a:cs typeface="Calibri" pitchFamily="34" charset="-120"/>
+                <a:cs typeface="Amiri" pitchFamily="2" charset="-78"/>
               </a:rPr>
               <a:t>5 / 18</a:t>
             </a:r>
@@ -30442,9 +29838,8 @@
                 <a:solidFill>
                   <a:srgbClr val="D4AF37"/>
                 </a:solidFill>
-                <a:latin typeface="Amiri" pitchFamily="34" charset="0"/>
-                <a:ea typeface="Amiri" pitchFamily="34" charset="-122"/>
-                <a:cs typeface="Amiri" pitchFamily="34" charset="-120"/>
+                <a:latin typeface="Amiri" pitchFamily="2" charset="-78"/>
+                <a:cs typeface="Amiri" pitchFamily="2" charset="-78"/>
               </a:rPr>
               <a:t>م</a:t>
             </a:r>
@@ -30482,8 +29877,7 @@
                   <a:srgbClr val="1B3B6F"/>
                 </a:solidFill>
                 <a:latin typeface="Cambria" pitchFamily="34" charset="0"/>
-                <a:ea typeface="Cambria" pitchFamily="34" charset="-122"/>
-                <a:cs typeface="Cambria" pitchFamily="34" charset="-120"/>
+                <a:cs typeface="Amiri" pitchFamily="2" charset="-78"/>
               </a:rPr>
               <a:t>Al Madina Online School</a:t>
             </a:r>
@@ -30521,8 +29915,7 @@
                   <a:srgbClr val="8A6D1E"/>
                 </a:solidFill>
                 <a:latin typeface="Calibri" pitchFamily="34" charset="0"/>
-                <a:ea typeface="Calibri" pitchFamily="34" charset="-122"/>
-                <a:cs typeface="Calibri" pitchFamily="34" charset="-120"/>
+                <a:cs typeface="Amiri" pitchFamily="2" charset="-78"/>
               </a:rPr>
               <a:t>ARABIC DEPARTMENT · MIFTAH ARABIC · IGCSE 0544</a:t>
             </a:r>
@@ -30587,8 +29980,7 @@
                   <a:srgbClr val="FFFFFF"/>
                 </a:solidFill>
                 <a:latin typeface="Calibri" pitchFamily="34" charset="0"/>
-                <a:ea typeface="Calibri" pitchFamily="34" charset="-122"/>
-                <a:cs typeface="Calibri" pitchFamily="34" charset="-120"/>
+                <a:cs typeface="Amiri" pitchFamily="2" charset="-78"/>
               </a:rPr>
               <a:t>P6-L11 · IGCSE Bridge</a:t>
             </a:r>
@@ -30653,8 +30045,7 @@
                   <a:srgbClr val="FFFFFF"/>
                 </a:solidFill>
                 <a:latin typeface="Calibri" pitchFamily="34" charset="0"/>
-                <a:ea typeface="Calibri" pitchFamily="34" charset="-122"/>
-                <a:cs typeface="Calibri" pitchFamily="34" charset="-120"/>
+                <a:cs typeface="Amiri" pitchFamily="2" charset="-78"/>
               </a:rPr>
               <a:t>WELCOME · 1 MIN</a:t>
             </a:r>
@@ -30692,8 +30083,7 @@
                   <a:srgbClr val="5A6472"/>
                 </a:solidFill>
                 <a:latin typeface="Calibri" pitchFamily="34" charset="0"/>
-                <a:ea typeface="Calibri" pitchFamily="34" charset="-122"/>
-                <a:cs typeface="Calibri" pitchFamily="34" charset="-120"/>
+                <a:cs typeface="Amiri" pitchFamily="2" charset="-78"/>
               </a:rPr>
               <a:t>LESSON OBJECTIVES</a:t>
             </a:r>
@@ -30731,8 +30121,7 @@
                   <a:srgbClr val="1B3B6F"/>
                 </a:solidFill>
                 <a:latin typeface="Cambria" pitchFamily="34" charset="0"/>
-                <a:ea typeface="Cambria" pitchFamily="34" charset="-122"/>
-                <a:cs typeface="Cambria" pitchFamily="34" charset="-120"/>
+                <a:cs typeface="Amiri" pitchFamily="2" charset="-78"/>
               </a:rPr>
               <a:t>Objectives and success criteria</a:t>
             </a:r>
@@ -30769,9 +30158,8 @@
                 <a:solidFill>
                   <a:srgbClr val="8A6D1E"/>
                 </a:solidFill>
-                <a:latin typeface="Amiri" pitchFamily="34" charset="0"/>
-                <a:ea typeface="Amiri" pitchFamily="34" charset="-122"/>
-                <a:cs typeface="Amiri" pitchFamily="34" charset="-120"/>
+                <a:latin typeface="Amiri" pitchFamily="2" charset="-78"/>
+                <a:cs typeface="Amiri" pitchFamily="2" charset="-78"/>
               </a:rPr>
               <a:t>الأَهْدَافُ وَمَعَايِيرُ النَّجَاحِ</a:t>
             </a:r>
@@ -30809,8 +30197,7 @@
                   <a:srgbClr val="8A93A0"/>
                 </a:solidFill>
                 <a:latin typeface="Calibri" pitchFamily="34" charset="0"/>
-                <a:ea typeface="Calibri" pitchFamily="34" charset="-122"/>
-                <a:cs typeface="Calibri" pitchFamily="34" charset="-120"/>
+                <a:cs typeface="Amiri" pitchFamily="2" charset="-78"/>
               </a:rPr>
               <a:t>Miftah Arabic · Progression P6 · IGCSE Bridge · P6-L11</a:t>
             </a:r>
@@ -30882,8 +30269,7 @@
                   <a:srgbClr val="1B3B6F"/>
                 </a:solidFill>
                 <a:latin typeface="Calibri" pitchFamily="34" charset="0"/>
-                <a:ea typeface="Calibri" pitchFamily="34" charset="-122"/>
-                <a:cs typeface="Calibri" pitchFamily="34" charset="-120"/>
+                <a:cs typeface="Amiri" pitchFamily="2" charset="-78"/>
               </a:rPr>
               <a:t>TODAY YOU WILL</a:t>
             </a:r>
@@ -30920,9 +30306,8 @@
                 <a:solidFill>
                   <a:srgbClr val="8A6D1E"/>
                 </a:solidFill>
-                <a:latin typeface="Amiri" pitchFamily="34" charset="0"/>
-                <a:ea typeface="Amiri" pitchFamily="34" charset="-122"/>
-                <a:cs typeface="Amiri" pitchFamily="34" charset="-120"/>
+                <a:latin typeface="Amiri" pitchFamily="2" charset="-78"/>
+                <a:cs typeface="Amiri" pitchFamily="2" charset="-78"/>
               </a:rPr>
               <a:t>سَتَتَعَلَّمُ اليَوْمَ</a:t>
             </a:r>
@@ -30985,8 +30370,7 @@
                   <a:srgbClr val="D4AF37"/>
                 </a:solidFill>
                 <a:latin typeface="Calibri" pitchFamily="34" charset="0"/>
-                <a:ea typeface="Calibri" pitchFamily="34" charset="-122"/>
-                <a:cs typeface="Calibri" pitchFamily="34" charset="-120"/>
+                <a:cs typeface="Amiri" pitchFamily="2" charset="-78"/>
               </a:rPr>
               <a:t>1</a:t>
             </a:r>
@@ -31024,8 +30408,7 @@
                   <a:srgbClr val="1F2A37"/>
                 </a:solidFill>
                 <a:latin typeface="Calibri" pitchFamily="34" charset="0"/>
-                <a:ea typeface="Calibri" pitchFamily="34" charset="-122"/>
-                <a:cs typeface="Calibri" pitchFamily="34" charset="-120"/>
+                <a:cs typeface="Amiri" pitchFamily="2" charset="-78"/>
               </a:rPr>
               <a:t>Calculate your full mock profile across all four papers (/150) and read your predicted grade.</a:t>
             </a:r>
@@ -31088,8 +30471,7 @@
                   <a:srgbClr val="D4AF37"/>
                 </a:solidFill>
                 <a:latin typeface="Calibri" pitchFamily="34" charset="0"/>
-                <a:ea typeface="Calibri" pitchFamily="34" charset="-122"/>
-                <a:cs typeface="Calibri" pitchFamily="34" charset="-120"/>
+                <a:cs typeface="Amiri" pitchFamily="2" charset="-78"/>
               </a:rPr>
               <a:t>2</a:t>
             </a:r>
@@ -31127,8 +30509,7 @@
                   <a:srgbClr val="1F2A37"/>
                 </a:solidFill>
                 <a:latin typeface="Calibri" pitchFamily="34" charset="0"/>
-                <a:ea typeface="Calibri" pitchFamily="34" charset="-122"/>
-                <a:cs typeface="Calibri" pitchFamily="34" charset="-120"/>
+                <a:cs typeface="Amiri" pitchFamily="2" charset="-78"/>
               </a:rPr>
               <a:t>Correct the highest-impact grammar errors from the mocks.</a:t>
             </a:r>
@@ -31191,8 +30572,7 @@
                   <a:srgbClr val="D4AF37"/>
                 </a:solidFill>
                 <a:latin typeface="Calibri" pitchFamily="34" charset="0"/>
-                <a:ea typeface="Calibri" pitchFamily="34" charset="-122"/>
-                <a:cs typeface="Calibri" pitchFamily="34" charset="-120"/>
+                <a:cs typeface="Amiri" pitchFamily="2" charset="-78"/>
               </a:rPr>
               <a:t>3</a:t>
             </a:r>
@@ -31230,8 +30610,7 @@
                   <a:srgbClr val="1F2A37"/>
                 </a:solidFill>
                 <a:latin typeface="Calibri" pitchFamily="34" charset="0"/>
-                <a:ea typeface="Calibri" pitchFamily="34" charset="-122"/>
-                <a:cs typeface="Calibri" pitchFamily="34" charset="-120"/>
+                <a:cs typeface="Amiri" pitchFamily="2" charset="-78"/>
               </a:rPr>
               <a:t>Revise your personal weakest grammar and vocabulary areas.</a:t>
             </a:r>
@@ -31294,8 +30673,7 @@
                   <a:srgbClr val="D4AF37"/>
                 </a:solidFill>
                 <a:latin typeface="Calibri" pitchFamily="34" charset="0"/>
-                <a:ea typeface="Calibri" pitchFamily="34" charset="-122"/>
-                <a:cs typeface="Calibri" pitchFamily="34" charset="-120"/>
+                <a:cs typeface="Amiri" pitchFamily="2" charset="-78"/>
               </a:rPr>
               <a:t>4</a:t>
             </a:r>
@@ -31333,8 +30711,7 @@
                   <a:srgbClr val="1F2A37"/>
                 </a:solidFill>
                 <a:latin typeface="Calibri" pitchFamily="34" charset="0"/>
-                <a:ea typeface="Calibri" pitchFamily="34" charset="-122"/>
-                <a:cs typeface="Calibri" pitchFamily="34" charset="-120"/>
+                <a:cs typeface="Amiri" pitchFamily="2" charset="-78"/>
               </a:rPr>
               <a:t>Complete a final exam-readiness checklist.</a:t>
             </a:r>
@@ -31426,8 +30803,7 @@
                   <a:srgbClr val="FFFFFF"/>
                 </a:solidFill>
                 <a:latin typeface="Calibri" pitchFamily="34" charset="0"/>
-                <a:ea typeface="Calibri" pitchFamily="34" charset="-122"/>
-                <a:cs typeface="Calibri" pitchFamily="34" charset="-120"/>
+                <a:cs typeface="Amiri" pitchFamily="2" charset="-78"/>
               </a:rPr>
               <a:t>CORE</a:t>
             </a:r>
@@ -31465,8 +30841,7 @@
                   <a:srgbClr val="2E8B57"/>
                 </a:solidFill>
                 <a:latin typeface="Calibri" pitchFamily="34" charset="0"/>
-                <a:ea typeface="Calibri" pitchFamily="34" charset="-122"/>
-                <a:cs typeface="Calibri" pitchFamily="34" charset="-120"/>
+                <a:cs typeface="Amiri" pitchFamily="2" charset="-78"/>
               </a:rPr>
               <a:t>Everyone</a:t>
             </a:r>
@@ -31504,8 +30879,7 @@
                   <a:srgbClr val="2E8B57"/>
                 </a:solidFill>
                 <a:latin typeface="Calibri" pitchFamily="34" charset="0"/>
-                <a:ea typeface="Calibri" pitchFamily="34" charset="-122"/>
-                <a:cs typeface="Calibri" pitchFamily="34" charset="-120"/>
+                <a:cs typeface="Amiri" pitchFamily="2" charset="-78"/>
               </a:rPr>
               <a:t>☐  I can calculate my mock total out of 150.</a:t>
             </a:r>
@@ -31543,8 +30917,7 @@
                   <a:srgbClr val="2E8B57"/>
                 </a:solidFill>
                 <a:latin typeface="Calibri" pitchFamily="34" charset="0"/>
-                <a:ea typeface="Calibri" pitchFamily="34" charset="-122"/>
-                <a:cs typeface="Calibri" pitchFamily="34" charset="-120"/>
+                <a:cs typeface="Amiri" pitchFamily="2" charset="-78"/>
               </a:rPr>
               <a:t>☐  I can fix the subjunctive fatḥa after a trigger.</a:t>
             </a:r>
@@ -31636,8 +31009,7 @@
                   <a:srgbClr val="FFFFFF"/>
                 </a:solidFill>
                 <a:latin typeface="Calibri" pitchFamily="34" charset="0"/>
-                <a:ea typeface="Calibri" pitchFamily="34" charset="-122"/>
-                <a:cs typeface="Calibri" pitchFamily="34" charset="-120"/>
+                <a:cs typeface="Amiri" pitchFamily="2" charset="-78"/>
               </a:rPr>
               <a:t>DEVELOP</a:t>
             </a:r>
@@ -31675,8 +31047,7 @@
                   <a:srgbClr val="C9780A"/>
                 </a:solidFill>
                 <a:latin typeface="Calibri" pitchFamily="34" charset="0"/>
-                <a:ea typeface="Calibri" pitchFamily="34" charset="-122"/>
-                <a:cs typeface="Calibri" pitchFamily="34" charset="-120"/>
+                <a:cs typeface="Amiri" pitchFamily="2" charset="-78"/>
               </a:rPr>
               <a:t>Most of us</a:t>
             </a:r>
@@ -31714,8 +31085,7 @@
                   <a:srgbClr val="C9780A"/>
                 </a:solidFill>
                 <a:latin typeface="Calibri" pitchFamily="34" charset="0"/>
-                <a:ea typeface="Calibri" pitchFamily="34" charset="-122"/>
-                <a:cs typeface="Calibri" pitchFamily="34" charset="-120"/>
+                <a:cs typeface="Amiri" pitchFamily="2" charset="-78"/>
               </a:rPr>
               <a:t>☐  I can correct the three most common errors.</a:t>
             </a:r>
@@ -31753,8 +31123,7 @@
                   <a:srgbClr val="C9780A"/>
                 </a:solidFill>
                 <a:latin typeface="Calibri" pitchFamily="34" charset="0"/>
-                <a:ea typeface="Calibri" pitchFamily="34" charset="-122"/>
-                <a:cs typeface="Calibri" pitchFamily="34" charset="-120"/>
+                <a:cs typeface="Amiri" pitchFamily="2" charset="-78"/>
               </a:rPr>
               <a:t>☐  I can complete the readiness checklist honestly.</a:t>
             </a:r>
@@ -31846,8 +31215,7 @@
                   <a:srgbClr val="FFFFFF"/>
                 </a:solidFill>
                 <a:latin typeface="Calibri" pitchFamily="34" charset="0"/>
-                <a:ea typeface="Calibri" pitchFamily="34" charset="-122"/>
-                <a:cs typeface="Calibri" pitchFamily="34" charset="-120"/>
+                <a:cs typeface="Amiri" pitchFamily="2" charset="-78"/>
               </a:rPr>
               <a:t>STRETCH</a:t>
             </a:r>
@@ -31885,8 +31253,7 @@
                   <a:srgbClr val="B83227"/>
                 </a:solidFill>
                 <a:latin typeface="Calibri" pitchFamily="34" charset="0"/>
-                <a:ea typeface="Calibri" pitchFamily="34" charset="-122"/>
-                <a:cs typeface="Calibri" pitchFamily="34" charset="-120"/>
+                <a:cs typeface="Amiri" pitchFamily="2" charset="-78"/>
               </a:rPr>
               <a:t>Aim high</a:t>
             </a:r>
@@ -31924,8 +31291,7 @@
                   <a:srgbClr val="B83227"/>
                 </a:solidFill>
                 <a:latin typeface="Calibri" pitchFamily="34" charset="0"/>
-                <a:ea typeface="Calibri" pitchFamily="34" charset="-122"/>
-                <a:cs typeface="Calibri" pitchFamily="34" charset="-120"/>
+                <a:cs typeface="Amiri" pitchFamily="2" charset="-78"/>
               </a:rPr>
               <a:t>☐  I can revise my two weakest structures with examples.</a:t>
             </a:r>
@@ -31963,8 +31329,7 @@
                   <a:srgbClr val="B83227"/>
                 </a:solidFill>
                 <a:latin typeface="Calibri" pitchFamily="34" charset="0"/>
-                <a:ea typeface="Calibri" pitchFamily="34" charset="-122"/>
-                <a:cs typeface="Calibri" pitchFamily="34" charset="-120"/>
+                <a:cs typeface="Amiri" pitchFamily="2" charset="-78"/>
               </a:rPr>
               <a:t>☐  I can write a dated revision plan.</a:t>
             </a:r>
@@ -32002,8 +31367,7 @@
                   <a:srgbClr val="8A93A0"/>
                 </a:solidFill>
                 <a:latin typeface="Calibri" pitchFamily="34" charset="0"/>
-                <a:ea typeface="Calibri" pitchFamily="34" charset="-122"/>
-                <a:cs typeface="Calibri" pitchFamily="34" charset="-120"/>
+                <a:cs typeface="Amiri" pitchFamily="2" charset="-78"/>
               </a:rPr>
               <a:t>6 / 18</a:t>
             </a:r>
@@ -32097,9 +31461,8 @@
                 <a:solidFill>
                   <a:srgbClr val="D4AF37"/>
                 </a:solidFill>
-                <a:latin typeface="Amiri" pitchFamily="34" charset="0"/>
-                <a:ea typeface="Amiri" pitchFamily="34" charset="-122"/>
-                <a:cs typeface="Amiri" pitchFamily="34" charset="-120"/>
+                <a:latin typeface="Amiri" pitchFamily="2" charset="-78"/>
+                <a:cs typeface="Amiri" pitchFamily="2" charset="-78"/>
               </a:rPr>
               <a:t>م</a:t>
             </a:r>
@@ -32137,8 +31500,7 @@
                   <a:srgbClr val="1B3B6F"/>
                 </a:solidFill>
                 <a:latin typeface="Cambria" pitchFamily="34" charset="0"/>
-                <a:ea typeface="Cambria" pitchFamily="34" charset="-122"/>
-                <a:cs typeface="Cambria" pitchFamily="34" charset="-120"/>
+                <a:cs typeface="Amiri" pitchFamily="2" charset="-78"/>
               </a:rPr>
               <a:t>Al Madina Online School</a:t>
             </a:r>
@@ -32176,8 +31538,7 @@
                   <a:srgbClr val="8A6D1E"/>
                 </a:solidFill>
                 <a:latin typeface="Calibri" pitchFamily="34" charset="0"/>
-                <a:ea typeface="Calibri" pitchFamily="34" charset="-122"/>
-                <a:cs typeface="Calibri" pitchFamily="34" charset="-120"/>
+                <a:cs typeface="Amiri" pitchFamily="2" charset="-78"/>
               </a:rPr>
               <a:t>ARABIC DEPARTMENT · MIFTAH ARABIC · IGCSE 0544</a:t>
             </a:r>
@@ -32242,8 +31603,7 @@
                   <a:srgbClr val="FFFFFF"/>
                 </a:solidFill>
                 <a:latin typeface="Calibri" pitchFamily="34" charset="0"/>
-                <a:ea typeface="Calibri" pitchFamily="34" charset="-122"/>
-                <a:cs typeface="Calibri" pitchFamily="34" charset="-120"/>
+                <a:cs typeface="Amiri" pitchFamily="2" charset="-78"/>
               </a:rPr>
               <a:t>P6-L11 · IGCSE Bridge</a:t>
             </a:r>
@@ -32308,8 +31668,7 @@
                   <a:srgbClr val="FFFFFF"/>
                 </a:solidFill>
                 <a:latin typeface="Calibri" pitchFamily="34" charset="0"/>
-                <a:ea typeface="Calibri" pitchFamily="34" charset="-122"/>
-                <a:cs typeface="Calibri" pitchFamily="34" charset="-120"/>
+                <a:cs typeface="Amiri" pitchFamily="2" charset="-78"/>
               </a:rPr>
               <a:t>TEACHER INSTRUCTION · 2 MIN</a:t>
             </a:r>
@@ -32347,8 +31706,7 @@
                   <a:srgbClr val="1B3B6F"/>
                 </a:solidFill>
                 <a:latin typeface="Calibri" pitchFamily="34" charset="0"/>
-                <a:ea typeface="Calibri" pitchFamily="34" charset="-122"/>
-                <a:cs typeface="Calibri" pitchFamily="34" charset="-120"/>
+                <a:cs typeface="Amiri" pitchFamily="2" charset="-78"/>
               </a:rPr>
               <a:t>TEACH · RESULTS · GRADE · AGENDA (WEBSITE)</a:t>
             </a:r>
@@ -32386,8 +31744,7 @@
                   <a:srgbClr val="1B3B6F"/>
                 </a:solidFill>
                 <a:latin typeface="Cambria" pitchFamily="34" charset="0"/>
-                <a:ea typeface="Cambria" pitchFamily="34" charset="-122"/>
-                <a:cs typeface="Cambria" pitchFamily="34" charset="-120"/>
+                <a:cs typeface="Amiri" pitchFamily="2" charset="-78"/>
               </a:rPr>
               <a:t>Your mock profile</a:t>
             </a:r>
@@ -32424,9 +31781,8 @@
                 <a:solidFill>
                   <a:srgbClr val="8A6D1E"/>
                 </a:solidFill>
-                <a:latin typeface="Amiri" pitchFamily="34" charset="0"/>
-                <a:ea typeface="Amiri" pitchFamily="34" charset="-122"/>
-                <a:cs typeface="Amiri" pitchFamily="34" charset="-120"/>
+                <a:latin typeface="Amiri" pitchFamily="2" charset="-78"/>
+                <a:cs typeface="Amiri" pitchFamily="2" charset="-78"/>
               </a:rPr>
               <a:t>مَلَفُّ المُحَاكَاةِ</a:t>
             </a:r>
@@ -32464,8 +31820,7 @@
                   <a:srgbClr val="8A93A0"/>
                 </a:solidFill>
                 <a:latin typeface="Calibri" pitchFamily="34" charset="0"/>
-                <a:ea typeface="Calibri" pitchFamily="34" charset="-122"/>
-                <a:cs typeface="Calibri" pitchFamily="34" charset="-120"/>
+                <a:cs typeface="Amiri" pitchFamily="2" charset="-78"/>
               </a:rPr>
               <a:t>Miftah Arabic · Progression P6 · IGCSE Bridge · P6-L11</a:t>
             </a:r>
@@ -32537,8 +31892,7 @@
                   <a:srgbClr val="1B3B6F"/>
                 </a:solidFill>
                 <a:latin typeface="Calibri" pitchFamily="34" charset="0"/>
-                <a:ea typeface="Calibri" pitchFamily="34" charset="-122"/>
-                <a:cs typeface="Calibri" pitchFamily="34" charset="-120"/>
+                <a:cs typeface="Amiri" pitchFamily="2" charset="-78"/>
               </a:rPr>
               <a:t>WHAT YOU NEED TO KNOW</a:t>
             </a:r>
@@ -32601,8 +31955,7 @@
                   <a:srgbClr val="D4AF37"/>
                 </a:solidFill>
                 <a:latin typeface="Calibri" pitchFamily="34" charset="0"/>
-                <a:ea typeface="Calibri" pitchFamily="34" charset="-122"/>
-                <a:cs typeface="Calibri" pitchFamily="34" charset="-120"/>
+                <a:cs typeface="Amiri" pitchFamily="2" charset="-78"/>
               </a:rPr>
               <a:t>1</a:t>
             </a:r>
@@ -32640,8 +31993,7 @@
                   <a:srgbClr val="1F2A37"/>
                 </a:solidFill>
                 <a:latin typeface="Calibri" pitchFamily="34" charset="0"/>
-                <a:ea typeface="Calibri" pitchFamily="34" charset="-122"/>
-                <a:cs typeface="Calibri" pitchFamily="34" charset="-120"/>
+                <a:cs typeface="Amiri" pitchFamily="2" charset="-78"/>
               </a:rPr>
               <a:t>Enter your four mock scores below to see your total out of 150 and your predicted grade. Grade boundaries (guidance): A* = 135+, A = 120+, B = 105+, C = 90+, D = 75+.</a:t>
             </a:r>
@@ -32704,8 +32056,7 @@
                   <a:srgbClr val="D4AF37"/>
                 </a:solidFill>
                 <a:latin typeface="Calibri" pitchFamily="34" charset="0"/>
-                <a:ea typeface="Calibri" pitchFamily="34" charset="-122"/>
-                <a:cs typeface="Calibri" pitchFamily="34" charset="-120"/>
+                <a:cs typeface="Amiri" pitchFamily="2" charset="-78"/>
               </a:rPr>
               <a:t>2</a:t>
             </a:r>
@@ -32743,8 +32094,7 @@
                   <a:srgbClr val="1F2A37"/>
                 </a:solidFill>
                 <a:latin typeface="Calibri" pitchFamily="34" charset="0"/>
-                <a:ea typeface="Calibri" pitchFamily="34" charset="-122"/>
-                <a:cs typeface="Calibri" pitchFamily="34" charset="-120"/>
+                <a:cs typeface="Amiri" pitchFamily="2" charset="-78"/>
               </a:rPr>
               <a:t>Your mock score is not your final score. Students typically gain 5–15 marks between the mock and the real exam through targeted revision. The gap between your mock and your target is today's agenda.</a:t>
             </a:r>
@@ -32816,8 +32166,7 @@
                   <a:srgbClr val="8A6D1E"/>
                 </a:solidFill>
                 <a:latin typeface="Calibri" pitchFamily="34" charset="0"/>
-                <a:ea typeface="Calibri" pitchFamily="34" charset="-122"/>
-                <a:cs typeface="Calibri" pitchFamily="34" charset="-120"/>
+                <a:cs typeface="Amiri" pitchFamily="2" charset="-78"/>
               </a:rPr>
               <a:t>THE MESSAGE</a:t>
             </a:r>
@@ -32854,9 +32203,8 @@
                 <a:solidFill>
                   <a:srgbClr val="1B3B6F"/>
                 </a:solidFill>
-                <a:latin typeface="Amiri" pitchFamily="34" charset="0"/>
-                <a:ea typeface="Amiri" pitchFamily="34" charset="-122"/>
-                <a:cs typeface="Amiri" pitchFamily="34" charset="-120"/>
+                <a:latin typeface="Amiri" pitchFamily="2" charset="-78"/>
+                <a:cs typeface="Amiri" pitchFamily="2" charset="-78"/>
               </a:rPr>
               <a:t>نَتِيجَةُ المُحَاكَاةِ لَيْسَتْ نَتِيجَتَكَ النِّهَائِيَّةَ.</a:t>
             </a:r>
@@ -32894,8 +32242,7 @@
                   <a:srgbClr val="5A6472"/>
                 </a:solidFill>
                 <a:latin typeface="Calibri" pitchFamily="34" charset="0"/>
-                <a:ea typeface="Calibri" pitchFamily="34" charset="-122"/>
-                <a:cs typeface="Calibri" pitchFamily="34" charset="-120"/>
+                <a:cs typeface="Amiri" pitchFamily="2" charset="-78"/>
               </a:rPr>
               <a:t>Your mock score is not your final score.</a:t>
             </a:r>
@@ -32955,9 +32302,8 @@
                 <a:solidFill>
                   <a:srgbClr val="1B3B6F"/>
                 </a:solidFill>
-                <a:latin typeface="Amiri" pitchFamily="34" charset="0"/>
-                <a:ea typeface="Amiri" pitchFamily="34" charset="-122"/>
-                <a:cs typeface="Amiri" pitchFamily="34" charset="-120"/>
+                <a:latin typeface="Amiri" pitchFamily="2" charset="-78"/>
+                <a:cs typeface="Amiri" pitchFamily="2" charset="-78"/>
               </a:rPr>
               <a:t>المُرَاجَعَةُ المُوَجَّهَةُ تَصْنَعُ الفَرْقَ.</a:t>
             </a:r>
@@ -32995,8 +32341,7 @@
                   <a:srgbClr val="5A6472"/>
                 </a:solidFill>
                 <a:latin typeface="Calibri" pitchFamily="34" charset="0"/>
-                <a:ea typeface="Calibri" pitchFamily="34" charset="-122"/>
-                <a:cs typeface="Calibri" pitchFamily="34" charset="-120"/>
+                <a:cs typeface="Amiri" pitchFamily="2" charset="-78"/>
               </a:rPr>
               <a:t>Targeted revision makes the difference.</a:t>
             </a:r>
@@ -33068,8 +32413,7 @@
                   <a:srgbClr val="8A6D1E"/>
                 </a:solidFill>
                 <a:latin typeface="Calibri" pitchFamily="34" charset="0"/>
-                <a:ea typeface="Calibri" pitchFamily="34" charset="-122"/>
-                <a:cs typeface="Calibri" pitchFamily="34" charset="-120"/>
+                <a:cs typeface="Amiri" pitchFamily="2" charset="-78"/>
               </a:rPr>
               <a:t>GUIDANCE ONLY</a:t>
             </a:r>
@@ -33107,8 +32451,7 @@
                   <a:srgbClr val="1F2A37"/>
                 </a:solidFill>
                 <a:latin typeface="Calibri" pitchFamily="34" charset="0"/>
-                <a:ea typeface="Calibri" pitchFamily="34" charset="-122"/>
-                <a:cs typeface="Calibri" pitchFamily="34" charset="-120"/>
+                <a:cs typeface="Amiri" pitchFamily="2" charset="-78"/>
               </a:rPr>
               <a:t>The grade boundaries are the website’s guidance; Cambridge sets the real boundaries for each exam series.</a:t>
             </a:r>
@@ -33146,8 +32489,7 @@
                   <a:srgbClr val="8A93A0"/>
                 </a:solidFill>
                 <a:latin typeface="Calibri" pitchFamily="34" charset="0"/>
-                <a:ea typeface="Calibri" pitchFamily="34" charset="-122"/>
-                <a:cs typeface="Calibri" pitchFamily="34" charset="-120"/>
+                <a:cs typeface="Amiri" pitchFamily="2" charset="-78"/>
               </a:rPr>
               <a:t>7 / 18</a:t>
             </a:r>
@@ -33241,9 +32583,8 @@
                 <a:solidFill>
                   <a:srgbClr val="D4AF37"/>
                 </a:solidFill>
-                <a:latin typeface="Amiri" pitchFamily="34" charset="0"/>
-                <a:ea typeface="Amiri" pitchFamily="34" charset="-122"/>
-                <a:cs typeface="Amiri" pitchFamily="34" charset="-120"/>
+                <a:latin typeface="Amiri" pitchFamily="2" charset="-78"/>
+                <a:cs typeface="Amiri" pitchFamily="2" charset="-78"/>
               </a:rPr>
               <a:t>م</a:t>
             </a:r>
@@ -33281,8 +32622,7 @@
                   <a:srgbClr val="1B3B6F"/>
                 </a:solidFill>
                 <a:latin typeface="Cambria" pitchFamily="34" charset="0"/>
-                <a:ea typeface="Cambria" pitchFamily="34" charset="-122"/>
-                <a:cs typeface="Cambria" pitchFamily="34" charset="-120"/>
+                <a:cs typeface="Amiri" pitchFamily="2" charset="-78"/>
               </a:rPr>
               <a:t>Al Madina Online School</a:t>
             </a:r>
@@ -33320,8 +32660,7 @@
                   <a:srgbClr val="8A6D1E"/>
                 </a:solidFill>
                 <a:latin typeface="Calibri" pitchFamily="34" charset="0"/>
-                <a:ea typeface="Calibri" pitchFamily="34" charset="-122"/>
-                <a:cs typeface="Calibri" pitchFamily="34" charset="-120"/>
+                <a:cs typeface="Amiri" pitchFamily="2" charset="-78"/>
               </a:rPr>
               <a:t>ARABIC DEPARTMENT · MIFTAH ARABIC · IGCSE 0544</a:t>
             </a:r>
@@ -33386,8 +32725,7 @@
                   <a:srgbClr val="FFFFFF"/>
                 </a:solidFill>
                 <a:latin typeface="Calibri" pitchFamily="34" charset="0"/>
-                <a:ea typeface="Calibri" pitchFamily="34" charset="-122"/>
-                <a:cs typeface="Calibri" pitchFamily="34" charset="-120"/>
+                <a:cs typeface="Amiri" pitchFamily="2" charset="-78"/>
               </a:rPr>
               <a:t>P6-L11 · IGCSE Bridge</a:t>
             </a:r>
@@ -33452,8 +32790,7 @@
                   <a:srgbClr val="FFFFFF"/>
                 </a:solidFill>
                 <a:latin typeface="Calibri" pitchFamily="34" charset="0"/>
-                <a:ea typeface="Calibri" pitchFamily="34" charset="-122"/>
-                <a:cs typeface="Calibri" pitchFamily="34" charset="-120"/>
+                <a:cs typeface="Amiri" pitchFamily="2" charset="-78"/>
               </a:rPr>
               <a:t>YOU DO · 6 MIN</a:t>
             </a:r>
@@ -33491,8 +32828,7 @@
                   <a:srgbClr val="1E6B52"/>
                 </a:solidFill>
                 <a:latin typeface="Calibri" pitchFamily="34" charset="0"/>
-                <a:ea typeface="Calibri" pitchFamily="34" charset="-122"/>
-                <a:cs typeface="Calibri" pitchFamily="34" charset="-120"/>
+                <a:cs typeface="Amiri" pitchFamily="2" charset="-78"/>
               </a:rPr>
               <a:t>YOU DO · ENTER · TOTAL · PREDICT (WEBSITE CALCULATOR)</a:t>
             </a:r>
@@ -33530,8 +32866,7 @@
                   <a:srgbClr val="1B3B6F"/>
                 </a:solidFill>
                 <a:latin typeface="Cambria" pitchFamily="34" charset="0"/>
-                <a:ea typeface="Cambria" pitchFamily="34" charset="-122"/>
-                <a:cs typeface="Cambria" pitchFamily="34" charset="-120"/>
+                <a:cs typeface="Amiri" pitchFamily="2" charset="-78"/>
               </a:rPr>
               <a:t>Mock results calculator (/150)</a:t>
             </a:r>
@@ -33568,9 +32903,8 @@
                 <a:solidFill>
                   <a:srgbClr val="8A6D1E"/>
                 </a:solidFill>
-                <a:latin typeface="Amiri" pitchFamily="34" charset="0"/>
-                <a:ea typeface="Amiri" pitchFamily="34" charset="-122"/>
-                <a:cs typeface="Amiri" pitchFamily="34" charset="-120"/>
+                <a:latin typeface="Amiri" pitchFamily="2" charset="-78"/>
+                <a:cs typeface="Amiri" pitchFamily="2" charset="-78"/>
               </a:rPr>
               <a:t>حَاسِبَةُ النَّتَائِجِ</a:t>
             </a:r>
@@ -33608,8 +32942,7 @@
                   <a:srgbClr val="8A93A0"/>
                 </a:solidFill>
                 <a:latin typeface="Calibri" pitchFamily="34" charset="0"/>
-                <a:ea typeface="Calibri" pitchFamily="34" charset="-122"/>
-                <a:cs typeface="Calibri" pitchFamily="34" charset="-120"/>
+                <a:cs typeface="Amiri" pitchFamily="2" charset="-78"/>
               </a:rPr>
               <a:t>Miftah Arabic · Progression P6 · IGCSE Bridge · P6-L11</a:t>
             </a:r>
@@ -33672,8 +33005,7 @@
                   <a:srgbClr val="FFFFFF"/>
                 </a:solidFill>
                 <a:latin typeface="Calibri" pitchFamily="34" charset="0"/>
-                <a:ea typeface="Calibri" pitchFamily="34" charset="-122"/>
-                <a:cs typeface="Calibri" pitchFamily="34" charset="-120"/>
+                <a:cs typeface="Amiri" pitchFamily="2" charset="-78"/>
               </a:rPr>
               <a:t>Where it came from</a:t>
             </a:r>
@@ -33711,8 +33043,7 @@
                   <a:srgbClr val="FFFFFF"/>
                 </a:solidFill>
                 <a:latin typeface="Calibri" pitchFamily="34" charset="0"/>
-                <a:ea typeface="Calibri" pitchFamily="34" charset="-122"/>
-                <a:cs typeface="Calibri" pitchFamily="34" charset="-120"/>
+                <a:cs typeface="Amiri" pitchFamily="2" charset="-78"/>
               </a:rPr>
               <a:t>My mock score</a:t>
             </a:r>
@@ -33750,8 +33081,7 @@
                   <a:srgbClr val="FFFFFF"/>
                 </a:solidFill>
                 <a:latin typeface="Calibri" pitchFamily="34" charset="0"/>
-                <a:ea typeface="Calibri" pitchFamily="34" charset="-122"/>
-                <a:cs typeface="Calibri" pitchFamily="34" charset="-120"/>
+                <a:cs typeface="Amiri" pitchFamily="2" charset="-78"/>
               </a:rPr>
               <a:t>Out of</a:t>
             </a:r>
@@ -33789,8 +33119,7 @@
                   <a:srgbClr val="FFFFFF"/>
                 </a:solidFill>
                 <a:latin typeface="Calibri" pitchFamily="34" charset="0"/>
-                <a:ea typeface="Calibri" pitchFamily="34" charset="-122"/>
-                <a:cs typeface="Calibri" pitchFamily="34" charset="-120"/>
+                <a:cs typeface="Amiri" pitchFamily="2" charset="-78"/>
               </a:rPr>
               <a:t>Paper</a:t>
             </a:r>
@@ -33855,8 +33184,7 @@
                   <a:srgbClr val="5A6472"/>
                 </a:solidFill>
                 <a:latin typeface="Calibri" pitchFamily="34" charset="0"/>
-                <a:ea typeface="Calibri" pitchFamily="34" charset="-122"/>
-                <a:cs typeface="Calibri" pitchFamily="34" charset="-120"/>
+                <a:cs typeface="Amiri" pitchFamily="2" charset="-78"/>
               </a:rPr>
               <a:t>P6-L08 (raw /20 × 2.25)</a:t>
             </a:r>
@@ -33894,8 +33222,7 @@
                   <a:srgbClr val="5A6472"/>
                 </a:solidFill>
                 <a:latin typeface="Calibri" pitchFamily="34" charset="0"/>
-                <a:ea typeface="Calibri" pitchFamily="34" charset="-122"/>
-                <a:cs typeface="Calibri" pitchFamily="34" charset="-120"/>
+                <a:cs typeface="Amiri" pitchFamily="2" charset="-78"/>
               </a:rPr>
               <a:t>______</a:t>
             </a:r>
@@ -33933,8 +33260,7 @@
                   <a:srgbClr val="5A6472"/>
                 </a:solidFill>
                 <a:latin typeface="Calibri" pitchFamily="34" charset="0"/>
-                <a:ea typeface="Calibri" pitchFamily="34" charset="-122"/>
-                <a:cs typeface="Calibri" pitchFamily="34" charset="-120"/>
+                <a:cs typeface="Amiri" pitchFamily="2" charset="-78"/>
               </a:rPr>
               <a:t>45</a:t>
             </a:r>
@@ -33972,8 +33298,7 @@
                   <a:srgbClr val="5A6472"/>
                 </a:solidFill>
                 <a:latin typeface="Calibri" pitchFamily="34" charset="0"/>
-                <a:ea typeface="Calibri" pitchFamily="34" charset="-122"/>
-                <a:cs typeface="Calibri" pitchFamily="34" charset="-120"/>
+                <a:cs typeface="Amiri" pitchFamily="2" charset="-78"/>
               </a:rPr>
               <a:t>Paper 1 — Listening</a:t>
             </a:r>
@@ -34038,8 +33363,7 @@
                   <a:srgbClr val="FFFFFF"/>
                 </a:solidFill>
                 <a:latin typeface="Calibri" pitchFamily="34" charset="0"/>
-                <a:ea typeface="Calibri" pitchFamily="34" charset="-122"/>
-                <a:cs typeface="Calibri" pitchFamily="34" charset="-120"/>
+                <a:cs typeface="Amiri" pitchFamily="2" charset="-78"/>
               </a:rPr>
               <a:t>CORE</a:t>
             </a:r>
@@ -34104,8 +33428,7 @@
                   <a:srgbClr val="5A6472"/>
                 </a:solidFill>
                 <a:latin typeface="Calibri" pitchFamily="34" charset="0"/>
-                <a:ea typeface="Calibri" pitchFamily="34" charset="-122"/>
-                <a:cs typeface="Calibri" pitchFamily="34" charset="-120"/>
+                <a:cs typeface="Amiri" pitchFamily="2" charset="-78"/>
               </a:rPr>
               <a:t>P6-L09 (raw /16 × 2.8125)</a:t>
             </a:r>
@@ -34143,8 +33466,7 @@
                   <a:srgbClr val="5A6472"/>
                 </a:solidFill>
                 <a:latin typeface="Calibri" pitchFamily="34" charset="0"/>
-                <a:ea typeface="Calibri" pitchFamily="34" charset="-122"/>
-                <a:cs typeface="Calibri" pitchFamily="34" charset="-120"/>
+                <a:cs typeface="Amiri" pitchFamily="2" charset="-78"/>
               </a:rPr>
               <a:t>______</a:t>
             </a:r>
@@ -34182,8 +33504,7 @@
                   <a:srgbClr val="5A6472"/>
                 </a:solidFill>
                 <a:latin typeface="Calibri" pitchFamily="34" charset="0"/>
-                <a:ea typeface="Calibri" pitchFamily="34" charset="-122"/>
-                <a:cs typeface="Calibri" pitchFamily="34" charset="-120"/>
+                <a:cs typeface="Amiri" pitchFamily="2" charset="-78"/>
               </a:rPr>
               <a:t>45</a:t>
             </a:r>
@@ -34221,8 +33542,7 @@
                   <a:srgbClr val="5A6472"/>
                 </a:solidFill>
                 <a:latin typeface="Calibri" pitchFamily="34" charset="0"/>
-                <a:ea typeface="Calibri" pitchFamily="34" charset="-122"/>
-                <a:cs typeface="Calibri" pitchFamily="34" charset="-120"/>
+                <a:cs typeface="Amiri" pitchFamily="2" charset="-78"/>
               </a:rPr>
               <a:t>Paper 2 — Reading</a:t>
             </a:r>
@@ -34287,8 +33607,7 @@
                   <a:srgbClr val="FFFFFF"/>
                 </a:solidFill>
                 <a:latin typeface="Calibri" pitchFamily="34" charset="0"/>
-                <a:ea typeface="Calibri" pitchFamily="34" charset="-122"/>
-                <a:cs typeface="Calibri" pitchFamily="34" charset="-120"/>
+                <a:cs typeface="Amiri" pitchFamily="2" charset="-78"/>
               </a:rPr>
               <a:t>CORE</a:t>
             </a:r>
@@ -34353,8 +33672,7 @@
                   <a:srgbClr val="5A6472"/>
                 </a:solidFill>
                 <a:latin typeface="Calibri" pitchFamily="34" charset="0"/>
-                <a:ea typeface="Calibri" pitchFamily="34" charset="-122"/>
-                <a:cs typeface="Calibri" pitchFamily="34" charset="-120"/>
+                <a:cs typeface="Amiri" pitchFamily="2" charset="-78"/>
               </a:rPr>
               <a:t>P6-L10 (role play + conversation)</a:t>
             </a:r>
@@ -34392,8 +33710,7 @@
                   <a:srgbClr val="5A6472"/>
                 </a:solidFill>
                 <a:latin typeface="Calibri" pitchFamily="34" charset="0"/>
-                <a:ea typeface="Calibri" pitchFamily="34" charset="-122"/>
-                <a:cs typeface="Calibri" pitchFamily="34" charset="-120"/>
+                <a:cs typeface="Amiri" pitchFamily="2" charset="-78"/>
               </a:rPr>
               <a:t>______</a:t>
             </a:r>
@@ -34431,8 +33748,7 @@
                   <a:srgbClr val="5A6472"/>
                 </a:solidFill>
                 <a:latin typeface="Calibri" pitchFamily="34" charset="0"/>
-                <a:ea typeface="Calibri" pitchFamily="34" charset="-122"/>
-                <a:cs typeface="Calibri" pitchFamily="34" charset="-120"/>
+                <a:cs typeface="Amiri" pitchFamily="2" charset="-78"/>
               </a:rPr>
               <a:t>30</a:t>
             </a:r>
@@ -34470,8 +33786,7 @@
                   <a:srgbClr val="5A6472"/>
                 </a:solidFill>
                 <a:latin typeface="Calibri" pitchFamily="34" charset="0"/>
-                <a:ea typeface="Calibri" pitchFamily="34" charset="-122"/>
-                <a:cs typeface="Calibri" pitchFamily="34" charset="-120"/>
+                <a:cs typeface="Amiri" pitchFamily="2" charset="-78"/>
               </a:rPr>
               <a:t>Paper 3 — Speaking</a:t>
             </a:r>
@@ -34536,8 +33851,7 @@
                   <a:srgbClr val="FFFFFF"/>
                 </a:solidFill>
                 <a:latin typeface="Calibri" pitchFamily="34" charset="0"/>
-                <a:ea typeface="Calibri" pitchFamily="34" charset="-122"/>
-                <a:cs typeface="Calibri" pitchFamily="34" charset="-120"/>
+                <a:cs typeface="Amiri" pitchFamily="2" charset="-78"/>
               </a:rPr>
               <a:t>CORE</a:t>
             </a:r>
@@ -34602,8 +33916,7 @@
                   <a:srgbClr val="5A6472"/>
                 </a:solidFill>
                 <a:latin typeface="Calibri" pitchFamily="34" charset="0"/>
-                <a:ea typeface="Calibri" pitchFamily="34" charset="-122"/>
-                <a:cs typeface="Calibri" pitchFamily="34" charset="-120"/>
+                <a:cs typeface="Amiri" pitchFamily="2" charset="-78"/>
               </a:rPr>
               <a:t>P6-L09 (Q1 + Q2, teacher-marked)</a:t>
             </a:r>
@@ -34641,8 +33954,7 @@
                   <a:srgbClr val="5A6472"/>
                 </a:solidFill>
                 <a:latin typeface="Calibri" pitchFamily="34" charset="0"/>
-                <a:ea typeface="Calibri" pitchFamily="34" charset="-122"/>
-                <a:cs typeface="Calibri" pitchFamily="34" charset="-120"/>
+                <a:cs typeface="Amiri" pitchFamily="2" charset="-78"/>
               </a:rPr>
               <a:t>______</a:t>
             </a:r>
@@ -34680,8 +33992,7 @@
                   <a:srgbClr val="5A6472"/>
                 </a:solidFill>
                 <a:latin typeface="Calibri" pitchFamily="34" charset="0"/>
-                <a:ea typeface="Calibri" pitchFamily="34" charset="-122"/>
-                <a:cs typeface="Calibri" pitchFamily="34" charset="-120"/>
+                <a:cs typeface="Amiri" pitchFamily="2" charset="-78"/>
               </a:rPr>
               <a:t>30</a:t>
             </a:r>
@@ -34719,8 +34030,7 @@
                   <a:srgbClr val="5A6472"/>
                 </a:solidFill>
                 <a:latin typeface="Calibri" pitchFamily="34" charset="0"/>
-                <a:ea typeface="Calibri" pitchFamily="34" charset="-122"/>
-                <a:cs typeface="Calibri" pitchFamily="34" charset="-120"/>
+                <a:cs typeface="Amiri" pitchFamily="2" charset="-78"/>
               </a:rPr>
               <a:t>Paper 4 — Writing</a:t>
             </a:r>
@@ -34785,8 +34095,7 @@
                   <a:srgbClr val="FFFFFF"/>
                 </a:solidFill>
                 <a:latin typeface="Calibri" pitchFamily="34" charset="0"/>
-                <a:ea typeface="Calibri" pitchFamily="34" charset="-122"/>
-                <a:cs typeface="Calibri" pitchFamily="34" charset="-120"/>
+                <a:cs typeface="Amiri" pitchFamily="2" charset="-78"/>
               </a:rPr>
               <a:t>CORE</a:t>
             </a:r>
@@ -34851,8 +34160,7 @@
                   <a:srgbClr val="5A6472"/>
                 </a:solidFill>
                 <a:latin typeface="Calibri" pitchFamily="34" charset="0"/>
-                <a:ea typeface="Calibri" pitchFamily="34" charset="-122"/>
-                <a:cs typeface="Calibri" pitchFamily="34" charset="-120"/>
+                <a:cs typeface="Amiri" pitchFamily="2" charset="-78"/>
               </a:rPr>
               <a:t>add the four scores</a:t>
             </a:r>
@@ -34890,8 +34198,7 @@
                   <a:srgbClr val="5A6472"/>
                 </a:solidFill>
                 <a:latin typeface="Calibri" pitchFamily="34" charset="0"/>
-                <a:ea typeface="Calibri" pitchFamily="34" charset="-122"/>
-                <a:cs typeface="Calibri" pitchFamily="34" charset="-120"/>
+                <a:cs typeface="Amiri" pitchFamily="2" charset="-78"/>
               </a:rPr>
               <a:t>______</a:t>
             </a:r>
@@ -34929,8 +34236,7 @@
                   <a:srgbClr val="5A6472"/>
                 </a:solidFill>
                 <a:latin typeface="Calibri" pitchFamily="34" charset="0"/>
-                <a:ea typeface="Calibri" pitchFamily="34" charset="-122"/>
-                <a:cs typeface="Calibri" pitchFamily="34" charset="-120"/>
+                <a:cs typeface="Amiri" pitchFamily="2" charset="-78"/>
               </a:rPr>
               <a:t>150</a:t>
             </a:r>
@@ -34968,8 +34274,7 @@
                   <a:srgbClr val="5A6472"/>
                 </a:solidFill>
                 <a:latin typeface="Calibri" pitchFamily="34" charset="0"/>
-                <a:ea typeface="Calibri" pitchFamily="34" charset="-122"/>
-                <a:cs typeface="Calibri" pitchFamily="34" charset="-120"/>
+                <a:cs typeface="Amiri" pitchFamily="2" charset="-78"/>
               </a:rPr>
               <a:t>TOTAL</a:t>
             </a:r>
@@ -35007,8 +34312,7 @@
                   <a:srgbClr val="1B3B6F"/>
                 </a:solidFill>
                 <a:latin typeface="Calibri" pitchFamily="34" charset="0"/>
-                <a:ea typeface="Calibri" pitchFamily="34" charset="-122"/>
-                <a:cs typeface="Calibri" pitchFamily="34" charset="-120"/>
+                <a:cs typeface="Amiri" pitchFamily="2" charset="-78"/>
               </a:rPr>
               <a:t>Grade guidance (website): A* = 135+ · A = 120+ · B = 105+ · C = 90+ · D = 75+. Guidance only — Cambridge sets the real boundaries each series.</a:t>
             </a:r>
@@ -35046,8 +34350,7 @@
                   <a:srgbClr val="8A93A0"/>
                 </a:solidFill>
                 <a:latin typeface="Calibri" pitchFamily="34" charset="0"/>
-                <a:ea typeface="Calibri" pitchFamily="34" charset="-122"/>
-                <a:cs typeface="Calibri" pitchFamily="34" charset="-120"/>
+                <a:cs typeface="Amiri" pitchFamily="2" charset="-78"/>
               </a:rPr>
               <a:t>8 / 18</a:t>
             </a:r>
@@ -35141,9 +34444,8 @@
                 <a:solidFill>
                   <a:srgbClr val="D4AF37"/>
                 </a:solidFill>
-                <a:latin typeface="Amiri" pitchFamily="34" charset="0"/>
-                <a:ea typeface="Amiri" pitchFamily="34" charset="-122"/>
-                <a:cs typeface="Amiri" pitchFamily="34" charset="-120"/>
+                <a:latin typeface="Amiri" pitchFamily="2" charset="-78"/>
+                <a:cs typeface="Amiri" pitchFamily="2" charset="-78"/>
               </a:rPr>
               <a:t>م</a:t>
             </a:r>
@@ -35181,8 +34483,7 @@
                   <a:srgbClr val="1B3B6F"/>
                 </a:solidFill>
                 <a:latin typeface="Cambria" pitchFamily="34" charset="0"/>
-                <a:ea typeface="Cambria" pitchFamily="34" charset="-122"/>
-                <a:cs typeface="Cambria" pitchFamily="34" charset="-120"/>
+                <a:cs typeface="Amiri" pitchFamily="2" charset="-78"/>
               </a:rPr>
               <a:t>Al Madina Online School</a:t>
             </a:r>
@@ -35220,8 +34521,7 @@
                   <a:srgbClr val="8A6D1E"/>
                 </a:solidFill>
                 <a:latin typeface="Calibri" pitchFamily="34" charset="0"/>
-                <a:ea typeface="Calibri" pitchFamily="34" charset="-122"/>
-                <a:cs typeface="Calibri" pitchFamily="34" charset="-120"/>
+                <a:cs typeface="Amiri" pitchFamily="2" charset="-78"/>
               </a:rPr>
               <a:t>ARABIC DEPARTMENT · MIFTAH ARABIC · IGCSE 0544</a:t>
             </a:r>
@@ -35286,8 +34586,7 @@
                   <a:srgbClr val="FFFFFF"/>
                 </a:solidFill>
                 <a:latin typeface="Calibri" pitchFamily="34" charset="0"/>
-                <a:ea typeface="Calibri" pitchFamily="34" charset="-122"/>
-                <a:cs typeface="Calibri" pitchFamily="34" charset="-120"/>
+                <a:cs typeface="Amiri" pitchFamily="2" charset="-78"/>
               </a:rPr>
               <a:t>P6-L11 · IGCSE Bridge</a:t>
             </a:r>
@@ -35352,8 +34651,7 @@
                   <a:srgbClr val="FFFFFF"/>
                 </a:solidFill>
                 <a:latin typeface="Calibri" pitchFamily="34" charset="0"/>
-                <a:ea typeface="Calibri" pitchFamily="34" charset="-122"/>
-                <a:cs typeface="Calibri" pitchFamily="34" charset="-120"/>
+                <a:cs typeface="Amiri" pitchFamily="2" charset="-78"/>
               </a:rPr>
               <a:t>I DO · 5 MIN</a:t>
             </a:r>
@@ -35391,8 +34689,7 @@
                   <a:srgbClr val="6B4C9A"/>
                 </a:solidFill>
                 <a:latin typeface="Calibri" pitchFamily="34" charset="0"/>
-                <a:ea typeface="Calibri" pitchFamily="34" charset="-122"/>
-                <a:cs typeface="Calibri" pitchFamily="34" charset="-120"/>
+                <a:cs typeface="Amiri" pitchFamily="2" charset="-78"/>
               </a:rPr>
               <a:t>I DO · THE THREE MOST COMMON ERRORS — HIGHEST IMPACT FIRST (WEBSITE)</a:t>
             </a:r>
@@ -35430,8 +34727,7 @@
                   <a:srgbClr val="1B3B6F"/>
                 </a:solidFill>
                 <a:latin typeface="Cambria" pitchFamily="34" charset="0"/>
-                <a:ea typeface="Cambria" pitchFamily="34" charset="-122"/>
-                <a:cs typeface="Cambria" pitchFamily="34" charset="-120"/>
+                <a:cs typeface="Amiri" pitchFamily="2" charset="-78"/>
               </a:rPr>
               <a:t>The three most common errors — and their fixes</a:t>
             </a:r>
@@ -35468,9 +34764,8 @@
                 <a:solidFill>
                   <a:srgbClr val="8A6D1E"/>
                 </a:solidFill>
-                <a:latin typeface="Amiri" pitchFamily="34" charset="0"/>
-                <a:ea typeface="Amiri" pitchFamily="34" charset="-122"/>
-                <a:cs typeface="Amiri" pitchFamily="34" charset="-120"/>
+                <a:latin typeface="Amiri" pitchFamily="2" charset="-78"/>
+                <a:cs typeface="Amiri" pitchFamily="2" charset="-78"/>
               </a:rPr>
               <a:t>الأَخْطَاءُ الثَّلَاثَةُ</a:t>
             </a:r>
@@ -35508,8 +34803,7 @@
                   <a:srgbClr val="8A93A0"/>
                 </a:solidFill>
                 <a:latin typeface="Calibri" pitchFamily="34" charset="0"/>
-                <a:ea typeface="Calibri" pitchFamily="34" charset="-122"/>
-                <a:cs typeface="Calibri" pitchFamily="34" charset="-120"/>
+                <a:cs typeface="Amiri" pitchFamily="2" charset="-78"/>
               </a:rPr>
               <a:t>Miftah Arabic · Progression P6 · IGCSE Bridge · P6-L11</a:t>
             </a:r>
@@ -35581,8 +34875,7 @@
                   <a:srgbClr val="1B3B6F"/>
                 </a:solidFill>
                 <a:latin typeface="Calibri" pitchFamily="34" charset="0"/>
-                <a:ea typeface="Calibri" pitchFamily="34" charset="-122"/>
-                <a:cs typeface="Calibri" pitchFamily="34" charset="-120"/>
+                <a:cs typeface="Amiri" pitchFamily="2" charset="-78"/>
               </a:rPr>
               <a:t>THE THREE MOST COMMON ERRORS — AND THEIR FIXES</a:t>
             </a:r>
@@ -35645,8 +34938,7 @@
                   <a:srgbClr val="D4AF37"/>
                 </a:solidFill>
                 <a:latin typeface="Calibri" pitchFamily="34" charset="0"/>
-                <a:ea typeface="Calibri" pitchFamily="34" charset="-122"/>
-                <a:cs typeface="Calibri" pitchFamily="34" charset="-120"/>
+                <a:cs typeface="Amiri" pitchFamily="2" charset="-78"/>
               </a:rPr>
               <a:t>1</a:t>
             </a:r>
@@ -35684,8 +34976,7 @@
                   <a:srgbClr val="1F2A37"/>
                 </a:solidFill>
                 <a:latin typeface="Calibri" pitchFamily="34" charset="0"/>
-                <a:ea typeface="Calibri" pitchFamily="34" charset="-122"/>
-                <a:cs typeface="Calibri" pitchFamily="34" charset="-120"/>
+                <a:cs typeface="Amiri" pitchFamily="2" charset="-78"/>
               </a:rPr>
               <a:t>The subjunctive fatḥa — after a trigger the verb ends in -a, not -u or -i. Worth 2 Accuracy marks and very frequent.</a:t>
             </a:r>
@@ -35748,8 +35039,7 @@
                   <a:srgbClr val="D4AF37"/>
                 </a:solidFill>
                 <a:latin typeface="Calibri" pitchFamily="34" charset="0"/>
-                <a:ea typeface="Calibri" pitchFamily="34" charset="-122"/>
-                <a:cs typeface="Calibri" pitchFamily="34" charset="-120"/>
+                <a:cs typeface="Amiri" pitchFamily="2" charset="-78"/>
               </a:rPr>
               <a:t>2</a:t>
             </a:r>
@@ -35787,8 +35077,7 @@
                   <a:srgbClr val="1F2A37"/>
                 </a:solidFill>
                 <a:latin typeface="Calibri" pitchFamily="34" charset="0"/>
-                <a:ea typeface="Calibri" pitchFamily="34" charset="-122"/>
-                <a:cs typeface="Calibri" pitchFamily="34" charset="-120"/>
+                <a:cs typeface="Amiri" pitchFamily="2" charset="-78"/>
               </a:rPr>
               <a:t>The Type 2 la- prefix — lau + past, then la- + past in the result. The la- cannot be dropped. Worth 2 Accuracy marks.</a:t>
             </a:r>
@@ -35851,8 +35140,7 @@
                   <a:srgbClr val="D4AF37"/>
                 </a:solidFill>
                 <a:latin typeface="Calibri" pitchFamily="34" charset="0"/>
-                <a:ea typeface="Calibri" pitchFamily="34" charset="-122"/>
-                <a:cs typeface="Calibri" pitchFamily="34" charset="-120"/>
+                <a:cs typeface="Amiri" pitchFamily="2" charset="-78"/>
               </a:rPr>
               <a:t>3</a:t>
             </a:r>
@@ -35890,8 +35178,7 @@
                   <a:srgbClr val="1F2A37"/>
                 </a:solidFill>
                 <a:latin typeface="Calibri" pitchFamily="34" charset="0"/>
-                <a:ea typeface="Calibri" pitchFamily="34" charset="-122"/>
-                <a:cs typeface="Calibri" pitchFamily="34" charset="-120"/>
+                <a:cs typeface="Amiri" pitchFamily="2" charset="-78"/>
               </a:rPr>
               <a:t>an vs anna — an + subjunctive; anna + a reported fact. And ṣaḥīḥun anna concedes a real situation, so its verb stays indicative.</a:t>
             </a:r>
@@ -35963,8 +35250,7 @@
                   <a:srgbClr val="8A6D1E"/>
                 </a:solidFill>
                 <a:latin typeface="Calibri" pitchFamily="34" charset="0"/>
-                <a:ea typeface="Calibri" pitchFamily="34" charset="-122"/>
-                <a:cs typeface="Calibri" pitchFamily="34" charset="-120"/>
+                <a:cs typeface="Amiri" pitchFamily="2" charset="-78"/>
               </a:rPr>
               <a:t>IN ARABIC</a:t>
             </a:r>
@@ -36001,9 +35287,8 @@
                 <a:solidFill>
                   <a:srgbClr val="1B3B6F"/>
                 </a:solidFill>
-                <a:latin typeface="Amiri" pitchFamily="34" charset="0"/>
-                <a:ea typeface="Amiri" pitchFamily="34" charset="-122"/>
-                <a:cs typeface="Amiri" pitchFamily="34" charset="-120"/>
+                <a:latin typeface="Amiri" pitchFamily="2" charset="-78"/>
+                <a:cs typeface="Amiri" pitchFamily="2" charset="-78"/>
               </a:rPr>
               <a:t>يَتَطَلَّبُ الأَمْرُ أَنْ تُوَفِّرَ المَدَارِسُ دَعْمًا.</a:t>
             </a:r>
@@ -36041,8 +35326,7 @@
                   <a:srgbClr val="5A6472"/>
                 </a:solidFill>
                 <a:latin typeface="Calibri" pitchFamily="34" charset="0"/>
-                <a:ea typeface="Calibri" pitchFamily="34" charset="-122"/>
-                <a:cs typeface="Calibri" pitchFamily="34" charset="-120"/>
+                <a:cs typeface="Amiri" pitchFamily="2" charset="-78"/>
               </a:rPr>
               <a:t>1 · tuwaffira — not tuwaffiru</a:t>
             </a:r>
@@ -36102,9 +35386,8 @@
                 <a:solidFill>
                   <a:srgbClr val="1B3B6F"/>
                 </a:solidFill>
-                <a:latin typeface="Amiri" pitchFamily="34" charset="0"/>
-                <a:ea typeface="Amiri" pitchFamily="34" charset="-122"/>
-                <a:cs typeface="Amiri" pitchFamily="34" charset="-120"/>
+                <a:latin typeface="Amiri" pitchFamily="2" charset="-78"/>
+                <a:cs typeface="Amiri" pitchFamily="2" charset="-78"/>
               </a:rPr>
               <a:t>لَوْ دَرَسْتُ، لَنَجَحْتُ.</a:t>
             </a:r>
@@ -36142,8 +35425,7 @@
                   <a:srgbClr val="5A6472"/>
                 </a:solidFill>
                 <a:latin typeface="Calibri" pitchFamily="34" charset="0"/>
-                <a:ea typeface="Calibri" pitchFamily="34" charset="-122"/>
-                <a:cs typeface="Calibri" pitchFamily="34" charset="-120"/>
+                <a:cs typeface="Amiri" pitchFamily="2" charset="-78"/>
               </a:rPr>
               <a:t>2 · la-najaḥtu — keep the la-</a:t>
             </a:r>
@@ -36203,9 +35485,8 @@
                 <a:solidFill>
                   <a:srgbClr val="1B3B6F"/>
                 </a:solidFill>
-                <a:latin typeface="Amiri" pitchFamily="34" charset="0"/>
-                <a:ea typeface="Amiri" pitchFamily="34" charset="-122"/>
-                <a:cs typeface="Amiri" pitchFamily="34" charset="-120"/>
+                <a:latin typeface="Amiri" pitchFamily="2" charset="-78"/>
+                <a:cs typeface="Amiri" pitchFamily="2" charset="-78"/>
               </a:rPr>
               <a:t>أَكَّدَ أَنَّ الوَقْتَ يَنْفَدُ.</a:t>
             </a:r>
@@ -36243,8 +35524,7 @@
                   <a:srgbClr val="5A6472"/>
                 </a:solidFill>
                 <a:latin typeface="Calibri" pitchFamily="34" charset="0"/>
-                <a:ea typeface="Calibri" pitchFamily="34" charset="-122"/>
-                <a:cs typeface="Calibri" pitchFamily="34" charset="-120"/>
+                <a:cs typeface="Amiri" pitchFamily="2" charset="-78"/>
               </a:rPr>
               <a:t>3 · anna + a fact (indicative)</a:t>
             </a:r>
@@ -36282,8 +35562,7 @@
                   <a:srgbClr val="8A93A0"/>
                 </a:solidFill>
                 <a:latin typeface="Calibri" pitchFamily="34" charset="0"/>
-                <a:ea typeface="Calibri" pitchFamily="34" charset="-122"/>
-                <a:cs typeface="Calibri" pitchFamily="34" charset="-120"/>
+                <a:cs typeface="Amiri" pitchFamily="2" charset="-78"/>
               </a:rPr>
               <a:t>9 / 18</a:t>
             </a:r>

--- a/Progression_P6/P6-L11_Mock_Results_and_Final_Revision.pptx
+++ b/Progression_P6/P6-L11_Mock_Results_and_Final_Revision.pptx
@@ -792,7 +792,11 @@
           <a:lstStyle/>
           <a:p>
             <a:r>
-              <a:rPr lang="en-US" dirty="0"/>
+              <a:rPr lang="ar-SA" dirty="0">
+                <a:latin typeface="Amiri" pitchFamily="2" charset="-78"/>
+                <a:ea typeface="Amiri" pitchFamily="2" charset="-78"/>
+                <a:cs typeface="Amiri" pitchFamily="2" charset="-78"/>
+              </a:rPr>
               <a:t>TEACH (4 min) — the website hierarchy. The examples expand item 3 (reported speech): after قَالَ use إِنَّ; after other reporting verbs (ذَكَرَ · أَكَّدَ · أَشَارَ إِلَى) use أَنَّ.
 WEBSITE CARDS “Grammar revision hierarchy — most marks per minute”: 1 · Subjunctive ـَ marker: High-frequency, 2 Accuracy marks. · 2 · Type 2 لَـ prefix: Common error, 2 Accuracy marks. · 3 · Reported speech إِنَّ / أَنَّ: 2 Accuracy marks. · 4 · صَحِيحٌ أَنَّ + indicative: 1 mark, but crucial for Task Completion. · 5 · Passive agreement: 1 Accuracy mark. · 6 · Vocabulary by topic: Target your three weakest topic areas from the mock.</a:t>
             </a:r>
@@ -1415,7 +1419,11 @@
           <a:lstStyle/>
           <a:p>
             <a:r>
-              <a:rPr lang="en-US" dirty="0"/>
+              <a:rPr lang="ar-SA" dirty="0">
+                <a:latin typeface="Amiri" pitchFamily="2" charset="-78"/>
+                <a:ea typeface="Amiri" pitchFamily="2" charset="-78"/>
+                <a:cs typeface="Amiri" pitchFamily="2" charset="-78"/>
+              </a:rPr>
               <a:t>WELCOME (1 min) — while students join.
 • Greet each student by name as they arrive: السَّلَامُ عَلَيْكُمْ. Take the register (Pastoral Tracker: attendance 0/1).
 • 2-MINUTE CHECK-IN (SEND training): a private chat to any student who seemed unsettled last lesson — “Are you okay today? 👍 / 👎”.
@@ -2047,7 +2055,11 @@
           <a:lstStyle/>
           <a:p>
             <a:r>
-              <a:rPr lang="en-US" dirty="0"/>
+              <a:rPr lang="ar-SA" dirty="0">
+                <a:latin typeface="Amiri" pitchFamily="2" charset="-78"/>
+                <a:ea typeface="Amiri" pitchFamily="2" charset="-78"/>
+                <a:cs typeface="Amiri" pitchFamily="2" charset="-78"/>
+              </a:rPr>
               <a:t>I DO (5 min) — the website cards with transliterated rule names (the website writes the prefix as a split letter; we write whole words). Write a WRONG version of each on the whiteboard (أَنْ تُوَفِّرُ · لَوْ دَرَسْتُ، نَجَحْتُ · أَكَّدَ أَنْ …), think aloud while fixing it.
 WEBSITE CARDS “The three most common errors — and their fixes”: The subjunctive fatḥa: After a trigger, the verb must end in ـَ — not ـُ, not ـِ. Worth 2 Accuracy marks and very frequent. (يَتَطَلَّبُ / يَنْبَغِي / لِكَيْ + فِعْلٌ مَنْصُوبٌ بِفَتْحَةٍ) · The Type 2 لَـ prefix: لَوْ + past, then لَـ + past in the result. The لَـ cannot be dropped. Worth 2 Accuracy marks. (لَوْ دَرَسْتُ، لَنَجَحْتُ) · أَنْ vs أَنَّ · صَحِيحٌ أَنَّ + indicative: أَنْ introduces a subjunctive; أَنَّ introduces a reported fact. And صَحِيحٌ أَنَّ concedes a real situation, so its verb stays indicative. (يُطَالِبُ بِأَنْ تُوَقِّعَ · أَكَّدَ أَنَّ الوَقْتَ يَنْفَدُ · صَحِيحٌ أَنَّ الوَقْتَ مَحْدُودٌ)</a:t>
             </a:r>
@@ -2532,6 +2544,7 @@
                   <a:srgbClr val="D4AF37"/>
                 </a:solidFill>
                 <a:latin typeface="Amiri" pitchFamily="2" charset="-78"/>
+                <a:ea typeface="Amiri" pitchFamily="2" charset="-78"/>
                 <a:cs typeface="Amiri" pitchFamily="2" charset="-78"/>
               </a:rPr>
               <a:t>م</a:t>
@@ -2738,6 +2751,7 @@
                   <a:srgbClr val="D4AF37"/>
                 </a:solidFill>
                 <a:latin typeface="Amiri" pitchFamily="2" charset="-78"/>
+                <a:ea typeface="Amiri" pitchFamily="2" charset="-78"/>
                 <a:cs typeface="Amiri" pitchFamily="2" charset="-78"/>
               </a:rPr>
               <a:t>نَتَائِجُ المُحَاكَاةِ وَالمُرَاجَعَةُ المُوَجَّهَةُ وَالاسْتِعْدَادُ النِّهَائِيُّ</a:t>
@@ -3195,6 +3209,7 @@
                   <a:srgbClr val="D4AF37"/>
                 </a:solidFill>
                 <a:latin typeface="Amiri" pitchFamily="2" charset="-78"/>
+                <a:ea typeface="Amiri" pitchFamily="2" charset="-78"/>
                 <a:cs typeface="Amiri" pitchFamily="2" charset="-78"/>
               </a:rPr>
               <a:t>م</a:t>
@@ -3515,6 +3530,7 @@
                   <a:srgbClr val="8A6D1E"/>
                 </a:solidFill>
                 <a:latin typeface="Amiri" pitchFamily="2" charset="-78"/>
+                <a:ea typeface="Amiri" pitchFamily="2" charset="-78"/>
                 <a:cs typeface="Amiri" pitchFamily="2" charset="-78"/>
               </a:rPr>
               <a:t>صَحِّحِ الخَطَأَ</a:t>
@@ -3701,6 +3717,7 @@
                   <a:srgbClr val="1B3B6F"/>
                 </a:solidFill>
                 <a:latin typeface="Amiri" pitchFamily="2" charset="-78"/>
+                <a:ea typeface="Amiri" pitchFamily="2" charset="-78"/>
                 <a:cs typeface="Amiri" pitchFamily="2" charset="-78"/>
               </a:rPr>
               <a:t>يَنْبَغِي أَنْ</a:t>
@@ -3727,6 +3744,7 @@
                   <a:srgbClr val="1B3B6F"/>
                 </a:solidFill>
                 <a:latin typeface="Amiri" pitchFamily="2" charset="-78"/>
+                <a:ea typeface="Amiri" pitchFamily="2" charset="-78"/>
                 <a:cs typeface="Amiri" pitchFamily="2" charset="-78"/>
               </a:rPr>
               <a:t>المَاءَ بِوَفْرَةٍ</a:t>
@@ -3841,6 +3859,7 @@
                   <a:srgbClr val="1F2A37"/>
                 </a:solidFill>
                 <a:latin typeface="Amiri" pitchFamily="2" charset="-78"/>
+                <a:ea typeface="Amiri" pitchFamily="2" charset="-78"/>
                 <a:cs typeface="Amiri" pitchFamily="2" charset="-78"/>
               </a:rPr>
               <a:t>نَشْرَبُ</a:t>
@@ -3942,6 +3961,7 @@
                   <a:srgbClr val="1F2A37"/>
                 </a:solidFill>
                 <a:latin typeface="Amiri" pitchFamily="2" charset="-78"/>
+                <a:ea typeface="Amiri" pitchFamily="2" charset="-78"/>
                 <a:cs typeface="Amiri" pitchFamily="2" charset="-78"/>
               </a:rPr>
               <a:t>نَشْرَبِ</a:t>
@@ -4043,6 +4063,7 @@
                   <a:srgbClr val="1F2A37"/>
                 </a:solidFill>
                 <a:latin typeface="Amiri" pitchFamily="2" charset="-78"/>
+                <a:ea typeface="Amiri" pitchFamily="2" charset="-78"/>
                 <a:cs typeface="Amiri" pitchFamily="2" charset="-78"/>
               </a:rPr>
               <a:t>نَشْرَبَ</a:t>
@@ -4191,6 +4212,7 @@
                   <a:srgbClr val="1B3B6F"/>
                 </a:solidFill>
                 <a:latin typeface="Amiri" pitchFamily="2" charset="-78"/>
+                <a:ea typeface="Amiri" pitchFamily="2" charset="-78"/>
                 <a:cs typeface="Amiri" pitchFamily="2" charset="-78"/>
               </a:rPr>
               <a:t>أُطْلِقَ بَرْنَامَجٌ لِكَيْ</a:t>
@@ -4217,6 +4239,7 @@
                   <a:srgbClr val="1B3B6F"/>
                 </a:solidFill>
                 <a:latin typeface="Amiri" pitchFamily="2" charset="-78"/>
+                <a:ea typeface="Amiri" pitchFamily="2" charset="-78"/>
                 <a:cs typeface="Amiri" pitchFamily="2" charset="-78"/>
               </a:rPr>
               <a:t>الشَّبَابَ</a:t>
@@ -4331,6 +4354,7 @@
                   <a:srgbClr val="1F2A37"/>
                 </a:solidFill>
                 <a:latin typeface="Amiri" pitchFamily="2" charset="-78"/>
+                <a:ea typeface="Amiri" pitchFamily="2" charset="-78"/>
                 <a:cs typeface="Amiri" pitchFamily="2" charset="-78"/>
               </a:rPr>
               <a:t>يُسَاعِدَ</a:t>
@@ -4432,6 +4456,7 @@
                   <a:srgbClr val="1F2A37"/>
                 </a:solidFill>
                 <a:latin typeface="Amiri" pitchFamily="2" charset="-78"/>
+                <a:ea typeface="Amiri" pitchFamily="2" charset="-78"/>
                 <a:cs typeface="Amiri" pitchFamily="2" charset="-78"/>
               </a:rPr>
               <a:t>يُسَاعِدُ</a:t>
@@ -4533,6 +4558,7 @@
                   <a:srgbClr val="1F2A37"/>
                 </a:solidFill>
                 <a:latin typeface="Amiri" pitchFamily="2" charset="-78"/>
+                <a:ea typeface="Amiri" pitchFamily="2" charset="-78"/>
                 <a:cs typeface="Amiri" pitchFamily="2" charset="-78"/>
               </a:rPr>
               <a:t>سَاعَدَ</a:t>
@@ -4681,6 +4707,7 @@
                   <a:srgbClr val="1B3B6F"/>
                 </a:solidFill>
                 <a:latin typeface="Amiri" pitchFamily="2" charset="-78"/>
+                <a:ea typeface="Amiri" pitchFamily="2" charset="-78"/>
                 <a:cs typeface="Amiri" pitchFamily="2" charset="-78"/>
               </a:rPr>
               <a:t>لَوْ قَرَأْتُ أَكْثَرَ،</a:t>
@@ -4707,6 +4734,7 @@
                   <a:srgbClr val="1B3B6F"/>
                 </a:solidFill>
                 <a:latin typeface="Amiri" pitchFamily="2" charset="-78"/>
+                <a:ea typeface="Amiri" pitchFamily="2" charset="-78"/>
                 <a:cs typeface="Amiri" pitchFamily="2" charset="-78"/>
               </a:rPr>
               <a:t>مُفْرَدَاتِي</a:t>
@@ -4821,6 +4849,7 @@
                   <a:srgbClr val="1F2A37"/>
                 </a:solidFill>
                 <a:latin typeface="Amiri" pitchFamily="2" charset="-78"/>
+                <a:ea typeface="Amiri" pitchFamily="2" charset="-78"/>
                 <a:cs typeface="Amiri" pitchFamily="2" charset="-78"/>
               </a:rPr>
               <a:t>زَادَتْ</a:t>
@@ -4922,6 +4951,7 @@
                   <a:srgbClr val="1F2A37"/>
                 </a:solidFill>
                 <a:latin typeface="Amiri" pitchFamily="2" charset="-78"/>
+                <a:ea typeface="Amiri" pitchFamily="2" charset="-78"/>
                 <a:cs typeface="Amiri" pitchFamily="2" charset="-78"/>
               </a:rPr>
               <a:t>لَزَادَتْ</a:t>
@@ -5023,6 +5053,7 @@
                   <a:srgbClr val="1F2A37"/>
                 </a:solidFill>
                 <a:latin typeface="Amiri" pitchFamily="2" charset="-78"/>
+                <a:ea typeface="Amiri" pitchFamily="2" charset="-78"/>
                 <a:cs typeface="Amiri" pitchFamily="2" charset="-78"/>
               </a:rPr>
               <a:t>سَتَزِيدُ</a:t>
@@ -5171,6 +5202,7 @@
                   <a:srgbClr val="1B3B6F"/>
                 </a:solidFill>
                 <a:latin typeface="Amiri" pitchFamily="2" charset="-78"/>
+                <a:ea typeface="Amiri" pitchFamily="2" charset="-78"/>
                 <a:cs typeface="Amiri" pitchFamily="2" charset="-78"/>
               </a:rPr>
               <a:t>أَكَّدَ المُعَلِّمُ</a:t>
@@ -5197,6 +5229,7 @@
                   <a:srgbClr val="1B3B6F"/>
                 </a:solidFill>
                 <a:latin typeface="Amiri" pitchFamily="2" charset="-78"/>
+                <a:ea typeface="Amiri" pitchFamily="2" charset="-78"/>
                 <a:cs typeface="Amiri" pitchFamily="2" charset="-78"/>
               </a:rPr>
               <a:t>الامْتِحَانَ قَرِيبٌ</a:t>
@@ -5311,6 +5344,7 @@
                   <a:srgbClr val="1F2A37"/>
                 </a:solidFill>
                 <a:latin typeface="Amiri" pitchFamily="2" charset="-78"/>
+                <a:ea typeface="Amiri" pitchFamily="2" charset="-78"/>
                 <a:cs typeface="Amiri" pitchFamily="2" charset="-78"/>
               </a:rPr>
               <a:t>أَنَّ</a:t>
@@ -5412,6 +5446,7 @@
                   <a:srgbClr val="1F2A37"/>
                 </a:solidFill>
                 <a:latin typeface="Amiri" pitchFamily="2" charset="-78"/>
+                <a:ea typeface="Amiri" pitchFamily="2" charset="-78"/>
                 <a:cs typeface="Amiri" pitchFamily="2" charset="-78"/>
               </a:rPr>
               <a:t>أَنْ</a:t>
@@ -5513,6 +5548,7 @@
                   <a:srgbClr val="1F2A37"/>
                 </a:solidFill>
                 <a:latin typeface="Amiri" pitchFamily="2" charset="-78"/>
+                <a:ea typeface="Amiri" pitchFamily="2" charset="-78"/>
                 <a:cs typeface="Amiri" pitchFamily="2" charset="-78"/>
               </a:rPr>
               <a:t>لِكَيْ</a:t>
@@ -5661,6 +5697,7 @@
                   <a:srgbClr val="1B3B6F"/>
                 </a:solidFill>
                 <a:latin typeface="Amiri" pitchFamily="2" charset="-78"/>
+                <a:ea typeface="Amiri" pitchFamily="2" charset="-78"/>
                 <a:cs typeface="Amiri" pitchFamily="2" charset="-78"/>
               </a:rPr>
               <a:t>صَحِيحٌ أَنَّ التِّقْنِيَّةَ</a:t>
@@ -5687,6 +5724,7 @@
                   <a:srgbClr val="1B3B6F"/>
                 </a:solidFill>
                 <a:latin typeface="Amiri" pitchFamily="2" charset="-78"/>
+                <a:ea typeface="Amiri" pitchFamily="2" charset="-78"/>
                 <a:cs typeface="Amiri" pitchFamily="2" charset="-78"/>
               </a:rPr>
               <a:t>البَعِيدَ</a:t>
@@ -5801,6 +5839,7 @@
                   <a:srgbClr val="1F2A37"/>
                 </a:solidFill>
                 <a:latin typeface="Amiri" pitchFamily="2" charset="-78"/>
+                <a:ea typeface="Amiri" pitchFamily="2" charset="-78"/>
                 <a:cs typeface="Amiri" pitchFamily="2" charset="-78"/>
               </a:rPr>
               <a:t>تُقَرِّبَ</a:t>
@@ -5902,6 +5941,7 @@
                   <a:srgbClr val="1F2A37"/>
                 </a:solidFill>
                 <a:latin typeface="Amiri" pitchFamily="2" charset="-78"/>
+                <a:ea typeface="Amiri" pitchFamily="2" charset="-78"/>
                 <a:cs typeface="Amiri" pitchFamily="2" charset="-78"/>
               </a:rPr>
               <a:t>لَقَرَّبَتْ</a:t>
@@ -6003,6 +6043,7 @@
                   <a:srgbClr val="1F2A37"/>
                 </a:solidFill>
                 <a:latin typeface="Amiri" pitchFamily="2" charset="-78"/>
+                <a:ea typeface="Amiri" pitchFamily="2" charset="-78"/>
                 <a:cs typeface="Amiri" pitchFamily="2" charset="-78"/>
               </a:rPr>
               <a:t>تُقَرِّبُ</a:t>
@@ -6151,6 +6192,7 @@
                   <a:srgbClr val="1B3B6F"/>
                 </a:solidFill>
                 <a:latin typeface="Amiri" pitchFamily="2" charset="-78"/>
+                <a:ea typeface="Amiri" pitchFamily="2" charset="-78"/>
                 <a:cs typeface="Amiri" pitchFamily="2" charset="-78"/>
               </a:rPr>
               <a:t>الرِّسَالَةُ</a:t>
@@ -6177,6 +6219,7 @@
                   <a:srgbClr val="1B3B6F"/>
                 </a:solidFill>
                 <a:latin typeface="Amiri" pitchFamily="2" charset="-78"/>
+                <a:ea typeface="Amiri" pitchFamily="2" charset="-78"/>
                 <a:cs typeface="Amiri" pitchFamily="2" charset="-78"/>
               </a:rPr>
               <a:t>أَمْسِ</a:t>
@@ -6291,6 +6334,7 @@
                   <a:srgbClr val="1F2A37"/>
                 </a:solidFill>
                 <a:latin typeface="Amiri" pitchFamily="2" charset="-78"/>
+                <a:ea typeface="Amiri" pitchFamily="2" charset="-78"/>
                 <a:cs typeface="Amiri" pitchFamily="2" charset="-78"/>
               </a:rPr>
               <a:t>كُتِبَ</a:t>
@@ -6392,6 +6436,7 @@
                   <a:srgbClr val="1F2A37"/>
                 </a:solidFill>
                 <a:latin typeface="Amiri" pitchFamily="2" charset="-78"/>
+                <a:ea typeface="Amiri" pitchFamily="2" charset="-78"/>
                 <a:cs typeface="Amiri" pitchFamily="2" charset="-78"/>
               </a:rPr>
               <a:t>كُتِبَتْ</a:t>
@@ -6493,6 +6538,7 @@
                   <a:srgbClr val="1F2A37"/>
                 </a:solidFill>
                 <a:latin typeface="Amiri" pitchFamily="2" charset="-78"/>
+                <a:ea typeface="Amiri" pitchFamily="2" charset="-78"/>
                 <a:cs typeface="Amiri" pitchFamily="2" charset="-78"/>
               </a:rPr>
               <a:t>كَتَبَتْ</a:t>
@@ -6626,6 +6672,7 @@
                   <a:srgbClr val="D4AF37"/>
                 </a:solidFill>
                 <a:latin typeface="Amiri" pitchFamily="2" charset="-78"/>
+                <a:ea typeface="Amiri" pitchFamily="2" charset="-78"/>
                 <a:cs typeface="Amiri" pitchFamily="2" charset="-78"/>
               </a:rPr>
               <a:t>م</a:t>
@@ -6946,6 +6993,7 @@
                   <a:srgbClr val="8A6D1E"/>
                 </a:solidFill>
                 <a:latin typeface="Amiri" pitchFamily="2" charset="-78"/>
+                <a:ea typeface="Amiri" pitchFamily="2" charset="-78"/>
                 <a:cs typeface="Amiri" pitchFamily="2" charset="-78"/>
               </a:rPr>
               <a:t>الإِجَابَاتُ وَالتَّعْلِيلُ</a:t>
@@ -7132,6 +7180,7 @@
                   <a:srgbClr val="1B3B6F"/>
                 </a:solidFill>
                 <a:latin typeface="Amiri" pitchFamily="2" charset="-78"/>
+                <a:ea typeface="Amiri" pitchFamily="2" charset="-78"/>
                 <a:cs typeface="Amiri" pitchFamily="2" charset="-78"/>
               </a:rPr>
               <a:t>يَنْبَغِي أَنْ</a:t>
@@ -7158,6 +7207,7 @@
                   <a:srgbClr val="1B3B6F"/>
                 </a:solidFill>
                 <a:latin typeface="Amiri" pitchFamily="2" charset="-78"/>
+                <a:ea typeface="Amiri" pitchFamily="2" charset="-78"/>
                 <a:cs typeface="Amiri" pitchFamily="2" charset="-78"/>
               </a:rPr>
               <a:t>المَاءَ بِوَفْرَةٍ</a:t>
@@ -7272,6 +7322,7 @@
                   <a:srgbClr val="9AA1AB"/>
                 </a:solidFill>
                 <a:latin typeface="Amiri" pitchFamily="2" charset="-78"/>
+                <a:ea typeface="Amiri" pitchFamily="2" charset="-78"/>
                 <a:cs typeface="Amiri" pitchFamily="2" charset="-78"/>
               </a:rPr>
               <a:t>نَشْرَبُ</a:t>
@@ -7373,6 +7424,7 @@
                   <a:srgbClr val="9AA1AB"/>
                 </a:solidFill>
                 <a:latin typeface="Amiri" pitchFamily="2" charset="-78"/>
+                <a:ea typeface="Amiri" pitchFamily="2" charset="-78"/>
                 <a:cs typeface="Amiri" pitchFamily="2" charset="-78"/>
               </a:rPr>
               <a:t>نَشْرَبِ</a:t>
@@ -7501,6 +7553,7 @@
                   <a:srgbClr val="1F2A37"/>
                 </a:solidFill>
                 <a:latin typeface="Amiri" pitchFamily="2" charset="-78"/>
+                <a:ea typeface="Amiri" pitchFamily="2" charset="-78"/>
                 <a:cs typeface="Amiri" pitchFamily="2" charset="-78"/>
               </a:rPr>
               <a:t>نَشْرَبَ</a:t>
@@ -7687,6 +7740,7 @@
                   <a:srgbClr val="1B3B6F"/>
                 </a:solidFill>
                 <a:latin typeface="Amiri" pitchFamily="2" charset="-78"/>
+                <a:ea typeface="Amiri" pitchFamily="2" charset="-78"/>
                 <a:cs typeface="Amiri" pitchFamily="2" charset="-78"/>
               </a:rPr>
               <a:t>أُطْلِقَ بَرْنَامَجٌ لِكَيْ</a:t>
@@ -7713,6 +7767,7 @@
                   <a:srgbClr val="1B3B6F"/>
                 </a:solidFill>
                 <a:latin typeface="Amiri" pitchFamily="2" charset="-78"/>
+                <a:ea typeface="Amiri" pitchFamily="2" charset="-78"/>
                 <a:cs typeface="Amiri" pitchFamily="2" charset="-78"/>
               </a:rPr>
               <a:t>الشَّبَابَ</a:t>
@@ -7854,6 +7909,7 @@
                   <a:srgbClr val="1F2A37"/>
                 </a:solidFill>
                 <a:latin typeface="Amiri" pitchFamily="2" charset="-78"/>
+                <a:ea typeface="Amiri" pitchFamily="2" charset="-78"/>
                 <a:cs typeface="Amiri" pitchFamily="2" charset="-78"/>
               </a:rPr>
               <a:t>يُسَاعِدَ</a:t>
@@ -7955,6 +8011,7 @@
                   <a:srgbClr val="9AA1AB"/>
                 </a:solidFill>
                 <a:latin typeface="Amiri" pitchFamily="2" charset="-78"/>
+                <a:ea typeface="Amiri" pitchFamily="2" charset="-78"/>
                 <a:cs typeface="Amiri" pitchFamily="2" charset="-78"/>
               </a:rPr>
               <a:t>يُسَاعِدُ</a:t>
@@ -8056,6 +8113,7 @@
                   <a:srgbClr val="9AA1AB"/>
                 </a:solidFill>
                 <a:latin typeface="Amiri" pitchFamily="2" charset="-78"/>
+                <a:ea typeface="Amiri" pitchFamily="2" charset="-78"/>
                 <a:cs typeface="Amiri" pitchFamily="2" charset="-78"/>
               </a:rPr>
               <a:t>سَاعَدَ</a:t>
@@ -8242,6 +8300,7 @@
                   <a:srgbClr val="1B3B6F"/>
                 </a:solidFill>
                 <a:latin typeface="Amiri" pitchFamily="2" charset="-78"/>
+                <a:ea typeface="Amiri" pitchFamily="2" charset="-78"/>
                 <a:cs typeface="Amiri" pitchFamily="2" charset="-78"/>
               </a:rPr>
               <a:t>لَوْ قَرَأْتُ أَكْثَرَ،</a:t>
@@ -8268,6 +8327,7 @@
                   <a:srgbClr val="1B3B6F"/>
                 </a:solidFill>
                 <a:latin typeface="Amiri" pitchFamily="2" charset="-78"/>
+                <a:ea typeface="Amiri" pitchFamily="2" charset="-78"/>
                 <a:cs typeface="Amiri" pitchFamily="2" charset="-78"/>
               </a:rPr>
               <a:t>مُفْرَدَاتِي</a:t>
@@ -8382,6 +8442,7 @@
                   <a:srgbClr val="9AA1AB"/>
                 </a:solidFill>
                 <a:latin typeface="Amiri" pitchFamily="2" charset="-78"/>
+                <a:ea typeface="Amiri" pitchFamily="2" charset="-78"/>
                 <a:cs typeface="Amiri" pitchFamily="2" charset="-78"/>
               </a:rPr>
               <a:t>زَادَتْ</a:t>
@@ -8510,6 +8571,7 @@
                   <a:srgbClr val="1F2A37"/>
                 </a:solidFill>
                 <a:latin typeface="Amiri" pitchFamily="2" charset="-78"/>
+                <a:ea typeface="Amiri" pitchFamily="2" charset="-78"/>
                 <a:cs typeface="Amiri" pitchFamily="2" charset="-78"/>
               </a:rPr>
               <a:t>لَزَادَتْ</a:t>
@@ -8611,6 +8673,7 @@
                   <a:srgbClr val="9AA1AB"/>
                 </a:solidFill>
                 <a:latin typeface="Amiri" pitchFamily="2" charset="-78"/>
+                <a:ea typeface="Amiri" pitchFamily="2" charset="-78"/>
                 <a:cs typeface="Amiri" pitchFamily="2" charset="-78"/>
               </a:rPr>
               <a:t>سَتَزِيدُ</a:t>
@@ -8797,6 +8860,7 @@
                   <a:srgbClr val="1B3B6F"/>
                 </a:solidFill>
                 <a:latin typeface="Amiri" pitchFamily="2" charset="-78"/>
+                <a:ea typeface="Amiri" pitchFamily="2" charset="-78"/>
                 <a:cs typeface="Amiri" pitchFamily="2" charset="-78"/>
               </a:rPr>
               <a:t>أَكَّدَ المُعَلِّمُ</a:t>
@@ -8823,6 +8887,7 @@
                   <a:srgbClr val="1B3B6F"/>
                 </a:solidFill>
                 <a:latin typeface="Amiri" pitchFamily="2" charset="-78"/>
+                <a:ea typeface="Amiri" pitchFamily="2" charset="-78"/>
                 <a:cs typeface="Amiri" pitchFamily="2" charset="-78"/>
               </a:rPr>
               <a:t>الامْتِحَانَ قَرِيبٌ</a:t>
@@ -8964,6 +9029,7 @@
                   <a:srgbClr val="1F2A37"/>
                 </a:solidFill>
                 <a:latin typeface="Amiri" pitchFamily="2" charset="-78"/>
+                <a:ea typeface="Amiri" pitchFamily="2" charset="-78"/>
                 <a:cs typeface="Amiri" pitchFamily="2" charset="-78"/>
               </a:rPr>
               <a:t>أَنَّ</a:t>
@@ -9065,6 +9131,7 @@
                   <a:srgbClr val="9AA1AB"/>
                 </a:solidFill>
                 <a:latin typeface="Amiri" pitchFamily="2" charset="-78"/>
+                <a:ea typeface="Amiri" pitchFamily="2" charset="-78"/>
                 <a:cs typeface="Amiri" pitchFamily="2" charset="-78"/>
               </a:rPr>
               <a:t>أَنْ</a:t>
@@ -9166,6 +9233,7 @@
                   <a:srgbClr val="9AA1AB"/>
                 </a:solidFill>
                 <a:latin typeface="Amiri" pitchFamily="2" charset="-78"/>
+                <a:ea typeface="Amiri" pitchFamily="2" charset="-78"/>
                 <a:cs typeface="Amiri" pitchFamily="2" charset="-78"/>
               </a:rPr>
               <a:t>لِكَيْ</a:t>
@@ -9352,6 +9420,7 @@
                   <a:srgbClr val="1B3B6F"/>
                 </a:solidFill>
                 <a:latin typeface="Amiri" pitchFamily="2" charset="-78"/>
+                <a:ea typeface="Amiri" pitchFamily="2" charset="-78"/>
                 <a:cs typeface="Amiri" pitchFamily="2" charset="-78"/>
               </a:rPr>
               <a:t>صَحِيحٌ أَنَّ التِّقْنِيَّةَ</a:t>
@@ -9378,6 +9447,7 @@
                   <a:srgbClr val="1B3B6F"/>
                 </a:solidFill>
                 <a:latin typeface="Amiri" pitchFamily="2" charset="-78"/>
+                <a:ea typeface="Amiri" pitchFamily="2" charset="-78"/>
                 <a:cs typeface="Amiri" pitchFamily="2" charset="-78"/>
               </a:rPr>
               <a:t>البَعِيدَ</a:t>
@@ -9492,6 +9562,7 @@
                   <a:srgbClr val="9AA1AB"/>
                 </a:solidFill>
                 <a:latin typeface="Amiri" pitchFamily="2" charset="-78"/>
+                <a:ea typeface="Amiri" pitchFamily="2" charset="-78"/>
                 <a:cs typeface="Amiri" pitchFamily="2" charset="-78"/>
               </a:rPr>
               <a:t>تُقَرِّبَ</a:t>
@@ -9593,6 +9664,7 @@
                   <a:srgbClr val="9AA1AB"/>
                 </a:solidFill>
                 <a:latin typeface="Amiri" pitchFamily="2" charset="-78"/>
+                <a:ea typeface="Amiri" pitchFamily="2" charset="-78"/>
                 <a:cs typeface="Amiri" pitchFamily="2" charset="-78"/>
               </a:rPr>
               <a:t>لَقَرَّبَتْ</a:t>
@@ -9721,6 +9793,7 @@
                   <a:srgbClr val="1F2A37"/>
                 </a:solidFill>
                 <a:latin typeface="Amiri" pitchFamily="2" charset="-78"/>
+                <a:ea typeface="Amiri" pitchFamily="2" charset="-78"/>
                 <a:cs typeface="Amiri" pitchFamily="2" charset="-78"/>
               </a:rPr>
               <a:t>تُقَرِّبُ</a:t>
@@ -9907,6 +9980,7 @@
                   <a:srgbClr val="1B3B6F"/>
                 </a:solidFill>
                 <a:latin typeface="Amiri" pitchFamily="2" charset="-78"/>
+                <a:ea typeface="Amiri" pitchFamily="2" charset="-78"/>
                 <a:cs typeface="Amiri" pitchFamily="2" charset="-78"/>
               </a:rPr>
               <a:t>الرِّسَالَةُ</a:t>
@@ -9933,6 +10007,7 @@
                   <a:srgbClr val="1B3B6F"/>
                 </a:solidFill>
                 <a:latin typeface="Amiri" pitchFamily="2" charset="-78"/>
+                <a:ea typeface="Amiri" pitchFamily="2" charset="-78"/>
                 <a:cs typeface="Amiri" pitchFamily="2" charset="-78"/>
               </a:rPr>
               <a:t>أَمْسِ</a:t>
@@ -10047,6 +10122,7 @@
                   <a:srgbClr val="9AA1AB"/>
                 </a:solidFill>
                 <a:latin typeface="Amiri" pitchFamily="2" charset="-78"/>
+                <a:ea typeface="Amiri" pitchFamily="2" charset="-78"/>
                 <a:cs typeface="Amiri" pitchFamily="2" charset="-78"/>
               </a:rPr>
               <a:t>كُتِبَ</a:t>
@@ -10175,6 +10251,7 @@
                   <a:srgbClr val="1F2A37"/>
                 </a:solidFill>
                 <a:latin typeface="Amiri" pitchFamily="2" charset="-78"/>
+                <a:ea typeface="Amiri" pitchFamily="2" charset="-78"/>
                 <a:cs typeface="Amiri" pitchFamily="2" charset="-78"/>
               </a:rPr>
               <a:t>كُتِبَتْ</a:t>
@@ -10276,6 +10353,7 @@
                   <a:srgbClr val="9AA1AB"/>
                 </a:solidFill>
                 <a:latin typeface="Amiri" pitchFamily="2" charset="-78"/>
+                <a:ea typeface="Amiri" pitchFamily="2" charset="-78"/>
                 <a:cs typeface="Amiri" pitchFamily="2" charset="-78"/>
               </a:rPr>
               <a:t>كَتَبَتْ</a:t>
@@ -10447,6 +10525,7 @@
                   <a:srgbClr val="D4AF37"/>
                 </a:solidFill>
                 <a:latin typeface="Amiri" pitchFamily="2" charset="-78"/>
+                <a:ea typeface="Amiri" pitchFamily="2" charset="-78"/>
                 <a:cs typeface="Amiri" pitchFamily="2" charset="-78"/>
               </a:rPr>
               <a:t>م</a:t>
@@ -10767,6 +10846,7 @@
                   <a:srgbClr val="8A6D1E"/>
                 </a:solidFill>
                 <a:latin typeface="Amiri" pitchFamily="2" charset="-78"/>
+                <a:ea typeface="Amiri" pitchFamily="2" charset="-78"/>
                 <a:cs typeface="Amiri" pitchFamily="2" charset="-78"/>
               </a:rPr>
               <a:t>تَرْتِيبُ المُرَاجَعَةِ</a:t>
@@ -11593,6 +11673,7 @@
                   <a:srgbClr val="1B3B6F"/>
                 </a:solidFill>
                 <a:latin typeface="Amiri" pitchFamily="2" charset="-78"/>
+                <a:ea typeface="Amiri" pitchFamily="2" charset="-78"/>
                 <a:cs typeface="Amiri" pitchFamily="2" charset="-78"/>
               </a:rPr>
               <a:t>قَالَ: «إِنَّ الوَقْتَ يَنْفَدُ.»</a:t>
@@ -11692,6 +11773,7 @@
                   <a:srgbClr val="1B3B6F"/>
                 </a:solidFill>
                 <a:latin typeface="Amiri" pitchFamily="2" charset="-78"/>
+                <a:ea typeface="Amiri" pitchFamily="2" charset="-78"/>
                 <a:cs typeface="Amiri" pitchFamily="2" charset="-78"/>
               </a:rPr>
               <a:t>قَالَ إِنَّ الوَقْتَ يَنْفَدُ.</a:t>
@@ -11791,6 +11873,7 @@
                   <a:srgbClr val="1B3B6F"/>
                 </a:solidFill>
                 <a:latin typeface="Amiri" pitchFamily="2" charset="-78"/>
+                <a:ea typeface="Amiri" pitchFamily="2" charset="-78"/>
                 <a:cs typeface="Amiri" pitchFamily="2" charset="-78"/>
               </a:rPr>
               <a:t>ذَكَرَ أَنَّ الوَقْتَ يَنْفَدُ.</a:t>
@@ -11962,6 +12045,7 @@
                   <a:srgbClr val="D4AF37"/>
                 </a:solidFill>
                 <a:latin typeface="Amiri" pitchFamily="2" charset="-78"/>
+                <a:ea typeface="Amiri" pitchFamily="2" charset="-78"/>
                 <a:cs typeface="Amiri" pitchFamily="2" charset="-78"/>
               </a:rPr>
               <a:t>م</a:t>
@@ -12282,6 +12366,7 @@
                   <a:srgbClr val="8A6D1E"/>
                 </a:solidFill>
                 <a:latin typeface="Amiri" pitchFamily="2" charset="-78"/>
+                <a:ea typeface="Amiri" pitchFamily="2" charset="-78"/>
                 <a:cs typeface="Amiri" pitchFamily="2" charset="-78"/>
               </a:rPr>
               <a:t>قَائِمَةُ التَّحَقُّقِ</a:t>
@@ -12524,6 +12609,7 @@
                   <a:srgbClr val="1B3B6F"/>
                 </a:solidFill>
                 <a:latin typeface="Amiri" pitchFamily="2" charset="-78"/>
+                <a:ea typeface="Amiri" pitchFamily="2" charset="-78"/>
                 <a:cs typeface="Amiri" pitchFamily="2" charset="-78"/>
               </a:rPr>
               <a:t>يَنْبَغِي أَنْ نَعْمَلَ لِكَيْ نَنْجَحَ.</a:t>
@@ -12665,6 +12751,7 @@
                   <a:srgbClr val="1B3B6F"/>
                 </a:solidFill>
                 <a:latin typeface="Amiri" pitchFamily="2" charset="-78"/>
+                <a:ea typeface="Amiri" pitchFamily="2" charset="-78"/>
                 <a:cs typeface="Amiri" pitchFamily="2" charset="-78"/>
               </a:rPr>
               <a:t>لَوْ دَرَسْتُ، لَنَجَحْتُ.</a:t>
@@ -12806,6 +12893,7 @@
                   <a:srgbClr val="1B3B6F"/>
                 </a:solidFill>
                 <a:latin typeface="Amiri" pitchFamily="2" charset="-78"/>
+                <a:ea typeface="Amiri" pitchFamily="2" charset="-78"/>
                 <a:cs typeface="Amiri" pitchFamily="2" charset="-78"/>
               </a:rPr>
               <a:t>أُرِيدُ أَنْ أَنْجَحَ · ذَكَرَ أَنَّ الوَقْتَ قَصِيرٌ.</a:t>
@@ -12947,6 +13035,7 @@
                   <a:srgbClr val="1B3B6F"/>
                 </a:solidFill>
                 <a:latin typeface="Amiri" pitchFamily="2" charset="-78"/>
+                <a:ea typeface="Amiri" pitchFamily="2" charset="-78"/>
                 <a:cs typeface="Amiri" pitchFamily="2" charset="-78"/>
               </a:rPr>
               <a:t>صَحِيحٌ أَنَّ الوَقْتَ مَحْدُودٌ …</a:t>
@@ -13088,6 +13177,7 @@
                   <a:srgbClr val="1B3B6F"/>
                 </a:solidFill>
                 <a:latin typeface="Amiri" pitchFamily="2" charset="-78"/>
+                <a:ea typeface="Amiri" pitchFamily="2" charset="-78"/>
                 <a:cs typeface="Amiri" pitchFamily="2" charset="-78"/>
               </a:rPr>
               <a:t>أُطْرُوحَةٌ ← دَلِيلٌ ← تَنَازُلٌ ← رَدٌّ ← خَاتِمَةٌ</a:t>
@@ -13491,6 +13581,7 @@
                   <a:srgbClr val="1B3B6F"/>
                 </a:solidFill>
                 <a:latin typeface="Amiri" pitchFamily="2" charset="-78"/>
+                <a:ea typeface="Amiri" pitchFamily="2" charset="-78"/>
                 <a:cs typeface="Amiri" pitchFamily="2" charset="-78"/>
               </a:rPr>
               <a:t>يُشَارُ إِلَى أَنَّ …</a:t>
@@ -13738,6 +13829,7 @@
                   <a:srgbClr val="D4AF37"/>
                 </a:solidFill>
                 <a:latin typeface="Amiri" pitchFamily="2" charset="-78"/>
+                <a:ea typeface="Amiri" pitchFamily="2" charset="-78"/>
                 <a:cs typeface="Amiri" pitchFamily="2" charset="-78"/>
               </a:rPr>
               <a:t>م</a:t>
@@ -14058,6 +14150,7 @@
                   <a:srgbClr val="8A6D1E"/>
                 </a:solidFill>
                 <a:latin typeface="Amiri" pitchFamily="2" charset="-78"/>
+                <a:ea typeface="Amiri" pitchFamily="2" charset="-78"/>
                 <a:cs typeface="Amiri" pitchFamily="2" charset="-78"/>
               </a:rPr>
               <a:t>خُطَّةُ المُرَاجَعَةِ</a:t>
@@ -15100,6 +15193,7 @@
                   <a:srgbClr val="D4AF37"/>
                 </a:solidFill>
                 <a:latin typeface="Amiri" pitchFamily="2" charset="-78"/>
+                <a:ea typeface="Amiri" pitchFamily="2" charset="-78"/>
                 <a:cs typeface="Amiri" pitchFamily="2" charset="-78"/>
               </a:rPr>
               <a:t>م</a:t>
@@ -15420,6 +15514,7 @@
                   <a:srgbClr val="8A6D1E"/>
                 </a:solidFill>
                 <a:latin typeface="Amiri" pitchFamily="2" charset="-78"/>
+                <a:ea typeface="Amiri" pitchFamily="2" charset="-78"/>
                 <a:cs typeface="Amiri" pitchFamily="2" charset="-78"/>
               </a:rPr>
               <a:t>التَّأَمُّلُ</a:t>
@@ -15665,6 +15760,7 @@
                   <a:srgbClr val="1B3B6F"/>
                 </a:solidFill>
                 <a:latin typeface="Amiri" pitchFamily="2" charset="-78"/>
+                <a:ea typeface="Amiri" pitchFamily="2" charset="-78"/>
                 <a:cs typeface="Amiri" pitchFamily="2" charset="-78"/>
               </a:rPr>
               <a:t>لَوْ لَمْ أَتَعَلَّمِ العَرَبِيَّةَ، لَمَا فَهِمْتُ القُرْآنَ بِهٰذَا العُمْقِ.</a:t>
@@ -16053,6 +16149,7 @@
                   <a:srgbClr val="D4AF37"/>
                 </a:solidFill>
                 <a:latin typeface="Amiri" pitchFamily="2" charset="-78"/>
+                <a:ea typeface="Amiri" pitchFamily="2" charset="-78"/>
                 <a:cs typeface="Amiri" pitchFamily="2" charset="-78"/>
               </a:rPr>
               <a:t>م</a:t>
@@ -16373,6 +16470,7 @@
                   <a:srgbClr val="8A6D1E"/>
                 </a:solidFill>
                 <a:latin typeface="Amiri" pitchFamily="2" charset="-78"/>
+                <a:ea typeface="Amiri" pitchFamily="2" charset="-78"/>
                 <a:cs typeface="Amiri" pitchFamily="2" charset="-78"/>
               </a:rPr>
               <a:t>قَيِّمْ عَمَلَكَ</a:t>
@@ -17368,6 +17466,7 @@
                   <a:srgbClr val="D4AF37"/>
                 </a:solidFill>
                 <a:latin typeface="Amiri" pitchFamily="2" charset="-78"/>
+                <a:ea typeface="Amiri" pitchFamily="2" charset="-78"/>
                 <a:cs typeface="Amiri" pitchFamily="2" charset="-78"/>
               </a:rPr>
               <a:t>م</a:t>
@@ -17688,6 +17787,7 @@
                   <a:srgbClr val="8A6D1E"/>
                 </a:solidFill>
                 <a:latin typeface="Amiri" pitchFamily="2" charset="-78"/>
+                <a:ea typeface="Amiri" pitchFamily="2" charset="-78"/>
                 <a:cs typeface="Amiri" pitchFamily="2" charset="-78"/>
               </a:rPr>
               <a:t>التَّحْضِيرُ لِلدَّرْسِ القَادِمِ</a:t>
@@ -17901,6 +18001,7 @@
                   <a:srgbClr val="1B3B6F"/>
                 </a:solidFill>
                 <a:latin typeface="Amiri" pitchFamily="2" charset="-78"/>
+                <a:ea typeface="Amiri" pitchFamily="2" charset="-78"/>
                 <a:cs typeface="Amiri" pitchFamily="2" charset="-78"/>
               </a:rPr>
               <a:t>الاحْتِفَالُ</a:t>
@@ -17947,11 +18048,12 @@
               <a:buNone/>
             </a:pPr>
             <a:r>
-              <a:rPr lang="en-US" sz="1000" i="1" dirty="0">
+              <a:rPr lang="ar-SA" sz="1000" i="1" dirty="0">
                 <a:solidFill>
                   <a:srgbClr val="5A6472"/>
                 </a:solidFill>
                 <a:latin typeface="Calibri" pitchFamily="34" charset="0"/>
+                <a:ea typeface="Amiri" pitchFamily="2" charset="-78"/>
                 <a:cs typeface="Amiri" pitchFamily="2" charset="-78"/>
               </a:rPr>
               <a:t>  pl. احْتِفَالَاتٌ</a:t>
@@ -17990,6 +18092,7 @@
                   <a:srgbClr val="1B3B6F"/>
                 </a:solidFill>
                 <a:latin typeface="Amiri" pitchFamily="2" charset="-78"/>
+                <a:ea typeface="Amiri" pitchFamily="2" charset="-78"/>
                 <a:cs typeface="Amiri" pitchFamily="2" charset="-78"/>
               </a:rPr>
               <a:t>الإِنْجَازُ</a:t>
@@ -18036,11 +18139,12 @@
               <a:buNone/>
             </a:pPr>
             <a:r>
-              <a:rPr lang="en-US" sz="1000" i="1" dirty="0">
+              <a:rPr lang="ar-SA" sz="1000" i="1" dirty="0">
                 <a:solidFill>
                   <a:srgbClr val="5A6472"/>
                 </a:solidFill>
                 <a:latin typeface="Calibri" pitchFamily="34" charset="0"/>
+                <a:ea typeface="Amiri" pitchFamily="2" charset="-78"/>
                 <a:cs typeface="Amiri" pitchFamily="2" charset="-78"/>
               </a:rPr>
               <a:t>  pl. إِنْجَازَاتٌ</a:t>
@@ -18079,6 +18183,7 @@
                   <a:srgbClr val="1B3B6F"/>
                 </a:solidFill>
                 <a:latin typeface="Amiri" pitchFamily="2" charset="-78"/>
+                <a:ea typeface="Amiri" pitchFamily="2" charset="-78"/>
                 <a:cs typeface="Amiri" pitchFamily="2" charset="-78"/>
               </a:rPr>
               <a:t>الرِّحْلَةُ</a:t>
@@ -18125,11 +18230,12 @@
               <a:buNone/>
             </a:pPr>
             <a:r>
-              <a:rPr lang="en-US" sz="1000" i="1" dirty="0">
+              <a:rPr lang="ar-SA" sz="1000" i="1" dirty="0">
                 <a:solidFill>
                   <a:srgbClr val="5A6472"/>
                 </a:solidFill>
                 <a:latin typeface="Calibri" pitchFamily="34" charset="0"/>
+                <a:ea typeface="Amiri" pitchFamily="2" charset="-78"/>
                 <a:cs typeface="Amiri" pitchFamily="2" charset="-78"/>
               </a:rPr>
               <a:t>  pl. رِحْلَاتٌ</a:t>
@@ -18168,6 +18274,7 @@
                   <a:srgbClr val="1B3B6F"/>
                 </a:solidFill>
                 <a:latin typeface="Amiri" pitchFamily="2" charset="-78"/>
+                <a:ea typeface="Amiri" pitchFamily="2" charset="-78"/>
                 <a:cs typeface="Amiri" pitchFamily="2" charset="-78"/>
               </a:rPr>
               <a:t>الطُّمُوحُ</a:t>
@@ -18257,6 +18364,7 @@
                   <a:srgbClr val="1B3B6F"/>
                 </a:solidFill>
                 <a:latin typeface="Amiri" pitchFamily="2" charset="-78"/>
+                <a:ea typeface="Amiri" pitchFamily="2" charset="-78"/>
                 <a:cs typeface="Amiri" pitchFamily="2" charset="-78"/>
               </a:rPr>
               <a:t>الطَّرِيقُ إِلَى الأَمَامِ</a:t>
@@ -18303,11 +18411,12 @@
               <a:buNone/>
             </a:pPr>
             <a:r>
-              <a:rPr lang="en-US" sz="1000" i="1" dirty="0">
+              <a:rPr lang="ar-SA" sz="1000" i="1" dirty="0">
                 <a:solidFill>
                   <a:srgbClr val="5A6472"/>
                 </a:solidFill>
                 <a:latin typeface="Calibri" pitchFamily="34" charset="0"/>
+                <a:ea typeface="Amiri" pitchFamily="2" charset="-78"/>
                 <a:cs typeface="Amiri" pitchFamily="2" charset="-78"/>
               </a:rPr>
               <a:t>  pl. طُرُقٌ</a:t>
@@ -18425,6 +18534,7 @@
                   <a:srgbClr val="1B3B6F"/>
                 </a:solidFill>
                 <a:latin typeface="Amiri" pitchFamily="2" charset="-78"/>
+                <a:ea typeface="Amiri" pitchFamily="2" charset="-78"/>
                 <a:cs typeface="Amiri" pitchFamily="2" charset="-78"/>
               </a:rPr>
               <a:t>فِي الصَّفِّ الأَوَّلِ كُنْتُ ______ ، أَمَّا اليَوْمَ فَأَسْتَطِيعُ أَنْ ______ .</a:t>
@@ -19094,6 +19204,7 @@
                   <a:srgbClr val="FFFFFF"/>
                 </a:solidFill>
                 <a:latin typeface="Amiri" pitchFamily="2" charset="-78"/>
+                <a:ea typeface="Amiri" pitchFamily="2" charset="-78"/>
                 <a:cs typeface="Amiri" pitchFamily="2" charset="-78"/>
               </a:rPr>
               <a:t>أَحْسَنْتُمْ! إِلَى اللِّقَاءِ</a:t>
@@ -19246,6 +19357,7 @@
                   <a:srgbClr val="D4AF37"/>
                 </a:solidFill>
                 <a:latin typeface="Amiri" pitchFamily="2" charset="-78"/>
+                <a:ea typeface="Amiri" pitchFamily="2" charset="-78"/>
                 <a:cs typeface="Amiri" pitchFamily="2" charset="-78"/>
               </a:rPr>
               <a:t>الاحْتِفَالُ وَالتَّأَمُّلُ وَالطَّرِيقُ إِلَى الأَمَامِ</a:t>
@@ -19379,6 +19491,7 @@
                   <a:srgbClr val="D4AF37"/>
                 </a:solidFill>
                 <a:latin typeface="Amiri" pitchFamily="2" charset="-78"/>
+                <a:ea typeface="Amiri" pitchFamily="2" charset="-78"/>
                 <a:cs typeface="Amiri" pitchFamily="2" charset="-78"/>
               </a:rPr>
               <a:t>م</a:t>
@@ -19699,6 +19812,7 @@
                   <a:srgbClr val="8A6D1E"/>
                 </a:solidFill>
                 <a:latin typeface="Amiri" pitchFamily="2" charset="-78"/>
+                <a:ea typeface="Amiri" pitchFamily="2" charset="-78"/>
                 <a:cs typeface="Amiri" pitchFamily="2" charset="-78"/>
               </a:rPr>
               <a:t>آدَابُ الصَّفِّ</a:t>
@@ -21230,6 +21344,7 @@
                   <a:srgbClr val="D4AF37"/>
                 </a:solidFill>
                 <a:latin typeface="Amiri" pitchFamily="2" charset="-78"/>
+                <a:ea typeface="Amiri" pitchFamily="2" charset="-78"/>
                 <a:cs typeface="Amiri" pitchFamily="2" charset="-78"/>
               </a:rPr>
               <a:t>م</a:t>
@@ -21550,6 +21665,7 @@
                   <a:srgbClr val="8A6D1E"/>
                 </a:solidFill>
                 <a:latin typeface="Amiri" pitchFamily="2" charset="-78"/>
+                <a:ea typeface="Amiri" pitchFamily="2" charset="-78"/>
                 <a:cs typeface="Amiri" pitchFamily="2" charset="-78"/>
               </a:rPr>
               <a:t>خَرِيطَةُ الدَّرْسِ</a:t>
@@ -21864,6 +21980,7 @@
                   <a:srgbClr val="0E7C86"/>
                 </a:solidFill>
                 <a:latin typeface="Amiri" pitchFamily="2" charset="-78"/>
+                <a:ea typeface="Amiri" pitchFamily="2" charset="-78"/>
                 <a:cs typeface="Amiri" pitchFamily="2" charset="-78"/>
               </a:rPr>
               <a:t>اِبْدَأِ الآنَ</a:t>
@@ -22140,6 +22257,7 @@
                   <a:srgbClr val="1B3B6F"/>
                 </a:solidFill>
                 <a:latin typeface="Amiri" pitchFamily="2" charset="-78"/>
+                <a:ea typeface="Amiri" pitchFamily="2" charset="-78"/>
                 <a:cs typeface="Amiri" pitchFamily="2" charset="-78"/>
               </a:rPr>
               <a:t>النَّتَائِجُ</a:t>
@@ -22416,6 +22534,7 @@
                   <a:srgbClr val="6B4C9A"/>
                 </a:solidFill>
                 <a:latin typeface="Amiri" pitchFamily="2" charset="-78"/>
+                <a:ea typeface="Amiri" pitchFamily="2" charset="-78"/>
                 <a:cs typeface="Amiri" pitchFamily="2" charset="-78"/>
               </a:rPr>
               <a:t>الأَخْطَاءُ</a:t>
@@ -22692,6 +22811,7 @@
                   <a:srgbClr val="2F6FB0"/>
                 </a:solidFill>
                 <a:latin typeface="Amiri" pitchFamily="2" charset="-78"/>
+                <a:ea typeface="Amiri" pitchFamily="2" charset="-78"/>
                 <a:cs typeface="Amiri" pitchFamily="2" charset="-78"/>
               </a:rPr>
               <a:t>صَحِّحْ</a:t>
@@ -22968,6 +23088,7 @@
                   <a:srgbClr val="1E6B52"/>
                 </a:solidFill>
                 <a:latin typeface="Amiri" pitchFamily="2" charset="-78"/>
+                <a:ea typeface="Amiri" pitchFamily="2" charset="-78"/>
                 <a:cs typeface="Amiri" pitchFamily="2" charset="-78"/>
               </a:rPr>
               <a:t>خُطَّتِي</a:t>
@@ -23244,6 +23365,7 @@
                   <a:srgbClr val="8A6D1E"/>
                 </a:solidFill>
                 <a:latin typeface="Amiri" pitchFamily="2" charset="-78"/>
+                <a:ea typeface="Amiri" pitchFamily="2" charset="-78"/>
                 <a:cs typeface="Amiri" pitchFamily="2" charset="-78"/>
               </a:rPr>
               <a:t>قَيِّمْ</a:t>
@@ -23487,6 +23609,7 @@
                   <a:srgbClr val="D4AF37"/>
                 </a:solidFill>
                 <a:latin typeface="Amiri" pitchFamily="2" charset="-78"/>
+                <a:ea typeface="Amiri" pitchFamily="2" charset="-78"/>
                 <a:cs typeface="Amiri" pitchFamily="2" charset="-78"/>
               </a:rPr>
               <a:t>م</a:t>
@@ -23807,6 +23930,7 @@
                   <a:srgbClr val="8A6D1E"/>
                 </a:solidFill>
                 <a:latin typeface="Amiri" pitchFamily="2" charset="-78"/>
+                <a:ea typeface="Amiri" pitchFamily="2" charset="-78"/>
                 <a:cs typeface="Amiri" pitchFamily="2" charset="-78"/>
               </a:rPr>
               <a:t>اِبْدَأِ الآنَ</a:t>
@@ -23993,6 +24117,7 @@
                   <a:srgbClr val="1B3B6F"/>
                 </a:solidFill>
                 <a:latin typeface="Amiri" pitchFamily="2" charset="-78"/>
+                <a:ea typeface="Amiri" pitchFamily="2" charset="-78"/>
                 <a:cs typeface="Amiri" pitchFamily="2" charset="-78"/>
               </a:rPr>
               <a:t>نِقَاطُ الضَّعْفِ</a:t>
@@ -24457,6 +24582,7 @@
                   <a:srgbClr val="1B3B6F"/>
                 </a:solidFill>
                 <a:latin typeface="Amiri" pitchFamily="2" charset="-78"/>
+                <a:ea typeface="Amiri" pitchFamily="2" charset="-78"/>
                 <a:cs typeface="Amiri" pitchFamily="2" charset="-78"/>
               </a:rPr>
               <a:t>الأَخْطَاءُ الشَّائِعَةُ</a:t>
@@ -24921,6 +25047,7 @@
                   <a:srgbClr val="1B3B6F"/>
                 </a:solidFill>
                 <a:latin typeface="Amiri" pitchFamily="2" charset="-78"/>
+                <a:ea typeface="Amiri" pitchFamily="2" charset="-78"/>
                 <a:cs typeface="Amiri" pitchFamily="2" charset="-78"/>
               </a:rPr>
               <a:t>خُطَّةُ المُرَاجَعَةِ</a:t>
@@ -25385,6 +25512,7 @@
                   <a:srgbClr val="1B3B6F"/>
                 </a:solidFill>
                 <a:latin typeface="Amiri" pitchFamily="2" charset="-78"/>
+                <a:ea typeface="Amiri" pitchFamily="2" charset="-78"/>
                 <a:cs typeface="Amiri" pitchFamily="2" charset="-78"/>
               </a:rPr>
               <a:t>يَنْبَغِي أَنْ</a:t>
@@ -25411,6 +25539,7 @@
                   <a:srgbClr val="1B3B6F"/>
                 </a:solidFill>
                 <a:latin typeface="Amiri" pitchFamily="2" charset="-78"/>
+                <a:ea typeface="Amiri" pitchFamily="2" charset="-78"/>
                 <a:cs typeface="Amiri" pitchFamily="2" charset="-78"/>
               </a:rPr>
               <a:t>بِجِدٍّ</a:t>
@@ -25525,6 +25654,7 @@
                   <a:srgbClr val="1F2A37"/>
                 </a:solidFill>
                 <a:latin typeface="Amiri" pitchFamily="2" charset="-78"/>
+                <a:ea typeface="Amiri" pitchFamily="2" charset="-78"/>
                 <a:cs typeface="Amiri" pitchFamily="2" charset="-78"/>
               </a:rPr>
               <a:t>نَعْمَلُ</a:t>
@@ -25626,6 +25756,7 @@
                   <a:srgbClr val="1F2A37"/>
                 </a:solidFill>
                 <a:latin typeface="Amiri" pitchFamily="2" charset="-78"/>
+                <a:ea typeface="Amiri" pitchFamily="2" charset="-78"/>
                 <a:cs typeface="Amiri" pitchFamily="2" charset="-78"/>
               </a:rPr>
               <a:t>عَمِلْنَا</a:t>
@@ -25727,6 +25858,7 @@
                   <a:srgbClr val="1F2A37"/>
                 </a:solidFill>
                 <a:latin typeface="Amiri" pitchFamily="2" charset="-78"/>
+                <a:ea typeface="Amiri" pitchFamily="2" charset="-78"/>
                 <a:cs typeface="Amiri" pitchFamily="2" charset="-78"/>
               </a:rPr>
               <a:t>نَعْمَلَ</a:t>
@@ -25875,6 +26007,7 @@
                   <a:srgbClr val="1B3B6F"/>
                 </a:solidFill>
                 <a:latin typeface="Amiri" pitchFamily="2" charset="-78"/>
+                <a:ea typeface="Amiri" pitchFamily="2" charset="-78"/>
                 <a:cs typeface="Amiri" pitchFamily="2" charset="-78"/>
               </a:rPr>
               <a:t>لَوْ تَدَرَّبْتُ أَكْثَرَ،</a:t>
@@ -25989,6 +26122,7 @@
                   <a:srgbClr val="1F2A37"/>
                 </a:solidFill>
                 <a:latin typeface="Amiri" pitchFamily="2" charset="-78"/>
+                <a:ea typeface="Amiri" pitchFamily="2" charset="-78"/>
                 <a:cs typeface="Amiri" pitchFamily="2" charset="-78"/>
               </a:rPr>
               <a:t>لَتَحَسَّنْتُ</a:t>
@@ -26090,6 +26224,7 @@
                   <a:srgbClr val="1F2A37"/>
                 </a:solidFill>
                 <a:latin typeface="Amiri" pitchFamily="2" charset="-78"/>
+                <a:ea typeface="Amiri" pitchFamily="2" charset="-78"/>
                 <a:cs typeface="Amiri" pitchFamily="2" charset="-78"/>
               </a:rPr>
               <a:t>تَحَسَّنْتُ</a:t>
@@ -26191,6 +26326,7 @@
                   <a:srgbClr val="1F2A37"/>
                 </a:solidFill>
                 <a:latin typeface="Amiri" pitchFamily="2" charset="-78"/>
+                <a:ea typeface="Amiri" pitchFamily="2" charset="-78"/>
                 <a:cs typeface="Amiri" pitchFamily="2" charset="-78"/>
               </a:rPr>
               <a:t>سَأَتَحَسَّنُ</a:t>
@@ -26526,6 +26662,7 @@
                   <a:srgbClr val="D4AF37"/>
                 </a:solidFill>
                 <a:latin typeface="Amiri" pitchFamily="2" charset="-78"/>
+                <a:ea typeface="Amiri" pitchFamily="2" charset="-78"/>
                 <a:cs typeface="Amiri" pitchFamily="2" charset="-78"/>
               </a:rPr>
               <a:t>م</a:t>
@@ -26846,6 +26983,7 @@
                   <a:srgbClr val="8A6D1E"/>
                 </a:solidFill>
                 <a:latin typeface="Amiri" pitchFamily="2" charset="-78"/>
+                <a:ea typeface="Amiri" pitchFamily="2" charset="-78"/>
                 <a:cs typeface="Amiri" pitchFamily="2" charset="-78"/>
               </a:rPr>
               <a:t>الإِجَابَاتُ وَالتَّعْلِيلُ</a:t>
@@ -27032,6 +27170,7 @@
                   <a:srgbClr val="1B3B6F"/>
                 </a:solidFill>
                 <a:latin typeface="Amiri" pitchFamily="2" charset="-78"/>
+                <a:ea typeface="Amiri" pitchFamily="2" charset="-78"/>
                 <a:cs typeface="Amiri" pitchFamily="2" charset="-78"/>
               </a:rPr>
               <a:t>نِقَاطُ الضَّعْفِ</a:t>
@@ -27561,6 +27700,7 @@
                   <a:srgbClr val="1B3B6F"/>
                 </a:solidFill>
                 <a:latin typeface="Amiri" pitchFamily="2" charset="-78"/>
+                <a:ea typeface="Amiri" pitchFamily="2" charset="-78"/>
                 <a:cs typeface="Amiri" pitchFamily="2" charset="-78"/>
               </a:rPr>
               <a:t>الأَخْطَاءُ الشَّائِعَةُ</a:t>
@@ -28090,6 +28230,7 @@
                   <a:srgbClr val="1B3B6F"/>
                 </a:solidFill>
                 <a:latin typeface="Amiri" pitchFamily="2" charset="-78"/>
+                <a:ea typeface="Amiri" pitchFamily="2" charset="-78"/>
                 <a:cs typeface="Amiri" pitchFamily="2" charset="-78"/>
               </a:rPr>
               <a:t>خُطَّةُ المُرَاجَعَةِ</a:t>
@@ -28619,6 +28760,7 @@
                   <a:srgbClr val="1B3B6F"/>
                 </a:solidFill>
                 <a:latin typeface="Amiri" pitchFamily="2" charset="-78"/>
+                <a:ea typeface="Amiri" pitchFamily="2" charset="-78"/>
                 <a:cs typeface="Amiri" pitchFamily="2" charset="-78"/>
               </a:rPr>
               <a:t>يَنْبَغِي أَنْ</a:t>
@@ -28645,6 +28787,7 @@
                   <a:srgbClr val="1B3B6F"/>
                 </a:solidFill>
                 <a:latin typeface="Amiri" pitchFamily="2" charset="-78"/>
+                <a:ea typeface="Amiri" pitchFamily="2" charset="-78"/>
                 <a:cs typeface="Amiri" pitchFamily="2" charset="-78"/>
               </a:rPr>
               <a:t>بِجِدٍّ</a:t>
@@ -28759,6 +28902,7 @@
                   <a:srgbClr val="9AA1AB"/>
                 </a:solidFill>
                 <a:latin typeface="Amiri" pitchFamily="2" charset="-78"/>
+                <a:ea typeface="Amiri" pitchFamily="2" charset="-78"/>
                 <a:cs typeface="Amiri" pitchFamily="2" charset="-78"/>
               </a:rPr>
               <a:t>نَعْمَلُ</a:t>
@@ -28860,6 +29004,7 @@
                   <a:srgbClr val="9AA1AB"/>
                 </a:solidFill>
                 <a:latin typeface="Amiri" pitchFamily="2" charset="-78"/>
+                <a:ea typeface="Amiri" pitchFamily="2" charset="-78"/>
                 <a:cs typeface="Amiri" pitchFamily="2" charset="-78"/>
               </a:rPr>
               <a:t>عَمِلْنَا</a:t>
@@ -28988,6 +29133,7 @@
                   <a:srgbClr val="1F2A37"/>
                 </a:solidFill>
                 <a:latin typeface="Amiri" pitchFamily="2" charset="-78"/>
+                <a:ea typeface="Amiri" pitchFamily="2" charset="-78"/>
                 <a:cs typeface="Amiri" pitchFamily="2" charset="-78"/>
               </a:rPr>
               <a:t>نَعْمَلَ</a:t>
@@ -29174,6 +29320,7 @@
                   <a:srgbClr val="1B3B6F"/>
                 </a:solidFill>
                 <a:latin typeface="Amiri" pitchFamily="2" charset="-78"/>
+                <a:ea typeface="Amiri" pitchFamily="2" charset="-78"/>
                 <a:cs typeface="Amiri" pitchFamily="2" charset="-78"/>
               </a:rPr>
               <a:t>لَوْ تَدَرَّبْتُ أَكْثَرَ،</a:t>
@@ -29315,6 +29462,7 @@
                   <a:srgbClr val="1F2A37"/>
                 </a:solidFill>
                 <a:latin typeface="Amiri" pitchFamily="2" charset="-78"/>
+                <a:ea typeface="Amiri" pitchFamily="2" charset="-78"/>
                 <a:cs typeface="Amiri" pitchFamily="2" charset="-78"/>
               </a:rPr>
               <a:t>لَتَحَسَّنْتُ</a:t>
@@ -29416,6 +29564,7 @@
                   <a:srgbClr val="9AA1AB"/>
                 </a:solidFill>
                 <a:latin typeface="Amiri" pitchFamily="2" charset="-78"/>
+                <a:ea typeface="Amiri" pitchFamily="2" charset="-78"/>
                 <a:cs typeface="Amiri" pitchFamily="2" charset="-78"/>
               </a:rPr>
               <a:t>تَحَسَّنْتُ</a:t>
@@ -29517,6 +29666,7 @@
                   <a:srgbClr val="9AA1AB"/>
                 </a:solidFill>
                 <a:latin typeface="Amiri" pitchFamily="2" charset="-78"/>
+                <a:ea typeface="Amiri" pitchFamily="2" charset="-78"/>
                 <a:cs typeface="Amiri" pitchFamily="2" charset="-78"/>
               </a:rPr>
               <a:t>سَأَتَحَسَّنُ</a:t>
@@ -29706,6 +29856,7 @@
                   <a:srgbClr val="1B3B6F"/>
                 </a:solidFill>
                 <a:latin typeface="Amiri" pitchFamily="2" charset="-78"/>
+                <a:ea typeface="Amiri" pitchFamily="2" charset="-78"/>
                 <a:cs typeface="Amiri" pitchFamily="2" charset="-78"/>
               </a:rPr>
               <a:t>نَتِيجَةُ المُحَاكَاةِ لَيْسَتْ نَتِيجَتَكَ النِّهَائِيَّةَ.</a:t>
@@ -29839,6 +29990,7 @@
                   <a:srgbClr val="D4AF37"/>
                 </a:solidFill>
                 <a:latin typeface="Amiri" pitchFamily="2" charset="-78"/>
+                <a:ea typeface="Amiri" pitchFamily="2" charset="-78"/>
                 <a:cs typeface="Amiri" pitchFamily="2" charset="-78"/>
               </a:rPr>
               <a:t>م</a:t>
@@ -30159,6 +30311,7 @@
                   <a:srgbClr val="8A6D1E"/>
                 </a:solidFill>
                 <a:latin typeface="Amiri" pitchFamily="2" charset="-78"/>
+                <a:ea typeface="Amiri" pitchFamily="2" charset="-78"/>
                 <a:cs typeface="Amiri" pitchFamily="2" charset="-78"/>
               </a:rPr>
               <a:t>الأَهْدَافُ وَمَعَايِيرُ النَّجَاحِ</a:t>
@@ -30307,6 +30460,7 @@
                   <a:srgbClr val="8A6D1E"/>
                 </a:solidFill>
                 <a:latin typeface="Amiri" pitchFamily="2" charset="-78"/>
+                <a:ea typeface="Amiri" pitchFamily="2" charset="-78"/>
                 <a:cs typeface="Amiri" pitchFamily="2" charset="-78"/>
               </a:rPr>
               <a:t>سَتَتَعَلَّمُ اليَوْمَ</a:t>
@@ -31462,6 +31616,7 @@
                   <a:srgbClr val="D4AF37"/>
                 </a:solidFill>
                 <a:latin typeface="Amiri" pitchFamily="2" charset="-78"/>
+                <a:ea typeface="Amiri" pitchFamily="2" charset="-78"/>
                 <a:cs typeface="Amiri" pitchFamily="2" charset="-78"/>
               </a:rPr>
               <a:t>م</a:t>
@@ -31782,6 +31937,7 @@
                   <a:srgbClr val="8A6D1E"/>
                 </a:solidFill>
                 <a:latin typeface="Amiri" pitchFamily="2" charset="-78"/>
+                <a:ea typeface="Amiri" pitchFamily="2" charset="-78"/>
                 <a:cs typeface="Amiri" pitchFamily="2" charset="-78"/>
               </a:rPr>
               <a:t>مَلَفُّ المُحَاكَاةِ</a:t>
@@ -32204,6 +32360,7 @@
                   <a:srgbClr val="1B3B6F"/>
                 </a:solidFill>
                 <a:latin typeface="Amiri" pitchFamily="2" charset="-78"/>
+                <a:ea typeface="Amiri" pitchFamily="2" charset="-78"/>
                 <a:cs typeface="Amiri" pitchFamily="2" charset="-78"/>
               </a:rPr>
               <a:t>نَتِيجَةُ المُحَاكَاةِ لَيْسَتْ نَتِيجَتَكَ النِّهَائِيَّةَ.</a:t>
@@ -32303,6 +32460,7 @@
                   <a:srgbClr val="1B3B6F"/>
                 </a:solidFill>
                 <a:latin typeface="Amiri" pitchFamily="2" charset="-78"/>
+                <a:ea typeface="Amiri" pitchFamily="2" charset="-78"/>
                 <a:cs typeface="Amiri" pitchFamily="2" charset="-78"/>
               </a:rPr>
               <a:t>المُرَاجَعَةُ المُوَجَّهَةُ تَصْنَعُ الفَرْقَ.</a:t>
@@ -32584,6 +32742,7 @@
                   <a:srgbClr val="D4AF37"/>
                 </a:solidFill>
                 <a:latin typeface="Amiri" pitchFamily="2" charset="-78"/>
+                <a:ea typeface="Amiri" pitchFamily="2" charset="-78"/>
                 <a:cs typeface="Amiri" pitchFamily="2" charset="-78"/>
               </a:rPr>
               <a:t>م</a:t>
@@ -32904,6 +33063,7 @@
                   <a:srgbClr val="8A6D1E"/>
                 </a:solidFill>
                 <a:latin typeface="Amiri" pitchFamily="2" charset="-78"/>
+                <a:ea typeface="Amiri" pitchFamily="2" charset="-78"/>
                 <a:cs typeface="Amiri" pitchFamily="2" charset="-78"/>
               </a:rPr>
               <a:t>حَاسِبَةُ النَّتَائِجِ</a:t>
@@ -34445,6 +34605,7 @@
                   <a:srgbClr val="D4AF37"/>
                 </a:solidFill>
                 <a:latin typeface="Amiri" pitchFamily="2" charset="-78"/>
+                <a:ea typeface="Amiri" pitchFamily="2" charset="-78"/>
                 <a:cs typeface="Amiri" pitchFamily="2" charset="-78"/>
               </a:rPr>
               <a:t>م</a:t>
@@ -34765,6 +34926,7 @@
                   <a:srgbClr val="8A6D1E"/>
                 </a:solidFill>
                 <a:latin typeface="Amiri" pitchFamily="2" charset="-78"/>
+                <a:ea typeface="Amiri" pitchFamily="2" charset="-78"/>
                 <a:cs typeface="Amiri" pitchFamily="2" charset="-78"/>
               </a:rPr>
               <a:t>الأَخْطَاءُ الثَّلَاثَةُ</a:t>
@@ -35288,6 +35450,7 @@
                   <a:srgbClr val="1B3B6F"/>
                 </a:solidFill>
                 <a:latin typeface="Amiri" pitchFamily="2" charset="-78"/>
+                <a:ea typeface="Amiri" pitchFamily="2" charset="-78"/>
                 <a:cs typeface="Amiri" pitchFamily="2" charset="-78"/>
               </a:rPr>
               <a:t>يَتَطَلَّبُ الأَمْرُ أَنْ تُوَفِّرَ المَدَارِسُ دَعْمًا.</a:t>
@@ -35387,6 +35550,7 @@
                   <a:srgbClr val="1B3B6F"/>
                 </a:solidFill>
                 <a:latin typeface="Amiri" pitchFamily="2" charset="-78"/>
+                <a:ea typeface="Amiri" pitchFamily="2" charset="-78"/>
                 <a:cs typeface="Amiri" pitchFamily="2" charset="-78"/>
               </a:rPr>
               <a:t>لَوْ دَرَسْتُ، لَنَجَحْتُ.</a:t>
@@ -35486,6 +35650,7 @@
                   <a:srgbClr val="1B3B6F"/>
                 </a:solidFill>
                 <a:latin typeface="Amiri" pitchFamily="2" charset="-78"/>
+                <a:ea typeface="Amiri" pitchFamily="2" charset="-78"/>
                 <a:cs typeface="Amiri" pitchFamily="2" charset="-78"/>
               </a:rPr>
               <a:t>أَكَّدَ أَنَّ الوَقْتَ يَنْفَدُ.</a:t>
@@ -35622,13 +35787,9 @@
     <a:fontScheme name="Office">
       <a:majorFont>
         <a:latin typeface="Calibri Light" panose="020F0302020204030204"/>
-        <a:ea typeface=""/>
-        <a:cs typeface=""/>
-        <a:font script="Jpan" typeface="游ゴシック Light"/>
-        <a:font script="Hang" typeface="맑은 고딕"/>
-        <a:font script="Hans" typeface="等线 Light"/>
-        <a:font script="Hant" typeface="新細明體"/>
-        <a:font script="Arab" typeface="Times New Roman"/>
+        <a:ea typeface="Amiri" pitchFamily="2" charset="-78"/>
+        <a:cs typeface="Amiri" pitchFamily="2" charset="-78"/>
+        <a:font script="Arab" typeface="Amiri"/>
         <a:font script="Hebr" typeface="Times New Roman"/>
         <a:font script="Thai" typeface="Angsana New"/>
         <a:font script="Ethi" typeface="Nyala"/>
@@ -35674,13 +35835,9 @@
       </a:majorFont>
       <a:minorFont>
         <a:latin typeface="Calibri" panose="020F0502020204030204"/>
-        <a:ea typeface=""/>
-        <a:cs typeface=""/>
-        <a:font script="Jpan" typeface="游ゴシック"/>
-        <a:font script="Hang" typeface="맑은 고딕"/>
-        <a:font script="Hans" typeface="等线"/>
-        <a:font script="Hant" typeface="新細明體"/>
-        <a:font script="Arab" typeface="Arial"/>
+        <a:ea typeface="Amiri" pitchFamily="2" charset="-78"/>
+        <a:cs typeface="Amiri" pitchFamily="2" charset="-78"/>
+        <a:font script="Arab" typeface="Amiri"/>
         <a:font script="Hebr" typeface="Arial"/>
         <a:font script="Thai" typeface="Cordia New"/>
         <a:font script="Ethi" typeface="Nyala"/>
